--- a/context/ppt/ppt0727/vigs_realtime_journey_0727.pptx
+++ b/context/ppt/ppt0727/vigs_realtime_journey_0727.pptx
@@ -24,6 +24,8 @@
     <p:sldId id="272" r:id="rId23"/>
     <p:sldId id="273" r:id="rId24"/>
     <p:sldId id="274" r:id="rId25"/>
+    <p:sldId id="275" r:id="rId26"/>
+    <p:sldId id="276" r:id="rId27"/>
   </p:sldIdLst>
   <p:sldSz cx="12191695" cy="6858000" type="screen4x3"/>
   <p:notesSz cx="6858000" cy="9144000"/>
@@ -6765,7 +6767,7 @@
           </a:solidFill>
           <a:ln w="12700">
             <a:solidFill>
-              <a:srgbClr val="4CC98A"/>
+              <a:srgbClr val="A479E0"/>
             </a:solidFill>
           </a:ln>
           <a:effectLst/>
@@ -6792,11 +6794,11 @@
             <a:r>
               <a:rPr sz="900" b="1">
                 <a:solidFill>
-                  <a:srgbClr val="4CC98A"/>
-                </a:solidFill>
-                <a:latin typeface="Noto Sans CJK KR"/>
-              </a:rPr>
-              <a:t>③ 다음 단계</a:t>
+                  <a:srgbClr val="A479E0"/>
+                </a:solidFill>
+                <a:latin typeface="Noto Sans CJK KR"/>
+              </a:rPr>
+              <a:t>③ 신규 후보</a:t>
             </a:r>
           </a:p>
         </p:txBody>
@@ -6835,6 +6837,102 @@
                 </a:solidFill>
                 <a:latin typeface="Noto Sans CJK KR"/>
               </a:rPr>
+              <a:t>오프라인 색정제를 실시간 호환으로 재설계 — 다음 슬라이드, +3~6dB 확인됨</a:t>
+            </a:r>
+          </a:p>
+        </p:txBody>
+      </p:sp>
+      <p:sp>
+        <p:nvSpPr>
+          <p:cNvPr id="16" name="Rounded Rectangle 15"/>
+          <p:cNvSpPr/>
+          <p:nvPr/>
+        </p:nvSpPr>
+        <p:spPr>
+          <a:xfrm>
+            <a:off x="548640" y="5257800"/>
+            <a:ext cx="1554480" cy="292608"/>
+          </a:xfrm>
+          <a:prstGeom prst="roundRect">
+            <a:avLst>
+              <a:gd name="adj" fmla="val 50000"/>
+            </a:avLst>
+          </a:prstGeom>
+          <a:solidFill>
+            <a:srgbClr val="1A1F2B"/>
+          </a:solidFill>
+          <a:ln w="12700">
+            <a:solidFill>
+              <a:srgbClr val="4CC98A"/>
+            </a:solidFill>
+          </a:ln>
+          <a:effectLst/>
+        </p:spPr>
+        <p:style>
+          <a:lnRef idx="1">
+            <a:schemeClr val="accent1"/>
+          </a:lnRef>
+          <a:fillRef idx="3">
+            <a:schemeClr val="accent1"/>
+          </a:fillRef>
+          <a:effectRef idx="2">
+            <a:schemeClr val="accent1"/>
+          </a:effectRef>
+          <a:fontRef idx="minor">
+            <a:schemeClr val="lt1"/>
+          </a:fontRef>
+        </p:style>
+        <p:txBody>
+          <a:bodyPr rtlCol="0" anchor="ctr" lIns="45720" rIns="45720"/>
+          <a:lstStyle/>
+          <a:p>
+            <a:pPr algn="ctr"/>
+            <a:r>
+              <a:rPr sz="900" b="1">
+                <a:solidFill>
+                  <a:srgbClr val="4CC98A"/>
+                </a:solidFill>
+                <a:latin typeface="Noto Sans CJK KR"/>
+              </a:rPr>
+              <a:t>④ 다음 단계</a:t>
+            </a:r>
+          </a:p>
+        </p:txBody>
+      </p:sp>
+      <p:sp>
+        <p:nvSpPr>
+          <p:cNvPr id="17" name="TextBox 16"/>
+          <p:cNvSpPr txBox="1"/>
+          <p:nvPr/>
+        </p:nvSpPr>
+        <p:spPr>
+          <a:xfrm>
+            <a:off x="2240280" y="5202936"/>
+            <a:ext cx="9402775" cy="502920"/>
+          </a:xfrm>
+          <a:prstGeom prst="rect">
+            <a:avLst/>
+          </a:prstGeom>
+          <a:noFill/>
+        </p:spPr>
+        <p:txBody>
+          <a:bodyPr wrap="square" anchor="ctr">
+            <a:spAutoFit/>
+          </a:bodyPr>
+          <a:lstStyle/>
+          <a:p>
+            <a:pPr algn="l">
+              <a:lnSpc>
+                <a:spcPct val="100000"/>
+              </a:lnSpc>
+            </a:pPr>
+            <a:r>
+              <a:rPr sz="1200" b="0">
+                <a:solidFill>
+                  <a:srgbClr val="E8ECF4"/>
+                </a:solidFill>
+                <a:latin typeface="Noto Sans CJK KR"/>
+              </a:rPr>
               <a:t>Localization(흑백 SLAM 트래킹) 실제 통합 — exp50과 합류</a:t>
             </a:r>
           </a:p>
@@ -6842,13 +6940,13 @@
       </p:sp>
       <p:sp>
         <p:nvSpPr>
-          <p:cNvPr id="16" name="TextBox 15"/>
+          <p:cNvPr id="18" name="TextBox 17"/>
           <p:cNvSpPr txBox="1"/>
           <p:nvPr/>
         </p:nvSpPr>
         <p:spPr>
           <a:xfrm>
-            <a:off x="548640" y="5577840"/>
+            <a:off x="548640" y="5943600"/>
             <a:ext cx="11094415" cy="822960"/>
           </a:xfrm>
           <a:prstGeom prst="rect">
@@ -6975,7 +7073,7 @@
                 </a:solidFill>
                 <a:latin typeface="Noto Sans CJK KR"/>
               </a:rPr>
-              <a:t>§4 · CONCLUSION</a:t>
+              <a:t>§4 · NEW FINDING</a:t>
             </a:r>
           </a:p>
         </p:txBody>
@@ -7014,7 +7112,7 @@
                 </a:solidFill>
                 <a:latin typeface="Noto Sans CJK KR"/>
               </a:rPr>
-              <a:t>결론 한 줄</a:t>
+              <a:t>부록: 오프라인 후처리가 사주는 PSNR</a:t>
             </a:r>
           </a:p>
         </p:txBody>
@@ -7063,28 +7161,52 @@
           </a:p>
         </p:txBody>
       </p:sp>
-      <p:sp>
-        <p:nvSpPr>
-          <p:cNvPr id="6" name="Rounded Rectangle 5"/>
+      <p:pic>
+        <p:nvPicPr>
+          <p:cNvPr id="6" name="Picture 5" descr="fig_ply_compare.png"/>
+          <p:cNvPicPr>
+            <a:picLocks noChangeAspect="1"/>
+          </p:cNvPicPr>
+          <p:nvPr/>
+        </p:nvPicPr>
+        <p:blipFill>
+          <a:blip r:embed="rId2"/>
+          <a:stretch>
+            <a:fillRect/>
+          </a:stretch>
+        </p:blipFill>
+        <p:spPr>
+          <a:xfrm>
+            <a:off x="2034995" y="1234440"/>
+            <a:ext cx="8121704" cy="3200400"/>
+          </a:xfrm>
+          <a:prstGeom prst="rect">
+            <a:avLst/>
+          </a:prstGeom>
+        </p:spPr>
+      </p:pic>
+      <p:sp>
+        <p:nvSpPr>
+          <p:cNvPr id="7" name="Rounded Rectangle 6"/>
           <p:cNvSpPr/>
           <p:nvPr/>
         </p:nvSpPr>
         <p:spPr>
           <a:xfrm>
-            <a:off x="548640" y="1554480"/>
-            <a:ext cx="1554480" cy="292608"/>
+            <a:off x="548640" y="4572000"/>
+            <a:ext cx="3566160" cy="914400"/>
           </a:xfrm>
           <a:prstGeom prst="roundRect">
             <a:avLst>
-              <a:gd name="adj" fmla="val 50000"/>
+              <a:gd name="adj" fmla="val 8000"/>
             </a:avLst>
           </a:prstGeom>
           <a:solidFill>
             <a:srgbClr val="1A1F2B"/>
           </a:solidFill>
-          <a:ln w="12700">
+          <a:ln w="15875">
             <a:solidFill>
-              <a:srgbClr val="4C86EA"/>
+              <a:srgbClr val="EF6A5C"/>
             </a:solidFill>
           </a:ln>
           <a:effectLst/>
@@ -7104,57 +7226,31 @@
           </a:fontRef>
         </p:style>
         <p:txBody>
-          <a:bodyPr rtlCol="0" anchor="ctr" lIns="45720" rIns="45720"/>
+          <a:bodyPr rtlCol="0" anchor="ctr" wrap="square" lIns="146304" rIns="146304"/>
           <a:lstStyle/>
           <a:p>
             <a:pPr algn="ctr"/>
             <a:r>
-              <a:rPr sz="900" b="1">
-                <a:solidFill>
-                  <a:srgbClr val="4C86EA"/>
-                </a:solidFill>
-                <a:latin typeface="Noto Sans CJK KR"/>
-              </a:rPr>
-              <a:t>EXP53+54</a:t>
-            </a:r>
-          </a:p>
-        </p:txBody>
-      </p:sp>
-      <p:sp>
-        <p:nvSpPr>
-          <p:cNvPr id="7" name="TextBox 6"/>
-          <p:cNvSpPr txBox="1"/>
-          <p:nvPr/>
-        </p:nvSpPr>
-        <p:spPr>
-          <a:xfrm>
-            <a:off x="2240280" y="1499616"/>
-            <a:ext cx="9402775" cy="502920"/>
-          </a:xfrm>
-          <a:prstGeom prst="rect">
-            <a:avLst/>
-          </a:prstGeom>
-          <a:noFill/>
-        </p:spPr>
-        <p:txBody>
-          <a:bodyPr wrap="square" anchor="ctr">
-            <a:spAutoFit/>
-          </a:bodyPr>
-          <a:lstStyle/>
-          <a:p>
-            <a:pPr algn="l">
-              <a:lnSpc>
-                <a:spcPct val="100000"/>
-              </a:lnSpc>
-            </a:pPr>
-            <a:r>
-              <a:rPr sz="1200" b="0">
-                <a:solidFill>
-                  <a:srgbClr val="E8ECF4"/>
-                </a:solidFill>
-                <a:latin typeface="Noto Sans CJK KR"/>
-              </a:rPr>
-              <a:t>실시간 최초 돌파 (0.94배)</a:t>
+              <a:rPr sz="2200" b="1">
+                <a:solidFill>
+                  <a:srgbClr val="EF6A5C"/>
+                </a:solidFill>
+                <a:latin typeface="Noto Sans CJK KR"/>
+              </a:rPr>
+              <a:t>~196s</a:t>
+            </a:r>
+          </a:p>
+          <a:p>
+            <a:pPr algn="ctr"/>
+            <a:r>
+              <a:rPr sz="1050">
+                <a:solidFill>
+                  <a:srgbClr val="8B95AB"/>
+                </a:solidFill>
+                <a:latin typeface="Noto Sans CJK KR"/>
+              </a:rPr>
+              <a:t>후처리 고정비용
+(26,000 iter, 프레임수 무관)</a:t>
             </a:r>
           </a:p>
         </p:txBody>
@@ -7167,18 +7263,18 @@
         </p:nvSpPr>
         <p:spPr>
           <a:xfrm>
-            <a:off x="548640" y="2331720"/>
-            <a:ext cx="1554480" cy="292608"/>
+            <a:off x="4297679" y="4572000"/>
+            <a:ext cx="3566160" cy="914400"/>
           </a:xfrm>
           <a:prstGeom prst="roundRect">
             <a:avLst>
-              <a:gd name="adj" fmla="val 50000"/>
+              <a:gd name="adj" fmla="val 8000"/>
             </a:avLst>
           </a:prstGeom>
           <a:solidFill>
             <a:srgbClr val="1A1F2B"/>
           </a:solidFill>
-          <a:ln w="12700">
+          <a:ln w="15875">
             <a:solidFill>
               <a:srgbClr val="4CC98A"/>
             </a:solidFill>
@@ -7200,83 +7296,56 @@
           </a:fontRef>
         </p:style>
         <p:txBody>
-          <a:bodyPr rtlCol="0" anchor="ctr" lIns="45720" rIns="45720"/>
+          <a:bodyPr rtlCol="0" anchor="ctr" wrap="square" lIns="146304" rIns="146304"/>
           <a:lstStyle/>
           <a:p>
             <a:pPr algn="ctr"/>
             <a:r>
-              <a:rPr sz="900" b="1">
+              <a:rPr sz="2200" b="1">
                 <a:solidFill>
                   <a:srgbClr val="4CC98A"/>
                 </a:solidFill>
                 <a:latin typeface="Noto Sans CJK KR"/>
               </a:rPr>
-              <a:t>EXP55</a:t>
-            </a:r>
-          </a:p>
-        </p:txBody>
-      </p:sp>
-      <p:sp>
-        <p:nvSpPr>
-          <p:cNvPr id="9" name="TextBox 8"/>
-          <p:cNvSpPr txBox="1"/>
-          <p:nvPr/>
-        </p:nvSpPr>
-        <p:spPr>
-          <a:xfrm>
-            <a:off x="2240280" y="2276856"/>
-            <a:ext cx="9402775" cy="502920"/>
-          </a:xfrm>
-          <a:prstGeom prst="rect">
-            <a:avLst/>
-          </a:prstGeom>
-          <a:noFill/>
-        </p:spPr>
-        <p:txBody>
-          <a:bodyPr wrap="square" anchor="ctr">
-            <a:spAutoFit/>
-          </a:bodyPr>
-          <a:lstStyle/>
-          <a:p>
-            <a:pPr algn="l">
-              <a:lnSpc>
-                <a:spcPct val="100000"/>
-              </a:lnSpc>
-            </a:pPr>
-            <a:r>
-              <a:rPr sz="1200" b="0">
-                <a:solidFill>
-                  <a:srgbClr val="E8ECF4"/>
-                </a:solidFill>
-                <a:latin typeface="Noto Sans CJK KR"/>
-              </a:rPr>
-              <a:t>품질 레버 확보 (gaussian −35.9%, floater −7.5%, 비용 없음)</a:t>
-            </a:r>
-          </a:p>
-        </p:txBody>
-      </p:sp>
-      <p:sp>
-        <p:nvSpPr>
-          <p:cNvPr id="10" name="Rounded Rectangle 9"/>
+              <a:t>+3.04 / +6.45dB</a:t>
+            </a:r>
+          </a:p>
+          <a:p>
+            <a:pPr algn="ctr"/>
+            <a:r>
+              <a:rPr sz="1050">
+                <a:solidFill>
+                  <a:srgbClr val="8B95AB"/>
+                </a:solidFill>
+                <a:latin typeface="Noto Sans CJK KR"/>
+              </a:rPr>
+              <a:t>PSNR 이득(mean/kf)</a:t>
+            </a:r>
+          </a:p>
+        </p:txBody>
+      </p:sp>
+      <p:sp>
+        <p:nvSpPr>
+          <p:cNvPr id="9" name="Rounded Rectangle 8"/>
           <p:cNvSpPr/>
           <p:nvPr/>
         </p:nvSpPr>
         <p:spPr>
           <a:xfrm>
-            <a:off x="548640" y="3108960"/>
-            <a:ext cx="1554480" cy="292608"/>
+            <a:off x="8046719" y="4572000"/>
+            <a:ext cx="3657600" cy="914400"/>
           </a:xfrm>
           <a:prstGeom prst="roundRect">
             <a:avLst>
-              <a:gd name="adj" fmla="val 50000"/>
+              <a:gd name="adj" fmla="val 8000"/>
             </a:avLst>
           </a:prstGeom>
           <a:solidFill>
             <a:srgbClr val="1A1F2B"/>
           </a:solidFill>
-          <a:ln w="12700">
+          <a:ln w="15875">
             <a:solidFill>
-              <a:srgbClr val="FFB454"/>
+              <a:srgbClr val="E8ECF4"/>
             </a:solidFill>
           </a:ln>
           <a:effectLst/>
@@ -7296,128 +7365,44 @@
           </a:fontRef>
         </p:style>
         <p:txBody>
-          <a:bodyPr rtlCol="0" anchor="ctr" lIns="45720" rIns="45720"/>
+          <a:bodyPr rtlCol="0" anchor="ctr" wrap="square" lIns="146304" rIns="146304"/>
           <a:lstStyle/>
           <a:p>
             <a:pPr algn="ctr"/>
             <a:r>
-              <a:rPr sz="900" b="1">
-                <a:solidFill>
-                  <a:srgbClr val="FFB454"/>
-                </a:solidFill>
-                <a:latin typeface="Noto Sans CJK KR"/>
-              </a:rPr>
-              <a:t>EXP56</a:t>
-            </a:r>
-          </a:p>
-        </p:txBody>
-      </p:sp>
-      <p:sp>
-        <p:nvSpPr>
-          <p:cNvPr id="11" name="TextBox 10"/>
+              <a:rPr sz="2200" b="1">
+                <a:solidFill>
+                  <a:srgbClr val="E8ECF4"/>
+                </a:solidFill>
+                <a:latin typeface="Noto Sans CJK KR"/>
+              </a:rPr>
+              <a:t>26.53 / 30.33dB</a:t>
+            </a:r>
+          </a:p>
+          <a:p>
+            <a:pPr algn="ctr"/>
+            <a:r>
+              <a:rPr sz="1050">
+                <a:solidFill>
+                  <a:srgbClr val="8B95AB"/>
+                </a:solidFill>
+                <a:latin typeface="Noto Sans CJK KR"/>
+              </a:rPr>
+              <a:t>exp56 최종 레시피 위 실측</a:t>
+            </a:r>
+          </a:p>
+        </p:txBody>
+      </p:sp>
+      <p:sp>
+        <p:nvSpPr>
+          <p:cNvPr id="10" name="TextBox 9"/>
           <p:cNvSpPr txBox="1"/>
           <p:nvPr/>
         </p:nvSpPr>
         <p:spPr>
           <a:xfrm>
-            <a:off x="2240280" y="3054096"/>
-            <a:ext cx="9402775" cy="502920"/>
-          </a:xfrm>
-          <a:prstGeom prst="rect">
-            <a:avLst/>
-          </a:prstGeom>
-          <a:noFill/>
-        </p:spPr>
-        <p:txBody>
-          <a:bodyPr wrap="square" anchor="ctr">
-            <a:spAutoFit/>
-          </a:bodyPr>
-          <a:lstStyle/>
-          <a:p>
-            <a:pPr algn="l">
-              <a:lnSpc>
-                <a:spcPct val="100000"/>
-              </a:lnSpc>
-            </a:pPr>
-            <a:r>
-              <a:rPr sz="1200" b="0">
-                <a:solidFill>
-                  <a:srgbClr val="E8ECF4"/>
-                </a:solidFill>
-                <a:latin typeface="Noto Sans CJK KR"/>
-              </a:rPr>
-              <a:t>"왜 안 빨라지나"를 끝까지 규명해 4단계 연속 개선 + 실패한 시도(batch화)까지 안전하게 검증</a:t>
-            </a:r>
-          </a:p>
-        </p:txBody>
-      </p:sp>
-      <p:sp>
-        <p:nvSpPr>
-          <p:cNvPr id="12" name="Rounded Rectangle 11"/>
-          <p:cNvSpPr/>
-          <p:nvPr/>
-        </p:nvSpPr>
-        <p:spPr>
-          <a:xfrm>
-            <a:off x="548640" y="4297680"/>
-            <a:ext cx="11094415" cy="1188720"/>
-          </a:xfrm>
-          <a:prstGeom prst="roundRect">
-            <a:avLst>
-              <a:gd name="adj" fmla="val 6000"/>
-            </a:avLst>
-          </a:prstGeom>
-          <a:solidFill>
-            <a:srgbClr val="1A1F2B"/>
-          </a:solidFill>
-          <a:ln w="19050">
-            <a:solidFill>
-              <a:srgbClr val="FFB454"/>
-            </a:solidFill>
-          </a:ln>
-          <a:effectLst/>
-        </p:spPr>
-        <p:style>
-          <a:lnRef idx="1">
-            <a:schemeClr val="accent1"/>
-          </a:lnRef>
-          <a:fillRef idx="3">
-            <a:schemeClr val="accent1"/>
-          </a:fillRef>
-          <a:effectRef idx="2">
-            <a:schemeClr val="accent1"/>
-          </a:effectRef>
-          <a:fontRef idx="minor">
-            <a:schemeClr val="lt1"/>
-          </a:fontRef>
-        </p:style>
-        <p:txBody>
-          <a:bodyPr rtlCol="0" anchor="ctr" wrap="square" lIns="228600" rIns="228600"/>
-          <a:lstStyle/>
-          <a:p>
-            <a:pPr algn="ctr"/>
-            <a:r>
-              <a:rPr sz="1600" b="1">
-                <a:solidFill>
-                  <a:srgbClr val="E8ECF4"/>
-                </a:solidFill>
-                <a:latin typeface="Noto Sans CJK KR"/>
-              </a:rPr>
-              <a:t>실시간을 달성하고, 그 위에서 시간을 추가로 1/4 더 줄이면서 품질까지 함께 올렸다</a:t>
-            </a:r>
-          </a:p>
-        </p:txBody>
-      </p:sp>
-      <p:sp>
-        <p:nvSpPr>
-          <p:cNvPr id="13" name="TextBox 12"/>
-          <p:cNvSpPr txBox="1"/>
-          <p:nvPr/>
-        </p:nvSpPr>
-        <p:spPr>
-          <a:xfrm>
-            <a:off x="548640" y="5852160"/>
-            <a:ext cx="11094415" cy="640080"/>
+            <a:off x="548640" y="5623560"/>
+            <a:ext cx="11094415" cy="1005840"/>
           </a:xfrm>
           <a:prstGeom prst="rect">
             <a:avLst/>
@@ -7442,7 +7427,7 @@
                 </a:solidFill>
                 <a:latin typeface="Noto Sans CJK KR"/>
               </a:rPr>
-              <a:t>다음 미팅까지 목표(localization 통합 vs 커널 batch화 여부)에 대한 팀 의견 요청.</a:t>
+              <a:t>07/18 구버전 설정에서 처음 발견된 패턴(+4.12/+7.95dB)이 exp56 최종 레시피에서도 재현됨(2026-07-27 재검증). 26k iteration은 시퀀스 길이와 무관한 고정 배치 작업이라 현재 구조로는 "실시간"이 아니라 "끝나고 한 번에 몰아서" — 다음 슬라이드는 이걸 실시간 호환으로 만들 방법에 대한 제안.</a:t>
             </a:r>
           </a:p>
         </p:txBody>
@@ -7765,6 +7750,1127 @@
                 <a:latin typeface="Noto Sans CJK KR"/>
               </a:rPr>
               <a:t>오늘은 이 지점(1.52배, 아직 실시간 아님) 이후 일주일간 일어난 일만 다룹니다.</a:t>
+            </a:r>
+          </a:p>
+        </p:txBody>
+      </p:sp>
+    </p:spTree>
+  </p:cSld>
+  <p:clrMapOvr>
+    <a:masterClrMapping/>
+  </p:clrMapOvr>
+</p:sld>
+</file>
+
+<file path=ppt/slides/slide20.xml><?xml version="1.0" encoding="utf-8"?>
+<p:sld xmlns:a="http://schemas.openxmlformats.org/drawingml/2006/main" xmlns:p="http://schemas.openxmlformats.org/presentationml/2006/main" xmlns:r="http://schemas.openxmlformats.org/officeDocument/2006/relationships">
+  <p:cSld>
+    <p:spTree>
+      <p:nvGrpSpPr>
+        <p:cNvPr id="1" name=""/>
+        <p:cNvGrpSpPr/>
+        <p:nvPr/>
+      </p:nvGrpSpPr>
+      <p:grpSpPr/>
+      <p:sp>
+        <p:nvSpPr>
+          <p:cNvPr id="2" name="Rectangle 1"/>
+          <p:cNvSpPr/>
+          <p:nvPr/>
+        </p:nvSpPr>
+        <p:spPr>
+          <a:xfrm>
+            <a:off x="0" y="0"/>
+            <a:ext cx="12191695" cy="6858000"/>
+          </a:xfrm>
+          <a:prstGeom prst="rect">
+            <a:avLst/>
+          </a:prstGeom>
+          <a:solidFill>
+            <a:srgbClr val="12151C"/>
+          </a:solidFill>
+          <a:ln>
+            <a:noFill/>
+          </a:ln>
+          <a:effectLst/>
+        </p:spPr>
+        <p:style>
+          <a:lnRef idx="1">
+            <a:schemeClr val="accent1"/>
+          </a:lnRef>
+          <a:fillRef idx="3">
+            <a:schemeClr val="accent1"/>
+          </a:fillRef>
+          <a:effectRef idx="2">
+            <a:schemeClr val="accent1"/>
+          </a:effectRef>
+          <a:fontRef idx="minor">
+            <a:schemeClr val="lt1"/>
+          </a:fontRef>
+        </p:style>
+        <p:txBody>
+          <a:bodyPr rtlCol="0" anchor="ctr"/>
+          <a:lstStyle/>
+          <a:p>
+            <a:pPr algn="ctr"/>
+          </a:p>
+        </p:txBody>
+      </p:sp>
+      <p:sp>
+        <p:nvSpPr>
+          <p:cNvPr id="3" name="TextBox 2"/>
+          <p:cNvSpPr txBox="1"/>
+          <p:nvPr/>
+        </p:nvSpPr>
+        <p:spPr>
+          <a:xfrm>
+            <a:off x="548640" y="320040"/>
+            <a:ext cx="11094415" cy="292608"/>
+          </a:xfrm>
+          <a:prstGeom prst="rect">
+            <a:avLst/>
+          </a:prstGeom>
+          <a:noFill/>
+        </p:spPr>
+        <p:txBody>
+          <a:bodyPr wrap="square" anchor="t">
+            <a:spAutoFit/>
+          </a:bodyPr>
+          <a:lstStyle/>
+          <a:p>
+            <a:pPr algn="l">
+              <a:lnSpc>
+                <a:spcPct val="100000"/>
+              </a:lnSpc>
+            </a:pPr>
+            <a:r>
+              <a:rPr sz="1200" b="1">
+                <a:solidFill>
+                  <a:srgbClr val="FFB454"/>
+                </a:solidFill>
+                <a:latin typeface="Noto Sans CJK KR"/>
+              </a:rPr>
+              <a:t>§4 · PROPOSAL</a:t>
+            </a:r>
+          </a:p>
+        </p:txBody>
+      </p:sp>
+      <p:sp>
+        <p:nvSpPr>
+          <p:cNvPr id="4" name="TextBox 3"/>
+          <p:cNvSpPr txBox="1"/>
+          <p:nvPr/>
+        </p:nvSpPr>
+        <p:spPr>
+          <a:xfrm>
+            <a:off x="548640" y="566928"/>
+            <a:ext cx="11094415" cy="548640"/>
+          </a:xfrm>
+          <a:prstGeom prst="rect">
+            <a:avLst/>
+          </a:prstGeom>
+          <a:noFill/>
+        </p:spPr>
+        <p:txBody>
+          <a:bodyPr wrap="square" anchor="t">
+            <a:spAutoFit/>
+          </a:bodyPr>
+          <a:lstStyle/>
+          <a:p>
+            <a:pPr algn="l">
+              <a:lnSpc>
+                <a:spcPct val="100000"/>
+              </a:lnSpc>
+            </a:pPr>
+            <a:r>
+              <a:rPr sz="2200" b="1">
+                <a:solidFill>
+                  <a:srgbClr val="E8ECF4"/>
+                </a:solidFill>
+                <a:latin typeface="Noto Sans CJK KR"/>
+              </a:rPr>
+              <a:t>후처리를 실시간 호환으로 만들려면</a:t>
+            </a:r>
+          </a:p>
+        </p:txBody>
+      </p:sp>
+      <p:sp>
+        <p:nvSpPr>
+          <p:cNvPr id="5" name="Rectangle 4"/>
+          <p:cNvSpPr/>
+          <p:nvPr/>
+        </p:nvSpPr>
+        <p:spPr>
+          <a:xfrm>
+            <a:off x="548640" y="1078992"/>
+            <a:ext cx="11094415" cy="25400"/>
+          </a:xfrm>
+          <a:prstGeom prst="rect">
+            <a:avLst/>
+          </a:prstGeom>
+          <a:solidFill>
+            <a:srgbClr val="2A3242"/>
+          </a:solidFill>
+          <a:ln>
+            <a:noFill/>
+          </a:ln>
+          <a:effectLst/>
+        </p:spPr>
+        <p:style>
+          <a:lnRef idx="1">
+            <a:schemeClr val="accent1"/>
+          </a:lnRef>
+          <a:fillRef idx="3">
+            <a:schemeClr val="accent1"/>
+          </a:fillRef>
+          <a:effectRef idx="2">
+            <a:schemeClr val="accent1"/>
+          </a:effectRef>
+          <a:fontRef idx="minor">
+            <a:schemeClr val="lt1"/>
+          </a:fontRef>
+        </p:style>
+        <p:txBody>
+          <a:bodyPr rtlCol="0" anchor="ctr"/>
+          <a:lstStyle/>
+          <a:p>
+            <a:pPr algn="ctr"/>
+          </a:p>
+        </p:txBody>
+      </p:sp>
+      <p:sp>
+        <p:nvSpPr>
+          <p:cNvPr id="6" name="TextBox 5"/>
+          <p:cNvSpPr txBox="1"/>
+          <p:nvPr/>
+        </p:nvSpPr>
+        <p:spPr>
+          <a:xfrm>
+            <a:off x="548640" y="1371600"/>
+            <a:ext cx="11094415" cy="914400"/>
+          </a:xfrm>
+          <a:prstGeom prst="rect">
+            <a:avLst/>
+          </a:prstGeom>
+          <a:noFill/>
+        </p:spPr>
+        <p:txBody>
+          <a:bodyPr wrap="square">
+            <a:spAutoFit/>
+          </a:bodyPr>
+          <a:lstStyle/>
+          <a:p>
+            <a:pPr>
+              <a:lnSpc>
+                <a:spcPct val="122000"/>
+              </a:lnSpc>
+              <a:spcAft>
+                <a:spcPts val="800"/>
+              </a:spcAft>
+            </a:pPr>
+            <a:r>
+              <a:rPr sz="1350">
+                <a:solidFill>
+                  <a:srgbClr val="E8ECF4"/>
+                </a:solidFill>
+                <a:latin typeface="Noto Sans CJK KR"/>
+              </a:rPr>
+              <a:t>•  핵심 문제: 26,000 iteration이 시퀀스 종료 후 한 번에 블로킹으로 몰림 — 온라인 시스템엔 "종료 시점"이 없음</a:t>
+            </a:r>
+          </a:p>
+        </p:txBody>
+      </p:sp>
+      <p:sp>
+        <p:nvSpPr>
+          <p:cNvPr id="7" name="Rounded Rectangle 6"/>
+          <p:cNvSpPr/>
+          <p:nvPr/>
+        </p:nvSpPr>
+        <p:spPr>
+          <a:xfrm>
+            <a:off x="548640" y="2468880"/>
+            <a:ext cx="1554480" cy="292608"/>
+          </a:xfrm>
+          <a:prstGeom prst="roundRect">
+            <a:avLst>
+              <a:gd name="adj" fmla="val 50000"/>
+            </a:avLst>
+          </a:prstGeom>
+          <a:solidFill>
+            <a:srgbClr val="1A1F2B"/>
+          </a:solidFill>
+          <a:ln w="12700">
+            <a:solidFill>
+              <a:srgbClr val="4C86EA"/>
+            </a:solidFill>
+          </a:ln>
+          <a:effectLst/>
+        </p:spPr>
+        <p:style>
+          <a:lnRef idx="1">
+            <a:schemeClr val="accent1"/>
+          </a:lnRef>
+          <a:fillRef idx="3">
+            <a:schemeClr val="accent1"/>
+          </a:fillRef>
+          <a:effectRef idx="2">
+            <a:schemeClr val="accent1"/>
+          </a:effectRef>
+          <a:fontRef idx="minor">
+            <a:schemeClr val="lt1"/>
+          </a:fontRef>
+        </p:style>
+        <p:txBody>
+          <a:bodyPr rtlCol="0" anchor="ctr" lIns="45720" rIns="45720"/>
+          <a:lstStyle/>
+          <a:p>
+            <a:pPr algn="ctr"/>
+            <a:r>
+              <a:rPr sz="900" b="1">
+                <a:solidFill>
+                  <a:srgbClr val="4C86EA"/>
+                </a:solidFill>
+                <a:latin typeface="Noto Sans CJK KR"/>
+              </a:rPr>
+              <a:t>A · 상시 백그라운드화</a:t>
+            </a:r>
+          </a:p>
+        </p:txBody>
+      </p:sp>
+      <p:sp>
+        <p:nvSpPr>
+          <p:cNvPr id="8" name="TextBox 7"/>
+          <p:cNvSpPr txBox="1"/>
+          <p:nvPr/>
+        </p:nvSpPr>
+        <p:spPr>
+          <a:xfrm>
+            <a:off x="2240280" y="2414016"/>
+            <a:ext cx="9402775" cy="502920"/>
+          </a:xfrm>
+          <a:prstGeom prst="rect">
+            <a:avLst/>
+          </a:prstGeom>
+          <a:noFill/>
+        </p:spPr>
+        <p:txBody>
+          <a:bodyPr wrap="square" anchor="ctr">
+            <a:spAutoFit/>
+          </a:bodyPr>
+          <a:lstStyle/>
+          <a:p>
+            <a:pPr algn="l">
+              <a:lnSpc>
+                <a:spcPct val="100000"/>
+              </a:lnSpc>
+            </a:pPr>
+            <a:r>
+              <a:rPr sz="1200" b="0">
+                <a:solidFill>
+                  <a:srgbClr val="E8ECF4"/>
+                </a:solidFill>
+                <a:latin typeface="Noto Sans CJK KR"/>
+              </a:rPr>
+              <a:t>26k를 세션 끝에 몰아서 돌리지 않고, 이미 지나간(프론티어 밖) keyframe에 대해 GPU 유휴 사이클마다 소량씩 지속 refinement — n_global_views(Phase7)가 이미 하던 걸 전용 백그라운드 루프로 확장</a:t>
+            </a:r>
+          </a:p>
+        </p:txBody>
+      </p:sp>
+      <p:sp>
+        <p:nvSpPr>
+          <p:cNvPr id="9" name="Rounded Rectangle 8"/>
+          <p:cNvSpPr/>
+          <p:nvPr/>
+        </p:nvSpPr>
+        <p:spPr>
+          <a:xfrm>
+            <a:off x="548640" y="3429000"/>
+            <a:ext cx="1554480" cy="292608"/>
+          </a:xfrm>
+          <a:prstGeom prst="roundRect">
+            <a:avLst>
+              <a:gd name="adj" fmla="val 50000"/>
+            </a:avLst>
+          </a:prstGeom>
+          <a:solidFill>
+            <a:srgbClr val="1A1F2B"/>
+          </a:solidFill>
+          <a:ln w="12700">
+            <a:solidFill>
+              <a:srgbClr val="FFB454"/>
+            </a:solidFill>
+          </a:ln>
+          <a:effectLst/>
+        </p:spPr>
+        <p:style>
+          <a:lnRef idx="1">
+            <a:schemeClr val="accent1"/>
+          </a:lnRef>
+          <a:fillRef idx="3">
+            <a:schemeClr val="accent1"/>
+          </a:fillRef>
+          <a:effectRef idx="2">
+            <a:schemeClr val="accent1"/>
+          </a:effectRef>
+          <a:fontRef idx="minor">
+            <a:schemeClr val="lt1"/>
+          </a:fontRef>
+        </p:style>
+        <p:txBody>
+          <a:bodyPr rtlCol="0" anchor="ctr" lIns="45720" rIns="45720"/>
+          <a:lstStyle/>
+          <a:p>
+            <a:pPr algn="ctr"/>
+            <a:r>
+              <a:rPr sz="900" b="1">
+                <a:solidFill>
+                  <a:srgbClr val="FFB454"/>
+                </a:solidFill>
+                <a:latin typeface="Noto Sans CJK KR"/>
+              </a:rPr>
+              <a:t>B · 우선순위 스케줄링</a:t>
+            </a:r>
+          </a:p>
+        </p:txBody>
+      </p:sp>
+      <p:sp>
+        <p:nvSpPr>
+          <p:cNvPr id="10" name="TextBox 9"/>
+          <p:cNvSpPr txBox="1"/>
+          <p:nvPr/>
+        </p:nvSpPr>
+        <p:spPr>
+          <a:xfrm>
+            <a:off x="2240280" y="3374136"/>
+            <a:ext cx="9402775" cy="502920"/>
+          </a:xfrm>
+          <a:prstGeom prst="rect">
+            <a:avLst/>
+          </a:prstGeom>
+          <a:noFill/>
+        </p:spPr>
+        <p:txBody>
+          <a:bodyPr wrap="square" anchor="ctr">
+            <a:spAutoFit/>
+          </a:bodyPr>
+          <a:lstStyle/>
+          <a:p>
+            <a:pPr algn="l">
+              <a:lnSpc>
+                <a:spcPct val="100000"/>
+              </a:lnSpc>
+            </a:pPr>
+            <a:r>
+              <a:rPr sz="1200" b="0">
+                <a:solidFill>
+                  <a:srgbClr val="E8ECF4"/>
+                </a:solidFill>
+                <a:latin typeface="Noto Sans CJK KR"/>
+              </a:rPr>
+              <a:t>_gs_queue가 비어 mapper가 노는 시점(exp55 부록에서 이미 발견한 유휴 구간)을 감지해 그 틈에만 refinement 스텝을 끼워 넣음 — 신규 keyframe 처리를 항상 최우선으로 선점</a:t>
+            </a:r>
+          </a:p>
+        </p:txBody>
+      </p:sp>
+      <p:sp>
+        <p:nvSpPr>
+          <p:cNvPr id="11" name="Rounded Rectangle 10"/>
+          <p:cNvSpPr/>
+          <p:nvPr/>
+        </p:nvSpPr>
+        <p:spPr>
+          <a:xfrm>
+            <a:off x="548640" y="4389120"/>
+            <a:ext cx="1554480" cy="292608"/>
+          </a:xfrm>
+          <a:prstGeom prst="roundRect">
+            <a:avLst>
+              <a:gd name="adj" fmla="val 50000"/>
+            </a:avLst>
+          </a:prstGeom>
+          <a:solidFill>
+            <a:srgbClr val="1A1F2B"/>
+          </a:solidFill>
+          <a:ln w="12700">
+            <a:solidFill>
+              <a:srgbClr val="4CC98A"/>
+            </a:solidFill>
+          </a:ln>
+          <a:effectLst/>
+        </p:spPr>
+        <p:style>
+          <a:lnRef idx="1">
+            <a:schemeClr val="accent1"/>
+          </a:lnRef>
+          <a:fillRef idx="3">
+            <a:schemeClr val="accent1"/>
+          </a:fillRef>
+          <a:effectRef idx="2">
+            <a:schemeClr val="accent1"/>
+          </a:effectRef>
+          <a:fontRef idx="minor">
+            <a:schemeClr val="lt1"/>
+          </a:fontRef>
+        </p:style>
+        <p:txBody>
+          <a:bodyPr rtlCol="0" anchor="ctr" lIns="45720" rIns="45720"/>
+          <a:lstStyle/>
+          <a:p>
+            <a:pPr algn="ctr"/>
+            <a:r>
+              <a:rPr sz="900" b="1">
+                <a:solidFill>
+                  <a:srgbClr val="4CC98A"/>
+                </a:solidFill>
+                <a:latin typeface="Noto Sans CJK KR"/>
+              </a:rPr>
+              <a:t>C · 반복수 자체 축소</a:t>
+            </a:r>
+          </a:p>
+        </p:txBody>
+      </p:sp>
+      <p:sp>
+        <p:nvSpPr>
+          <p:cNvPr id="12" name="TextBox 11"/>
+          <p:cNvSpPr txBox="1"/>
+          <p:nvPr/>
+        </p:nvSpPr>
+        <p:spPr>
+          <a:xfrm>
+            <a:off x="2240280" y="4334256"/>
+            <a:ext cx="9402775" cy="502920"/>
+          </a:xfrm>
+          <a:prstGeom prst="rect">
+            <a:avLst/>
+          </a:prstGeom>
+          <a:noFill/>
+        </p:spPr>
+        <p:txBody>
+          <a:bodyPr wrap="square" anchor="ctr">
+            <a:spAutoFit/>
+          </a:bodyPr>
+          <a:lstStyle/>
+          <a:p>
+            <a:pPr algn="l">
+              <a:lnSpc>
+                <a:spcPct val="100000"/>
+              </a:lnSpc>
+            </a:pPr>
+            <a:r>
+              <a:rPr sz="1200" b="0">
+                <a:solidFill>
+                  <a:srgbClr val="E8ECF4"/>
+                </a:solidFill>
+                <a:latin typeface="Noto Sans CJK KR"/>
+              </a:rPr>
+              <a:t>iters=10→7이 온라인에서 그랬듯, 26,000도 고정 상수일 뿐 — 스윕(예: 5000/10000)해서 수확체감 지점을 찾으면 고정비용 자체를 줄일 수 있음(저위험, 미검증)</a:t>
+            </a:r>
+          </a:p>
+        </p:txBody>
+      </p:sp>
+      <p:sp>
+        <p:nvSpPr>
+          <p:cNvPr id="13" name="TextBox 12"/>
+          <p:cNvSpPr txBox="1"/>
+          <p:nvPr/>
+        </p:nvSpPr>
+        <p:spPr>
+          <a:xfrm>
+            <a:off x="548640" y="5760720"/>
+            <a:ext cx="11094415" cy="822960"/>
+          </a:xfrm>
+          <a:prstGeom prst="rect">
+            <a:avLst/>
+          </a:prstGeom>
+          <a:noFill/>
+        </p:spPr>
+        <p:txBody>
+          <a:bodyPr wrap="square" anchor="t">
+            <a:spAutoFit/>
+          </a:bodyPr>
+          <a:lstStyle/>
+          <a:p>
+            <a:pPr algn="l">
+              <a:lnSpc>
+                <a:spcPct val="120000"/>
+              </a:lnSpc>
+            </a:pPr>
+            <a:r>
+              <a:rPr sz="1100" b="0">
+                <a:solidFill>
+                  <a:srgbClr val="8B95AB"/>
+                </a:solidFill>
+                <a:latin typeface="Noto Sans CJK KR"/>
+              </a:rPr>
+              <a:t>권장: C(반복수 스윕)로 저위험 저비용 검증 먼저 → A/B(상시 백그라운드화)로 구조를 바꾸는 건 exp56 Phase7의 아이디어를 그대로 확장하는 것이라 다음 사이클 후보로 유력.</a:t>
+            </a:r>
+          </a:p>
+        </p:txBody>
+      </p:sp>
+    </p:spTree>
+  </p:cSld>
+  <p:clrMapOvr>
+    <a:masterClrMapping/>
+  </p:clrMapOvr>
+</p:sld>
+</file>
+
+<file path=ppt/slides/slide21.xml><?xml version="1.0" encoding="utf-8"?>
+<p:sld xmlns:a="http://schemas.openxmlformats.org/drawingml/2006/main" xmlns:p="http://schemas.openxmlformats.org/presentationml/2006/main" xmlns:r="http://schemas.openxmlformats.org/officeDocument/2006/relationships">
+  <p:cSld>
+    <p:spTree>
+      <p:nvGrpSpPr>
+        <p:cNvPr id="1" name=""/>
+        <p:cNvGrpSpPr/>
+        <p:nvPr/>
+      </p:nvGrpSpPr>
+      <p:grpSpPr/>
+      <p:sp>
+        <p:nvSpPr>
+          <p:cNvPr id="2" name="Rectangle 1"/>
+          <p:cNvSpPr/>
+          <p:nvPr/>
+        </p:nvSpPr>
+        <p:spPr>
+          <a:xfrm>
+            <a:off x="0" y="0"/>
+            <a:ext cx="12191695" cy="6858000"/>
+          </a:xfrm>
+          <a:prstGeom prst="rect">
+            <a:avLst/>
+          </a:prstGeom>
+          <a:solidFill>
+            <a:srgbClr val="12151C"/>
+          </a:solidFill>
+          <a:ln>
+            <a:noFill/>
+          </a:ln>
+          <a:effectLst/>
+        </p:spPr>
+        <p:style>
+          <a:lnRef idx="1">
+            <a:schemeClr val="accent1"/>
+          </a:lnRef>
+          <a:fillRef idx="3">
+            <a:schemeClr val="accent1"/>
+          </a:fillRef>
+          <a:effectRef idx="2">
+            <a:schemeClr val="accent1"/>
+          </a:effectRef>
+          <a:fontRef idx="minor">
+            <a:schemeClr val="lt1"/>
+          </a:fontRef>
+        </p:style>
+        <p:txBody>
+          <a:bodyPr rtlCol="0" anchor="ctr"/>
+          <a:lstStyle/>
+          <a:p>
+            <a:pPr algn="ctr"/>
+          </a:p>
+        </p:txBody>
+      </p:sp>
+      <p:sp>
+        <p:nvSpPr>
+          <p:cNvPr id="3" name="TextBox 2"/>
+          <p:cNvSpPr txBox="1"/>
+          <p:nvPr/>
+        </p:nvSpPr>
+        <p:spPr>
+          <a:xfrm>
+            <a:off x="548640" y="320040"/>
+            <a:ext cx="11094415" cy="292608"/>
+          </a:xfrm>
+          <a:prstGeom prst="rect">
+            <a:avLst/>
+          </a:prstGeom>
+          <a:noFill/>
+        </p:spPr>
+        <p:txBody>
+          <a:bodyPr wrap="square" anchor="t">
+            <a:spAutoFit/>
+          </a:bodyPr>
+          <a:lstStyle/>
+          <a:p>
+            <a:pPr algn="l">
+              <a:lnSpc>
+                <a:spcPct val="100000"/>
+              </a:lnSpc>
+            </a:pPr>
+            <a:r>
+              <a:rPr sz="1200" b="1">
+                <a:solidFill>
+                  <a:srgbClr val="FFB454"/>
+                </a:solidFill>
+                <a:latin typeface="Noto Sans CJK KR"/>
+              </a:rPr>
+              <a:t>§4 · CONCLUSION</a:t>
+            </a:r>
+          </a:p>
+        </p:txBody>
+      </p:sp>
+      <p:sp>
+        <p:nvSpPr>
+          <p:cNvPr id="4" name="TextBox 3"/>
+          <p:cNvSpPr txBox="1"/>
+          <p:nvPr/>
+        </p:nvSpPr>
+        <p:spPr>
+          <a:xfrm>
+            <a:off x="548640" y="566928"/>
+            <a:ext cx="11094415" cy="548640"/>
+          </a:xfrm>
+          <a:prstGeom prst="rect">
+            <a:avLst/>
+          </a:prstGeom>
+          <a:noFill/>
+        </p:spPr>
+        <p:txBody>
+          <a:bodyPr wrap="square" anchor="t">
+            <a:spAutoFit/>
+          </a:bodyPr>
+          <a:lstStyle/>
+          <a:p>
+            <a:pPr algn="l">
+              <a:lnSpc>
+                <a:spcPct val="100000"/>
+              </a:lnSpc>
+            </a:pPr>
+            <a:r>
+              <a:rPr sz="2200" b="1">
+                <a:solidFill>
+                  <a:srgbClr val="E8ECF4"/>
+                </a:solidFill>
+                <a:latin typeface="Noto Sans CJK KR"/>
+              </a:rPr>
+              <a:t>결론 한 줄</a:t>
+            </a:r>
+          </a:p>
+        </p:txBody>
+      </p:sp>
+      <p:sp>
+        <p:nvSpPr>
+          <p:cNvPr id="5" name="Rectangle 4"/>
+          <p:cNvSpPr/>
+          <p:nvPr/>
+        </p:nvSpPr>
+        <p:spPr>
+          <a:xfrm>
+            <a:off x="548640" y="1078992"/>
+            <a:ext cx="11094415" cy="25400"/>
+          </a:xfrm>
+          <a:prstGeom prst="rect">
+            <a:avLst/>
+          </a:prstGeom>
+          <a:solidFill>
+            <a:srgbClr val="2A3242"/>
+          </a:solidFill>
+          <a:ln>
+            <a:noFill/>
+          </a:ln>
+          <a:effectLst/>
+        </p:spPr>
+        <p:style>
+          <a:lnRef idx="1">
+            <a:schemeClr val="accent1"/>
+          </a:lnRef>
+          <a:fillRef idx="3">
+            <a:schemeClr val="accent1"/>
+          </a:fillRef>
+          <a:effectRef idx="2">
+            <a:schemeClr val="accent1"/>
+          </a:effectRef>
+          <a:fontRef idx="minor">
+            <a:schemeClr val="lt1"/>
+          </a:fontRef>
+        </p:style>
+        <p:txBody>
+          <a:bodyPr rtlCol="0" anchor="ctr"/>
+          <a:lstStyle/>
+          <a:p>
+            <a:pPr algn="ctr"/>
+          </a:p>
+        </p:txBody>
+      </p:sp>
+      <p:sp>
+        <p:nvSpPr>
+          <p:cNvPr id="6" name="Rounded Rectangle 5"/>
+          <p:cNvSpPr/>
+          <p:nvPr/>
+        </p:nvSpPr>
+        <p:spPr>
+          <a:xfrm>
+            <a:off x="548640" y="1554480"/>
+            <a:ext cx="1554480" cy="292608"/>
+          </a:xfrm>
+          <a:prstGeom prst="roundRect">
+            <a:avLst>
+              <a:gd name="adj" fmla="val 50000"/>
+            </a:avLst>
+          </a:prstGeom>
+          <a:solidFill>
+            <a:srgbClr val="1A1F2B"/>
+          </a:solidFill>
+          <a:ln w="12700">
+            <a:solidFill>
+              <a:srgbClr val="4C86EA"/>
+            </a:solidFill>
+          </a:ln>
+          <a:effectLst/>
+        </p:spPr>
+        <p:style>
+          <a:lnRef idx="1">
+            <a:schemeClr val="accent1"/>
+          </a:lnRef>
+          <a:fillRef idx="3">
+            <a:schemeClr val="accent1"/>
+          </a:fillRef>
+          <a:effectRef idx="2">
+            <a:schemeClr val="accent1"/>
+          </a:effectRef>
+          <a:fontRef idx="minor">
+            <a:schemeClr val="lt1"/>
+          </a:fontRef>
+        </p:style>
+        <p:txBody>
+          <a:bodyPr rtlCol="0" anchor="ctr" lIns="45720" rIns="45720"/>
+          <a:lstStyle/>
+          <a:p>
+            <a:pPr algn="ctr"/>
+            <a:r>
+              <a:rPr sz="900" b="1">
+                <a:solidFill>
+                  <a:srgbClr val="4C86EA"/>
+                </a:solidFill>
+                <a:latin typeface="Noto Sans CJK KR"/>
+              </a:rPr>
+              <a:t>EXP53+54</a:t>
+            </a:r>
+          </a:p>
+        </p:txBody>
+      </p:sp>
+      <p:sp>
+        <p:nvSpPr>
+          <p:cNvPr id="7" name="TextBox 6"/>
+          <p:cNvSpPr txBox="1"/>
+          <p:nvPr/>
+        </p:nvSpPr>
+        <p:spPr>
+          <a:xfrm>
+            <a:off x="2240280" y="1499616"/>
+            <a:ext cx="9402775" cy="502920"/>
+          </a:xfrm>
+          <a:prstGeom prst="rect">
+            <a:avLst/>
+          </a:prstGeom>
+          <a:noFill/>
+        </p:spPr>
+        <p:txBody>
+          <a:bodyPr wrap="square" anchor="ctr">
+            <a:spAutoFit/>
+          </a:bodyPr>
+          <a:lstStyle/>
+          <a:p>
+            <a:pPr algn="l">
+              <a:lnSpc>
+                <a:spcPct val="100000"/>
+              </a:lnSpc>
+            </a:pPr>
+            <a:r>
+              <a:rPr sz="1200" b="0">
+                <a:solidFill>
+                  <a:srgbClr val="E8ECF4"/>
+                </a:solidFill>
+                <a:latin typeface="Noto Sans CJK KR"/>
+              </a:rPr>
+              <a:t>실시간 최초 돌파 (0.94배)</a:t>
+            </a:r>
+          </a:p>
+        </p:txBody>
+      </p:sp>
+      <p:sp>
+        <p:nvSpPr>
+          <p:cNvPr id="8" name="Rounded Rectangle 7"/>
+          <p:cNvSpPr/>
+          <p:nvPr/>
+        </p:nvSpPr>
+        <p:spPr>
+          <a:xfrm>
+            <a:off x="548640" y="2331720"/>
+            <a:ext cx="1554480" cy="292608"/>
+          </a:xfrm>
+          <a:prstGeom prst="roundRect">
+            <a:avLst>
+              <a:gd name="adj" fmla="val 50000"/>
+            </a:avLst>
+          </a:prstGeom>
+          <a:solidFill>
+            <a:srgbClr val="1A1F2B"/>
+          </a:solidFill>
+          <a:ln w="12700">
+            <a:solidFill>
+              <a:srgbClr val="4CC98A"/>
+            </a:solidFill>
+          </a:ln>
+          <a:effectLst/>
+        </p:spPr>
+        <p:style>
+          <a:lnRef idx="1">
+            <a:schemeClr val="accent1"/>
+          </a:lnRef>
+          <a:fillRef idx="3">
+            <a:schemeClr val="accent1"/>
+          </a:fillRef>
+          <a:effectRef idx="2">
+            <a:schemeClr val="accent1"/>
+          </a:effectRef>
+          <a:fontRef idx="minor">
+            <a:schemeClr val="lt1"/>
+          </a:fontRef>
+        </p:style>
+        <p:txBody>
+          <a:bodyPr rtlCol="0" anchor="ctr" lIns="45720" rIns="45720"/>
+          <a:lstStyle/>
+          <a:p>
+            <a:pPr algn="ctr"/>
+            <a:r>
+              <a:rPr sz="900" b="1">
+                <a:solidFill>
+                  <a:srgbClr val="4CC98A"/>
+                </a:solidFill>
+                <a:latin typeface="Noto Sans CJK KR"/>
+              </a:rPr>
+              <a:t>EXP55</a:t>
+            </a:r>
+          </a:p>
+        </p:txBody>
+      </p:sp>
+      <p:sp>
+        <p:nvSpPr>
+          <p:cNvPr id="9" name="TextBox 8"/>
+          <p:cNvSpPr txBox="1"/>
+          <p:nvPr/>
+        </p:nvSpPr>
+        <p:spPr>
+          <a:xfrm>
+            <a:off x="2240280" y="2276856"/>
+            <a:ext cx="9402775" cy="502920"/>
+          </a:xfrm>
+          <a:prstGeom prst="rect">
+            <a:avLst/>
+          </a:prstGeom>
+          <a:noFill/>
+        </p:spPr>
+        <p:txBody>
+          <a:bodyPr wrap="square" anchor="ctr">
+            <a:spAutoFit/>
+          </a:bodyPr>
+          <a:lstStyle/>
+          <a:p>
+            <a:pPr algn="l">
+              <a:lnSpc>
+                <a:spcPct val="100000"/>
+              </a:lnSpc>
+            </a:pPr>
+            <a:r>
+              <a:rPr sz="1200" b="0">
+                <a:solidFill>
+                  <a:srgbClr val="E8ECF4"/>
+                </a:solidFill>
+                <a:latin typeface="Noto Sans CJK KR"/>
+              </a:rPr>
+              <a:t>품질 레버 확보 (gaussian −35.9%, floater −7.5%, 비용 없음)</a:t>
+            </a:r>
+          </a:p>
+        </p:txBody>
+      </p:sp>
+      <p:sp>
+        <p:nvSpPr>
+          <p:cNvPr id="10" name="Rounded Rectangle 9"/>
+          <p:cNvSpPr/>
+          <p:nvPr/>
+        </p:nvSpPr>
+        <p:spPr>
+          <a:xfrm>
+            <a:off x="548640" y="3108960"/>
+            <a:ext cx="1554480" cy="292608"/>
+          </a:xfrm>
+          <a:prstGeom prst="roundRect">
+            <a:avLst>
+              <a:gd name="adj" fmla="val 50000"/>
+            </a:avLst>
+          </a:prstGeom>
+          <a:solidFill>
+            <a:srgbClr val="1A1F2B"/>
+          </a:solidFill>
+          <a:ln w="12700">
+            <a:solidFill>
+              <a:srgbClr val="FFB454"/>
+            </a:solidFill>
+          </a:ln>
+          <a:effectLst/>
+        </p:spPr>
+        <p:style>
+          <a:lnRef idx="1">
+            <a:schemeClr val="accent1"/>
+          </a:lnRef>
+          <a:fillRef idx="3">
+            <a:schemeClr val="accent1"/>
+          </a:fillRef>
+          <a:effectRef idx="2">
+            <a:schemeClr val="accent1"/>
+          </a:effectRef>
+          <a:fontRef idx="minor">
+            <a:schemeClr val="lt1"/>
+          </a:fontRef>
+        </p:style>
+        <p:txBody>
+          <a:bodyPr rtlCol="0" anchor="ctr" lIns="45720" rIns="45720"/>
+          <a:lstStyle/>
+          <a:p>
+            <a:pPr algn="ctr"/>
+            <a:r>
+              <a:rPr sz="900" b="1">
+                <a:solidFill>
+                  <a:srgbClr val="FFB454"/>
+                </a:solidFill>
+                <a:latin typeface="Noto Sans CJK KR"/>
+              </a:rPr>
+              <a:t>EXP56</a:t>
+            </a:r>
+          </a:p>
+        </p:txBody>
+      </p:sp>
+      <p:sp>
+        <p:nvSpPr>
+          <p:cNvPr id="11" name="TextBox 10"/>
+          <p:cNvSpPr txBox="1"/>
+          <p:nvPr/>
+        </p:nvSpPr>
+        <p:spPr>
+          <a:xfrm>
+            <a:off x="2240280" y="3054096"/>
+            <a:ext cx="9402775" cy="502920"/>
+          </a:xfrm>
+          <a:prstGeom prst="rect">
+            <a:avLst/>
+          </a:prstGeom>
+          <a:noFill/>
+        </p:spPr>
+        <p:txBody>
+          <a:bodyPr wrap="square" anchor="ctr">
+            <a:spAutoFit/>
+          </a:bodyPr>
+          <a:lstStyle/>
+          <a:p>
+            <a:pPr algn="l">
+              <a:lnSpc>
+                <a:spcPct val="100000"/>
+              </a:lnSpc>
+            </a:pPr>
+            <a:r>
+              <a:rPr sz="1200" b="0">
+                <a:solidFill>
+                  <a:srgbClr val="E8ECF4"/>
+                </a:solidFill>
+                <a:latin typeface="Noto Sans CJK KR"/>
+              </a:rPr>
+              <a:t>"왜 안 빨라지나"를 끝까지 규명해 4단계 연속 개선 + 실패한 시도(batch화)까지 안전하게 검증</a:t>
+            </a:r>
+          </a:p>
+        </p:txBody>
+      </p:sp>
+      <p:sp>
+        <p:nvSpPr>
+          <p:cNvPr id="12" name="Rounded Rectangle 11"/>
+          <p:cNvSpPr/>
+          <p:nvPr/>
+        </p:nvSpPr>
+        <p:spPr>
+          <a:xfrm>
+            <a:off x="548640" y="4297680"/>
+            <a:ext cx="11094415" cy="1188720"/>
+          </a:xfrm>
+          <a:prstGeom prst="roundRect">
+            <a:avLst>
+              <a:gd name="adj" fmla="val 6000"/>
+            </a:avLst>
+          </a:prstGeom>
+          <a:solidFill>
+            <a:srgbClr val="1A1F2B"/>
+          </a:solidFill>
+          <a:ln w="19050">
+            <a:solidFill>
+              <a:srgbClr val="FFB454"/>
+            </a:solidFill>
+          </a:ln>
+          <a:effectLst/>
+        </p:spPr>
+        <p:style>
+          <a:lnRef idx="1">
+            <a:schemeClr val="accent1"/>
+          </a:lnRef>
+          <a:fillRef idx="3">
+            <a:schemeClr val="accent1"/>
+          </a:fillRef>
+          <a:effectRef idx="2">
+            <a:schemeClr val="accent1"/>
+          </a:effectRef>
+          <a:fontRef idx="minor">
+            <a:schemeClr val="lt1"/>
+          </a:fontRef>
+        </p:style>
+        <p:txBody>
+          <a:bodyPr rtlCol="0" anchor="ctr" wrap="square" lIns="228600" rIns="228600"/>
+          <a:lstStyle/>
+          <a:p>
+            <a:pPr algn="ctr"/>
+            <a:r>
+              <a:rPr sz="1600" b="1">
+                <a:solidFill>
+                  <a:srgbClr val="E8ECF4"/>
+                </a:solidFill>
+                <a:latin typeface="Noto Sans CJK KR"/>
+              </a:rPr>
+              <a:t>실시간을 달성하고, 그 위에서 시간을 추가로 1/4 더 줄이면서 품질까지 함께 올렸다</a:t>
+            </a:r>
+          </a:p>
+        </p:txBody>
+      </p:sp>
+      <p:sp>
+        <p:nvSpPr>
+          <p:cNvPr id="13" name="TextBox 12"/>
+          <p:cNvSpPr txBox="1"/>
+          <p:nvPr/>
+        </p:nvSpPr>
+        <p:spPr>
+          <a:xfrm>
+            <a:off x="548640" y="5852160"/>
+            <a:ext cx="11094415" cy="640080"/>
+          </a:xfrm>
+          <a:prstGeom prst="rect">
+            <a:avLst/>
+          </a:prstGeom>
+          <a:noFill/>
+        </p:spPr>
+        <p:txBody>
+          <a:bodyPr wrap="square" anchor="t">
+            <a:spAutoFit/>
+          </a:bodyPr>
+          <a:lstStyle/>
+          <a:p>
+            <a:pPr algn="l">
+              <a:lnSpc>
+                <a:spcPct val="120000"/>
+              </a:lnSpc>
+            </a:pPr>
+            <a:r>
+              <a:rPr sz="1100" b="0">
+                <a:solidFill>
+                  <a:srgbClr val="8B95AB"/>
+                </a:solidFill>
+                <a:latin typeface="Noto Sans CJK KR"/>
+              </a:rPr>
+              <a:t>다음 미팅까지 목표(localization 통합 vs 커널 batch화 여부)에 대한 팀 의견 요청.</a:t>
             </a:r>
           </a:p>
         </p:txBody>

--- a/context/ppt/ppt0727/vigs_realtime_journey_0727.pptx
+++ b/context/ppt/ppt0727/vigs_realtime_journey_0727.pptx
@@ -26,6 +26,8 @@
     <p:sldId id="274" r:id="rId25"/>
     <p:sldId id="275" r:id="rId26"/>
     <p:sldId id="276" r:id="rId27"/>
+    <p:sldId id="277" r:id="rId28"/>
+    <p:sldId id="278" r:id="rId29"/>
   </p:sldIdLst>
   <p:sldSz cx="12191695" cy="6858000" type="screen4x3"/>
   <p:notesSz cx="6858000" cy="9144000"/>
@@ -8403,6 +8405,580 @@
                 </a:solidFill>
                 <a:latin typeface="Noto Sans CJK KR"/>
               </a:rPr>
+              <a:t>§4 · REALITY CHECK</a:t>
+            </a:r>
+          </a:p>
+        </p:txBody>
+      </p:sp>
+      <p:sp>
+        <p:nvSpPr>
+          <p:cNvPr id="4" name="TextBox 3"/>
+          <p:cNvSpPr txBox="1"/>
+          <p:nvPr/>
+        </p:nvSpPr>
+        <p:spPr>
+          <a:xfrm>
+            <a:off x="548640" y="566928"/>
+            <a:ext cx="11094415" cy="548640"/>
+          </a:xfrm>
+          <a:prstGeom prst="rect">
+            <a:avLst/>
+          </a:prstGeom>
+          <a:noFill/>
+        </p:spPr>
+        <p:txBody>
+          <a:bodyPr wrap="square" anchor="t">
+            <a:spAutoFit/>
+          </a:bodyPr>
+          <a:lstStyle/>
+          <a:p>
+            <a:pPr algn="l">
+              <a:lnSpc>
+                <a:spcPct val="100000"/>
+              </a:lnSpc>
+            </a:pPr>
+            <a:r>
+              <a:rPr sz="2200" b="1">
+                <a:solidFill>
+                  <a:srgbClr val="E8ECF4"/>
+                </a:solidFill>
+                <a:latin typeface="Noto Sans CJK KR"/>
+              </a:rPr>
+              <a:t>post-processed급 online — 쉽지 않은 이유</a:t>
+            </a:r>
+          </a:p>
+        </p:txBody>
+      </p:sp>
+      <p:sp>
+        <p:nvSpPr>
+          <p:cNvPr id="5" name="Rectangle 4"/>
+          <p:cNvSpPr/>
+          <p:nvPr/>
+        </p:nvSpPr>
+        <p:spPr>
+          <a:xfrm>
+            <a:off x="548640" y="1078992"/>
+            <a:ext cx="11094415" cy="25400"/>
+          </a:xfrm>
+          <a:prstGeom prst="rect">
+            <a:avLst/>
+          </a:prstGeom>
+          <a:solidFill>
+            <a:srgbClr val="2A3242"/>
+          </a:solidFill>
+          <a:ln>
+            <a:noFill/>
+          </a:ln>
+          <a:effectLst/>
+        </p:spPr>
+        <p:style>
+          <a:lnRef idx="1">
+            <a:schemeClr val="accent1"/>
+          </a:lnRef>
+          <a:fillRef idx="3">
+            <a:schemeClr val="accent1"/>
+          </a:fillRef>
+          <a:effectRef idx="2">
+            <a:schemeClr val="accent1"/>
+          </a:effectRef>
+          <a:fontRef idx="minor">
+            <a:schemeClr val="lt1"/>
+          </a:fontRef>
+        </p:style>
+        <p:txBody>
+          <a:bodyPr rtlCol="0" anchor="ctr"/>
+          <a:lstStyle/>
+          <a:p>
+            <a:pPr algn="ctr"/>
+          </a:p>
+        </p:txBody>
+      </p:sp>
+      <p:pic>
+        <p:nvPicPr>
+          <p:cNvPr id="6" name="Picture 5" descr="fig_realtime_gap.png"/>
+          <p:cNvPicPr>
+            <a:picLocks noChangeAspect="1"/>
+          </p:cNvPicPr>
+          <p:nvPr/>
+        </p:nvPicPr>
+        <p:blipFill>
+          <a:blip r:embed="rId2"/>
+          <a:stretch>
+            <a:fillRect/>
+          </a:stretch>
+        </p:blipFill>
+        <p:spPr>
+          <a:xfrm>
+            <a:off x="582606" y="1234440"/>
+            <a:ext cx="5692786" cy="3840480"/>
+          </a:xfrm>
+          <a:prstGeom prst="rect">
+            <a:avLst/>
+          </a:prstGeom>
+        </p:spPr>
+      </p:pic>
+      <p:sp>
+        <p:nvSpPr>
+          <p:cNvPr id="7" name="TextBox 6"/>
+          <p:cNvSpPr txBox="1"/>
+          <p:nvPr/>
+        </p:nvSpPr>
+        <p:spPr>
+          <a:xfrm>
+            <a:off x="6583680" y="1371600"/>
+            <a:ext cx="5059375" cy="3840480"/>
+          </a:xfrm>
+          <a:prstGeom prst="rect">
+            <a:avLst/>
+          </a:prstGeom>
+          <a:noFill/>
+        </p:spPr>
+        <p:txBody>
+          <a:bodyPr wrap="square">
+            <a:spAutoFit/>
+          </a:bodyPr>
+          <a:lstStyle/>
+          <a:p>
+            <a:pPr>
+              <a:lnSpc>
+                <a:spcPct val="122000"/>
+              </a:lnSpc>
+              <a:spcAft>
+                <a:spcPts val="800"/>
+              </a:spcAft>
+            </a:pPr>
+            <a:r>
+              <a:rPr sz="1250">
+                <a:solidFill>
+                  <a:srgbClr val="E8ECF4"/>
+                </a:solidFill>
+                <a:latin typeface="Noto Sans CJK KR"/>
+              </a:rPr>
+              <a:t>•  계산량 격차: 26,000 iter × ~6.4ms/view-op(Phase8 실측치 그대로 적용) ≈ 166~196초 필요 — 지금 파이프라인 여유는 65.1s 예산 대비 19.3초뿐, 약 8~10배 부족</a:t>
+            </a:r>
+          </a:p>
+          <a:p>
+            <a:pPr>
+              <a:lnSpc>
+                <a:spcPct val="122000"/>
+              </a:lnSpc>
+              <a:spcAft>
+                <a:spcPts val="800"/>
+              </a:spcAft>
+            </a:pPr>
+            <a:r>
+              <a:rPr sz="1250">
+                <a:solidFill>
+                  <a:srgbClr val="E8ECF4"/>
+                </a:solidFill>
+                <a:latin typeface="Noto Sans CJK KR"/>
+              </a:rPr>
+              <a:t>•  더 근본적 문제: color_refinement는 "전체 궤적을 이미 다 본 상태"에서 모든 keyframe을 반복 방문하는 global 작업 — 라이브 스트림엔 애초에 "다 봤다"는 시점이 없음</a:t>
+            </a:r>
+          </a:p>
+          <a:p>
+            <a:pPr>
+              <a:lnSpc>
+                <a:spcPct val="122000"/>
+              </a:lnSpc>
+              <a:spcAft>
+                <a:spcPts val="800"/>
+              </a:spcAft>
+            </a:pPr>
+            <a:r>
+              <a:rPr sz="1250">
+                <a:solidFill>
+                  <a:srgbClr val="E8ECF4"/>
+                </a:solidFill>
+                <a:latin typeface="Noto Sans CJK KR"/>
+              </a:rPr>
+              <a:t>•  즉 "매 순간 완전히 캐치업된 post-processed급"은 계산량 문제 이전에 정의상 불가능</a:t>
+            </a:r>
+          </a:p>
+        </p:txBody>
+      </p:sp>
+      <p:sp>
+        <p:nvSpPr>
+          <p:cNvPr id="8" name="TextBox 7"/>
+          <p:cNvSpPr txBox="1"/>
+          <p:nvPr/>
+        </p:nvSpPr>
+        <p:spPr>
+          <a:xfrm>
+            <a:off x="6583680" y="5577840"/>
+            <a:ext cx="5059375" cy="914400"/>
+          </a:xfrm>
+          <a:prstGeom prst="rect">
+            <a:avLst/>
+          </a:prstGeom>
+          <a:noFill/>
+        </p:spPr>
+        <p:txBody>
+          <a:bodyPr wrap="square" anchor="t">
+            <a:spAutoFit/>
+          </a:bodyPr>
+          <a:lstStyle/>
+          <a:p>
+            <a:pPr algn="l">
+              <a:lnSpc>
+                <a:spcPct val="120000"/>
+              </a:lnSpc>
+            </a:pPr>
+            <a:r>
+              <a:rPr sz="1100" b="0">
+                <a:solidFill>
+                  <a:srgbClr val="8B95AB"/>
+                </a:solidFill>
+                <a:latin typeface="Noto Sans CJK KR"/>
+              </a:rPr>
+              <a:t>그래서 목표를 "항상 최종 품질"이 아니라 "프론티어 + 뒤에서 점점 따라잡는 품질"로 재정의하는 게 현실적 — 다음 슬라이드가 그 그림.</a:t>
+            </a:r>
+          </a:p>
+        </p:txBody>
+      </p:sp>
+    </p:spTree>
+  </p:cSld>
+  <p:clrMapOvr>
+    <a:masterClrMapping/>
+  </p:clrMapOvr>
+</p:sld>
+</file>
+
+<file path=ppt/slides/slide22.xml><?xml version="1.0" encoding="utf-8"?>
+<p:sld xmlns:a="http://schemas.openxmlformats.org/drawingml/2006/main" xmlns:p="http://schemas.openxmlformats.org/presentationml/2006/main" xmlns:r="http://schemas.openxmlformats.org/officeDocument/2006/relationships">
+  <p:cSld>
+    <p:spTree>
+      <p:nvGrpSpPr>
+        <p:cNvPr id="1" name=""/>
+        <p:cNvGrpSpPr/>
+        <p:nvPr/>
+      </p:nvGrpSpPr>
+      <p:grpSpPr/>
+      <p:sp>
+        <p:nvSpPr>
+          <p:cNvPr id="2" name="Rectangle 1"/>
+          <p:cNvSpPr/>
+          <p:nvPr/>
+        </p:nvSpPr>
+        <p:spPr>
+          <a:xfrm>
+            <a:off x="0" y="0"/>
+            <a:ext cx="12191695" cy="6858000"/>
+          </a:xfrm>
+          <a:prstGeom prst="rect">
+            <a:avLst/>
+          </a:prstGeom>
+          <a:solidFill>
+            <a:srgbClr val="12151C"/>
+          </a:solidFill>
+          <a:ln>
+            <a:noFill/>
+          </a:ln>
+          <a:effectLst/>
+        </p:spPr>
+        <p:style>
+          <a:lnRef idx="1">
+            <a:schemeClr val="accent1"/>
+          </a:lnRef>
+          <a:fillRef idx="3">
+            <a:schemeClr val="accent1"/>
+          </a:fillRef>
+          <a:effectRef idx="2">
+            <a:schemeClr val="accent1"/>
+          </a:effectRef>
+          <a:fontRef idx="minor">
+            <a:schemeClr val="lt1"/>
+          </a:fontRef>
+        </p:style>
+        <p:txBody>
+          <a:bodyPr rtlCol="0" anchor="ctr"/>
+          <a:lstStyle/>
+          <a:p>
+            <a:pPr algn="ctr"/>
+          </a:p>
+        </p:txBody>
+      </p:sp>
+      <p:sp>
+        <p:nvSpPr>
+          <p:cNvPr id="3" name="TextBox 2"/>
+          <p:cNvSpPr txBox="1"/>
+          <p:nvPr/>
+        </p:nvSpPr>
+        <p:spPr>
+          <a:xfrm>
+            <a:off x="548640" y="320040"/>
+            <a:ext cx="11094415" cy="292608"/>
+          </a:xfrm>
+          <a:prstGeom prst="rect">
+            <a:avLst/>
+          </a:prstGeom>
+          <a:noFill/>
+        </p:spPr>
+        <p:txBody>
+          <a:bodyPr wrap="square" anchor="t">
+            <a:spAutoFit/>
+          </a:bodyPr>
+          <a:lstStyle/>
+          <a:p>
+            <a:pPr algn="l">
+              <a:lnSpc>
+                <a:spcPct val="100000"/>
+              </a:lnSpc>
+            </a:pPr>
+            <a:r>
+              <a:rPr sz="1200" b="1">
+                <a:solidFill>
+                  <a:srgbClr val="FFB454"/>
+                </a:solidFill>
+                <a:latin typeface="Noto Sans CJK KR"/>
+              </a:rPr>
+              <a:t>§4 · REALITY CHECK</a:t>
+            </a:r>
+          </a:p>
+        </p:txBody>
+      </p:sp>
+      <p:sp>
+        <p:nvSpPr>
+          <p:cNvPr id="4" name="TextBox 3"/>
+          <p:cNvSpPr txBox="1"/>
+          <p:nvPr/>
+        </p:nvSpPr>
+        <p:spPr>
+          <a:xfrm>
+            <a:off x="548640" y="566928"/>
+            <a:ext cx="11094415" cy="548640"/>
+          </a:xfrm>
+          <a:prstGeom prst="rect">
+            <a:avLst/>
+          </a:prstGeom>
+          <a:noFill/>
+        </p:spPr>
+        <p:txBody>
+          <a:bodyPr wrap="square" anchor="t">
+            <a:spAutoFit/>
+          </a:bodyPr>
+          <a:lstStyle/>
+          <a:p>
+            <a:pPr algn="l">
+              <a:lnSpc>
+                <a:spcPct val="100000"/>
+              </a:lnSpc>
+            </a:pPr>
+            <a:r>
+              <a:rPr sz="2200" b="1">
+                <a:solidFill>
+                  <a:srgbClr val="E8ECF4"/>
+                </a:solidFill>
+                <a:latin typeface="Noto Sans CJK KR"/>
+              </a:rPr>
+              <a:t>현실적 목표: bounded-lag 온라인 정제</a:t>
+            </a:r>
+          </a:p>
+        </p:txBody>
+      </p:sp>
+      <p:sp>
+        <p:nvSpPr>
+          <p:cNvPr id="5" name="Rectangle 4"/>
+          <p:cNvSpPr/>
+          <p:nvPr/>
+        </p:nvSpPr>
+        <p:spPr>
+          <a:xfrm>
+            <a:off x="548640" y="1078992"/>
+            <a:ext cx="11094415" cy="25400"/>
+          </a:xfrm>
+          <a:prstGeom prst="rect">
+            <a:avLst/>
+          </a:prstGeom>
+          <a:solidFill>
+            <a:srgbClr val="2A3242"/>
+          </a:solidFill>
+          <a:ln>
+            <a:noFill/>
+          </a:ln>
+          <a:effectLst/>
+        </p:spPr>
+        <p:style>
+          <a:lnRef idx="1">
+            <a:schemeClr val="accent1"/>
+          </a:lnRef>
+          <a:fillRef idx="3">
+            <a:schemeClr val="accent1"/>
+          </a:fillRef>
+          <a:effectRef idx="2">
+            <a:schemeClr val="accent1"/>
+          </a:effectRef>
+          <a:fontRef idx="minor">
+            <a:schemeClr val="lt1"/>
+          </a:fontRef>
+        </p:style>
+        <p:txBody>
+          <a:bodyPr rtlCol="0" anchor="ctr"/>
+          <a:lstStyle/>
+          <a:p>
+            <a:pPr algn="ctr"/>
+          </a:p>
+        </p:txBody>
+      </p:sp>
+      <p:pic>
+        <p:nvPicPr>
+          <p:cNvPr id="6" name="Picture 5" descr="fig_bounded_lag.png"/>
+          <p:cNvPicPr>
+            <a:picLocks noChangeAspect="1"/>
+          </p:cNvPicPr>
+          <p:nvPr/>
+        </p:nvPicPr>
+        <p:blipFill>
+          <a:blip r:embed="rId2"/>
+          <a:stretch>
+            <a:fillRect/>
+          </a:stretch>
+        </p:blipFill>
+        <p:spPr>
+          <a:xfrm>
+            <a:off x="2178354" y="1280160"/>
+            <a:ext cx="7834985" cy="3566159"/>
+          </a:xfrm>
+          <a:prstGeom prst="rect">
+            <a:avLst/>
+          </a:prstGeom>
+        </p:spPr>
+      </p:pic>
+      <p:sp>
+        <p:nvSpPr>
+          <p:cNvPr id="7" name="TextBox 6"/>
+          <p:cNvSpPr txBox="1"/>
+          <p:nvPr/>
+        </p:nvSpPr>
+        <p:spPr>
+          <a:xfrm>
+            <a:off x="548640" y="5120640"/>
+            <a:ext cx="11094415" cy="1371600"/>
+          </a:xfrm>
+          <a:prstGeom prst="rect">
+            <a:avLst/>
+          </a:prstGeom>
+          <a:noFill/>
+        </p:spPr>
+        <p:txBody>
+          <a:bodyPr wrap="square" anchor="t">
+            <a:spAutoFit/>
+          </a:bodyPr>
+          <a:lstStyle/>
+          <a:p>
+            <a:pPr algn="l">
+              <a:lnSpc>
+                <a:spcPct val="120000"/>
+              </a:lnSpc>
+            </a:pPr>
+            <a:r>
+              <a:rPr sz="1100" b="0">
+                <a:solidFill>
+                  <a:srgbClr val="8B95AB"/>
+                </a:solidFill>
+                <a:latin typeface="Noto Sans CJK KR"/>
+              </a:rPr>
+              <a:t>루프클로저 global BA를 백그라운드로 돌리는 성숙한 SLAM 시스템들과 같은 패턴 — 프론티어(방금 본 곳)는 항상 실시간으로 그려지고, 그 뒤를 정제(refinement)가 시간차를 두고 계속 따라오며 품질을 끌어올린다. "실시간 = 항상 완성본"이 아니라 "실시간 = 프론티어가 안 밀린다 + 지나간 곳은 계속 좋아진다"로 성공 기준 자체를 바꾸는 게 이번 발견의 결론.</a:t>
+            </a:r>
+          </a:p>
+        </p:txBody>
+      </p:sp>
+    </p:spTree>
+  </p:cSld>
+  <p:clrMapOvr>
+    <a:masterClrMapping/>
+  </p:clrMapOvr>
+</p:sld>
+</file>
+
+<file path=ppt/slides/slide23.xml><?xml version="1.0" encoding="utf-8"?>
+<p:sld xmlns:a="http://schemas.openxmlformats.org/drawingml/2006/main" xmlns:p="http://schemas.openxmlformats.org/presentationml/2006/main" xmlns:r="http://schemas.openxmlformats.org/officeDocument/2006/relationships">
+  <p:cSld>
+    <p:spTree>
+      <p:nvGrpSpPr>
+        <p:cNvPr id="1" name=""/>
+        <p:cNvGrpSpPr/>
+        <p:nvPr/>
+      </p:nvGrpSpPr>
+      <p:grpSpPr/>
+      <p:sp>
+        <p:nvSpPr>
+          <p:cNvPr id="2" name="Rectangle 1"/>
+          <p:cNvSpPr/>
+          <p:nvPr/>
+        </p:nvSpPr>
+        <p:spPr>
+          <a:xfrm>
+            <a:off x="0" y="0"/>
+            <a:ext cx="12191695" cy="6858000"/>
+          </a:xfrm>
+          <a:prstGeom prst="rect">
+            <a:avLst/>
+          </a:prstGeom>
+          <a:solidFill>
+            <a:srgbClr val="12151C"/>
+          </a:solidFill>
+          <a:ln>
+            <a:noFill/>
+          </a:ln>
+          <a:effectLst/>
+        </p:spPr>
+        <p:style>
+          <a:lnRef idx="1">
+            <a:schemeClr val="accent1"/>
+          </a:lnRef>
+          <a:fillRef idx="3">
+            <a:schemeClr val="accent1"/>
+          </a:fillRef>
+          <a:effectRef idx="2">
+            <a:schemeClr val="accent1"/>
+          </a:effectRef>
+          <a:fontRef idx="minor">
+            <a:schemeClr val="lt1"/>
+          </a:fontRef>
+        </p:style>
+        <p:txBody>
+          <a:bodyPr rtlCol="0" anchor="ctr"/>
+          <a:lstStyle/>
+          <a:p>
+            <a:pPr algn="ctr"/>
+          </a:p>
+        </p:txBody>
+      </p:sp>
+      <p:sp>
+        <p:nvSpPr>
+          <p:cNvPr id="3" name="TextBox 2"/>
+          <p:cNvSpPr txBox="1"/>
+          <p:nvPr/>
+        </p:nvSpPr>
+        <p:spPr>
+          <a:xfrm>
+            <a:off x="548640" y="320040"/>
+            <a:ext cx="11094415" cy="292608"/>
+          </a:xfrm>
+          <a:prstGeom prst="rect">
+            <a:avLst/>
+          </a:prstGeom>
+          <a:noFill/>
+        </p:spPr>
+        <p:txBody>
+          <a:bodyPr wrap="square" anchor="t">
+            <a:spAutoFit/>
+          </a:bodyPr>
+          <a:lstStyle/>
+          <a:p>
+            <a:pPr algn="l">
+              <a:lnSpc>
+                <a:spcPct val="100000"/>
+              </a:lnSpc>
+            </a:pPr>
+            <a:r>
+              <a:rPr sz="1200" b="1">
+                <a:solidFill>
+                  <a:srgbClr val="FFB454"/>
+                </a:solidFill>
+                <a:latin typeface="Noto Sans CJK KR"/>
+              </a:rPr>
               <a:t>§4 · CONCLUSION</a:t>
             </a:r>
           </a:p>
@@ -9712,30 +10288,63 @@
           </a:p>
         </p:txBody>
       </p:sp>
-      <p:pic>
-        <p:nvPicPr>
-          <p:cNvPr id="6" name="Picture 5" descr="fig_exp54_axes.png"/>
-          <p:cNvPicPr>
-            <a:picLocks noChangeAspect="1"/>
-          </p:cNvPicPr>
-          <p:nvPr/>
-        </p:nvPicPr>
-        <p:blipFill>
-          <a:blip r:embed="rId2"/>
-          <a:stretch>
-            <a:fillRect/>
-          </a:stretch>
-        </p:blipFill>
-        <p:spPr>
-          <a:xfrm>
-            <a:off x="1227608" y="1280160"/>
-            <a:ext cx="9736478" cy="4206240"/>
-          </a:xfrm>
-          <a:prstGeom prst="rect">
-            <a:avLst/>
-          </a:prstGeom>
-        </p:spPr>
-      </p:pic>
+      <p:sp>
+        <p:nvSpPr>
+          <p:cNvPr id="6" name="Rounded Rectangle 5"/>
+          <p:cNvSpPr/>
+          <p:nvPr/>
+        </p:nvSpPr>
+        <p:spPr>
+          <a:xfrm>
+            <a:off x="548640" y="1371600"/>
+            <a:ext cx="1554480" cy="292608"/>
+          </a:xfrm>
+          <a:prstGeom prst="roundRect">
+            <a:avLst>
+              <a:gd name="adj" fmla="val 50000"/>
+            </a:avLst>
+          </a:prstGeom>
+          <a:solidFill>
+            <a:srgbClr val="1A1F2B"/>
+          </a:solidFill>
+          <a:ln w="12700">
+            <a:solidFill>
+              <a:srgbClr val="4CC98A"/>
+            </a:solidFill>
+          </a:ln>
+          <a:effectLst/>
+        </p:spPr>
+        <p:style>
+          <a:lnRef idx="1">
+            <a:schemeClr val="accent1"/>
+          </a:lnRef>
+          <a:fillRef idx="3">
+            <a:schemeClr val="accent1"/>
+          </a:fillRef>
+          <a:effectRef idx="2">
+            <a:schemeClr val="accent1"/>
+          </a:effectRef>
+          <a:fontRef idx="minor">
+            <a:schemeClr val="lt1"/>
+          </a:fontRef>
+        </p:style>
+        <p:txBody>
+          <a:bodyPr rtlCol="0" anchor="ctr" lIns="45720" rIns="45720"/>
+          <a:lstStyle/>
+          <a:p>
+            <a:pPr algn="ctr"/>
+            <a:r>
+              <a:rPr sz="900" b="1">
+                <a:solidFill>
+                  <a:srgbClr val="4CC98A"/>
+                </a:solidFill>
+                <a:latin typeface="Noto Sans CJK KR"/>
+              </a:rPr>
+              <a:t>축1 · 채택</a:t>
+            </a:r>
+          </a:p>
+        </p:txBody>
+      </p:sp>
       <p:sp>
         <p:nvSpPr>
           <p:cNvPr id="7" name="TextBox 6"/>
@@ -9744,7 +10353,622 @@
         </p:nvSpPr>
         <p:spPr>
           <a:xfrm>
-            <a:off x="548640" y="5806440"/>
+            <a:off x="2240280" y="1316736"/>
+            <a:ext cx="9402775" cy="502920"/>
+          </a:xfrm>
+          <a:prstGeom prst="rect">
+            <a:avLst/>
+          </a:prstGeom>
+          <a:noFill/>
+        </p:spPr>
+        <p:txBody>
+          <a:bodyPr wrap="square" anchor="ctr">
+            <a:spAutoFit/>
+          </a:bodyPr>
+          <a:lstStyle/>
+          <a:p>
+            <a:pPr algn="l">
+              <a:lnSpc>
+                <a:spcPct val="100000"/>
+              </a:lnSpc>
+            </a:pPr>
+            <a:r>
+              <a:rPr sz="1200" b="0">
+                <a:solidFill>
+                  <a:srgbClr val="E8ECF4"/>
+                </a:solidFill>
+                <a:latin typeface="Noto Sans CJK KR"/>
+              </a:rPr>
+              <a:t>keyframe당 초기 gaussian 점 개수를 절반으로 (pcd_downsample 64→128) → 시간 −3.3%, 품질 손실 없음</a:t>
+            </a:r>
+          </a:p>
+        </p:txBody>
+      </p:sp>
+      <p:sp>
+        <p:nvSpPr>
+          <p:cNvPr id="8" name="Rounded Rectangle 7"/>
+          <p:cNvSpPr/>
+          <p:nvPr/>
+        </p:nvSpPr>
+        <p:spPr>
+          <a:xfrm>
+            <a:off x="548640" y="1933956"/>
+            <a:ext cx="1554480" cy="292608"/>
+          </a:xfrm>
+          <a:prstGeom prst="roundRect">
+            <a:avLst>
+              <a:gd name="adj" fmla="val 50000"/>
+            </a:avLst>
+          </a:prstGeom>
+          <a:solidFill>
+            <a:srgbClr val="1A1F2B"/>
+          </a:solidFill>
+          <a:ln w="12700">
+            <a:solidFill>
+              <a:srgbClr val="EF6A5C"/>
+            </a:solidFill>
+          </a:ln>
+          <a:effectLst/>
+        </p:spPr>
+        <p:style>
+          <a:lnRef idx="1">
+            <a:schemeClr val="accent1"/>
+          </a:lnRef>
+          <a:fillRef idx="3">
+            <a:schemeClr val="accent1"/>
+          </a:fillRef>
+          <a:effectRef idx="2">
+            <a:schemeClr val="accent1"/>
+          </a:effectRef>
+          <a:fontRef idx="minor">
+            <a:schemeClr val="lt1"/>
+          </a:fontRef>
+        </p:style>
+        <p:txBody>
+          <a:bodyPr rtlCol="0" anchor="ctr" lIns="45720" rIns="45720"/>
+          <a:lstStyle/>
+          <a:p>
+            <a:pPr algn="ctr"/>
+            <a:r>
+              <a:rPr sz="900" b="1">
+                <a:solidFill>
+                  <a:srgbClr val="EF6A5C"/>
+                </a:solidFill>
+                <a:latin typeface="Noto Sans CJK KR"/>
+              </a:rPr>
+              <a:t>축2 · 기각</a:t>
+            </a:r>
+          </a:p>
+        </p:txBody>
+      </p:sp>
+      <p:sp>
+        <p:nvSpPr>
+          <p:cNvPr id="9" name="TextBox 8"/>
+          <p:cNvSpPr txBox="1"/>
+          <p:nvPr/>
+        </p:nvSpPr>
+        <p:spPr>
+          <a:xfrm>
+            <a:off x="2240280" y="1879092"/>
+            <a:ext cx="9402775" cy="502920"/>
+          </a:xfrm>
+          <a:prstGeom prst="rect">
+            <a:avLst/>
+          </a:prstGeom>
+          <a:noFill/>
+        </p:spPr>
+        <p:txBody>
+          <a:bodyPr wrap="square" anchor="ctr">
+            <a:spAutoFit/>
+          </a:bodyPr>
+          <a:lstStyle/>
+          <a:p>
+            <a:pPr algn="l">
+              <a:lnSpc>
+                <a:spcPct val="100000"/>
+              </a:lnSpc>
+            </a:pPr>
+            <a:r>
+              <a:rPr sz="1200" b="0">
+                <a:solidFill>
+                  <a:srgbClr val="E8ECF4"/>
+                </a:solidFill>
+                <a:latin typeface="Noto Sans CJK KR"/>
+              </a:rPr>
+              <a:t>첫 keyframe만 더 성기게 초기화 → 오히려 densify가 보충해버려 +1.2%(역효과) — 축6과 짝으로 봐야 하는 축</a:t>
+            </a:r>
+          </a:p>
+        </p:txBody>
+      </p:sp>
+      <p:sp>
+        <p:nvSpPr>
+          <p:cNvPr id="10" name="Rounded Rectangle 9"/>
+          <p:cNvSpPr/>
+          <p:nvPr/>
+        </p:nvSpPr>
+        <p:spPr>
+          <a:xfrm>
+            <a:off x="548640" y="2496312"/>
+            <a:ext cx="1554480" cy="292608"/>
+          </a:xfrm>
+          <a:prstGeom prst="roundRect">
+            <a:avLst>
+              <a:gd name="adj" fmla="val 50000"/>
+            </a:avLst>
+          </a:prstGeom>
+          <a:solidFill>
+            <a:srgbClr val="1A1F2B"/>
+          </a:solidFill>
+          <a:ln w="12700">
+            <a:solidFill>
+              <a:srgbClr val="EF6A5C"/>
+            </a:solidFill>
+          </a:ln>
+          <a:effectLst/>
+        </p:spPr>
+        <p:style>
+          <a:lnRef idx="1">
+            <a:schemeClr val="accent1"/>
+          </a:lnRef>
+          <a:fillRef idx="3">
+            <a:schemeClr val="accent1"/>
+          </a:fillRef>
+          <a:effectRef idx="2">
+            <a:schemeClr val="accent1"/>
+          </a:effectRef>
+          <a:fontRef idx="minor">
+            <a:schemeClr val="lt1"/>
+          </a:fontRef>
+        </p:style>
+        <p:txBody>
+          <a:bodyPr rtlCol="0" anchor="ctr" lIns="45720" rIns="45720"/>
+          <a:lstStyle/>
+          <a:p>
+            <a:pPr algn="ctr"/>
+            <a:r>
+              <a:rPr sz="900" b="1">
+                <a:solidFill>
+                  <a:srgbClr val="EF6A5C"/>
+                </a:solidFill>
+                <a:latin typeface="Noto Sans CJK KR"/>
+              </a:rPr>
+              <a:t>축3 · 기각</a:t>
+            </a:r>
+          </a:p>
+        </p:txBody>
+      </p:sp>
+      <p:sp>
+        <p:nvSpPr>
+          <p:cNvPr id="11" name="TextBox 10"/>
+          <p:cNvSpPr txBox="1"/>
+          <p:nvPr/>
+        </p:nvSpPr>
+        <p:spPr>
+          <a:xfrm>
+            <a:off x="2240280" y="2441448"/>
+            <a:ext cx="9402775" cy="502920"/>
+          </a:xfrm>
+          <a:prstGeom prst="rect">
+            <a:avLst/>
+          </a:prstGeom>
+          <a:noFill/>
+        </p:spPr>
+        <p:txBody>
+          <a:bodyPr wrap="square" anchor="ctr">
+            <a:spAutoFit/>
+          </a:bodyPr>
+          <a:lstStyle/>
+          <a:p>
+            <a:pPr algn="l">
+              <a:lnSpc>
+                <a:spcPct val="100000"/>
+              </a:lnSpc>
+            </a:pPr>
+            <a:r>
+              <a:rPr sz="1200" b="0">
+                <a:solidFill>
+                  <a:srgbClr val="E8ECF4"/>
+                </a:solidFill>
+                <a:latin typeface="Noto Sans CJK KR"/>
+              </a:rPr>
+              <a:t>keyframe당 최적화 반복 10→5로 절반 → 이 시점엔 트래킹이 병목(91%)이라 mapping 줄여도 ±0%, ROI 없음</a:t>
+            </a:r>
+          </a:p>
+        </p:txBody>
+      </p:sp>
+      <p:sp>
+        <p:nvSpPr>
+          <p:cNvPr id="12" name="Rounded Rectangle 11"/>
+          <p:cNvSpPr/>
+          <p:nvPr/>
+        </p:nvSpPr>
+        <p:spPr>
+          <a:xfrm>
+            <a:off x="548640" y="3058668"/>
+            <a:ext cx="1554480" cy="292608"/>
+          </a:xfrm>
+          <a:prstGeom prst="roundRect">
+            <a:avLst>
+              <a:gd name="adj" fmla="val 50000"/>
+            </a:avLst>
+          </a:prstGeom>
+          <a:solidFill>
+            <a:srgbClr val="1A1F2B"/>
+          </a:solidFill>
+          <a:ln w="12700">
+            <a:solidFill>
+              <a:srgbClr val="A479E0"/>
+            </a:solidFill>
+          </a:ln>
+          <a:effectLst/>
+        </p:spPr>
+        <p:style>
+          <a:lnRef idx="1">
+            <a:schemeClr val="accent1"/>
+          </a:lnRef>
+          <a:fillRef idx="3">
+            <a:schemeClr val="accent1"/>
+          </a:fillRef>
+          <a:effectRef idx="2">
+            <a:schemeClr val="accent1"/>
+          </a:effectRef>
+          <a:fontRef idx="minor">
+            <a:schemeClr val="lt1"/>
+          </a:fontRef>
+        </p:style>
+        <p:txBody>
+          <a:bodyPr rtlCol="0" anchor="ctr" lIns="45720" rIns="45720"/>
+          <a:lstStyle/>
+          <a:p>
+            <a:pPr algn="ctr"/>
+            <a:r>
+              <a:rPr sz="900" b="1">
+                <a:solidFill>
+                  <a:srgbClr val="A479E0"/>
+                </a:solidFill>
+                <a:latin typeface="Noto Sans CJK KR"/>
+              </a:rPr>
+              <a:t>축4 · 보류</a:t>
+            </a:r>
+          </a:p>
+        </p:txBody>
+      </p:sp>
+      <p:sp>
+        <p:nvSpPr>
+          <p:cNvPr id="13" name="TextBox 12"/>
+          <p:cNvSpPr txBox="1"/>
+          <p:nvPr/>
+        </p:nvSpPr>
+        <p:spPr>
+          <a:xfrm>
+            <a:off x="2240280" y="3003804"/>
+            <a:ext cx="9402775" cy="502920"/>
+          </a:xfrm>
+          <a:prstGeom prst="rect">
+            <a:avLst/>
+          </a:prstGeom>
+          <a:noFill/>
+        </p:spPr>
+        <p:txBody>
+          <a:bodyPr wrap="square" anchor="ctr">
+            <a:spAutoFit/>
+          </a:bodyPr>
+          <a:lstStyle/>
+          <a:p>
+            <a:pPr algn="l">
+              <a:lnSpc>
+                <a:spcPct val="100000"/>
+              </a:lnSpc>
+            </a:pPr>
+            <a:r>
+              <a:rPr sz="1200" b="0">
+                <a:solidFill>
+                  <a:srgbClr val="E8ECF4"/>
+                </a:solidFill>
+                <a:latin typeface="Noto Sans CJK KR"/>
+              </a:rPr>
+              <a:t>매핑 렌더링 해상도를 절반으로(render_downsample=2) → −4.2%, PSNR −0.8dB — 유효하지만 이미 실시간이라 미채택, 코드만 보존</a:t>
+            </a:r>
+          </a:p>
+        </p:txBody>
+      </p:sp>
+      <p:sp>
+        <p:nvSpPr>
+          <p:cNvPr id="14" name="Rounded Rectangle 13"/>
+          <p:cNvSpPr/>
+          <p:nvPr/>
+        </p:nvSpPr>
+        <p:spPr>
+          <a:xfrm>
+            <a:off x="548640" y="3621024"/>
+            <a:ext cx="1554480" cy="292608"/>
+          </a:xfrm>
+          <a:prstGeom prst="roundRect">
+            <a:avLst>
+              <a:gd name="adj" fmla="val 50000"/>
+            </a:avLst>
+          </a:prstGeom>
+          <a:solidFill>
+            <a:srgbClr val="1A1F2B"/>
+          </a:solidFill>
+          <a:ln w="12700">
+            <a:solidFill>
+              <a:srgbClr val="EF6A5C"/>
+            </a:solidFill>
+          </a:ln>
+          <a:effectLst/>
+        </p:spPr>
+        <p:style>
+          <a:lnRef idx="1">
+            <a:schemeClr val="accent1"/>
+          </a:lnRef>
+          <a:fillRef idx="3">
+            <a:schemeClr val="accent1"/>
+          </a:fillRef>
+          <a:effectRef idx="2">
+            <a:schemeClr val="accent1"/>
+          </a:effectRef>
+          <a:fontRef idx="minor">
+            <a:schemeClr val="lt1"/>
+          </a:fontRef>
+        </p:style>
+        <p:txBody>
+          <a:bodyPr rtlCol="0" anchor="ctr" lIns="45720" rIns="45720"/>
+          <a:lstStyle/>
+          <a:p>
+            <a:pPr algn="ctr"/>
+            <a:r>
+              <a:rPr sz="900" b="1">
+                <a:solidFill>
+                  <a:srgbClr val="EF6A5C"/>
+                </a:solidFill>
+                <a:latin typeface="Noto Sans CJK KR"/>
+              </a:rPr>
+              <a:t>축5 · 기각</a:t>
+            </a:r>
+          </a:p>
+        </p:txBody>
+      </p:sp>
+      <p:sp>
+        <p:nvSpPr>
+          <p:cNvPr id="15" name="TextBox 14"/>
+          <p:cNvSpPr txBox="1"/>
+          <p:nvPr/>
+        </p:nvSpPr>
+        <p:spPr>
+          <a:xfrm>
+            <a:off x="2240280" y="3566160"/>
+            <a:ext cx="9402775" cy="502920"/>
+          </a:xfrm>
+          <a:prstGeom prst="rect">
+            <a:avLst/>
+          </a:prstGeom>
+          <a:noFill/>
+        </p:spPr>
+        <p:txBody>
+          <a:bodyPr wrap="square" anchor="ctr">
+            <a:spAutoFit/>
+          </a:bodyPr>
+          <a:lstStyle/>
+          <a:p>
+            <a:pPr algn="l">
+              <a:lnSpc>
+                <a:spcPct val="100000"/>
+              </a:lnSpc>
+            </a:pPr>
+            <a:r>
+              <a:rPr sz="1200" b="0">
+                <a:solidFill>
+                  <a:srgbClr val="E8ECF4"/>
+                </a:solidFill>
+                <a:latin typeface="Noto Sans CJK KR"/>
+              </a:rPr>
+              <a:t>한 번의 map() 호출에서 보는 카메라 뷰 개수 상한을 축소(max_viewpoints↓) → ±0%, 효과 없음</a:t>
+            </a:r>
+          </a:p>
+        </p:txBody>
+      </p:sp>
+      <p:sp>
+        <p:nvSpPr>
+          <p:cNvPr id="16" name="Rounded Rectangle 15"/>
+          <p:cNvSpPr/>
+          <p:nvPr/>
+        </p:nvSpPr>
+        <p:spPr>
+          <a:xfrm>
+            <a:off x="548640" y="4183380"/>
+            <a:ext cx="1554480" cy="292608"/>
+          </a:xfrm>
+          <a:prstGeom prst="roundRect">
+            <a:avLst>
+              <a:gd name="adj" fmla="val 50000"/>
+            </a:avLst>
+          </a:prstGeom>
+          <a:solidFill>
+            <a:srgbClr val="1A1F2B"/>
+          </a:solidFill>
+          <a:ln w="12700">
+            <a:solidFill>
+              <a:srgbClr val="EF6A5C"/>
+            </a:solidFill>
+          </a:ln>
+          <a:effectLst/>
+        </p:spPr>
+        <p:style>
+          <a:lnRef idx="1">
+            <a:schemeClr val="accent1"/>
+          </a:lnRef>
+          <a:fillRef idx="3">
+            <a:schemeClr val="accent1"/>
+          </a:fillRef>
+          <a:effectRef idx="2">
+            <a:schemeClr val="accent1"/>
+          </a:effectRef>
+          <a:fontRef idx="minor">
+            <a:schemeClr val="lt1"/>
+          </a:fontRef>
+        </p:style>
+        <p:txBody>
+          <a:bodyPr rtlCol="0" anchor="ctr" lIns="45720" rIns="45720"/>
+          <a:lstStyle/>
+          <a:p>
+            <a:pPr algn="ctr"/>
+            <a:r>
+              <a:rPr sz="900" b="1">
+                <a:solidFill>
+                  <a:srgbClr val="EF6A5C"/>
+                </a:solidFill>
+                <a:latin typeface="Noto Sans CJK KR"/>
+              </a:rPr>
+              <a:t>축6+2 · 기각</a:t>
+            </a:r>
+          </a:p>
+        </p:txBody>
+      </p:sp>
+      <p:sp>
+        <p:nvSpPr>
+          <p:cNvPr id="17" name="TextBox 16"/>
+          <p:cNvSpPr txBox="1"/>
+          <p:nvPr/>
+        </p:nvSpPr>
+        <p:spPr>
+          <a:xfrm>
+            <a:off x="2240280" y="4128516"/>
+            <a:ext cx="9402775" cy="502920"/>
+          </a:xfrm>
+          <a:prstGeom prst="rect">
+            <a:avLst/>
+          </a:prstGeom>
+          <a:noFill/>
+        </p:spPr>
+        <p:txBody>
+          <a:bodyPr wrap="square" anchor="ctr">
+            <a:spAutoFit/>
+          </a:bodyPr>
+          <a:lstStyle/>
+          <a:p>
+            <a:pPr algn="l">
+              <a:lnSpc>
+                <a:spcPct val="100000"/>
+              </a:lnSpc>
+            </a:pPr>
+            <a:r>
+              <a:rPr sz="1200" b="0">
+                <a:solidFill>
+                  <a:srgbClr val="E8ECF4"/>
+                </a:solidFill>
+                <a:latin typeface="Noto Sans CJK KR"/>
+              </a:rPr>
+              <a:t>gaussian 증식 속도 억제 + 성긴 초기화 결합 → 최종 gaussian 수는 줄었는데 시간은 그대로(+0.2%) — 개수 자체가 더는 병목이 아님을 처음 시사</a:t>
+            </a:r>
+          </a:p>
+        </p:txBody>
+      </p:sp>
+      <p:sp>
+        <p:nvSpPr>
+          <p:cNvPr id="18" name="Rounded Rectangle 17"/>
+          <p:cNvSpPr/>
+          <p:nvPr/>
+        </p:nvSpPr>
+        <p:spPr>
+          <a:xfrm>
+            <a:off x="548640" y="4745736"/>
+            <a:ext cx="1554480" cy="292608"/>
+          </a:xfrm>
+          <a:prstGeom prst="roundRect">
+            <a:avLst>
+              <a:gd name="adj" fmla="val 50000"/>
+            </a:avLst>
+          </a:prstGeom>
+          <a:solidFill>
+            <a:srgbClr val="1A1F2B"/>
+          </a:solidFill>
+          <a:ln w="12700">
+            <a:solidFill>
+              <a:srgbClr val="4CC98A"/>
+            </a:solidFill>
+          </a:ln>
+          <a:effectLst/>
+        </p:spPr>
+        <p:style>
+          <a:lnRef idx="1">
+            <a:schemeClr val="accent1"/>
+          </a:lnRef>
+          <a:fillRef idx="3">
+            <a:schemeClr val="accent1"/>
+          </a:fillRef>
+          <a:effectRef idx="2">
+            <a:schemeClr val="accent1"/>
+          </a:effectRef>
+          <a:fontRef idx="minor">
+            <a:schemeClr val="lt1"/>
+          </a:fontRef>
+        </p:style>
+        <p:txBody>
+          <a:bodyPr rtlCol="0" anchor="ctr" lIns="45720" rIns="45720"/>
+          <a:lstStyle/>
+          <a:p>
+            <a:pPr algn="ctr"/>
+            <a:r>
+              <a:rPr sz="900" b="1">
+                <a:solidFill>
+                  <a:srgbClr val="4CC98A"/>
+                </a:solidFill>
+                <a:latin typeface="Noto Sans CJK KR"/>
+              </a:rPr>
+              <a:t>축7 · 채택</a:t>
+            </a:r>
+          </a:p>
+        </p:txBody>
+      </p:sp>
+      <p:sp>
+        <p:nvSpPr>
+          <p:cNvPr id="19" name="TextBox 18"/>
+          <p:cNvSpPr txBox="1"/>
+          <p:nvPr/>
+        </p:nvSpPr>
+        <p:spPr>
+          <a:xfrm>
+            <a:off x="2240280" y="4690872"/>
+            <a:ext cx="9402775" cy="502920"/>
+          </a:xfrm>
+          <a:prstGeom prst="rect">
+            <a:avLst/>
+          </a:prstGeom>
+          <a:noFill/>
+        </p:spPr>
+        <p:txBody>
+          <a:bodyPr wrap="square" anchor="ctr">
+            <a:spAutoFit/>
+          </a:bodyPr>
+          <a:lstStyle/>
+          <a:p>
+            <a:pPr algn="l">
+              <a:lnSpc>
+                <a:spcPct val="100000"/>
+              </a:lnSpc>
+            </a:pPr>
+            <a:r>
+              <a:rPr sz="1200" b="0">
+                <a:solidFill>
+                  <a:srgbClr val="E8ECF4"/>
+                </a:solidFill>
+                <a:latin typeface="Noto Sans CJK KR"/>
+              </a:rPr>
+              <a:t>균일 샘플링 대신 이미지 디테일에 따라 점을 배분(PPM 적응 샘플링) → 시간 그대로, PSNR +0.16dB 공짜</a:t>
+            </a:r>
+          </a:p>
+        </p:txBody>
+      </p:sp>
+      <p:sp>
+        <p:nvSpPr>
+          <p:cNvPr id="20" name="TextBox 19"/>
+          <p:cNvSpPr txBox="1"/>
+          <p:nvPr/>
+        </p:nvSpPr>
+        <p:spPr>
+          <a:xfrm>
+            <a:off x="548640" y="5445252"/>
             <a:ext cx="11094415" cy="822960"/>
           </a:xfrm>
           <a:prstGeom prst="rect">

--- a/context/ppt/ppt0727/vigs_realtime_journey_0727.pptx
+++ b/context/ppt/ppt0727/vigs_realtime_journey_0727.pptx
@@ -28,6 +28,10 @@
     <p:sldId id="276" r:id="rId27"/>
     <p:sldId id="277" r:id="rId28"/>
     <p:sldId id="278" r:id="rId29"/>
+    <p:sldId id="279" r:id="rId30"/>
+    <p:sldId id="280" r:id="rId31"/>
+    <p:sldId id="281" r:id="rId32"/>
+    <p:sldId id="282" r:id="rId33"/>
   </p:sldIdLst>
   <p:sldSz cx="12191695" cy="6858000" type="screen4x3"/>
   <p:notesSz cx="6858000" cy="9144000"/>
@@ -3422,7 +3426,7 @@
                 </a:solidFill>
                 <a:latin typeface="Noto Sans CJK KR"/>
               </a:rPr>
-              <a:t>§3 · EXP56</a:t>
+              <a:t>§2 · EXP55</a:t>
             </a:r>
           </a:p>
         </p:txBody>
@@ -3461,7 +3465,7 @@
                 </a:solidFill>
                 <a:latin typeface="Noto Sans CJK KR"/>
               </a:rPr>
-              <a:t>문제 제기: gaussian↓인데 시간은 그대로</a:t>
+              <a:t>carve loss 온라인 이식</a:t>
             </a:r>
           </a:p>
         </p:txBody>
@@ -3512,7 +3516,7 @@
       </p:sp>
       <p:pic>
         <p:nvPicPr>
-          <p:cNvPr id="6" name="Picture 5" descr="fig_exp56_problem.png"/>
+          <p:cNvPr id="6" name="Picture 5" descr="fig_exp55_carve.png"/>
           <p:cNvPicPr>
             <a:picLocks noChangeAspect="1"/>
           </p:cNvPicPr>
@@ -3526,8 +3530,8 @@
         </p:blipFill>
         <p:spPr>
           <a:xfrm>
-            <a:off x="548640" y="1450141"/>
-            <a:ext cx="6035040" cy="3866277"/>
+            <a:off x="2200213" y="1280160"/>
+            <a:ext cx="7791268" cy="2926080"/>
           </a:xfrm>
           <a:prstGeom prst="rect">
             <a:avLst/>
@@ -3542,8 +3546,8 @@
         </p:nvSpPr>
         <p:spPr>
           <a:xfrm>
-            <a:off x="6858000" y="1463040"/>
-            <a:ext cx="4785055" cy="3840480"/>
+            <a:off x="548640" y="4434840"/>
+            <a:ext cx="11094415" cy="1737360"/>
           </a:xfrm>
           <a:prstGeom prst="rect">
             <a:avLst/>
@@ -3565,13 +3569,13 @@
               </a:spcAft>
             </a:pPr>
             <a:r>
-              <a:rPr sz="1250">
+              <a:rPr sz="1200">
                 <a:solidFill>
                   <a:srgbClr val="E8ECF4"/>
                 </a:solidFill>
                 <a:latin typeface="Noto Sans CJK KR"/>
               </a:rPr>
-              <a:t>•  exp55에서 평균 gaussian 수를 35.9% 줄였는데 순수 mapping 시간은 12.2%밖에 안 줄었음 — "gaussian 수를 줄이는" 접근이 한계에 도달한 신호</a:t>
+              <a:t>•  배치 트랙에서 이미 검증된(AUC 0.98) carve loss를, VIGS의 BA-정제 추적 depth(disps_up)를 신뢰 표면 삼아 depth-violation 전용 온라인 근사로 재설계</a:t>
             </a:r>
           </a:p>
           <a:p>
@@ -3584,70 +3588,52 @@
               </a:spcAft>
             </a:pPr>
             <a:r>
-              <a:rPr sz="1250">
+              <a:rPr sz="1200">
                 <a:solidFill>
                   <a:srgbClr val="E8ECF4"/>
                 </a:solidFill>
                 <a:latin typeface="Noto Sans CJK KR"/>
               </a:rPr>
-              <a:t>•  exp54 축6+2에서도 이미 같은 현상 관측(gaussian 수를 더 눌러도 시간 그대로)</a:t>
-            </a:r>
-          </a:p>
-        </p:txBody>
-      </p:sp>
-      <p:sp>
-        <p:nvSpPr>
-          <p:cNvPr id="8" name="Rounded Rectangle 7"/>
-          <p:cNvSpPr/>
-          <p:nvPr/>
-        </p:nvSpPr>
-        <p:spPr>
-          <a:xfrm>
-            <a:off x="6858000" y="5120640"/>
-            <a:ext cx="4785055" cy="1188720"/>
-          </a:xfrm>
-          <a:prstGeom prst="roundRect">
-            <a:avLst>
-              <a:gd name="adj" fmla="val 8000"/>
-            </a:avLst>
-          </a:prstGeom>
-          <a:solidFill>
-            <a:srgbClr val="1A1F2B"/>
-          </a:solidFill>
-          <a:ln w="15875">
-            <a:solidFill>
-              <a:srgbClr val="FFB454"/>
-            </a:solidFill>
-          </a:ln>
-          <a:effectLst/>
-        </p:spPr>
-        <p:style>
-          <a:lnRef idx="1">
-            <a:schemeClr val="accent1"/>
-          </a:lnRef>
-          <a:fillRef idx="3">
-            <a:schemeClr val="accent1"/>
-          </a:fillRef>
-          <a:effectRef idx="2">
-            <a:schemeClr val="accent1"/>
-          </a:effectRef>
-          <a:fontRef idx="minor">
-            <a:schemeClr val="lt1"/>
-          </a:fontRef>
-        </p:style>
-        <p:txBody>
-          <a:bodyPr rtlCol="0" anchor="ctr" wrap="square" lIns="164592" rIns="164592"/>
-          <a:lstStyle/>
-          <a:p>
-            <a:pPr algn="ctr"/>
-            <a:r>
-              <a:rPr sz="1300" b="1">
-                <a:solidFill>
-                  <a:srgbClr val="E8ECF4"/>
-                </a:solidFill>
-                <a:latin typeface="Noto Sans CJK KR"/>
-              </a:rPr>
-              <a:t>질문: gaussian 수가 시간을 안 줄이면, 무엇이 시간을 지배하는가?</a:t>
+              <a:t>•  region GT가 VIGS 좌표계에 안 맞아 — carve_loss.py 자신의 신호 설계를 그대로 재구현한 오프라인 진단 지표를 새로 제작해 검증</a:t>
+            </a:r>
+          </a:p>
+        </p:txBody>
+      </p:sp>
+      <p:sp>
+        <p:nvSpPr>
+          <p:cNvPr id="8" name="TextBox 7"/>
+          <p:cNvSpPr txBox="1"/>
+          <p:nvPr/>
+        </p:nvSpPr>
+        <p:spPr>
+          <a:xfrm>
+            <a:off x="548640" y="6172200"/>
+            <a:ext cx="11094415" cy="457200"/>
+          </a:xfrm>
+          <a:prstGeom prst="rect">
+            <a:avLst/>
+          </a:prstGeom>
+          <a:noFill/>
+        </p:spPr>
+        <p:txBody>
+          <a:bodyPr wrap="square" anchor="t">
+            <a:spAutoFit/>
+          </a:bodyPr>
+          <a:lstStyle/>
+          <a:p>
+            <a:pPr algn="l">
+              <a:lnSpc>
+                <a:spcPct val="120000"/>
+              </a:lnSpc>
+            </a:pPr>
+            <a:r>
+              <a:rPr sz="1100" b="0">
+                <a:solidFill>
+                  <a:srgbClr val="8B95AB"/>
+                </a:solidFill>
+                <a:latin typeface="Noto Sans CJK KR"/>
+              </a:rPr>
+              <a:t>표준 지표가 안 맞으면 새로 만들어서라도 채택/기각을 숫자로 판단한다는 원칙.</a:t>
             </a:r>
           </a:p>
         </p:txBody>
@@ -3748,7 +3734,7 @@
                 </a:solidFill>
                 <a:latin typeface="Noto Sans CJK KR"/>
               </a:rPr>
-              <a:t>§3 · PHASE 0</a:t>
+              <a:t>§2 · APPENDIX</a:t>
             </a:r>
           </a:p>
         </p:txBody>
@@ -3787,7 +3773,7 @@
                 </a:solidFill>
                 <a:latin typeface="Noto Sans CJK KR"/>
               </a:rPr>
-              <a:t>기존 계측 재분석으로 원인 진단</a:t>
+              <a:t>부록: 직렬 실행으로 밝혀진 진짜 구조</a:t>
             </a:r>
           </a:p>
         </p:txBody>
@@ -3838,7 +3824,7 @@
       </p:sp>
       <p:pic>
         <p:nvPicPr>
-          <p:cNvPr id="6" name="Picture 5" descr="fig_exp56_phase0.png"/>
+          <p:cNvPr id="6" name="Picture 5" descr="fig_exp55_appendix.png"/>
           <p:cNvPicPr>
             <a:picLocks noChangeAspect="1"/>
           </p:cNvPicPr>
@@ -3852,8 +3838,8 @@
         </p:blipFill>
         <p:spPr>
           <a:xfrm>
-            <a:off x="1328464" y="1234440"/>
-            <a:ext cx="3560991" cy="4846321"/>
+            <a:off x="1582655" y="1280160"/>
+            <a:ext cx="9026384" cy="3383280"/>
           </a:xfrm>
           <a:prstGeom prst="rect">
             <a:avLst/>
@@ -3868,8 +3854,8 @@
         </p:nvSpPr>
         <p:spPr>
           <a:xfrm>
-            <a:off x="5943600" y="1645920"/>
-            <a:ext cx="5699455" cy="3200400"/>
+            <a:off x="548640" y="4846320"/>
+            <a:ext cx="11094415" cy="1280160"/>
           </a:xfrm>
           <a:prstGeom prst="rect">
             <a:avLst/>
@@ -3891,13 +3877,13 @@
               </a:spcAft>
             </a:pPr>
             <a:r>
-              <a:rPr sz="1250">
+              <a:rPr sz="1200">
                 <a:solidFill>
                   <a:srgbClr val="E8ECF4"/>
                 </a:solidFill>
                 <a:latin typeface="Noto Sans CJK KR"/>
               </a:rPr>
-              <a:t>•  새 실험 없이 기존 타이밍 로그를 처음으로 세부 태그별 집계 — 직렬 순수 map() 68.16초 중 rasterize 40% + backward 34% + loss_compute 24%</a:t>
+              <a:t>•  "지금 상태로 직렬 돌리면 순수 시간이 어떻게 되나" 실측 → 순수 tracking 27.9초 vs 순수 mapping 80.1초. 이게 exp54의 "tracking-bound" 결론과 정면 모순</a:t>
             </a:r>
           </a:p>
           <a:p>
@@ -3910,13 +3896,13 @@
               </a:spcAft>
             </a:pPr>
             <a:r>
-              <a:rPr sz="1250">
+              <a:rPr sz="1200">
                 <a:solidFill>
                   <a:srgbClr val="E8ECF4"/>
                 </a:solidFill>
                 <a:latin typeface="Noto Sans CJK KR"/>
               </a:rPr>
-              <a:t>•  loss_compute는 순수 픽셀 연산(N-무관), rasterize/backward도 이 gaussian 규모(85k~130k)에선 "고정비"가 데이터量-비례 항을 압도함을 확인</a:t>
+              <a:t>•  파고든 결과 두 가지 발견: ① GPU 경합이 병렬 tracking을 거의 2배로 부풀림 ② _gs_queue가 가득 차면 오래된 keyframe을 버리는 정책 때문에 병렬 모드가 mapping 업데이트의 약 80%를 그냥 스킵(직렬 110회 vs 병렬 22회)</a:t>
             </a:r>
           </a:p>
         </p:txBody>
@@ -3929,8 +3915,8 @@
         </p:nvSpPr>
         <p:spPr>
           <a:xfrm>
-            <a:off x="5943600" y="5212080"/>
-            <a:ext cx="5699455" cy="914400"/>
+            <a:off x="548640" y="6309360"/>
+            <a:ext cx="11094415" cy="457200"/>
           </a:xfrm>
           <a:prstGeom prst="rect">
             <a:avLst/>
@@ -3955,7 +3941,7 @@
                 </a:solidFill>
                 <a:latin typeface="Noto Sans CJK KR"/>
               </a:rPr>
-              <a:t>새 실험을 돌리기 전에 이미 있는 데이터부터 다시 봤다 — 이게 다음 발견들의 방법론.</a:t>
+              <a:t>이 발견이 exp56 전체의 출발점 — "병렬 배수만 보면 안 되고 안에서 뭐가 스킵되는지 봐야 한다".</a:t>
             </a:r>
           </a:p>
         </p:txBody>
@@ -4056,7 +4042,7 @@
                 </a:solidFill>
                 <a:latin typeface="Noto Sans CJK KR"/>
               </a:rPr>
-              <a:t>§3 · PHASE 1</a:t>
+              <a:t>§3 · EXP56</a:t>
             </a:r>
           </a:p>
         </p:txBody>
@@ -4095,7 +4081,7 @@
                 </a:solidFill>
                 <a:latin typeface="Noto Sans CJK KR"/>
               </a:rPr>
-              <a:t>iters 하향 — 첫 큰 개선</a:t>
+              <a:t>문제 제기: gaussian↓인데 시간은 그대로</a:t>
             </a:r>
           </a:p>
         </p:txBody>
@@ -4146,7 +4132,7 @@
       </p:sp>
       <p:pic>
         <p:nvPicPr>
-          <p:cNvPr id="6" name="Picture 5" descr="fig_exp56_phase1.png"/>
+          <p:cNvPr id="6" name="Picture 5" descr="fig_exp56_problem.png"/>
           <p:cNvPicPr>
             <a:picLocks noChangeAspect="1"/>
           </p:cNvPicPr>
@@ -4160,8 +4146,8 @@
         </p:blipFill>
         <p:spPr>
           <a:xfrm>
-            <a:off x="2433121" y="1280160"/>
-            <a:ext cx="7325451" cy="4114800"/>
+            <a:off x="548640" y="1450141"/>
+            <a:ext cx="6035040" cy="3866277"/>
           </a:xfrm>
           <a:prstGeom prst="rect">
             <a:avLst/>
@@ -4176,8 +4162,8 @@
         </p:nvSpPr>
         <p:spPr>
           <a:xfrm>
-            <a:off x="548640" y="5532120"/>
-            <a:ext cx="11094415" cy="1097280"/>
+            <a:off x="6858000" y="1463040"/>
+            <a:ext cx="4785055" cy="3840480"/>
           </a:xfrm>
           <a:prstGeom prst="rect">
             <a:avLst/>
@@ -4185,24 +4171,103 @@
           <a:noFill/>
         </p:spPr>
         <p:txBody>
-          <a:bodyPr wrap="square" anchor="t">
+          <a:bodyPr wrap="square">
             <a:spAutoFit/>
           </a:bodyPr>
           <a:lstStyle/>
           <a:p>
-            <a:pPr algn="l">
-              <a:lnSpc>
-                <a:spcPct val="120000"/>
-              </a:lnSpc>
-            </a:pPr>
-            <a:r>
-              <a:rPr sz="1100" b="0">
-                <a:solidFill>
-                  <a:srgbClr val="8B95AB"/>
-                </a:solidFill>
-                <a:latin typeface="Noto Sans CJK KR"/>
-              </a:rPr>
-              <a:t>"고정비가 지배적"이라면 진짜 변수는 gaussian 수가 아니라 "반복 횟수(iters)" — keyframe당 SGD 반복 10→7→5 스캔. iters=7: 시간 −16.1%, PSNR mean/kf 둘 다 +0.21dB, map() 처리 keyframe 수도 22→26회 증가 — 전 지표 동시 개선. (참고) 반대 방향(iters를 올려보는 실험)은 오히려 coverage가 줄어 역효과.</a:t>
+            <a:pPr>
+              <a:lnSpc>
+                <a:spcPct val="122000"/>
+              </a:lnSpc>
+              <a:spcAft>
+                <a:spcPts val="800"/>
+              </a:spcAft>
+            </a:pPr>
+            <a:r>
+              <a:rPr sz="1250">
+                <a:solidFill>
+                  <a:srgbClr val="E8ECF4"/>
+                </a:solidFill>
+                <a:latin typeface="Noto Sans CJK KR"/>
+              </a:rPr>
+              <a:t>•  exp55에서 평균 gaussian 수를 35.9% 줄였는데 순수 mapping 시간은 12.2%밖에 안 줄었음 — "gaussian 수를 줄이는" 접근이 한계에 도달한 신호</a:t>
+            </a:r>
+          </a:p>
+          <a:p>
+            <a:pPr>
+              <a:lnSpc>
+                <a:spcPct val="122000"/>
+              </a:lnSpc>
+              <a:spcAft>
+                <a:spcPts val="800"/>
+              </a:spcAft>
+            </a:pPr>
+            <a:r>
+              <a:rPr sz="1250">
+                <a:solidFill>
+                  <a:srgbClr val="E8ECF4"/>
+                </a:solidFill>
+                <a:latin typeface="Noto Sans CJK KR"/>
+              </a:rPr>
+              <a:t>•  exp54 축6+2에서도 이미 같은 현상 관측(gaussian 수를 더 눌러도 시간 그대로)</a:t>
+            </a:r>
+          </a:p>
+        </p:txBody>
+      </p:sp>
+      <p:sp>
+        <p:nvSpPr>
+          <p:cNvPr id="8" name="Rounded Rectangle 7"/>
+          <p:cNvSpPr/>
+          <p:nvPr/>
+        </p:nvSpPr>
+        <p:spPr>
+          <a:xfrm>
+            <a:off x="6858000" y="5120640"/>
+            <a:ext cx="4785055" cy="1188720"/>
+          </a:xfrm>
+          <a:prstGeom prst="roundRect">
+            <a:avLst>
+              <a:gd name="adj" fmla="val 8000"/>
+            </a:avLst>
+          </a:prstGeom>
+          <a:solidFill>
+            <a:srgbClr val="1A1F2B"/>
+          </a:solidFill>
+          <a:ln w="15875">
+            <a:solidFill>
+              <a:srgbClr val="FFB454"/>
+            </a:solidFill>
+          </a:ln>
+          <a:effectLst/>
+        </p:spPr>
+        <p:style>
+          <a:lnRef idx="1">
+            <a:schemeClr val="accent1"/>
+          </a:lnRef>
+          <a:fillRef idx="3">
+            <a:schemeClr val="accent1"/>
+          </a:fillRef>
+          <a:effectRef idx="2">
+            <a:schemeClr val="accent1"/>
+          </a:effectRef>
+          <a:fontRef idx="minor">
+            <a:schemeClr val="lt1"/>
+          </a:fontRef>
+        </p:style>
+        <p:txBody>
+          <a:bodyPr rtlCol="0" anchor="ctr" wrap="square" lIns="164592" rIns="164592"/>
+          <a:lstStyle/>
+          <a:p>
+            <a:pPr algn="ctr"/>
+            <a:r>
+              <a:rPr sz="1300" b="1">
+                <a:solidFill>
+                  <a:srgbClr val="E8ECF4"/>
+                </a:solidFill>
+                <a:latin typeface="Noto Sans CJK KR"/>
+              </a:rPr>
+              <a:t>질문: gaussian 수가 시간을 안 줄이면, 무엇이 시간을 지배하는가?</a:t>
             </a:r>
           </a:p>
         </p:txBody>
@@ -4303,7 +4368,7 @@
                 </a:solidFill>
                 <a:latin typeface="Noto Sans CJK KR"/>
               </a:rPr>
-              <a:t>§3 · PHASE 4</a:t>
+              <a:t>§3 · PHASE 0</a:t>
             </a:r>
           </a:p>
         </p:txBody>
@@ -4342,7 +4407,7 @@
                 </a:solidFill>
                 <a:latin typeface="Noto Sans CJK KR"/>
               </a:rPr>
-              <a:t>숨어있던 진짜 병목 발견</a:t>
+              <a:t>기존 계측 재분석으로 원인 진단</a:t>
             </a:r>
           </a:p>
         </p:txBody>
@@ -4393,7 +4458,7 @@
       </p:sp>
       <p:pic>
         <p:nvPicPr>
-          <p:cNvPr id="6" name="Picture 5" descr="fig_exp56_phase4.png"/>
+          <p:cNvPr id="6" name="Picture 5" descr="fig_exp56_phase0.png"/>
           <p:cNvPicPr>
             <a:picLocks noChangeAspect="1"/>
           </p:cNvPicPr>
@@ -4407,8 +4472,8 @@
         </p:blipFill>
         <p:spPr>
           <a:xfrm>
-            <a:off x="1107499" y="1234440"/>
-            <a:ext cx="3820040" cy="4846320"/>
+            <a:off x="1328464" y="1234440"/>
+            <a:ext cx="3560991" cy="4846321"/>
           </a:xfrm>
           <a:prstGeom prst="rect">
             <a:avLst/>
@@ -4423,8 +4488,8 @@
         </p:nvSpPr>
         <p:spPr>
           <a:xfrm>
-            <a:off x="5760720" y="1645920"/>
-            <a:ext cx="5882335" cy="3291840"/>
+            <a:off x="5943600" y="1645920"/>
+            <a:ext cx="5699455" cy="3200400"/>
           </a:xfrm>
           <a:prstGeom prst="rect">
             <a:avLst/>
@@ -4446,13 +4511,13 @@
               </a:spcAft>
             </a:pPr>
             <a:r>
-              <a:rPr sz="1200">
+              <a:rPr sz="1250">
                 <a:solidFill>
                   <a:srgbClr val="E8ECF4"/>
                 </a:solidFill>
                 <a:latin typeface="Noto Sans CJK KR"/>
               </a:rPr>
-              <a:t>•  map() 호출을 세부 로그로 종류별 분해해보니 — 26회 중 단 2~3회(맵 최초 초기화 + IMU 재초기화)가 전체 mapping 시간의 49%를 차지</a:t>
+              <a:t>•  새 실험 없이 기존 타이밍 로그를 처음으로 세부 태그별 집계 — 직렬 순수 map() 68.16초 중 rasterize 40% + backward 34% + loss_compute 24%</a:t>
             </a:r>
           </a:p>
           <a:p>
@@ -4465,32 +4530,13 @@
               </a:spcAft>
             </a:pPr>
             <a:r>
-              <a:rPr sz="1200">
+              <a:rPr sz="1250">
                 <a:solidFill>
                   <a:srgbClr val="E8ECF4"/>
                 </a:solidFill>
                 <a:latin typeface="Noto Sans CJK KR"/>
               </a:rPr>
-              <a:t>•  원인: IMU 재초기화 시 맵 전체를 삭제하고 처음부터 다시 채우는데, 이때 반복 횟수가 90~131회(정규 호출의 10배 이상)</a:t>
-            </a:r>
-          </a:p>
-          <a:p>
-            <a:pPr>
-              <a:lnSpc>
-                <a:spcPct val="122000"/>
-              </a:lnSpc>
-              <a:spcAft>
-                <a:spcPts val="800"/>
-              </a:spcAft>
-            </a:pPr>
-            <a:r>
-              <a:rPr sz="1200">
-                <a:solidFill>
-                  <a:srgbClr val="E8ECF4"/>
-                </a:solidFill>
-                <a:latin typeface="Noto Sans CJK KR"/>
-              </a:rPr>
-              <a:t>•  init_itr_num 1050→600으로 낮춰 추가 시간 −6.2%, PSNR 사실상 무손실(300까지 내리면 실손실 확인 후 기각)</a:t>
+              <a:t>•  loss_compute는 순수 픽셀 연산(N-무관), rasterize/backward도 이 gaussian 규모(85k~130k)에선 "고정비"가 데이터量-비례 항을 압도함을 확인</a:t>
             </a:r>
           </a:p>
         </p:txBody>
@@ -4503,8 +4549,8 @@
         </p:nvSpPr>
         <p:spPr>
           <a:xfrm>
-            <a:off x="5760720" y="5303520"/>
-            <a:ext cx="5882335" cy="822960"/>
+            <a:off x="5943600" y="5212080"/>
+            <a:ext cx="5699455" cy="914400"/>
           </a:xfrm>
           <a:prstGeom prst="rect">
             <a:avLst/>
@@ -4529,7 +4575,7 @@
                 </a:solidFill>
                 <a:latin typeface="Noto Sans CJK KR"/>
               </a:rPr>
-              <a:t>호출 26개 중 딱 2~3개에 절반이 몰려있었다는 게 이번 사이클 최대 발견.</a:t>
+              <a:t>새 실험을 돌리기 전에 이미 있는 데이터부터 다시 봤다 — 이게 다음 발견들의 방법론.</a:t>
             </a:r>
           </a:p>
         </p:txBody>
@@ -4630,7 +4676,7 @@
                 </a:solidFill>
                 <a:latin typeface="Noto Sans CJK KR"/>
               </a:rPr>
-              <a:t>§3 · PHASE 5~7</a:t>
+              <a:t>§3 · PHASE 1</a:t>
             </a:r>
           </a:p>
         </p:txBody>
@@ -4669,7 +4715,7 @@
                 </a:solidFill>
                 <a:latin typeface="Noto Sans CJK KR"/>
               </a:rPr>
-              <a:t>회귀분석으로 규명한 관계식, 그리고 품질까지</a:t>
+              <a:t>iters 하향 — 첫 큰 개선</a:t>
             </a:r>
           </a:p>
         </p:txBody>
@@ -4720,7 +4766,7 @@
       </p:sp>
       <p:pic>
         <p:nvPicPr>
-          <p:cNvPr id="6" name="Picture 5" descr="fig_exp56_phase67.png"/>
+          <p:cNvPr id="6" name="Picture 5" descr="fig_exp56_phase1.png"/>
           <p:cNvPicPr>
             <a:picLocks noChangeAspect="1"/>
           </p:cNvPicPr>
@@ -4734,8 +4780,8 @@
         </p:blipFill>
         <p:spPr>
           <a:xfrm>
-            <a:off x="2137960" y="1234440"/>
-            <a:ext cx="7915774" cy="3108960"/>
+            <a:off x="2433121" y="1280160"/>
+            <a:ext cx="7325451" cy="4114800"/>
           </a:xfrm>
           <a:prstGeom prst="rect">
             <a:avLst/>
@@ -4750,69 +4796,8 @@
         </p:nvSpPr>
         <p:spPr>
           <a:xfrm>
-            <a:off x="548640" y="4526280"/>
-            <a:ext cx="11094415" cy="1737360"/>
-          </a:xfrm>
-          <a:prstGeom prst="rect">
-            <a:avLst/>
-          </a:prstGeom>
-          <a:noFill/>
-        </p:spPr>
-        <p:txBody>
-          <a:bodyPr wrap="square">
-            <a:spAutoFit/>
-          </a:bodyPr>
-          <a:lstStyle/>
-          <a:p>
-            <a:pPr>
-              <a:lnSpc>
-                <a:spcPct val="122000"/>
-              </a:lnSpc>
-              <a:spcAft>
-                <a:spcPts val="800"/>
-              </a:spcAft>
-            </a:pPr>
-            <a:r>
-              <a:rPr sz="1200">
-                <a:solidFill>
-                  <a:srgbClr val="E8ECF4"/>
-                </a:solidFill>
-                <a:latin typeface="Noto Sans CJK KR"/>
-              </a:rPr>
-              <a:t>•  548개 실제 map() 호출 데이터로 회귀분석 — iters×n_view(반복 횟수×카메라 수)가 시간을 지배, gaussian 수·해상도는 부차적(R²=0.93~0.998)</a:t>
-            </a:r>
-          </a:p>
-          <a:p>
-            <a:pPr>
-              <a:lnSpc>
-                <a:spcPct val="122000"/>
-              </a:lnSpc>
-              <a:spcAft>
-                <a:spcPts val="800"/>
-              </a:spcAft>
-            </a:pPr>
-            <a:r>
-              <a:rPr sz="1200">
-                <a:solidFill>
-                  <a:srgbClr val="E8ECF4"/>
-                </a:solidFill>
-                <a:latin typeface="Noto Sans CJK KR"/>
-              </a:rPr>
-              <a:t>•  "카메라 뷰를 늘리면 품질이 좋아지지 않을까?" → window(프론티어) 자체를 키우면 오히려 PSNR 악화(−1.1~3.5dB) — 기각. 대신 프론티어는 그대로 두고 과거-keyframe 곁눈질 비중만 늘리기 → PSNR 개선, 시간 비용 무시할 수준 — 채택</a:t>
-            </a:r>
-          </a:p>
-        </p:txBody>
-      </p:sp>
-      <p:sp>
-        <p:nvSpPr>
-          <p:cNvPr id="8" name="TextBox 7"/>
-          <p:cNvSpPr txBox="1"/>
-          <p:nvPr/>
-        </p:nvSpPr>
-        <p:spPr>
-          <a:xfrm>
-            <a:off x="548640" y="6263640"/>
-            <a:ext cx="11094415" cy="457200"/>
+            <a:off x="548640" y="5532120"/>
+            <a:ext cx="11094415" cy="1097280"/>
           </a:xfrm>
           <a:prstGeom prst="rect">
             <a:avLst/>
@@ -4837,7 +4822,7 @@
                 </a:solidFill>
                 <a:latin typeface="Noto Sans CJK KR"/>
               </a:rPr>
-              <a:t>같은 "뷰를 늘린다"는 아이디어인데 방법에 따라 정반대 결과 — 다음 로드맵(dense-frame supervision)에 대한 경고이기도 함.</a:t>
+              <a:t>"고정비가 지배적"이라면 진짜 변수는 gaussian 수가 아니라 "반복 횟수(iters)" — keyframe당 SGD 반복 10→7→5 스캔. iters=7: 시간 −16.1%, PSNR mean/kf 둘 다 +0.21dB, map() 처리 keyframe 수도 22→26회 증가 — 전 지표 동시 개선. (참고) 반대 방향(iters를 올려보는 실험)은 오히려 coverage가 줄어 역효과.</a:t>
             </a:r>
           </a:p>
         </p:txBody>
@@ -4938,7 +4923,7 @@
                 </a:solidFill>
                 <a:latin typeface="Noto Sans CJK KR"/>
               </a:rPr>
-              <a:t>§3 · PHASE 8</a:t>
+              <a:t>§3 · PHASE 4</a:t>
             </a:r>
           </a:p>
         </p:txBody>
@@ -4977,7 +4962,7 @@
                 </a:solidFill>
                 <a:latin typeface="Noto Sans CJK KR"/>
               </a:rPr>
-              <a:t>"공짜" 최적화 발견</a:t>
+              <a:t>숨어있던 진짜 병목 발견</a:t>
             </a:r>
           </a:p>
         </p:txBody>
@@ -5028,7 +5013,7 @@
       </p:sp>
       <p:pic>
         <p:nvPicPr>
-          <p:cNvPr id="6" name="Picture 5" descr="fig_exp56_phase8.png"/>
+          <p:cNvPr id="6" name="Picture 5" descr="fig_exp56_phase4.png"/>
           <p:cNvPicPr>
             <a:picLocks noChangeAspect="1"/>
           </p:cNvPicPr>
@@ -5042,8 +5027,8 @@
         </p:blipFill>
         <p:spPr>
           <a:xfrm>
-            <a:off x="3095662" y="1463040"/>
-            <a:ext cx="6000369" cy="2926080"/>
+            <a:off x="1107499" y="1234440"/>
+            <a:ext cx="3820040" cy="4846320"/>
           </a:xfrm>
           <a:prstGeom prst="rect">
             <a:avLst/>
@@ -5058,8 +5043,8 @@
         </p:nvSpPr>
         <p:spPr>
           <a:xfrm>
-            <a:off x="548640" y="4663440"/>
-            <a:ext cx="11094415" cy="1463040"/>
+            <a:off x="5760720" y="1645920"/>
+            <a:ext cx="5882335" cy="3291840"/>
           </a:xfrm>
           <a:prstGeom prst="rect">
             <a:avLst/>
@@ -5081,13 +5066,13 @@
               </a:spcAft>
             </a:pPr>
             <a:r>
-              <a:rPr sz="1250">
+              <a:rPr sz="1200">
                 <a:solidFill>
                   <a:srgbClr val="E8ECF4"/>
                 </a:solidFill>
                 <a:latin typeface="Noto Sans CJK KR"/>
               </a:rPr>
-              <a:t>•  프로파일링 중 우연히 발견: 카메라 pose가 안 바뀌는데도 매 렌더링 호출마다 행렬 역산을 처음부터 다시 계산하고 있었음</a:t>
+              <a:t>•  map() 호출을 세부 로그로 종류별 분해해보니 — 26회 중 단 2~3회(맵 최초 초기화 + IMU 재초기화)가 전체 mapping 시간의 49%를 차지</a:t>
             </a:r>
           </a:p>
           <a:p>
@@ -5100,13 +5085,32 @@
               </a:spcAft>
             </a:pPr>
             <a:r>
-              <a:rPr sz="1250">
+              <a:rPr sz="1200">
                 <a:solidFill>
                   <a:srgbClr val="E8ECF4"/>
                 </a:solidFill>
                 <a:latin typeface="Noto Sans CJK KR"/>
               </a:rPr>
-              <a:t>•  pose가 바뀌는 지점이 코드 전체에 딱 한 곳뿐임을 확인한 뒤 캐싱 추가 — 그래디언트 수학은 전혀 안 건드리는 무위험 변경</a:t>
+              <a:t>•  원인: IMU 재초기화 시 맵 전체를 삭제하고 처음부터 다시 채우는데, 이때 반복 횟수가 90~131회(정규 호출의 10배 이상)</a:t>
+            </a:r>
+          </a:p>
+          <a:p>
+            <a:pPr>
+              <a:lnSpc>
+                <a:spcPct val="122000"/>
+              </a:lnSpc>
+              <a:spcAft>
+                <a:spcPts val="800"/>
+              </a:spcAft>
+            </a:pPr>
+            <a:r>
+              <a:rPr sz="1200">
+                <a:solidFill>
+                  <a:srgbClr val="E8ECF4"/>
+                </a:solidFill>
+                <a:latin typeface="Noto Sans CJK KR"/>
+              </a:rPr>
+              <a:t>•  init_itr_num 1050→600으로 낮춰 추가 시간 −6.2%, PSNR 사실상 무손실(300까지 내리면 실손실 확인 후 기각)</a:t>
             </a:r>
           </a:p>
         </p:txBody>
@@ -5119,8 +5123,8 @@
         </p:nvSpPr>
         <p:spPr>
           <a:xfrm>
-            <a:off x="548640" y="6263640"/>
-            <a:ext cx="11094415" cy="457200"/>
+            <a:off x="5760720" y="5303520"/>
+            <a:ext cx="5882335" cy="822960"/>
           </a:xfrm>
           <a:prstGeom prst="rect">
             <a:avLst/>
@@ -5145,7 +5149,7 @@
                 </a:solidFill>
                 <a:latin typeface="Noto Sans CJK KR"/>
               </a:rPr>
-              <a:t>제일 큰 인프라 작업(다음 슬라이드)을 준비하다가 발견한 제일 작은데 제일 확실한 개선.</a:t>
+              <a:t>호출 26개 중 딱 2~3개에 절반이 몰려있었다는 게 이번 사이클 최대 발견.</a:t>
             </a:r>
           </a:p>
         </p:txBody>
@@ -5246,7 +5250,7 @@
                 </a:solidFill>
                 <a:latin typeface="Noto Sans CJK KR"/>
               </a:rPr>
-              <a:t>§3 · PHASE 8b</a:t>
+              <a:t>§3 · PHASE 5</a:t>
             </a:r>
           </a:p>
         </p:txBody>
@@ -5285,7 +5289,7 @@
                 </a:solidFill>
                 <a:latin typeface="Noto Sans CJK KR"/>
               </a:rPr>
-              <a:t>CUDA 커널 batch화 시도 — 정직한 실패 기록</a:t>
+              <a:t>회귀분석 피팅 — 무엇이 시간을 결정하는가</a:t>
             </a:r>
           </a:p>
         </p:txBody>
@@ -5336,7 +5340,7 @@
       </p:sp>
       <p:pic>
         <p:nvPicPr>
-          <p:cNvPr id="6" name="Picture 5" descr="fig_exp56_phase8b.png"/>
+          <p:cNvPr id="6" name="Picture 5" descr="fig_phase5_fit.png"/>
           <p:cNvPicPr>
             <a:picLocks noChangeAspect="1"/>
           </p:cNvPicPr>
@@ -5350,8 +5354,8 @@
         </p:blipFill>
         <p:spPr>
           <a:xfrm>
-            <a:off x="2084704" y="1371600"/>
-            <a:ext cx="8022285" cy="2194560"/>
+            <a:off x="683280" y="1234440"/>
+            <a:ext cx="10825134" cy="4663440"/>
           </a:xfrm>
           <a:prstGeom prst="rect">
             <a:avLst/>
@@ -5366,107 +5370,8 @@
         </p:nvSpPr>
         <p:spPr>
           <a:xfrm>
-            <a:off x="548640" y="3794760"/>
-            <a:ext cx="11094415" cy="2011680"/>
-          </a:xfrm>
-          <a:prstGeom prst="rect">
-            <a:avLst/>
-          </a:prstGeom>
-          <a:noFill/>
-        </p:spPr>
-        <p:txBody>
-          <a:bodyPr wrap="square">
-            <a:spAutoFit/>
-          </a:bodyPr>
-          <a:lstStyle/>
-          <a:p>
-            <a:pPr>
-              <a:lnSpc>
-                <a:spcPct val="122000"/>
-              </a:lnSpc>
-              <a:spcAft>
-                <a:spcPts val="800"/>
-              </a:spcAft>
-            </a:pPr>
-            <a:r>
-              <a:rPr sz="1180">
-                <a:solidFill>
-                  <a:srgbClr val="E8ECF4"/>
-                </a:solidFill>
-                <a:latin typeface="Noto Sans CJK KR"/>
-              </a:rPr>
-              <a:t>•  "카메라 여러 대를 한 번의 CUDA 커널 호출로 묶으면 더 빠르지 않을까" — 실제로 구현·검증까지 진행</a:t>
-            </a:r>
-          </a:p>
-          <a:p>
-            <a:pPr>
-              <a:lnSpc>
-                <a:spcPct val="122000"/>
-              </a:lnSpc>
-              <a:spcAft>
-                <a:spcPts val="800"/>
-              </a:spcAft>
-            </a:pPr>
-            <a:r>
-              <a:rPr sz="1180">
-                <a:solidFill>
-                  <a:srgbClr val="E8ECF4"/>
-                </a:solidFill>
-                <a:latin typeface="Noto Sans CJK KR"/>
-              </a:rPr>
-              <a:t>•  기존 커널(그래디언트 수학 포함)은 안 건드리고 C++에서 안전하게 감싸는 방식으로 구현, forward는 완전 일치, backward도 수치적으로 검증 통과</a:t>
-            </a:r>
-          </a:p>
-          <a:p>
-            <a:pPr>
-              <a:lnSpc>
-                <a:spcPct val="122000"/>
-              </a:lnSpc>
-              <a:spcAft>
-                <a:spcPts val="800"/>
-              </a:spcAft>
-            </a:pPr>
-            <a:r>
-              <a:rPr sz="1180">
-                <a:solidFill>
-                  <a:srgbClr val="E8ECF4"/>
-                </a:solidFill>
-                <a:latin typeface="Noto Sans CJK KR"/>
-              </a:rPr>
-              <a:t>•  실전 적용 1차 시도에서 PSNR 붕괴 발견 → 원인(텐서 shape 불일치) 진단·수정 → 재검증 통과</a:t>
-            </a:r>
-          </a:p>
-          <a:p>
-            <a:pPr>
-              <a:lnSpc>
-                <a:spcPct val="122000"/>
-              </a:lnSpc>
-              <a:spcAft>
-                <a:spcPts val="800"/>
-              </a:spcAft>
-            </a:pPr>
-            <a:r>
-              <a:rPr sz="1180">
-                <a:solidFill>
-                  <a:srgbClr val="E8ECF4"/>
-                </a:solidFill>
-                <a:latin typeface="Noto Sans CJK KR"/>
-              </a:rPr>
-              <a:t>•  하지만 최종 시간 측정 결과 개선 없음 — 진짜 병목이 "CUDA 커널 실행 자체"라는 사전 진단이 재확인됨, 채택하지 않고 안전하게 원복</a:t>
-            </a:r>
-          </a:p>
-        </p:txBody>
-      </p:sp>
-      <p:sp>
-        <p:nvSpPr>
-          <p:cNvPr id="8" name="TextBox 7"/>
-          <p:cNvSpPr txBox="1"/>
-          <p:nvPr/>
-        </p:nvSpPr>
-        <p:spPr>
-          <a:xfrm>
-            <a:off x="548640" y="6263640"/>
-            <a:ext cx="11094415" cy="502920"/>
+            <a:off x="548640" y="6035040"/>
+            <a:ext cx="11094415" cy="731520"/>
           </a:xfrm>
           <a:prstGeom prst="rect">
             <a:avLst/>
@@ -5491,7 +5396,7 @@
                 </a:solidFill>
                 <a:latin typeface="Noto Sans CJK KR"/>
               </a:rPr>
-              <a:t>성공한 것만 보여주면 신뢰가 안 감 — 위험한 시도를 안전하게 검증하고, 안 되면 되돌리는 과정 자체가 방법론.</a:t>
+              <a:t>왼쪽: 548개 실제 map() 호출을 iters×n_view(한 호출이 처리하는 "view-op" 수) 하나로 설명하면 R²=0.992 — gaussian 수(점 색깔)는 같은 x값 안에서도 시간을 거의 안 바꿈. 오른쪽: 그 회귀식을 항목별로 분해하면 "view-op당 고정비"가 gaussian-비례항의 3배, 픽셀-비례항은 사실상 0에 가까움.</a:t>
             </a:r>
           </a:p>
         </p:txBody>
@@ -5505,6 +5410,2178 @@
 </file>
 
 <file path=ppt/slides/slide17.xml><?xml version="1.0" encoding="utf-8"?>
+<p:sld xmlns:a="http://schemas.openxmlformats.org/drawingml/2006/main" xmlns:p="http://schemas.openxmlformats.org/presentationml/2006/main" xmlns:r="http://schemas.openxmlformats.org/officeDocument/2006/relationships">
+  <p:cSld>
+    <p:spTree>
+      <p:nvGrpSpPr>
+        <p:cNvPr id="1" name=""/>
+        <p:cNvGrpSpPr/>
+        <p:nvPr/>
+      </p:nvGrpSpPr>
+      <p:grpSpPr/>
+      <p:sp>
+        <p:nvSpPr>
+          <p:cNvPr id="2" name="Rectangle 1"/>
+          <p:cNvSpPr/>
+          <p:nvPr/>
+        </p:nvSpPr>
+        <p:spPr>
+          <a:xfrm>
+            <a:off x="0" y="0"/>
+            <a:ext cx="12191695" cy="6858000"/>
+          </a:xfrm>
+          <a:prstGeom prst="rect">
+            <a:avLst/>
+          </a:prstGeom>
+          <a:solidFill>
+            <a:srgbClr val="12151C"/>
+          </a:solidFill>
+          <a:ln>
+            <a:noFill/>
+          </a:ln>
+          <a:effectLst/>
+        </p:spPr>
+        <p:style>
+          <a:lnRef idx="1">
+            <a:schemeClr val="accent1"/>
+          </a:lnRef>
+          <a:fillRef idx="3">
+            <a:schemeClr val="accent1"/>
+          </a:fillRef>
+          <a:effectRef idx="2">
+            <a:schemeClr val="accent1"/>
+          </a:effectRef>
+          <a:fontRef idx="minor">
+            <a:schemeClr val="lt1"/>
+          </a:fontRef>
+        </p:style>
+        <p:txBody>
+          <a:bodyPr rtlCol="0" anchor="ctr"/>
+          <a:lstStyle/>
+          <a:p>
+            <a:pPr algn="ctr"/>
+          </a:p>
+        </p:txBody>
+      </p:sp>
+      <p:sp>
+        <p:nvSpPr>
+          <p:cNvPr id="3" name="TextBox 2"/>
+          <p:cNvSpPr txBox="1"/>
+          <p:nvPr/>
+        </p:nvSpPr>
+        <p:spPr>
+          <a:xfrm>
+            <a:off x="548640" y="320040"/>
+            <a:ext cx="11094415" cy="292608"/>
+          </a:xfrm>
+          <a:prstGeom prst="rect">
+            <a:avLst/>
+          </a:prstGeom>
+          <a:noFill/>
+        </p:spPr>
+        <p:txBody>
+          <a:bodyPr wrap="square" anchor="t">
+            <a:spAutoFit/>
+          </a:bodyPr>
+          <a:lstStyle/>
+          <a:p>
+            <a:pPr algn="l">
+              <a:lnSpc>
+                <a:spcPct val="100000"/>
+              </a:lnSpc>
+            </a:pPr>
+            <a:r>
+              <a:rPr sz="1200" b="1">
+                <a:solidFill>
+                  <a:srgbClr val="FFB454"/>
+                </a:solidFill>
+                <a:latin typeface="Noto Sans CJK KR"/>
+              </a:rPr>
+              <a:t>§3 · PHASE 5 · 수식</a:t>
+            </a:r>
+          </a:p>
+        </p:txBody>
+      </p:sp>
+      <p:sp>
+        <p:nvSpPr>
+          <p:cNvPr id="4" name="TextBox 3"/>
+          <p:cNvSpPr txBox="1"/>
+          <p:nvPr/>
+        </p:nvSpPr>
+        <p:spPr>
+          <a:xfrm>
+            <a:off x="548640" y="566928"/>
+            <a:ext cx="11094415" cy="548640"/>
+          </a:xfrm>
+          <a:prstGeom prst="rect">
+            <a:avLst/>
+          </a:prstGeom>
+          <a:noFill/>
+        </p:spPr>
+        <p:txBody>
+          <a:bodyPr wrap="square" anchor="t">
+            <a:spAutoFit/>
+          </a:bodyPr>
+          <a:lstStyle/>
+          <a:p>
+            <a:pPr algn="l">
+              <a:lnSpc>
+                <a:spcPct val="100000"/>
+              </a:lnSpc>
+            </a:pPr>
+            <a:r>
+              <a:rPr sz="2200" b="1">
+                <a:solidFill>
+                  <a:srgbClr val="E8ECF4"/>
+                </a:solidFill>
+                <a:latin typeface="Noto Sans CJK KR"/>
+              </a:rPr>
+              <a:t>실제로 피팅된 4개 관계식</a:t>
+            </a:r>
+          </a:p>
+        </p:txBody>
+      </p:sp>
+      <p:sp>
+        <p:nvSpPr>
+          <p:cNvPr id="5" name="Rectangle 4"/>
+          <p:cNvSpPr/>
+          <p:nvPr/>
+        </p:nvSpPr>
+        <p:spPr>
+          <a:xfrm>
+            <a:off x="548640" y="1078992"/>
+            <a:ext cx="11094415" cy="25400"/>
+          </a:xfrm>
+          <a:prstGeom prst="rect">
+            <a:avLst/>
+          </a:prstGeom>
+          <a:solidFill>
+            <a:srgbClr val="2A3242"/>
+          </a:solidFill>
+          <a:ln>
+            <a:noFill/>
+          </a:ln>
+          <a:effectLst/>
+        </p:spPr>
+        <p:style>
+          <a:lnRef idx="1">
+            <a:schemeClr val="accent1"/>
+          </a:lnRef>
+          <a:fillRef idx="3">
+            <a:schemeClr val="accent1"/>
+          </a:fillRef>
+          <a:effectRef idx="2">
+            <a:schemeClr val="accent1"/>
+          </a:effectRef>
+          <a:fontRef idx="minor">
+            <a:schemeClr val="lt1"/>
+          </a:fontRef>
+        </p:style>
+        <p:txBody>
+          <a:bodyPr rtlCol="0" anchor="ctr"/>
+          <a:lstStyle/>
+          <a:p>
+            <a:pPr algn="ctr"/>
+          </a:p>
+        </p:txBody>
+      </p:sp>
+      <p:sp>
+        <p:nvSpPr>
+          <p:cNvPr id="6" name="TextBox 5"/>
+          <p:cNvSpPr txBox="1"/>
+          <p:nvPr/>
+        </p:nvSpPr>
+        <p:spPr>
+          <a:xfrm>
+            <a:off x="548640" y="1188720"/>
+            <a:ext cx="11094415" cy="320040"/>
+          </a:xfrm>
+          <a:prstGeom prst="rect">
+            <a:avLst/>
+          </a:prstGeom>
+          <a:noFill/>
+        </p:spPr>
+        <p:txBody>
+          <a:bodyPr wrap="square" anchor="t">
+            <a:spAutoFit/>
+          </a:bodyPr>
+          <a:lstStyle/>
+          <a:p>
+            <a:pPr algn="l">
+              <a:lnSpc>
+                <a:spcPct val="100000"/>
+              </a:lnSpc>
+            </a:pPr>
+            <a:r>
+              <a:rPr sz="1200" b="0">
+                <a:solidFill>
+                  <a:srgbClr val="8B95AB"/>
+                </a:solidFill>
+                <a:latin typeface="Noto Sans CJK KR"/>
+              </a:rPr>
+              <a:t>직렬(GPU 경합 없음) 330개 실제 map_call 로그, 최소제곱(least-squares) 피팅</a:t>
+            </a:r>
+          </a:p>
+        </p:txBody>
+      </p:sp>
+      <p:sp>
+        <p:nvSpPr>
+          <p:cNvPr id="7" name="Rounded Rectangle 6"/>
+          <p:cNvSpPr/>
+          <p:nvPr/>
+        </p:nvSpPr>
+        <p:spPr>
+          <a:xfrm>
+            <a:off x="548640" y="1536192"/>
+            <a:ext cx="11094415" cy="914400"/>
+          </a:xfrm>
+          <a:prstGeom prst="roundRect">
+            <a:avLst>
+              <a:gd name="adj" fmla="val 6000"/>
+            </a:avLst>
+          </a:prstGeom>
+          <a:solidFill>
+            <a:srgbClr val="1A1F2B"/>
+          </a:solidFill>
+          <a:ln w="12700">
+            <a:solidFill>
+              <a:srgbClr val="2A3242"/>
+            </a:solidFill>
+          </a:ln>
+          <a:effectLst/>
+        </p:spPr>
+        <p:style>
+          <a:lnRef idx="1">
+            <a:schemeClr val="accent1"/>
+          </a:lnRef>
+          <a:fillRef idx="3">
+            <a:schemeClr val="accent1"/>
+          </a:fillRef>
+          <a:effectRef idx="2">
+            <a:schemeClr val="accent1"/>
+          </a:effectRef>
+          <a:fontRef idx="minor">
+            <a:schemeClr val="lt1"/>
+          </a:fontRef>
+        </p:style>
+        <p:txBody>
+          <a:bodyPr rtlCol="0" anchor="ctr" wrap="square" lIns="182880" rIns="182880" tIns="91440" bIns="91440"/>
+          <a:lstStyle/>
+          <a:p>
+            <a:pPr algn="l">
+              <a:lnSpc>
+                <a:spcPct val="115000"/>
+              </a:lnSpc>
+            </a:pPr>
+            <a:r>
+              <a:rPr sz="1150" b="1">
+                <a:solidFill>
+                  <a:srgbClr val="FFB454"/>
+                </a:solidFill>
+                <a:latin typeface="Noto Sans Mono CJK KR"/>
+              </a:rPr>
+              <a:t>iters  </a:t>
+            </a:r>
+            <a:r>
+              <a:rPr sz="1100">
+                <a:solidFill>
+                  <a:srgbClr val="E8ECF4"/>
+                </a:solidFill>
+                <a:latin typeface="Noto Sans CJK KR"/>
+              </a:rPr>
+              <a:t>그 map() 호출에서 gaussian을 SGD로 최적화하는 반복 횟수 (정규 keyframe=7, 초기화=90~131 등)</a:t>
+            </a:r>
+          </a:p>
+          <a:p>
+            <a:pPr algn="l">
+              <a:lnSpc>
+                <a:spcPct val="115000"/>
+              </a:lnSpc>
+            </a:pPr>
+            <a:r>
+              <a:rPr sz="1150" b="1">
+                <a:solidFill>
+                  <a:srgbClr val="FFB454"/>
+                </a:solidFill>
+                <a:latin typeface="Noto Sans Mono CJK KR"/>
+              </a:rPr>
+              <a:t>n_view  </a:t>
+            </a:r>
+            <a:r>
+              <a:rPr sz="1100">
+                <a:solidFill>
+                  <a:srgbClr val="E8ECF4"/>
+                </a:solidFill>
+                <a:latin typeface="Noto Sans CJK KR"/>
+              </a:rPr>
+              <a:t>그 반복 1회마다 렌더링해서 loss를 재는 카메라 뷰 개수 (window+global 곁눈질 합)</a:t>
+            </a:r>
+          </a:p>
+          <a:p>
+            <a:pPr algn="l">
+              <a:lnSpc>
+                <a:spcPct val="115000"/>
+              </a:lnSpc>
+            </a:pPr>
+            <a:r>
+              <a:rPr sz="1150" b="1">
+                <a:solidFill>
+                  <a:srgbClr val="FFB454"/>
+                </a:solidFill>
+                <a:latin typeface="Noto Sans Mono CJK KR"/>
+              </a:rPr>
+              <a:t>n_gauss  </a:t>
+            </a:r>
+            <a:r>
+              <a:rPr sz="1100">
+                <a:solidFill>
+                  <a:srgbClr val="E8ECF4"/>
+                </a:solidFill>
+                <a:latin typeface="Noto Sans CJK KR"/>
+              </a:rPr>
+              <a:t>그 시점의 전체 gaussian 개수</a:t>
+            </a:r>
+          </a:p>
+          <a:p>
+            <a:pPr algn="l">
+              <a:lnSpc>
+                <a:spcPct val="115000"/>
+              </a:lnSpc>
+            </a:pPr>
+            <a:r>
+              <a:rPr sz="1150" b="1">
+                <a:solidFill>
+                  <a:srgbClr val="FFB454"/>
+                </a:solidFill>
+                <a:latin typeface="Noto Sans Mono CJK KR"/>
+              </a:rPr>
+              <a:t>pixratio  </a:t>
+            </a:r>
+            <a:r>
+              <a:rPr sz="1100">
+                <a:solidFill>
+                  <a:srgbClr val="E8ECF4"/>
+                </a:solidFill>
+                <a:latin typeface="Noto Sans CJK KR"/>
+              </a:rPr>
+              <a:t>렌더 해상도 배율 = 1/render_downsample² (원해상도면 1)</a:t>
+            </a:r>
+          </a:p>
+          <a:p>
+            <a:pPr algn="l">
+              <a:lnSpc>
+                <a:spcPct val="115000"/>
+              </a:lnSpc>
+            </a:pPr>
+            <a:r>
+              <a:rPr sz="1150" b="1">
+                <a:solidFill>
+                  <a:srgbClr val="FFB454"/>
+                </a:solidFill>
+                <a:latin typeface="Noto Sans Mono CJK KR"/>
+              </a:rPr>
+              <a:t>ncalls  </a:t>
+            </a:r>
+            <a:r>
+              <a:rPr sz="1100">
+                <a:solidFill>
+                  <a:srgbClr val="E8ECF4"/>
+                </a:solidFill>
+                <a:latin typeface="Noto Sans CJK KR"/>
+              </a:rPr>
+              <a:t>= iters × n_view — 한 번의 map() 호출이 처리하는 총 "view-op" 수 (rasterize/loss_compute는 view마다 도니까 이 단위가 자연스러움)</a:t>
+            </a:r>
+          </a:p>
+        </p:txBody>
+      </p:sp>
+      <p:sp>
+        <p:nvSpPr>
+          <p:cNvPr id="8" name="Rounded Rectangle 7"/>
+          <p:cNvSpPr/>
+          <p:nvPr/>
+        </p:nvSpPr>
+        <p:spPr>
+          <a:xfrm>
+            <a:off x="548640" y="2606040"/>
+            <a:ext cx="5410047" cy="1417320"/>
+          </a:xfrm>
+          <a:prstGeom prst="roundRect">
+            <a:avLst>
+              <a:gd name="adj" fmla="val 5000"/>
+            </a:avLst>
+          </a:prstGeom>
+          <a:solidFill>
+            <a:srgbClr val="1A1F2B"/>
+          </a:solidFill>
+          <a:ln w="15875">
+            <a:solidFill>
+              <a:srgbClr val="4C86EA"/>
+            </a:solidFill>
+          </a:ln>
+          <a:effectLst/>
+        </p:spPr>
+        <p:style>
+          <a:lnRef idx="1">
+            <a:schemeClr val="accent1"/>
+          </a:lnRef>
+          <a:fillRef idx="3">
+            <a:schemeClr val="accent1"/>
+          </a:fillRef>
+          <a:effectRef idx="2">
+            <a:schemeClr val="accent1"/>
+          </a:effectRef>
+          <a:fontRef idx="minor">
+            <a:schemeClr val="lt1"/>
+          </a:fontRef>
+        </p:style>
+        <p:txBody>
+          <a:bodyPr rtlCol="0" anchor="ctr" wrap="square" lIns="201168" rIns="201168" tIns="128016" bIns="128016"/>
+          <a:lstStyle/>
+          <a:p>
+            <a:pPr algn="ctr"/>
+            <a:r>
+              <a:rPr sz="1400" b="1">
+                <a:solidFill>
+                  <a:srgbClr val="4C86EA"/>
+                </a:solidFill>
+                <a:latin typeface="Noto Sans CJK KR"/>
+              </a:rPr>
+              <a:t>rasterize   (R² = 0.992)</a:t>
+            </a:r>
+          </a:p>
+          <a:p>
+            <a:pPr>
+              <a:lnSpc>
+                <a:spcPct val="125000"/>
+              </a:lnSpc>
+              <a:spcBef>
+                <a:spcPts val="700"/>
+              </a:spcBef>
+            </a:pPr>
+            <a:r>
+              <a:rPr sz="1300">
+                <a:solidFill>
+                  <a:srgbClr val="E8ECF4"/>
+                </a:solidFill>
+                <a:latin typeface="Noto Sans Mono CJK KR"/>
+              </a:rPr>
+              <a:t>= 1.473·ncalls</a:t>
+            </a:r>
+          </a:p>
+          <a:p>
+            <a:pPr>
+              <a:lnSpc>
+                <a:spcPct val="125000"/>
+              </a:lnSpc>
+              <a:spcBef>
+                <a:spcPts val="700"/>
+              </a:spcBef>
+            </a:pPr>
+            <a:r>
+              <a:rPr sz="1300">
+                <a:solidFill>
+                  <a:srgbClr val="E8ECF4"/>
+                </a:solidFill>
+                <a:latin typeface="Noto Sans Mono CJK KR"/>
+              </a:rPr>
+              <a:t>+ 0.00545·ncalls·(n_gauss/1000)</a:t>
+            </a:r>
+          </a:p>
+          <a:p>
+            <a:pPr>
+              <a:lnSpc>
+                <a:spcPct val="125000"/>
+              </a:lnSpc>
+              <a:spcBef>
+                <a:spcPts val="700"/>
+              </a:spcBef>
+            </a:pPr>
+            <a:r>
+              <a:rPr sz="1300">
+                <a:solidFill>
+                  <a:srgbClr val="E8ECF4"/>
+                </a:solidFill>
+                <a:latin typeface="Noto Sans Mono CJK KR"/>
+              </a:rPr>
+              <a:t>− 0.0346·ncalls·pixratio   [ms]</a:t>
+            </a:r>
+          </a:p>
+        </p:txBody>
+      </p:sp>
+      <p:sp>
+        <p:nvSpPr>
+          <p:cNvPr id="9" name="Rounded Rectangle 8"/>
+          <p:cNvSpPr/>
+          <p:nvPr/>
+        </p:nvSpPr>
+        <p:spPr>
+          <a:xfrm>
+            <a:off x="6233007" y="2606040"/>
+            <a:ext cx="5410047" cy="1417320"/>
+          </a:xfrm>
+          <a:prstGeom prst="roundRect">
+            <a:avLst>
+              <a:gd name="adj" fmla="val 5000"/>
+            </a:avLst>
+          </a:prstGeom>
+          <a:solidFill>
+            <a:srgbClr val="1A1F2B"/>
+          </a:solidFill>
+          <a:ln w="15875">
+            <a:solidFill>
+              <a:srgbClr val="FFB454"/>
+            </a:solidFill>
+          </a:ln>
+          <a:effectLst/>
+        </p:spPr>
+        <p:style>
+          <a:lnRef idx="1">
+            <a:schemeClr val="accent1"/>
+          </a:lnRef>
+          <a:fillRef idx="3">
+            <a:schemeClr val="accent1"/>
+          </a:fillRef>
+          <a:effectRef idx="2">
+            <a:schemeClr val="accent1"/>
+          </a:effectRef>
+          <a:fontRef idx="minor">
+            <a:schemeClr val="lt1"/>
+          </a:fontRef>
+        </p:style>
+        <p:txBody>
+          <a:bodyPr rtlCol="0" anchor="ctr" wrap="square" lIns="201168" rIns="201168" tIns="128016" bIns="128016"/>
+          <a:lstStyle/>
+          <a:p>
+            <a:pPr algn="ctr"/>
+            <a:r>
+              <a:rPr sz="1400" b="1">
+                <a:solidFill>
+                  <a:srgbClr val="FFB454"/>
+                </a:solidFill>
+                <a:latin typeface="Noto Sans CJK KR"/>
+              </a:rPr>
+              <a:t>loss_compute   (R² = 0.994)</a:t>
+            </a:r>
+          </a:p>
+          <a:p>
+            <a:pPr>
+              <a:lnSpc>
+                <a:spcPct val="125000"/>
+              </a:lnSpc>
+              <a:spcBef>
+                <a:spcPts val="700"/>
+              </a:spcBef>
+            </a:pPr>
+            <a:r>
+              <a:rPr sz="1300">
+                <a:solidFill>
+                  <a:srgbClr val="E8ECF4"/>
+                </a:solidFill>
+                <a:latin typeface="Noto Sans Mono CJK KR"/>
+              </a:rPr>
+              <a:t>= 0.956·ncalls</a:t>
+            </a:r>
+          </a:p>
+          <a:p>
+            <a:pPr>
+              <a:lnSpc>
+                <a:spcPct val="125000"/>
+              </a:lnSpc>
+              <a:spcBef>
+                <a:spcPts val="700"/>
+              </a:spcBef>
+            </a:pPr>
+            <a:r>
+              <a:rPr sz="1300">
+                <a:solidFill>
+                  <a:srgbClr val="E8ECF4"/>
+                </a:solidFill>
+                <a:latin typeface="Noto Sans Mono CJK KR"/>
+              </a:rPr>
+              <a:t>+ 0.00207·ncalls·(n_gauss/1000)</a:t>
+            </a:r>
+          </a:p>
+          <a:p>
+            <a:pPr>
+              <a:lnSpc>
+                <a:spcPct val="125000"/>
+              </a:lnSpc>
+              <a:spcBef>
+                <a:spcPts val="700"/>
+              </a:spcBef>
+            </a:pPr>
+            <a:r>
+              <a:rPr sz="1300">
+                <a:solidFill>
+                  <a:srgbClr val="E8ECF4"/>
+                </a:solidFill>
+                <a:latin typeface="Noto Sans Mono CJK KR"/>
+              </a:rPr>
+              <a:t>− 0.0241·ncalls·pixratio   [ms]</a:t>
+            </a:r>
+          </a:p>
+        </p:txBody>
+      </p:sp>
+      <p:sp>
+        <p:nvSpPr>
+          <p:cNvPr id="10" name="Rounded Rectangle 9"/>
+          <p:cNvSpPr/>
+          <p:nvPr/>
+        </p:nvSpPr>
+        <p:spPr>
+          <a:xfrm>
+            <a:off x="548640" y="4224528"/>
+            <a:ext cx="5410047" cy="1417320"/>
+          </a:xfrm>
+          <a:prstGeom prst="roundRect">
+            <a:avLst>
+              <a:gd name="adj" fmla="val 5000"/>
+            </a:avLst>
+          </a:prstGeom>
+          <a:solidFill>
+            <a:srgbClr val="1A1F2B"/>
+          </a:solidFill>
+          <a:ln w="15875">
+            <a:solidFill>
+              <a:srgbClr val="A479E0"/>
+            </a:solidFill>
+          </a:ln>
+          <a:effectLst/>
+        </p:spPr>
+        <p:style>
+          <a:lnRef idx="1">
+            <a:schemeClr val="accent1"/>
+          </a:lnRef>
+          <a:fillRef idx="3">
+            <a:schemeClr val="accent1"/>
+          </a:fillRef>
+          <a:effectRef idx="2">
+            <a:schemeClr val="accent1"/>
+          </a:effectRef>
+          <a:fontRef idx="minor">
+            <a:schemeClr val="lt1"/>
+          </a:fontRef>
+        </p:style>
+        <p:txBody>
+          <a:bodyPr rtlCol="0" anchor="ctr" wrap="square" lIns="201168" rIns="201168" tIns="128016" bIns="128016"/>
+          <a:lstStyle/>
+          <a:p>
+            <a:pPr algn="ctr"/>
+            <a:r>
+              <a:rPr sz="1400" b="1">
+                <a:solidFill>
+                  <a:srgbClr val="A479E0"/>
+                </a:solidFill>
+                <a:latin typeface="Noto Sans CJK KR"/>
+              </a:rPr>
+              <a:t>backward   (R² = 0.929)</a:t>
+            </a:r>
+          </a:p>
+          <a:p>
+            <a:pPr>
+              <a:lnSpc>
+                <a:spcPct val="125000"/>
+              </a:lnSpc>
+              <a:spcBef>
+                <a:spcPts val="700"/>
+              </a:spcBef>
+            </a:pPr>
+            <a:r>
+              <a:rPr sz="1300">
+                <a:solidFill>
+                  <a:srgbClr val="E8ECF4"/>
+                </a:solidFill>
+                <a:latin typeface="Noto Sans Mono CJK KR"/>
+              </a:rPr>
+              <a:t>= −1.623·iters</a:t>
+            </a:r>
+          </a:p>
+          <a:p>
+            <a:pPr>
+              <a:lnSpc>
+                <a:spcPct val="125000"/>
+              </a:lnSpc>
+              <a:spcBef>
+                <a:spcPts val="700"/>
+              </a:spcBef>
+            </a:pPr>
+            <a:r>
+              <a:rPr sz="1300">
+                <a:solidFill>
+                  <a:srgbClr val="E8ECF4"/>
+                </a:solidFill>
+                <a:latin typeface="Noto Sans Mono CJK KR"/>
+              </a:rPr>
+              <a:t>+ 1.126·iters·n_view</a:t>
+            </a:r>
+          </a:p>
+          <a:p>
+            <a:pPr>
+              <a:lnSpc>
+                <a:spcPct val="125000"/>
+              </a:lnSpc>
+              <a:spcBef>
+                <a:spcPts val="700"/>
+              </a:spcBef>
+            </a:pPr>
+            <a:r>
+              <a:rPr sz="1300">
+                <a:solidFill>
+                  <a:srgbClr val="E8ECF4"/>
+                </a:solidFill>
+                <a:latin typeface="Noto Sans Mono CJK KR"/>
+              </a:rPr>
+              <a:t>+ 0.126·iters·(n_gauss/1000)   [ms]</a:t>
+            </a:r>
+          </a:p>
+        </p:txBody>
+      </p:sp>
+      <p:sp>
+        <p:nvSpPr>
+          <p:cNvPr id="11" name="Rounded Rectangle 10"/>
+          <p:cNvSpPr/>
+          <p:nvPr/>
+        </p:nvSpPr>
+        <p:spPr>
+          <a:xfrm>
+            <a:off x="6233007" y="4224528"/>
+            <a:ext cx="5410047" cy="1417320"/>
+          </a:xfrm>
+          <a:prstGeom prst="roundRect">
+            <a:avLst>
+              <a:gd name="adj" fmla="val 5000"/>
+            </a:avLst>
+          </a:prstGeom>
+          <a:solidFill>
+            <a:srgbClr val="1A1F2B"/>
+          </a:solidFill>
+          <a:ln w="15875">
+            <a:solidFill>
+              <a:srgbClr val="4CC98A"/>
+            </a:solidFill>
+          </a:ln>
+          <a:effectLst/>
+        </p:spPr>
+        <p:style>
+          <a:lnRef idx="1">
+            <a:schemeClr val="accent1"/>
+          </a:lnRef>
+          <a:fillRef idx="3">
+            <a:schemeClr val="accent1"/>
+          </a:fillRef>
+          <a:effectRef idx="2">
+            <a:schemeClr val="accent1"/>
+          </a:effectRef>
+          <a:fontRef idx="minor">
+            <a:schemeClr val="lt1"/>
+          </a:fontRef>
+        </p:style>
+        <p:txBody>
+          <a:bodyPr rtlCol="0" anchor="ctr" wrap="square" lIns="201168" rIns="201168" tIns="128016" bIns="128016"/>
+          <a:lstStyle/>
+          <a:p>
+            <a:pPr algn="ctr"/>
+            <a:r>
+              <a:rPr sz="1400" b="1">
+                <a:solidFill>
+                  <a:srgbClr val="4CC98A"/>
+                </a:solidFill>
+                <a:latin typeface="Noto Sans CJK KR"/>
+              </a:rPr>
+              <a:t>optimizer_step   (R² = 0.998)</a:t>
+            </a:r>
+          </a:p>
+          <a:p>
+            <a:pPr>
+              <a:lnSpc>
+                <a:spcPct val="125000"/>
+              </a:lnSpc>
+              <a:spcBef>
+                <a:spcPts val="700"/>
+              </a:spcBef>
+            </a:pPr>
+            <a:r>
+              <a:rPr sz="1300">
+                <a:solidFill>
+                  <a:srgbClr val="E8ECF4"/>
+                </a:solidFill>
+                <a:latin typeface="Noto Sans Mono CJK KR"/>
+              </a:rPr>
+              <a:t>= 1.739·iters</a:t>
+            </a:r>
+          </a:p>
+          <a:p>
+            <a:pPr>
+              <a:lnSpc>
+                <a:spcPct val="125000"/>
+              </a:lnSpc>
+              <a:spcBef>
+                <a:spcPts val="700"/>
+              </a:spcBef>
+            </a:pPr>
+            <a:r>
+              <a:rPr sz="1300">
+                <a:solidFill>
+                  <a:srgbClr val="E8ECF4"/>
+                </a:solidFill>
+                <a:latin typeface="Noto Sans Mono CJK KR"/>
+              </a:rPr>
+              <a:t>− 0.0946·iters·n_view</a:t>
+            </a:r>
+          </a:p>
+          <a:p>
+            <a:pPr>
+              <a:lnSpc>
+                <a:spcPct val="125000"/>
+              </a:lnSpc>
+              <a:spcBef>
+                <a:spcPts val="700"/>
+              </a:spcBef>
+            </a:pPr>
+            <a:r>
+              <a:rPr sz="1300">
+                <a:solidFill>
+                  <a:srgbClr val="E8ECF4"/>
+                </a:solidFill>
+                <a:latin typeface="Noto Sans Mono CJK KR"/>
+              </a:rPr>
+              <a:t>+ 0.00093·iters·(n_gauss/1000)   [ms]</a:t>
+            </a:r>
+          </a:p>
+        </p:txBody>
+      </p:sp>
+      <p:sp>
+        <p:nvSpPr>
+          <p:cNvPr id="12" name="TextBox 11"/>
+          <p:cNvSpPr txBox="1"/>
+          <p:nvPr/>
+        </p:nvSpPr>
+        <p:spPr>
+          <a:xfrm>
+            <a:off x="548640" y="5779008"/>
+            <a:ext cx="11094415" cy="548640"/>
+          </a:xfrm>
+          <a:prstGeom prst="rect">
+            <a:avLst/>
+          </a:prstGeom>
+          <a:noFill/>
+        </p:spPr>
+        <p:txBody>
+          <a:bodyPr wrap="square" anchor="t">
+            <a:spAutoFit/>
+          </a:bodyPr>
+          <a:lstStyle/>
+          <a:p>
+            <a:pPr algn="l">
+              <a:lnSpc>
+                <a:spcPct val="120000"/>
+              </a:lnSpc>
+            </a:pPr>
+            <a:r>
+              <a:rPr sz="1100" b="0">
+                <a:solidFill>
+                  <a:srgbClr val="8B95AB"/>
+                </a:solidFill>
+                <a:latin typeface="Noto Sans CJK KR"/>
+              </a:rPr>
+              <a:t>네 식 전부 "iters·n_view" 항의 계수가 gaussian/픽셀 항보다 압도적으로 큼(또는 그 항 자체가 없음) — 그래서 "n_view(카메라 수)가 시간을 지배한다"는 결론이 감이 아니라 계수로 확정됨.</a:t>
+            </a:r>
+          </a:p>
+        </p:txBody>
+      </p:sp>
+    </p:spTree>
+  </p:cSld>
+  <p:clrMapOvr>
+    <a:masterClrMapping/>
+  </p:clrMapOvr>
+</p:sld>
+</file>
+
+<file path=ppt/slides/slide18.xml><?xml version="1.0" encoding="utf-8"?>
+<p:sld xmlns:a="http://schemas.openxmlformats.org/drawingml/2006/main" xmlns:p="http://schemas.openxmlformats.org/presentationml/2006/main" xmlns:r="http://schemas.openxmlformats.org/officeDocument/2006/relationships">
+  <p:cSld>
+    <p:spTree>
+      <p:nvGrpSpPr>
+        <p:cNvPr id="1" name=""/>
+        <p:cNvGrpSpPr/>
+        <p:nvPr/>
+      </p:nvGrpSpPr>
+      <p:grpSpPr/>
+      <p:sp>
+        <p:nvSpPr>
+          <p:cNvPr id="2" name="Rectangle 1"/>
+          <p:cNvSpPr/>
+          <p:nvPr/>
+        </p:nvSpPr>
+        <p:spPr>
+          <a:xfrm>
+            <a:off x="0" y="0"/>
+            <a:ext cx="12191695" cy="6858000"/>
+          </a:xfrm>
+          <a:prstGeom prst="rect">
+            <a:avLst/>
+          </a:prstGeom>
+          <a:solidFill>
+            <a:srgbClr val="12151C"/>
+          </a:solidFill>
+          <a:ln>
+            <a:noFill/>
+          </a:ln>
+          <a:effectLst/>
+        </p:spPr>
+        <p:style>
+          <a:lnRef idx="1">
+            <a:schemeClr val="accent1"/>
+          </a:lnRef>
+          <a:fillRef idx="3">
+            <a:schemeClr val="accent1"/>
+          </a:fillRef>
+          <a:effectRef idx="2">
+            <a:schemeClr val="accent1"/>
+          </a:effectRef>
+          <a:fontRef idx="minor">
+            <a:schemeClr val="lt1"/>
+          </a:fontRef>
+        </p:style>
+        <p:txBody>
+          <a:bodyPr rtlCol="0" anchor="ctr"/>
+          <a:lstStyle/>
+          <a:p>
+            <a:pPr algn="ctr"/>
+          </a:p>
+        </p:txBody>
+      </p:sp>
+      <p:sp>
+        <p:nvSpPr>
+          <p:cNvPr id="3" name="TextBox 2"/>
+          <p:cNvSpPr txBox="1"/>
+          <p:nvPr/>
+        </p:nvSpPr>
+        <p:spPr>
+          <a:xfrm>
+            <a:off x="548640" y="320040"/>
+            <a:ext cx="11094415" cy="292608"/>
+          </a:xfrm>
+          <a:prstGeom prst="rect">
+            <a:avLst/>
+          </a:prstGeom>
+          <a:noFill/>
+        </p:spPr>
+        <p:txBody>
+          <a:bodyPr wrap="square" anchor="t">
+            <a:spAutoFit/>
+          </a:bodyPr>
+          <a:lstStyle/>
+          <a:p>
+            <a:pPr algn="l">
+              <a:lnSpc>
+                <a:spcPct val="100000"/>
+              </a:lnSpc>
+            </a:pPr>
+            <a:r>
+              <a:rPr sz="1200" b="1">
+                <a:solidFill>
+                  <a:srgbClr val="FFB454"/>
+                </a:solidFill>
+                <a:latin typeface="Noto Sans CJK KR"/>
+              </a:rPr>
+              <a:t>§3 · PHASE 5~7</a:t>
+            </a:r>
+          </a:p>
+        </p:txBody>
+      </p:sp>
+      <p:sp>
+        <p:nvSpPr>
+          <p:cNvPr id="4" name="TextBox 3"/>
+          <p:cNvSpPr txBox="1"/>
+          <p:nvPr/>
+        </p:nvSpPr>
+        <p:spPr>
+          <a:xfrm>
+            <a:off x="548640" y="566928"/>
+            <a:ext cx="11094415" cy="548640"/>
+          </a:xfrm>
+          <a:prstGeom prst="rect">
+            <a:avLst/>
+          </a:prstGeom>
+          <a:noFill/>
+        </p:spPr>
+        <p:txBody>
+          <a:bodyPr wrap="square" anchor="t">
+            <a:spAutoFit/>
+          </a:bodyPr>
+          <a:lstStyle/>
+          <a:p>
+            <a:pPr algn="l">
+              <a:lnSpc>
+                <a:spcPct val="100000"/>
+              </a:lnSpc>
+            </a:pPr>
+            <a:r>
+              <a:rPr sz="2200" b="1">
+                <a:solidFill>
+                  <a:srgbClr val="E8ECF4"/>
+                </a:solidFill>
+                <a:latin typeface="Noto Sans CJK KR"/>
+              </a:rPr>
+              <a:t>회귀분석으로 규명한 관계식, 그리고 품질까지</a:t>
+            </a:r>
+          </a:p>
+        </p:txBody>
+      </p:sp>
+      <p:sp>
+        <p:nvSpPr>
+          <p:cNvPr id="5" name="Rectangle 4"/>
+          <p:cNvSpPr/>
+          <p:nvPr/>
+        </p:nvSpPr>
+        <p:spPr>
+          <a:xfrm>
+            <a:off x="548640" y="1078992"/>
+            <a:ext cx="11094415" cy="25400"/>
+          </a:xfrm>
+          <a:prstGeom prst="rect">
+            <a:avLst/>
+          </a:prstGeom>
+          <a:solidFill>
+            <a:srgbClr val="2A3242"/>
+          </a:solidFill>
+          <a:ln>
+            <a:noFill/>
+          </a:ln>
+          <a:effectLst/>
+        </p:spPr>
+        <p:style>
+          <a:lnRef idx="1">
+            <a:schemeClr val="accent1"/>
+          </a:lnRef>
+          <a:fillRef idx="3">
+            <a:schemeClr val="accent1"/>
+          </a:fillRef>
+          <a:effectRef idx="2">
+            <a:schemeClr val="accent1"/>
+          </a:effectRef>
+          <a:fontRef idx="minor">
+            <a:schemeClr val="lt1"/>
+          </a:fontRef>
+        </p:style>
+        <p:txBody>
+          <a:bodyPr rtlCol="0" anchor="ctr"/>
+          <a:lstStyle/>
+          <a:p>
+            <a:pPr algn="ctr"/>
+          </a:p>
+        </p:txBody>
+      </p:sp>
+      <p:pic>
+        <p:nvPicPr>
+          <p:cNvPr id="6" name="Picture 5" descr="fig_exp56_phase67.png"/>
+          <p:cNvPicPr>
+            <a:picLocks noChangeAspect="1"/>
+          </p:cNvPicPr>
+          <p:nvPr/>
+        </p:nvPicPr>
+        <p:blipFill>
+          <a:blip r:embed="rId2"/>
+          <a:stretch>
+            <a:fillRect/>
+          </a:stretch>
+        </p:blipFill>
+        <p:spPr>
+          <a:xfrm>
+            <a:off x="2137960" y="1234440"/>
+            <a:ext cx="7915774" cy="3108960"/>
+          </a:xfrm>
+          <a:prstGeom prst="rect">
+            <a:avLst/>
+          </a:prstGeom>
+        </p:spPr>
+      </p:pic>
+      <p:sp>
+        <p:nvSpPr>
+          <p:cNvPr id="7" name="TextBox 6"/>
+          <p:cNvSpPr txBox="1"/>
+          <p:nvPr/>
+        </p:nvSpPr>
+        <p:spPr>
+          <a:xfrm>
+            <a:off x="548640" y="4526280"/>
+            <a:ext cx="11094415" cy="1737360"/>
+          </a:xfrm>
+          <a:prstGeom prst="rect">
+            <a:avLst/>
+          </a:prstGeom>
+          <a:noFill/>
+        </p:spPr>
+        <p:txBody>
+          <a:bodyPr wrap="square">
+            <a:spAutoFit/>
+          </a:bodyPr>
+          <a:lstStyle/>
+          <a:p>
+            <a:pPr>
+              <a:lnSpc>
+                <a:spcPct val="122000"/>
+              </a:lnSpc>
+              <a:spcAft>
+                <a:spcPts val="800"/>
+              </a:spcAft>
+            </a:pPr>
+            <a:r>
+              <a:rPr sz="1200">
+                <a:solidFill>
+                  <a:srgbClr val="E8ECF4"/>
+                </a:solidFill>
+                <a:latin typeface="Noto Sans CJK KR"/>
+              </a:rPr>
+              <a:t>•  548개 실제 map() 호출 데이터로 회귀분석 — iters×n_view(반복 횟수×카메라 수)가 시간을 지배, gaussian 수·해상도는 부차적(R²=0.93~0.998)</a:t>
+            </a:r>
+          </a:p>
+          <a:p>
+            <a:pPr>
+              <a:lnSpc>
+                <a:spcPct val="122000"/>
+              </a:lnSpc>
+              <a:spcAft>
+                <a:spcPts val="800"/>
+              </a:spcAft>
+            </a:pPr>
+            <a:r>
+              <a:rPr sz="1200">
+                <a:solidFill>
+                  <a:srgbClr val="E8ECF4"/>
+                </a:solidFill>
+                <a:latin typeface="Noto Sans CJK KR"/>
+              </a:rPr>
+              <a:t>•  "카메라 뷰를 늘리면 품질이 좋아지지 않을까?" → window(프론티어) 자체를 키우면 오히려 PSNR 악화(−1.1~3.5dB) — 기각. 대신 프론티어는 그대로 두고 과거-keyframe 곁눈질 비중만 늘리기 → PSNR 개선, 시간 비용 무시할 수준 — 채택</a:t>
+            </a:r>
+          </a:p>
+        </p:txBody>
+      </p:sp>
+      <p:sp>
+        <p:nvSpPr>
+          <p:cNvPr id="8" name="TextBox 7"/>
+          <p:cNvSpPr txBox="1"/>
+          <p:nvPr/>
+        </p:nvSpPr>
+        <p:spPr>
+          <a:xfrm>
+            <a:off x="548640" y="6263640"/>
+            <a:ext cx="11094415" cy="457200"/>
+          </a:xfrm>
+          <a:prstGeom prst="rect">
+            <a:avLst/>
+          </a:prstGeom>
+          <a:noFill/>
+        </p:spPr>
+        <p:txBody>
+          <a:bodyPr wrap="square" anchor="t">
+            <a:spAutoFit/>
+          </a:bodyPr>
+          <a:lstStyle/>
+          <a:p>
+            <a:pPr algn="l">
+              <a:lnSpc>
+                <a:spcPct val="120000"/>
+              </a:lnSpc>
+            </a:pPr>
+            <a:r>
+              <a:rPr sz="1100" b="0">
+                <a:solidFill>
+                  <a:srgbClr val="8B95AB"/>
+                </a:solidFill>
+                <a:latin typeface="Noto Sans CJK KR"/>
+              </a:rPr>
+              <a:t>같은 "뷰를 늘린다"는 아이디어인데 방법에 따라 정반대 결과 — 다음 로드맵(dense-frame supervision)에 대한 경고이기도 함.</a:t>
+            </a:r>
+          </a:p>
+        </p:txBody>
+      </p:sp>
+    </p:spTree>
+  </p:cSld>
+  <p:clrMapOvr>
+    <a:masterClrMapping/>
+  </p:clrMapOvr>
+</p:sld>
+</file>
+
+<file path=ppt/slides/slide19.xml><?xml version="1.0" encoding="utf-8"?>
+<p:sld xmlns:a="http://schemas.openxmlformats.org/drawingml/2006/main" xmlns:p="http://schemas.openxmlformats.org/presentationml/2006/main" xmlns:r="http://schemas.openxmlformats.org/officeDocument/2006/relationships">
+  <p:cSld>
+    <p:spTree>
+      <p:nvGrpSpPr>
+        <p:cNvPr id="1" name=""/>
+        <p:cNvGrpSpPr/>
+        <p:nvPr/>
+      </p:nvGrpSpPr>
+      <p:grpSpPr/>
+      <p:sp>
+        <p:nvSpPr>
+          <p:cNvPr id="2" name="Rectangle 1"/>
+          <p:cNvSpPr/>
+          <p:nvPr/>
+        </p:nvSpPr>
+        <p:spPr>
+          <a:xfrm>
+            <a:off x="0" y="0"/>
+            <a:ext cx="12191695" cy="6858000"/>
+          </a:xfrm>
+          <a:prstGeom prst="rect">
+            <a:avLst/>
+          </a:prstGeom>
+          <a:solidFill>
+            <a:srgbClr val="12151C"/>
+          </a:solidFill>
+          <a:ln>
+            <a:noFill/>
+          </a:ln>
+          <a:effectLst/>
+        </p:spPr>
+        <p:style>
+          <a:lnRef idx="1">
+            <a:schemeClr val="accent1"/>
+          </a:lnRef>
+          <a:fillRef idx="3">
+            <a:schemeClr val="accent1"/>
+          </a:fillRef>
+          <a:effectRef idx="2">
+            <a:schemeClr val="accent1"/>
+          </a:effectRef>
+          <a:fontRef idx="minor">
+            <a:schemeClr val="lt1"/>
+          </a:fontRef>
+        </p:style>
+        <p:txBody>
+          <a:bodyPr rtlCol="0" anchor="ctr"/>
+          <a:lstStyle/>
+          <a:p>
+            <a:pPr algn="ctr"/>
+          </a:p>
+        </p:txBody>
+      </p:sp>
+      <p:sp>
+        <p:nvSpPr>
+          <p:cNvPr id="3" name="TextBox 2"/>
+          <p:cNvSpPr txBox="1"/>
+          <p:nvPr/>
+        </p:nvSpPr>
+        <p:spPr>
+          <a:xfrm>
+            <a:off x="548640" y="320040"/>
+            <a:ext cx="11094415" cy="292608"/>
+          </a:xfrm>
+          <a:prstGeom prst="rect">
+            <a:avLst/>
+          </a:prstGeom>
+          <a:noFill/>
+        </p:spPr>
+        <p:txBody>
+          <a:bodyPr wrap="square" anchor="t">
+            <a:spAutoFit/>
+          </a:bodyPr>
+          <a:lstStyle/>
+          <a:p>
+            <a:pPr algn="l">
+              <a:lnSpc>
+                <a:spcPct val="100000"/>
+              </a:lnSpc>
+            </a:pPr>
+            <a:r>
+              <a:rPr sz="1200" b="1">
+                <a:solidFill>
+                  <a:srgbClr val="FFB454"/>
+                </a:solidFill>
+                <a:latin typeface="Noto Sans CJK KR"/>
+              </a:rPr>
+              <a:t>§3 · PHASE 8</a:t>
+            </a:r>
+          </a:p>
+        </p:txBody>
+      </p:sp>
+      <p:sp>
+        <p:nvSpPr>
+          <p:cNvPr id="4" name="TextBox 3"/>
+          <p:cNvSpPr txBox="1"/>
+          <p:nvPr/>
+        </p:nvSpPr>
+        <p:spPr>
+          <a:xfrm>
+            <a:off x="548640" y="566928"/>
+            <a:ext cx="11094415" cy="548640"/>
+          </a:xfrm>
+          <a:prstGeom prst="rect">
+            <a:avLst/>
+          </a:prstGeom>
+          <a:noFill/>
+        </p:spPr>
+        <p:txBody>
+          <a:bodyPr wrap="square" anchor="t">
+            <a:spAutoFit/>
+          </a:bodyPr>
+          <a:lstStyle/>
+          <a:p>
+            <a:pPr algn="l">
+              <a:lnSpc>
+                <a:spcPct val="100000"/>
+              </a:lnSpc>
+            </a:pPr>
+            <a:r>
+              <a:rPr sz="2200" b="1">
+                <a:solidFill>
+                  <a:srgbClr val="E8ECF4"/>
+                </a:solidFill>
+                <a:latin typeface="Noto Sans CJK KR"/>
+              </a:rPr>
+              <a:t>"공짜" 최적화 발견</a:t>
+            </a:r>
+          </a:p>
+        </p:txBody>
+      </p:sp>
+      <p:sp>
+        <p:nvSpPr>
+          <p:cNvPr id="5" name="Rectangle 4"/>
+          <p:cNvSpPr/>
+          <p:nvPr/>
+        </p:nvSpPr>
+        <p:spPr>
+          <a:xfrm>
+            <a:off x="548640" y="1078992"/>
+            <a:ext cx="11094415" cy="25400"/>
+          </a:xfrm>
+          <a:prstGeom prst="rect">
+            <a:avLst/>
+          </a:prstGeom>
+          <a:solidFill>
+            <a:srgbClr val="2A3242"/>
+          </a:solidFill>
+          <a:ln>
+            <a:noFill/>
+          </a:ln>
+          <a:effectLst/>
+        </p:spPr>
+        <p:style>
+          <a:lnRef idx="1">
+            <a:schemeClr val="accent1"/>
+          </a:lnRef>
+          <a:fillRef idx="3">
+            <a:schemeClr val="accent1"/>
+          </a:fillRef>
+          <a:effectRef idx="2">
+            <a:schemeClr val="accent1"/>
+          </a:effectRef>
+          <a:fontRef idx="minor">
+            <a:schemeClr val="lt1"/>
+          </a:fontRef>
+        </p:style>
+        <p:txBody>
+          <a:bodyPr rtlCol="0" anchor="ctr"/>
+          <a:lstStyle/>
+          <a:p>
+            <a:pPr algn="ctr"/>
+          </a:p>
+        </p:txBody>
+      </p:sp>
+      <p:pic>
+        <p:nvPicPr>
+          <p:cNvPr id="6" name="Picture 5" descr="fig_exp56_phase8.png"/>
+          <p:cNvPicPr>
+            <a:picLocks noChangeAspect="1"/>
+          </p:cNvPicPr>
+          <p:nvPr/>
+        </p:nvPicPr>
+        <p:blipFill>
+          <a:blip r:embed="rId2"/>
+          <a:stretch>
+            <a:fillRect/>
+          </a:stretch>
+        </p:blipFill>
+        <p:spPr>
+          <a:xfrm>
+            <a:off x="3095662" y="1463040"/>
+            <a:ext cx="6000369" cy="2926080"/>
+          </a:xfrm>
+          <a:prstGeom prst="rect">
+            <a:avLst/>
+          </a:prstGeom>
+        </p:spPr>
+      </p:pic>
+      <p:sp>
+        <p:nvSpPr>
+          <p:cNvPr id="7" name="TextBox 6"/>
+          <p:cNvSpPr txBox="1"/>
+          <p:nvPr/>
+        </p:nvSpPr>
+        <p:spPr>
+          <a:xfrm>
+            <a:off x="548640" y="4663440"/>
+            <a:ext cx="11094415" cy="1463040"/>
+          </a:xfrm>
+          <a:prstGeom prst="rect">
+            <a:avLst/>
+          </a:prstGeom>
+          <a:noFill/>
+        </p:spPr>
+        <p:txBody>
+          <a:bodyPr wrap="square">
+            <a:spAutoFit/>
+          </a:bodyPr>
+          <a:lstStyle/>
+          <a:p>
+            <a:pPr>
+              <a:lnSpc>
+                <a:spcPct val="122000"/>
+              </a:lnSpc>
+              <a:spcAft>
+                <a:spcPts val="800"/>
+              </a:spcAft>
+            </a:pPr>
+            <a:r>
+              <a:rPr sz="1250">
+                <a:solidFill>
+                  <a:srgbClr val="E8ECF4"/>
+                </a:solidFill>
+                <a:latin typeface="Noto Sans CJK KR"/>
+              </a:rPr>
+              <a:t>•  프로파일링 중 우연히 발견: 카메라 pose가 안 바뀌는데도 매 렌더링 호출마다 행렬 역산을 처음부터 다시 계산하고 있었음</a:t>
+            </a:r>
+          </a:p>
+          <a:p>
+            <a:pPr>
+              <a:lnSpc>
+                <a:spcPct val="122000"/>
+              </a:lnSpc>
+              <a:spcAft>
+                <a:spcPts val="800"/>
+              </a:spcAft>
+            </a:pPr>
+            <a:r>
+              <a:rPr sz="1250">
+                <a:solidFill>
+                  <a:srgbClr val="E8ECF4"/>
+                </a:solidFill>
+                <a:latin typeface="Noto Sans CJK KR"/>
+              </a:rPr>
+              <a:t>•  pose가 바뀌는 지점이 코드 전체에 딱 한 곳뿐임을 확인한 뒤 캐싱 추가 — 그래디언트 수학은 전혀 안 건드리는 무위험 변경</a:t>
+            </a:r>
+          </a:p>
+        </p:txBody>
+      </p:sp>
+      <p:sp>
+        <p:nvSpPr>
+          <p:cNvPr id="8" name="TextBox 7"/>
+          <p:cNvSpPr txBox="1"/>
+          <p:nvPr/>
+        </p:nvSpPr>
+        <p:spPr>
+          <a:xfrm>
+            <a:off x="548640" y="6263640"/>
+            <a:ext cx="11094415" cy="457200"/>
+          </a:xfrm>
+          <a:prstGeom prst="rect">
+            <a:avLst/>
+          </a:prstGeom>
+          <a:noFill/>
+        </p:spPr>
+        <p:txBody>
+          <a:bodyPr wrap="square" anchor="t">
+            <a:spAutoFit/>
+          </a:bodyPr>
+          <a:lstStyle/>
+          <a:p>
+            <a:pPr algn="l">
+              <a:lnSpc>
+                <a:spcPct val="120000"/>
+              </a:lnSpc>
+            </a:pPr>
+            <a:r>
+              <a:rPr sz="1100" b="0">
+                <a:solidFill>
+                  <a:srgbClr val="8B95AB"/>
+                </a:solidFill>
+                <a:latin typeface="Noto Sans CJK KR"/>
+              </a:rPr>
+              <a:t>제일 큰 인프라 작업(다음 슬라이드)을 준비하다가 발견한 제일 작은데 제일 확실한 개선.</a:t>
+            </a:r>
+          </a:p>
+        </p:txBody>
+      </p:sp>
+    </p:spTree>
+  </p:cSld>
+  <p:clrMapOvr>
+    <a:masterClrMapping/>
+  </p:clrMapOvr>
+</p:sld>
+</file>
+
+<file path=ppt/slides/slide2.xml><?xml version="1.0" encoding="utf-8"?>
+<p:sld xmlns:a="http://schemas.openxmlformats.org/drawingml/2006/main" xmlns:p="http://schemas.openxmlformats.org/presentationml/2006/main" xmlns:r="http://schemas.openxmlformats.org/officeDocument/2006/relationships">
+  <p:cSld>
+    <p:spTree>
+      <p:nvGrpSpPr>
+        <p:cNvPr id="1" name=""/>
+        <p:cNvGrpSpPr/>
+        <p:nvPr/>
+      </p:nvGrpSpPr>
+      <p:grpSpPr/>
+      <p:sp>
+        <p:nvSpPr>
+          <p:cNvPr id="2" name="Rectangle 1"/>
+          <p:cNvSpPr/>
+          <p:nvPr/>
+        </p:nvSpPr>
+        <p:spPr>
+          <a:xfrm>
+            <a:off x="0" y="0"/>
+            <a:ext cx="12191695" cy="6858000"/>
+          </a:xfrm>
+          <a:prstGeom prst="rect">
+            <a:avLst/>
+          </a:prstGeom>
+          <a:solidFill>
+            <a:srgbClr val="12151C"/>
+          </a:solidFill>
+          <a:ln>
+            <a:noFill/>
+          </a:ln>
+          <a:effectLst/>
+        </p:spPr>
+        <p:style>
+          <a:lnRef idx="1">
+            <a:schemeClr val="accent1"/>
+          </a:lnRef>
+          <a:fillRef idx="3">
+            <a:schemeClr val="accent1"/>
+          </a:fillRef>
+          <a:effectRef idx="2">
+            <a:schemeClr val="accent1"/>
+          </a:effectRef>
+          <a:fontRef idx="minor">
+            <a:schemeClr val="lt1"/>
+          </a:fontRef>
+        </p:style>
+        <p:txBody>
+          <a:bodyPr rtlCol="0" anchor="ctr"/>
+          <a:lstStyle/>
+          <a:p>
+            <a:pPr algn="ctr"/>
+          </a:p>
+        </p:txBody>
+      </p:sp>
+      <p:sp>
+        <p:nvSpPr>
+          <p:cNvPr id="3" name="TextBox 2"/>
+          <p:cNvSpPr txBox="1"/>
+          <p:nvPr/>
+        </p:nvSpPr>
+        <p:spPr>
+          <a:xfrm>
+            <a:off x="548640" y="320040"/>
+            <a:ext cx="11094415" cy="292608"/>
+          </a:xfrm>
+          <a:prstGeom prst="rect">
+            <a:avLst/>
+          </a:prstGeom>
+          <a:noFill/>
+        </p:spPr>
+        <p:txBody>
+          <a:bodyPr wrap="square" anchor="t">
+            <a:spAutoFit/>
+          </a:bodyPr>
+          <a:lstStyle/>
+          <a:p>
+            <a:pPr algn="l">
+              <a:lnSpc>
+                <a:spcPct val="100000"/>
+              </a:lnSpc>
+            </a:pPr>
+            <a:r>
+              <a:rPr sz="1200" b="1">
+                <a:solidFill>
+                  <a:srgbClr val="FFB454"/>
+                </a:solidFill>
+                <a:latin typeface="Noto Sans CJK KR"/>
+              </a:rPr>
+              <a:t>RECAP · 07/20</a:t>
+            </a:r>
+          </a:p>
+        </p:txBody>
+      </p:sp>
+      <p:sp>
+        <p:nvSpPr>
+          <p:cNvPr id="4" name="TextBox 3"/>
+          <p:cNvSpPr txBox="1"/>
+          <p:nvPr/>
+        </p:nvSpPr>
+        <p:spPr>
+          <a:xfrm>
+            <a:off x="548640" y="566928"/>
+            <a:ext cx="11094415" cy="548640"/>
+          </a:xfrm>
+          <a:prstGeom prst="rect">
+            <a:avLst/>
+          </a:prstGeom>
+          <a:noFill/>
+        </p:spPr>
+        <p:txBody>
+          <a:bodyPr wrap="square" anchor="t">
+            <a:spAutoFit/>
+          </a:bodyPr>
+          <a:lstStyle/>
+          <a:p>
+            <a:pPr algn="l">
+              <a:lnSpc>
+                <a:spcPct val="100000"/>
+              </a:lnSpc>
+            </a:pPr>
+            <a:r>
+              <a:rPr sz="2200" b="1">
+                <a:solidFill>
+                  <a:srgbClr val="E8ECF4"/>
+                </a:solidFill>
+                <a:latin typeface="Noto Sans CJK KR"/>
+              </a:rPr>
+              <a:t>지난 발표 리캡: 어디까지 끝냈나</a:t>
+            </a:r>
+          </a:p>
+        </p:txBody>
+      </p:sp>
+      <p:sp>
+        <p:nvSpPr>
+          <p:cNvPr id="5" name="Rectangle 4"/>
+          <p:cNvSpPr/>
+          <p:nvPr/>
+        </p:nvSpPr>
+        <p:spPr>
+          <a:xfrm>
+            <a:off x="548640" y="1078992"/>
+            <a:ext cx="11094415" cy="25400"/>
+          </a:xfrm>
+          <a:prstGeom prst="rect">
+            <a:avLst/>
+          </a:prstGeom>
+          <a:solidFill>
+            <a:srgbClr val="2A3242"/>
+          </a:solidFill>
+          <a:ln>
+            <a:noFill/>
+          </a:ln>
+          <a:effectLst/>
+        </p:spPr>
+        <p:style>
+          <a:lnRef idx="1">
+            <a:schemeClr val="accent1"/>
+          </a:lnRef>
+          <a:fillRef idx="3">
+            <a:schemeClr val="accent1"/>
+          </a:fillRef>
+          <a:effectRef idx="2">
+            <a:schemeClr val="accent1"/>
+          </a:effectRef>
+          <a:fontRef idx="minor">
+            <a:schemeClr val="lt1"/>
+          </a:fontRef>
+        </p:style>
+        <p:txBody>
+          <a:bodyPr rtlCol="0" anchor="ctr"/>
+          <a:lstStyle/>
+          <a:p>
+            <a:pPr algn="ctr"/>
+          </a:p>
+        </p:txBody>
+      </p:sp>
+      <p:sp>
+        <p:nvSpPr>
+          <p:cNvPr id="6" name="TextBox 5"/>
+          <p:cNvSpPr txBox="1"/>
+          <p:nvPr/>
+        </p:nvSpPr>
+        <p:spPr>
+          <a:xfrm>
+            <a:off x="548640" y="1325880"/>
+            <a:ext cx="11094415" cy="3108960"/>
+          </a:xfrm>
+          <a:prstGeom prst="rect">
+            <a:avLst/>
+          </a:prstGeom>
+          <a:noFill/>
+        </p:spPr>
+        <p:txBody>
+          <a:bodyPr wrap="square">
+            <a:spAutoFit/>
+          </a:bodyPr>
+          <a:lstStyle/>
+          <a:p>
+            <a:pPr>
+              <a:lnSpc>
+                <a:spcPct val="122000"/>
+              </a:lnSpc>
+              <a:spcAft>
+                <a:spcPts val="800"/>
+              </a:spcAft>
+            </a:pPr>
+            <a:r>
+              <a:rPr sz="1350">
+                <a:solidFill>
+                  <a:srgbClr val="E8ECF4"/>
+                </a:solidFill>
+                <a:latin typeface="Noto Sans CJK KR"/>
+              </a:rPr>
+              <a:t>•  VIGS-SLAM(ECCV2026) 채택 — 단안 RGB+IMU, DROID-SLAM식 dense correlation 트래킹. 우리 목표(흑백 SLAM 트래킹 + RGB incremental 매핑)에 가장 가까운 참조 아키텍처</a:t>
+            </a:r>
+          </a:p>
+          <a:p>
+            <a:pPr>
+              <a:lnSpc>
+                <a:spcPct val="122000"/>
+              </a:lnSpc>
+              <a:spcAft>
+                <a:spcPts val="800"/>
+              </a:spcAft>
+            </a:pPr>
+            <a:r>
+              <a:rPr sz="1350">
+                <a:solidFill>
+                  <a:srgbClr val="E8ECF4"/>
+                </a:solidFill>
+                <a:latin typeface="Noto Sans CJK KR"/>
+              </a:rPr>
+              <a:t>•  20초 타이밍 버그 발견·수정 — reader 프로세스 sleep(20) 순서 문제로 모든 "온라인 루프 총합"에 인위적 20초가 섞여있었음. 수정 후 실시간 배수 2.77배 → 1.52배로 정정</a:t>
+            </a:r>
+          </a:p>
+          <a:p>
+            <a:pPr>
+              <a:lnSpc>
+                <a:spcPct val="122000"/>
+              </a:lnSpc>
+              <a:spcAft>
+                <a:spcPts val="800"/>
+              </a:spcAft>
+            </a:pPr>
+            <a:r>
+              <a:rPr sz="1350">
+                <a:solidFill>
+                  <a:srgbClr val="E8ECF4"/>
+                </a:solidFill>
+                <a:latin typeface="Noto Sans CJK KR"/>
+              </a:rPr>
+              <a:t>•  구조적 개선 — IMU 프리적분 C++ 빌드 + TensorRT 3종(−14%), tracking/mapping 비동기 오버랩 gs_parallel 도입(업스트림 레이스 컨디션 버그 발견·수정, −26.1% 추가)</a:t>
+            </a:r>
+          </a:p>
+          <a:p>
+            <a:pPr>
+              <a:lnSpc>
+                <a:spcPct val="122000"/>
+              </a:lnSpc>
+              <a:spcAft>
+                <a:spcPts val="800"/>
+              </a:spcAft>
+            </a:pPr>
+            <a:r>
+              <a:rPr sz="1350">
+                <a:solidFill>
+                  <a:srgbClr val="E8ECF4"/>
+                </a:solidFill>
+                <a:latin typeface="Noto Sans CJK KR"/>
+              </a:rPr>
+              <a:t>•  핵심 진단 — mapping(rasterize+backward+loss_compute)이 온라인 루프의 81.4%로 압도적 병목. 이번 사이클(exp53~56) 전체가 이 진단 위에서 진행됨</a:t>
+            </a:r>
+          </a:p>
+        </p:txBody>
+      </p:sp>
+      <p:sp>
+        <p:nvSpPr>
+          <p:cNvPr id="7" name="TextBox 6"/>
+          <p:cNvSpPr txBox="1"/>
+          <p:nvPr/>
+        </p:nvSpPr>
+        <p:spPr>
+          <a:xfrm>
+            <a:off x="548640" y="6126480"/>
+            <a:ext cx="11094415" cy="457200"/>
+          </a:xfrm>
+          <a:prstGeom prst="rect">
+            <a:avLst/>
+          </a:prstGeom>
+          <a:noFill/>
+        </p:spPr>
+        <p:txBody>
+          <a:bodyPr wrap="square" anchor="t">
+            <a:spAutoFit/>
+          </a:bodyPr>
+          <a:lstStyle/>
+          <a:p>
+            <a:pPr algn="l">
+              <a:lnSpc>
+                <a:spcPct val="120000"/>
+              </a:lnSpc>
+            </a:pPr>
+            <a:r>
+              <a:rPr sz="1100" b="0">
+                <a:solidFill>
+                  <a:srgbClr val="8B95AB"/>
+                </a:solidFill>
+                <a:latin typeface="Noto Sans CJK KR"/>
+              </a:rPr>
+              <a:t>오늘은 이 지점(1.52배, 아직 실시간 아님) 이후 일주일간 일어난 일만 다룹니다.</a:t>
+            </a:r>
+          </a:p>
+        </p:txBody>
+      </p:sp>
+    </p:spTree>
+  </p:cSld>
+  <p:clrMapOvr>
+    <a:masterClrMapping/>
+  </p:clrMapOvr>
+</p:sld>
+</file>
+
+<file path=ppt/slides/slide20.xml><?xml version="1.0" encoding="utf-8"?>
+<p:sld xmlns:a="http://schemas.openxmlformats.org/drawingml/2006/main" xmlns:p="http://schemas.openxmlformats.org/presentationml/2006/main" xmlns:r="http://schemas.openxmlformats.org/officeDocument/2006/relationships">
+  <p:cSld>
+    <p:spTree>
+      <p:nvGrpSpPr>
+        <p:cNvPr id="1" name=""/>
+        <p:cNvGrpSpPr/>
+        <p:nvPr/>
+      </p:nvGrpSpPr>
+      <p:grpSpPr/>
+      <p:sp>
+        <p:nvSpPr>
+          <p:cNvPr id="2" name="Rectangle 1"/>
+          <p:cNvSpPr/>
+          <p:nvPr/>
+        </p:nvSpPr>
+        <p:spPr>
+          <a:xfrm>
+            <a:off x="0" y="0"/>
+            <a:ext cx="12191695" cy="6858000"/>
+          </a:xfrm>
+          <a:prstGeom prst="rect">
+            <a:avLst/>
+          </a:prstGeom>
+          <a:solidFill>
+            <a:srgbClr val="12151C"/>
+          </a:solidFill>
+          <a:ln>
+            <a:noFill/>
+          </a:ln>
+          <a:effectLst/>
+        </p:spPr>
+        <p:style>
+          <a:lnRef idx="1">
+            <a:schemeClr val="accent1"/>
+          </a:lnRef>
+          <a:fillRef idx="3">
+            <a:schemeClr val="accent1"/>
+          </a:fillRef>
+          <a:effectRef idx="2">
+            <a:schemeClr val="accent1"/>
+          </a:effectRef>
+          <a:fontRef idx="minor">
+            <a:schemeClr val="lt1"/>
+          </a:fontRef>
+        </p:style>
+        <p:txBody>
+          <a:bodyPr rtlCol="0" anchor="ctr"/>
+          <a:lstStyle/>
+          <a:p>
+            <a:pPr algn="ctr"/>
+          </a:p>
+        </p:txBody>
+      </p:sp>
+      <p:sp>
+        <p:nvSpPr>
+          <p:cNvPr id="3" name="TextBox 2"/>
+          <p:cNvSpPr txBox="1"/>
+          <p:nvPr/>
+        </p:nvSpPr>
+        <p:spPr>
+          <a:xfrm>
+            <a:off x="548640" y="320040"/>
+            <a:ext cx="11094415" cy="292608"/>
+          </a:xfrm>
+          <a:prstGeom prst="rect">
+            <a:avLst/>
+          </a:prstGeom>
+          <a:noFill/>
+        </p:spPr>
+        <p:txBody>
+          <a:bodyPr wrap="square" anchor="t">
+            <a:spAutoFit/>
+          </a:bodyPr>
+          <a:lstStyle/>
+          <a:p>
+            <a:pPr algn="l">
+              <a:lnSpc>
+                <a:spcPct val="100000"/>
+              </a:lnSpc>
+            </a:pPr>
+            <a:r>
+              <a:rPr sz="1200" b="1">
+                <a:solidFill>
+                  <a:srgbClr val="FFB454"/>
+                </a:solidFill>
+                <a:latin typeface="Noto Sans CJK KR"/>
+              </a:rPr>
+              <a:t>§3 · PHASE 8b</a:t>
+            </a:r>
+          </a:p>
+        </p:txBody>
+      </p:sp>
+      <p:sp>
+        <p:nvSpPr>
+          <p:cNvPr id="4" name="TextBox 3"/>
+          <p:cNvSpPr txBox="1"/>
+          <p:nvPr/>
+        </p:nvSpPr>
+        <p:spPr>
+          <a:xfrm>
+            <a:off x="548640" y="566928"/>
+            <a:ext cx="11094415" cy="548640"/>
+          </a:xfrm>
+          <a:prstGeom prst="rect">
+            <a:avLst/>
+          </a:prstGeom>
+          <a:noFill/>
+        </p:spPr>
+        <p:txBody>
+          <a:bodyPr wrap="square" anchor="t">
+            <a:spAutoFit/>
+          </a:bodyPr>
+          <a:lstStyle/>
+          <a:p>
+            <a:pPr algn="l">
+              <a:lnSpc>
+                <a:spcPct val="100000"/>
+              </a:lnSpc>
+            </a:pPr>
+            <a:r>
+              <a:rPr sz="2200" b="1">
+                <a:solidFill>
+                  <a:srgbClr val="E8ECF4"/>
+                </a:solidFill>
+                <a:latin typeface="Noto Sans CJK KR"/>
+              </a:rPr>
+              <a:t>CUDA 커널 batch화 시도 — 정직한 실패 기록</a:t>
+            </a:r>
+          </a:p>
+        </p:txBody>
+      </p:sp>
+      <p:sp>
+        <p:nvSpPr>
+          <p:cNvPr id="5" name="Rectangle 4"/>
+          <p:cNvSpPr/>
+          <p:nvPr/>
+        </p:nvSpPr>
+        <p:spPr>
+          <a:xfrm>
+            <a:off x="548640" y="1078992"/>
+            <a:ext cx="11094415" cy="25400"/>
+          </a:xfrm>
+          <a:prstGeom prst="rect">
+            <a:avLst/>
+          </a:prstGeom>
+          <a:solidFill>
+            <a:srgbClr val="2A3242"/>
+          </a:solidFill>
+          <a:ln>
+            <a:noFill/>
+          </a:ln>
+          <a:effectLst/>
+        </p:spPr>
+        <p:style>
+          <a:lnRef idx="1">
+            <a:schemeClr val="accent1"/>
+          </a:lnRef>
+          <a:fillRef idx="3">
+            <a:schemeClr val="accent1"/>
+          </a:fillRef>
+          <a:effectRef idx="2">
+            <a:schemeClr val="accent1"/>
+          </a:effectRef>
+          <a:fontRef idx="minor">
+            <a:schemeClr val="lt1"/>
+          </a:fontRef>
+        </p:style>
+        <p:txBody>
+          <a:bodyPr rtlCol="0" anchor="ctr"/>
+          <a:lstStyle/>
+          <a:p>
+            <a:pPr algn="ctr"/>
+          </a:p>
+        </p:txBody>
+      </p:sp>
+      <p:pic>
+        <p:nvPicPr>
+          <p:cNvPr id="6" name="Picture 5" descr="fig_exp56_phase8b.png"/>
+          <p:cNvPicPr>
+            <a:picLocks noChangeAspect="1"/>
+          </p:cNvPicPr>
+          <p:nvPr/>
+        </p:nvPicPr>
+        <p:blipFill>
+          <a:blip r:embed="rId2"/>
+          <a:stretch>
+            <a:fillRect/>
+          </a:stretch>
+        </p:blipFill>
+        <p:spPr>
+          <a:xfrm>
+            <a:off x="2084704" y="1371600"/>
+            <a:ext cx="8022285" cy="2194560"/>
+          </a:xfrm>
+          <a:prstGeom prst="rect">
+            <a:avLst/>
+          </a:prstGeom>
+        </p:spPr>
+      </p:pic>
+      <p:sp>
+        <p:nvSpPr>
+          <p:cNvPr id="7" name="TextBox 6"/>
+          <p:cNvSpPr txBox="1"/>
+          <p:nvPr/>
+        </p:nvSpPr>
+        <p:spPr>
+          <a:xfrm>
+            <a:off x="548640" y="3794760"/>
+            <a:ext cx="11094415" cy="2011680"/>
+          </a:xfrm>
+          <a:prstGeom prst="rect">
+            <a:avLst/>
+          </a:prstGeom>
+          <a:noFill/>
+        </p:spPr>
+        <p:txBody>
+          <a:bodyPr wrap="square">
+            <a:spAutoFit/>
+          </a:bodyPr>
+          <a:lstStyle/>
+          <a:p>
+            <a:pPr>
+              <a:lnSpc>
+                <a:spcPct val="122000"/>
+              </a:lnSpc>
+              <a:spcAft>
+                <a:spcPts val="800"/>
+              </a:spcAft>
+            </a:pPr>
+            <a:r>
+              <a:rPr sz="1180">
+                <a:solidFill>
+                  <a:srgbClr val="E8ECF4"/>
+                </a:solidFill>
+                <a:latin typeface="Noto Sans CJK KR"/>
+              </a:rPr>
+              <a:t>•  "카메라 여러 대를 한 번의 CUDA 커널 호출로 묶으면 더 빠르지 않을까" — 실제로 구현·검증까지 진행</a:t>
+            </a:r>
+          </a:p>
+          <a:p>
+            <a:pPr>
+              <a:lnSpc>
+                <a:spcPct val="122000"/>
+              </a:lnSpc>
+              <a:spcAft>
+                <a:spcPts val="800"/>
+              </a:spcAft>
+            </a:pPr>
+            <a:r>
+              <a:rPr sz="1180">
+                <a:solidFill>
+                  <a:srgbClr val="E8ECF4"/>
+                </a:solidFill>
+                <a:latin typeface="Noto Sans CJK KR"/>
+              </a:rPr>
+              <a:t>•  기존 커널(그래디언트 수학 포함)은 안 건드리고 C++에서 안전하게 감싸는 방식으로 구현, forward는 완전 일치, backward도 수치적으로 검증 통과</a:t>
+            </a:r>
+          </a:p>
+          <a:p>
+            <a:pPr>
+              <a:lnSpc>
+                <a:spcPct val="122000"/>
+              </a:lnSpc>
+              <a:spcAft>
+                <a:spcPts val="800"/>
+              </a:spcAft>
+            </a:pPr>
+            <a:r>
+              <a:rPr sz="1180">
+                <a:solidFill>
+                  <a:srgbClr val="E8ECF4"/>
+                </a:solidFill>
+                <a:latin typeface="Noto Sans CJK KR"/>
+              </a:rPr>
+              <a:t>•  실전 적용 1차 시도에서 PSNR 붕괴 발견 → 원인(텐서 shape 불일치) 진단·수정 → 재검증 통과</a:t>
+            </a:r>
+          </a:p>
+          <a:p>
+            <a:pPr>
+              <a:lnSpc>
+                <a:spcPct val="122000"/>
+              </a:lnSpc>
+              <a:spcAft>
+                <a:spcPts val="800"/>
+              </a:spcAft>
+            </a:pPr>
+            <a:r>
+              <a:rPr sz="1180">
+                <a:solidFill>
+                  <a:srgbClr val="E8ECF4"/>
+                </a:solidFill>
+                <a:latin typeface="Noto Sans CJK KR"/>
+              </a:rPr>
+              <a:t>•  하지만 최종 시간 측정 결과 개선 없음 — 진짜 병목이 "CUDA 커널 실행 자체"라는 사전 진단이 재확인됨, 채택하지 않고 안전하게 원복</a:t>
+            </a:r>
+          </a:p>
+        </p:txBody>
+      </p:sp>
+      <p:sp>
+        <p:nvSpPr>
+          <p:cNvPr id="8" name="TextBox 7"/>
+          <p:cNvSpPr txBox="1"/>
+          <p:nvPr/>
+        </p:nvSpPr>
+        <p:spPr>
+          <a:xfrm>
+            <a:off x="548640" y="6263640"/>
+            <a:ext cx="11094415" cy="502920"/>
+          </a:xfrm>
+          <a:prstGeom prst="rect">
+            <a:avLst/>
+          </a:prstGeom>
+          <a:noFill/>
+        </p:spPr>
+        <p:txBody>
+          <a:bodyPr wrap="square" anchor="t">
+            <a:spAutoFit/>
+          </a:bodyPr>
+          <a:lstStyle/>
+          <a:p>
+            <a:pPr algn="l">
+              <a:lnSpc>
+                <a:spcPct val="120000"/>
+              </a:lnSpc>
+            </a:pPr>
+            <a:r>
+              <a:rPr sz="1100" b="0">
+                <a:solidFill>
+                  <a:srgbClr val="8B95AB"/>
+                </a:solidFill>
+                <a:latin typeface="Noto Sans CJK KR"/>
+              </a:rPr>
+              <a:t>성공한 것만 보여주면 신뢰가 안 감 — 위험한 시도를 안전하게 검증하고, 안 되면 되돌리는 과정 자체가 방법론.</a:t>
+            </a:r>
+          </a:p>
+        </p:txBody>
+      </p:sp>
+    </p:spTree>
+  </p:cSld>
+  <p:clrMapOvr>
+    <a:masterClrMapping/>
+  </p:clrMapOvr>
+</p:sld>
+</file>
+
+<file path=ppt/slides/slide21.xml><?xml version="1.0" encoding="utf-8"?>
 <p:sld xmlns:a="http://schemas.openxmlformats.org/drawingml/2006/main" xmlns:p="http://schemas.openxmlformats.org/presentationml/2006/main" xmlns:r="http://schemas.openxmlformats.org/officeDocument/2006/relationships">
   <p:cSld>
     <p:spTree>
@@ -6133,2517 +8210,6 @@
 </p:sld>
 </file>
 
-<file path=ppt/slides/slide18.xml><?xml version="1.0" encoding="utf-8"?>
-<p:sld xmlns:a="http://schemas.openxmlformats.org/drawingml/2006/main" xmlns:p="http://schemas.openxmlformats.org/presentationml/2006/main" xmlns:r="http://schemas.openxmlformats.org/officeDocument/2006/relationships">
-  <p:cSld>
-    <p:spTree>
-      <p:nvGrpSpPr>
-        <p:cNvPr id="1" name=""/>
-        <p:cNvGrpSpPr/>
-        <p:nvPr/>
-      </p:nvGrpSpPr>
-      <p:grpSpPr/>
-      <p:sp>
-        <p:nvSpPr>
-          <p:cNvPr id="2" name="Rectangle 1"/>
-          <p:cNvSpPr/>
-          <p:nvPr/>
-        </p:nvSpPr>
-        <p:spPr>
-          <a:xfrm>
-            <a:off x="0" y="0"/>
-            <a:ext cx="12191695" cy="6858000"/>
-          </a:xfrm>
-          <a:prstGeom prst="rect">
-            <a:avLst/>
-          </a:prstGeom>
-          <a:solidFill>
-            <a:srgbClr val="12151C"/>
-          </a:solidFill>
-          <a:ln>
-            <a:noFill/>
-          </a:ln>
-          <a:effectLst/>
-        </p:spPr>
-        <p:style>
-          <a:lnRef idx="1">
-            <a:schemeClr val="accent1"/>
-          </a:lnRef>
-          <a:fillRef idx="3">
-            <a:schemeClr val="accent1"/>
-          </a:fillRef>
-          <a:effectRef idx="2">
-            <a:schemeClr val="accent1"/>
-          </a:effectRef>
-          <a:fontRef idx="minor">
-            <a:schemeClr val="lt1"/>
-          </a:fontRef>
-        </p:style>
-        <p:txBody>
-          <a:bodyPr rtlCol="0" anchor="ctr"/>
-          <a:lstStyle/>
-          <a:p>
-            <a:pPr algn="ctr"/>
-          </a:p>
-        </p:txBody>
-      </p:sp>
-      <p:sp>
-        <p:nvSpPr>
-          <p:cNvPr id="3" name="TextBox 2"/>
-          <p:cNvSpPr txBox="1"/>
-          <p:nvPr/>
-        </p:nvSpPr>
-        <p:spPr>
-          <a:xfrm>
-            <a:off x="548640" y="320040"/>
-            <a:ext cx="11094415" cy="292608"/>
-          </a:xfrm>
-          <a:prstGeom prst="rect">
-            <a:avLst/>
-          </a:prstGeom>
-          <a:noFill/>
-        </p:spPr>
-        <p:txBody>
-          <a:bodyPr wrap="square" anchor="t">
-            <a:spAutoFit/>
-          </a:bodyPr>
-          <a:lstStyle/>
-          <a:p>
-            <a:pPr algn="l">
-              <a:lnSpc>
-                <a:spcPct val="100000"/>
-              </a:lnSpc>
-            </a:pPr>
-            <a:r>
-              <a:rPr sz="1200" b="1">
-                <a:solidFill>
-                  <a:srgbClr val="FFB454"/>
-                </a:solidFill>
-                <a:latin typeface="Noto Sans CJK KR"/>
-              </a:rPr>
-              <a:t>§4 · SCORECARD</a:t>
-            </a:r>
-          </a:p>
-        </p:txBody>
-      </p:sp>
-      <p:sp>
-        <p:nvSpPr>
-          <p:cNvPr id="4" name="TextBox 3"/>
-          <p:cNvSpPr txBox="1"/>
-          <p:nvPr/>
-        </p:nvSpPr>
-        <p:spPr>
-          <a:xfrm>
-            <a:off x="548640" y="566928"/>
-            <a:ext cx="11094415" cy="548640"/>
-          </a:xfrm>
-          <a:prstGeom prst="rect">
-            <a:avLst/>
-          </a:prstGeom>
-          <a:noFill/>
-        </p:spPr>
-        <p:txBody>
-          <a:bodyPr wrap="square" anchor="t">
-            <a:spAutoFit/>
-          </a:bodyPr>
-          <a:lstStyle/>
-          <a:p>
-            <a:pPr algn="l">
-              <a:lnSpc>
-                <a:spcPct val="100000"/>
-              </a:lnSpc>
-            </a:pPr>
-            <a:r>
-              <a:rPr sz="2200" b="1">
-                <a:solidFill>
-                  <a:srgbClr val="E8ECF4"/>
-                </a:solidFill>
-                <a:latin typeface="Noto Sans CJK KR"/>
-              </a:rPr>
-              <a:t>현재 상태 스코어카드 + 다음 후보</a:t>
-            </a:r>
-          </a:p>
-        </p:txBody>
-      </p:sp>
-      <p:sp>
-        <p:nvSpPr>
-          <p:cNvPr id="5" name="Rectangle 4"/>
-          <p:cNvSpPr/>
-          <p:nvPr/>
-        </p:nvSpPr>
-        <p:spPr>
-          <a:xfrm>
-            <a:off x="548640" y="1078992"/>
-            <a:ext cx="11094415" cy="25400"/>
-          </a:xfrm>
-          <a:prstGeom prst="rect">
-            <a:avLst/>
-          </a:prstGeom>
-          <a:solidFill>
-            <a:srgbClr val="2A3242"/>
-          </a:solidFill>
-          <a:ln>
-            <a:noFill/>
-          </a:ln>
-          <a:effectLst/>
-        </p:spPr>
-        <p:style>
-          <a:lnRef idx="1">
-            <a:schemeClr val="accent1"/>
-          </a:lnRef>
-          <a:fillRef idx="3">
-            <a:schemeClr val="accent1"/>
-          </a:fillRef>
-          <a:effectRef idx="2">
-            <a:schemeClr val="accent1"/>
-          </a:effectRef>
-          <a:fontRef idx="minor">
-            <a:schemeClr val="lt1"/>
-          </a:fontRef>
-        </p:style>
-        <p:txBody>
-          <a:bodyPr rtlCol="0" anchor="ctr"/>
-          <a:lstStyle/>
-          <a:p>
-            <a:pPr algn="ctr"/>
-          </a:p>
-        </p:txBody>
-      </p:sp>
-      <p:sp>
-        <p:nvSpPr>
-          <p:cNvPr id="6" name="Rounded Rectangle 5"/>
-          <p:cNvSpPr/>
-          <p:nvPr/>
-        </p:nvSpPr>
-        <p:spPr>
-          <a:xfrm>
-            <a:off x="548640" y="1417320"/>
-            <a:ext cx="3566160" cy="1051560"/>
-          </a:xfrm>
-          <a:prstGeom prst="roundRect">
-            <a:avLst>
-              <a:gd name="adj" fmla="val 8000"/>
-            </a:avLst>
-          </a:prstGeom>
-          <a:solidFill>
-            <a:srgbClr val="1A1F2B"/>
-          </a:solidFill>
-          <a:ln w="15875">
-            <a:solidFill>
-              <a:srgbClr val="E8ECF4"/>
-            </a:solidFill>
-          </a:ln>
-          <a:effectLst/>
-        </p:spPr>
-        <p:style>
-          <a:lnRef idx="1">
-            <a:schemeClr val="accent1"/>
-          </a:lnRef>
-          <a:fillRef idx="3">
-            <a:schemeClr val="accent1"/>
-          </a:fillRef>
-          <a:effectRef idx="2">
-            <a:schemeClr val="accent1"/>
-          </a:effectRef>
-          <a:fontRef idx="minor">
-            <a:schemeClr val="lt1"/>
-          </a:fontRef>
-        </p:style>
-        <p:txBody>
-          <a:bodyPr rtlCol="0" anchor="ctr" wrap="square" lIns="146304" rIns="146304"/>
-          <a:lstStyle/>
-          <a:p>
-            <a:pPr algn="ctr"/>
-            <a:r>
-              <a:rPr sz="2200" b="1">
-                <a:solidFill>
-                  <a:srgbClr val="E8ECF4"/>
-                </a:solidFill>
-                <a:latin typeface="Noto Sans CJK KR"/>
-              </a:rPr>
-              <a:t>45.79s</a:t>
-            </a:r>
-          </a:p>
-          <a:p>
-            <a:pPr algn="ctr"/>
-            <a:r>
-              <a:rPr sz="1050">
-                <a:solidFill>
-                  <a:srgbClr val="8B95AB"/>
-                </a:solidFill>
-                <a:latin typeface="Noto Sans CJK KR"/>
-              </a:rPr>
-              <a:t>온라인 루프 총합
-(예산 65.1s 대비 여유 19s)</a:t>
-            </a:r>
-          </a:p>
-        </p:txBody>
-      </p:sp>
-      <p:sp>
-        <p:nvSpPr>
-          <p:cNvPr id="7" name="Rounded Rectangle 6"/>
-          <p:cNvSpPr/>
-          <p:nvPr/>
-        </p:nvSpPr>
-        <p:spPr>
-          <a:xfrm>
-            <a:off x="4297679" y="1417320"/>
-            <a:ext cx="3566160" cy="1051560"/>
-          </a:xfrm>
-          <a:prstGeom prst="roundRect">
-            <a:avLst>
-              <a:gd name="adj" fmla="val 8000"/>
-            </a:avLst>
-          </a:prstGeom>
-          <a:solidFill>
-            <a:srgbClr val="1A1F2B"/>
-          </a:solidFill>
-          <a:ln w="15875">
-            <a:solidFill>
-              <a:srgbClr val="4CC98A"/>
-            </a:solidFill>
-          </a:ln>
-          <a:effectLst/>
-        </p:spPr>
-        <p:style>
-          <a:lnRef idx="1">
-            <a:schemeClr val="accent1"/>
-          </a:lnRef>
-          <a:fillRef idx="3">
-            <a:schemeClr val="accent1"/>
-          </a:fillRef>
-          <a:effectRef idx="2">
-            <a:schemeClr val="accent1"/>
-          </a:effectRef>
-          <a:fontRef idx="minor">
-            <a:schemeClr val="lt1"/>
-          </a:fontRef>
-        </p:style>
-        <p:txBody>
-          <a:bodyPr rtlCol="0" anchor="ctr" wrap="square" lIns="146304" rIns="146304"/>
-          <a:lstStyle/>
-          <a:p>
-            <a:pPr algn="ctr"/>
-            <a:r>
-              <a:rPr sz="2200" b="1">
-                <a:solidFill>
-                  <a:srgbClr val="4CC98A"/>
-                </a:solidFill>
-                <a:latin typeface="Noto Sans CJK KR"/>
-              </a:rPr>
-              <a:t>23.49/23.88</a:t>
-            </a:r>
-          </a:p>
-          <a:p>
-            <a:pPr algn="ctr"/>
-            <a:r>
-              <a:rPr sz="1050">
-                <a:solidFill>
-                  <a:srgbClr val="8B95AB"/>
-                </a:solidFill>
-                <a:latin typeface="Noto Sans CJK KR"/>
-              </a:rPr>
-              <a:t>PSNR (mean/kf)</a:t>
-            </a:r>
-          </a:p>
-        </p:txBody>
-      </p:sp>
-      <p:sp>
-        <p:nvSpPr>
-          <p:cNvPr id="8" name="Rounded Rectangle 7"/>
-          <p:cNvSpPr/>
-          <p:nvPr/>
-        </p:nvSpPr>
-        <p:spPr>
-          <a:xfrm>
-            <a:off x="8046719" y="1417320"/>
-            <a:ext cx="3657600" cy="1051560"/>
-          </a:xfrm>
-          <a:prstGeom prst="roundRect">
-            <a:avLst>
-              <a:gd name="adj" fmla="val 8000"/>
-            </a:avLst>
-          </a:prstGeom>
-          <a:solidFill>
-            <a:srgbClr val="1A1F2B"/>
-          </a:solidFill>
-          <a:ln w="15875">
-            <a:solidFill>
-              <a:srgbClr val="FFB454"/>
-            </a:solidFill>
-          </a:ln>
-          <a:effectLst/>
-        </p:spPr>
-        <p:style>
-          <a:lnRef idx="1">
-            <a:schemeClr val="accent1"/>
-          </a:lnRef>
-          <a:fillRef idx="3">
-            <a:schemeClr val="accent1"/>
-          </a:fillRef>
-          <a:effectRef idx="2">
-            <a:schemeClr val="accent1"/>
-          </a:effectRef>
-          <a:fontRef idx="minor">
-            <a:schemeClr val="lt1"/>
-          </a:fontRef>
-        </p:style>
-        <p:txBody>
-          <a:bodyPr rtlCol="0" anchor="ctr" wrap="square" lIns="146304" rIns="146304"/>
-          <a:lstStyle/>
-          <a:p>
-            <a:pPr algn="ctr"/>
-            <a:r>
-              <a:rPr sz="2200" b="1">
-                <a:solidFill>
-                  <a:srgbClr val="FFB454"/>
-                </a:solidFill>
-                <a:latin typeface="Noto Sans CJK KR"/>
-              </a:rPr>
-              <a:t>0.70×</a:t>
-            </a:r>
-          </a:p>
-          <a:p>
-            <a:pPr algn="ctr"/>
-            <a:r>
-              <a:rPr sz="1050">
-                <a:solidFill>
-                  <a:srgbClr val="8B95AB"/>
-                </a:solidFill>
-                <a:latin typeface="Noto Sans CJK KR"/>
-              </a:rPr>
-              <a:t>실시간 배수</a:t>
-            </a:r>
-          </a:p>
-        </p:txBody>
-      </p:sp>
-      <p:sp>
-        <p:nvSpPr>
-          <p:cNvPr id="9" name="TextBox 8"/>
-          <p:cNvSpPr txBox="1"/>
-          <p:nvPr/>
-        </p:nvSpPr>
-        <p:spPr>
-          <a:xfrm>
-            <a:off x="548640" y="2743200"/>
-            <a:ext cx="11094415" cy="365760"/>
-          </a:xfrm>
-          <a:prstGeom prst="rect">
-            <a:avLst/>
-          </a:prstGeom>
-          <a:noFill/>
-        </p:spPr>
-        <p:txBody>
-          <a:bodyPr wrap="square" anchor="t">
-            <a:spAutoFit/>
-          </a:bodyPr>
-          <a:lstStyle/>
-          <a:p>
-            <a:pPr algn="l">
-              <a:lnSpc>
-                <a:spcPct val="100000"/>
-              </a:lnSpc>
-            </a:pPr>
-            <a:r>
-              <a:rPr sz="1400" b="1">
-                <a:solidFill>
-                  <a:srgbClr val="FFB454"/>
-                </a:solidFill>
-                <a:latin typeface="Noto Sans CJK KR"/>
-              </a:rPr>
-              <a:t>다음 후보 (우선순위 논의 필요)</a:t>
-            </a:r>
-          </a:p>
-        </p:txBody>
-      </p:sp>
-      <p:sp>
-        <p:nvSpPr>
-          <p:cNvPr id="10" name="Rounded Rectangle 9"/>
-          <p:cNvSpPr/>
-          <p:nvPr/>
-        </p:nvSpPr>
-        <p:spPr>
-          <a:xfrm>
-            <a:off x="548640" y="3200400"/>
-            <a:ext cx="1554480" cy="292608"/>
-          </a:xfrm>
-          <a:prstGeom prst="roundRect">
-            <a:avLst>
-              <a:gd name="adj" fmla="val 50000"/>
-            </a:avLst>
-          </a:prstGeom>
-          <a:solidFill>
-            <a:srgbClr val="1A1F2B"/>
-          </a:solidFill>
-          <a:ln w="12700">
-            <a:solidFill>
-              <a:srgbClr val="EF6A5C"/>
-            </a:solidFill>
-          </a:ln>
-          <a:effectLst/>
-        </p:spPr>
-        <p:style>
-          <a:lnRef idx="1">
-            <a:schemeClr val="accent1"/>
-          </a:lnRef>
-          <a:fillRef idx="3">
-            <a:schemeClr val="accent1"/>
-          </a:fillRef>
-          <a:effectRef idx="2">
-            <a:schemeClr val="accent1"/>
-          </a:effectRef>
-          <a:fontRef idx="minor">
-            <a:schemeClr val="lt1"/>
-          </a:fontRef>
-        </p:style>
-        <p:txBody>
-          <a:bodyPr rtlCol="0" anchor="ctr" lIns="45720" rIns="45720"/>
-          <a:lstStyle/>
-          <a:p>
-            <a:pPr algn="ctr"/>
-            <a:r>
-              <a:rPr sz="900" b="1">
-                <a:solidFill>
-                  <a:srgbClr val="EF6A5C"/>
-                </a:solidFill>
-                <a:latin typeface="Noto Sans CJK KR"/>
-              </a:rPr>
-              <a:t>① 고위험</a:t>
-            </a:r>
-          </a:p>
-        </p:txBody>
-      </p:sp>
-      <p:sp>
-        <p:nvSpPr>
-          <p:cNvPr id="11" name="TextBox 10"/>
-          <p:cNvSpPr txBox="1"/>
-          <p:nvPr/>
-        </p:nvSpPr>
-        <p:spPr>
-          <a:xfrm>
-            <a:off x="2240280" y="3145536"/>
-            <a:ext cx="9402775" cy="502920"/>
-          </a:xfrm>
-          <a:prstGeom prst="rect">
-            <a:avLst/>
-          </a:prstGeom>
-          <a:noFill/>
-        </p:spPr>
-        <p:txBody>
-          <a:bodyPr wrap="square" anchor="ctr">
-            <a:spAutoFit/>
-          </a:bodyPr>
-          <a:lstStyle/>
-          <a:p>
-            <a:pPr algn="l">
-              <a:lnSpc>
-                <a:spcPct val="100000"/>
-              </a:lnSpc>
-            </a:pPr>
-            <a:r>
-              <a:rPr sz="1200" b="0">
-                <a:solidFill>
-                  <a:srgbClr val="E8ECF4"/>
-                </a:solidFill>
-                <a:latin typeface="Noto Sans CJK KR"/>
-              </a:rPr>
-              <a:t>CUDA 커널 레벨 batch화(Phase 8b가 실패한 진짜 원인 해결) — 이득 불확실</a:t>
-            </a:r>
-          </a:p>
-        </p:txBody>
-      </p:sp>
-      <p:sp>
-        <p:nvSpPr>
-          <p:cNvPr id="12" name="Rounded Rectangle 11"/>
-          <p:cNvSpPr/>
-          <p:nvPr/>
-        </p:nvSpPr>
-        <p:spPr>
-          <a:xfrm>
-            <a:off x="548640" y="3886200"/>
-            <a:ext cx="1554480" cy="292608"/>
-          </a:xfrm>
-          <a:prstGeom prst="roundRect">
-            <a:avLst>
-              <a:gd name="adj" fmla="val 50000"/>
-            </a:avLst>
-          </a:prstGeom>
-          <a:solidFill>
-            <a:srgbClr val="1A1F2B"/>
-          </a:solidFill>
-          <a:ln w="12700">
-            <a:solidFill>
-              <a:srgbClr val="4C86EA"/>
-            </a:solidFill>
-          </a:ln>
-          <a:effectLst/>
-        </p:spPr>
-        <p:style>
-          <a:lnRef idx="1">
-            <a:schemeClr val="accent1"/>
-          </a:lnRef>
-          <a:fillRef idx="3">
-            <a:schemeClr val="accent1"/>
-          </a:fillRef>
-          <a:effectRef idx="2">
-            <a:schemeClr val="accent1"/>
-          </a:effectRef>
-          <a:fontRef idx="minor">
-            <a:schemeClr val="lt1"/>
-          </a:fontRef>
-        </p:style>
-        <p:txBody>
-          <a:bodyPr rtlCol="0" anchor="ctr" lIns="45720" rIns="45720"/>
-          <a:lstStyle/>
-          <a:p>
-            <a:pPr algn="ctr"/>
-            <a:r>
-              <a:rPr sz="900" b="1">
-                <a:solidFill>
-                  <a:srgbClr val="4C86EA"/>
-                </a:solidFill>
-                <a:latin typeface="Noto Sans CJK KR"/>
-              </a:rPr>
-              <a:t>② 저위험</a:t>
-            </a:r>
-          </a:p>
-        </p:txBody>
-      </p:sp>
-      <p:sp>
-        <p:nvSpPr>
-          <p:cNvPr id="13" name="TextBox 12"/>
-          <p:cNvSpPr txBox="1"/>
-          <p:nvPr/>
-        </p:nvSpPr>
-        <p:spPr>
-          <a:xfrm>
-            <a:off x="2240280" y="3831336"/>
-            <a:ext cx="9402775" cy="502920"/>
-          </a:xfrm>
-          <a:prstGeom prst="rect">
-            <a:avLst/>
-          </a:prstGeom>
-          <a:noFill/>
-        </p:spPr>
-        <p:txBody>
-          <a:bodyPr wrap="square" anchor="ctr">
-            <a:spAutoFit/>
-          </a:bodyPr>
-          <a:lstStyle/>
-          <a:p>
-            <a:pPr algn="l">
-              <a:lnSpc>
-                <a:spcPct val="100000"/>
-              </a:lnSpc>
-            </a:pPr>
-            <a:r>
-              <a:rPr sz="1200" b="0">
-                <a:solidFill>
-                  <a:srgbClr val="E8ECF4"/>
-                </a:solidFill>
-                <a:latin typeface="Noto Sans CJK KR"/>
-              </a:rPr>
-              <a:t>init_itr_num/iters 더 세밀한 스캔 — 이득 작음</a:t>
-            </a:r>
-          </a:p>
-        </p:txBody>
-      </p:sp>
-      <p:sp>
-        <p:nvSpPr>
-          <p:cNvPr id="14" name="Rounded Rectangle 13"/>
-          <p:cNvSpPr/>
-          <p:nvPr/>
-        </p:nvSpPr>
-        <p:spPr>
-          <a:xfrm>
-            <a:off x="548640" y="4572000"/>
-            <a:ext cx="1554480" cy="292608"/>
-          </a:xfrm>
-          <a:prstGeom prst="roundRect">
-            <a:avLst>
-              <a:gd name="adj" fmla="val 50000"/>
-            </a:avLst>
-          </a:prstGeom>
-          <a:solidFill>
-            <a:srgbClr val="1A1F2B"/>
-          </a:solidFill>
-          <a:ln w="12700">
-            <a:solidFill>
-              <a:srgbClr val="A479E0"/>
-            </a:solidFill>
-          </a:ln>
-          <a:effectLst/>
-        </p:spPr>
-        <p:style>
-          <a:lnRef idx="1">
-            <a:schemeClr val="accent1"/>
-          </a:lnRef>
-          <a:fillRef idx="3">
-            <a:schemeClr val="accent1"/>
-          </a:fillRef>
-          <a:effectRef idx="2">
-            <a:schemeClr val="accent1"/>
-          </a:effectRef>
-          <a:fontRef idx="minor">
-            <a:schemeClr val="lt1"/>
-          </a:fontRef>
-        </p:style>
-        <p:txBody>
-          <a:bodyPr rtlCol="0" anchor="ctr" lIns="45720" rIns="45720"/>
-          <a:lstStyle/>
-          <a:p>
-            <a:pPr algn="ctr"/>
-            <a:r>
-              <a:rPr sz="900" b="1">
-                <a:solidFill>
-                  <a:srgbClr val="A479E0"/>
-                </a:solidFill>
-                <a:latin typeface="Noto Sans CJK KR"/>
-              </a:rPr>
-              <a:t>③ 신규 후보</a:t>
-            </a:r>
-          </a:p>
-        </p:txBody>
-      </p:sp>
-      <p:sp>
-        <p:nvSpPr>
-          <p:cNvPr id="15" name="TextBox 14"/>
-          <p:cNvSpPr txBox="1"/>
-          <p:nvPr/>
-        </p:nvSpPr>
-        <p:spPr>
-          <a:xfrm>
-            <a:off x="2240280" y="4517136"/>
-            <a:ext cx="9402775" cy="502920"/>
-          </a:xfrm>
-          <a:prstGeom prst="rect">
-            <a:avLst/>
-          </a:prstGeom>
-          <a:noFill/>
-        </p:spPr>
-        <p:txBody>
-          <a:bodyPr wrap="square" anchor="ctr">
-            <a:spAutoFit/>
-          </a:bodyPr>
-          <a:lstStyle/>
-          <a:p>
-            <a:pPr algn="l">
-              <a:lnSpc>
-                <a:spcPct val="100000"/>
-              </a:lnSpc>
-            </a:pPr>
-            <a:r>
-              <a:rPr sz="1200" b="0">
-                <a:solidFill>
-                  <a:srgbClr val="E8ECF4"/>
-                </a:solidFill>
-                <a:latin typeface="Noto Sans CJK KR"/>
-              </a:rPr>
-              <a:t>오프라인 색정제를 실시간 호환으로 재설계 — 다음 슬라이드, +3~6dB 확인됨</a:t>
-            </a:r>
-          </a:p>
-        </p:txBody>
-      </p:sp>
-      <p:sp>
-        <p:nvSpPr>
-          <p:cNvPr id="16" name="Rounded Rectangle 15"/>
-          <p:cNvSpPr/>
-          <p:nvPr/>
-        </p:nvSpPr>
-        <p:spPr>
-          <a:xfrm>
-            <a:off x="548640" y="5257800"/>
-            <a:ext cx="1554480" cy="292608"/>
-          </a:xfrm>
-          <a:prstGeom prst="roundRect">
-            <a:avLst>
-              <a:gd name="adj" fmla="val 50000"/>
-            </a:avLst>
-          </a:prstGeom>
-          <a:solidFill>
-            <a:srgbClr val="1A1F2B"/>
-          </a:solidFill>
-          <a:ln w="12700">
-            <a:solidFill>
-              <a:srgbClr val="4CC98A"/>
-            </a:solidFill>
-          </a:ln>
-          <a:effectLst/>
-        </p:spPr>
-        <p:style>
-          <a:lnRef idx="1">
-            <a:schemeClr val="accent1"/>
-          </a:lnRef>
-          <a:fillRef idx="3">
-            <a:schemeClr val="accent1"/>
-          </a:fillRef>
-          <a:effectRef idx="2">
-            <a:schemeClr val="accent1"/>
-          </a:effectRef>
-          <a:fontRef idx="minor">
-            <a:schemeClr val="lt1"/>
-          </a:fontRef>
-        </p:style>
-        <p:txBody>
-          <a:bodyPr rtlCol="0" anchor="ctr" lIns="45720" rIns="45720"/>
-          <a:lstStyle/>
-          <a:p>
-            <a:pPr algn="ctr"/>
-            <a:r>
-              <a:rPr sz="900" b="1">
-                <a:solidFill>
-                  <a:srgbClr val="4CC98A"/>
-                </a:solidFill>
-                <a:latin typeface="Noto Sans CJK KR"/>
-              </a:rPr>
-              <a:t>④ 다음 단계</a:t>
-            </a:r>
-          </a:p>
-        </p:txBody>
-      </p:sp>
-      <p:sp>
-        <p:nvSpPr>
-          <p:cNvPr id="17" name="TextBox 16"/>
-          <p:cNvSpPr txBox="1"/>
-          <p:nvPr/>
-        </p:nvSpPr>
-        <p:spPr>
-          <a:xfrm>
-            <a:off x="2240280" y="5202936"/>
-            <a:ext cx="9402775" cy="502920"/>
-          </a:xfrm>
-          <a:prstGeom prst="rect">
-            <a:avLst/>
-          </a:prstGeom>
-          <a:noFill/>
-        </p:spPr>
-        <p:txBody>
-          <a:bodyPr wrap="square" anchor="ctr">
-            <a:spAutoFit/>
-          </a:bodyPr>
-          <a:lstStyle/>
-          <a:p>
-            <a:pPr algn="l">
-              <a:lnSpc>
-                <a:spcPct val="100000"/>
-              </a:lnSpc>
-            </a:pPr>
-            <a:r>
-              <a:rPr sz="1200" b="0">
-                <a:solidFill>
-                  <a:srgbClr val="E8ECF4"/>
-                </a:solidFill>
-                <a:latin typeface="Noto Sans CJK KR"/>
-              </a:rPr>
-              <a:t>Localization(흑백 SLAM 트래킹) 실제 통합 — exp50과 합류</a:t>
-            </a:r>
-          </a:p>
-        </p:txBody>
-      </p:sp>
-      <p:sp>
-        <p:nvSpPr>
-          <p:cNvPr id="18" name="TextBox 17"/>
-          <p:cNvSpPr txBox="1"/>
-          <p:nvPr/>
-        </p:nvSpPr>
-        <p:spPr>
-          <a:xfrm>
-            <a:off x="548640" y="5943600"/>
-            <a:ext cx="11094415" cy="822960"/>
-          </a:xfrm>
-          <a:prstGeom prst="rect">
-            <a:avLst/>
-          </a:prstGeom>
-          <a:noFill/>
-        </p:spPr>
-        <p:txBody>
-          <a:bodyPr wrap="square" anchor="t">
-            <a:spAutoFit/>
-          </a:bodyPr>
-          <a:lstStyle/>
-          <a:p>
-            <a:pPr algn="l">
-              <a:lnSpc>
-                <a:spcPct val="120000"/>
-              </a:lnSpc>
-            </a:pPr>
-            <a:r>
-              <a:rPr sz="1100" b="0">
-                <a:solidFill>
-                  <a:srgbClr val="8B95AB"/>
-                </a:solidFill>
-                <a:latin typeface="Noto Sans CJK KR"/>
-              </a:rPr>
-              <a:t>carve loss로 floater 억제는 유지 중. ①번은 리스크 대비 이득이 불확실해서 팀 논의가 필요한 지점.</a:t>
-            </a:r>
-          </a:p>
-        </p:txBody>
-      </p:sp>
-    </p:spTree>
-  </p:cSld>
-  <p:clrMapOvr>
-    <a:masterClrMapping/>
-  </p:clrMapOvr>
-</p:sld>
-</file>
-
-<file path=ppt/slides/slide19.xml><?xml version="1.0" encoding="utf-8"?>
-<p:sld xmlns:a="http://schemas.openxmlformats.org/drawingml/2006/main" xmlns:p="http://schemas.openxmlformats.org/presentationml/2006/main" xmlns:r="http://schemas.openxmlformats.org/officeDocument/2006/relationships">
-  <p:cSld>
-    <p:spTree>
-      <p:nvGrpSpPr>
-        <p:cNvPr id="1" name=""/>
-        <p:cNvGrpSpPr/>
-        <p:nvPr/>
-      </p:nvGrpSpPr>
-      <p:grpSpPr/>
-      <p:sp>
-        <p:nvSpPr>
-          <p:cNvPr id="2" name="Rectangle 1"/>
-          <p:cNvSpPr/>
-          <p:nvPr/>
-        </p:nvSpPr>
-        <p:spPr>
-          <a:xfrm>
-            <a:off x="0" y="0"/>
-            <a:ext cx="12191695" cy="6858000"/>
-          </a:xfrm>
-          <a:prstGeom prst="rect">
-            <a:avLst/>
-          </a:prstGeom>
-          <a:solidFill>
-            <a:srgbClr val="12151C"/>
-          </a:solidFill>
-          <a:ln>
-            <a:noFill/>
-          </a:ln>
-          <a:effectLst/>
-        </p:spPr>
-        <p:style>
-          <a:lnRef idx="1">
-            <a:schemeClr val="accent1"/>
-          </a:lnRef>
-          <a:fillRef idx="3">
-            <a:schemeClr val="accent1"/>
-          </a:fillRef>
-          <a:effectRef idx="2">
-            <a:schemeClr val="accent1"/>
-          </a:effectRef>
-          <a:fontRef idx="minor">
-            <a:schemeClr val="lt1"/>
-          </a:fontRef>
-        </p:style>
-        <p:txBody>
-          <a:bodyPr rtlCol="0" anchor="ctr"/>
-          <a:lstStyle/>
-          <a:p>
-            <a:pPr algn="ctr"/>
-          </a:p>
-        </p:txBody>
-      </p:sp>
-      <p:sp>
-        <p:nvSpPr>
-          <p:cNvPr id="3" name="TextBox 2"/>
-          <p:cNvSpPr txBox="1"/>
-          <p:nvPr/>
-        </p:nvSpPr>
-        <p:spPr>
-          <a:xfrm>
-            <a:off x="548640" y="320040"/>
-            <a:ext cx="11094415" cy="292608"/>
-          </a:xfrm>
-          <a:prstGeom prst="rect">
-            <a:avLst/>
-          </a:prstGeom>
-          <a:noFill/>
-        </p:spPr>
-        <p:txBody>
-          <a:bodyPr wrap="square" anchor="t">
-            <a:spAutoFit/>
-          </a:bodyPr>
-          <a:lstStyle/>
-          <a:p>
-            <a:pPr algn="l">
-              <a:lnSpc>
-                <a:spcPct val="100000"/>
-              </a:lnSpc>
-            </a:pPr>
-            <a:r>
-              <a:rPr sz="1200" b="1">
-                <a:solidFill>
-                  <a:srgbClr val="FFB454"/>
-                </a:solidFill>
-                <a:latin typeface="Noto Sans CJK KR"/>
-              </a:rPr>
-              <a:t>§4 · NEW FINDING</a:t>
-            </a:r>
-          </a:p>
-        </p:txBody>
-      </p:sp>
-      <p:sp>
-        <p:nvSpPr>
-          <p:cNvPr id="4" name="TextBox 3"/>
-          <p:cNvSpPr txBox="1"/>
-          <p:nvPr/>
-        </p:nvSpPr>
-        <p:spPr>
-          <a:xfrm>
-            <a:off x="548640" y="566928"/>
-            <a:ext cx="11094415" cy="548640"/>
-          </a:xfrm>
-          <a:prstGeom prst="rect">
-            <a:avLst/>
-          </a:prstGeom>
-          <a:noFill/>
-        </p:spPr>
-        <p:txBody>
-          <a:bodyPr wrap="square" anchor="t">
-            <a:spAutoFit/>
-          </a:bodyPr>
-          <a:lstStyle/>
-          <a:p>
-            <a:pPr algn="l">
-              <a:lnSpc>
-                <a:spcPct val="100000"/>
-              </a:lnSpc>
-            </a:pPr>
-            <a:r>
-              <a:rPr sz="2200" b="1">
-                <a:solidFill>
-                  <a:srgbClr val="E8ECF4"/>
-                </a:solidFill>
-                <a:latin typeface="Noto Sans CJK KR"/>
-              </a:rPr>
-              <a:t>부록: 오프라인 후처리가 사주는 PSNR</a:t>
-            </a:r>
-          </a:p>
-        </p:txBody>
-      </p:sp>
-      <p:sp>
-        <p:nvSpPr>
-          <p:cNvPr id="5" name="Rectangle 4"/>
-          <p:cNvSpPr/>
-          <p:nvPr/>
-        </p:nvSpPr>
-        <p:spPr>
-          <a:xfrm>
-            <a:off x="548640" y="1078992"/>
-            <a:ext cx="11094415" cy="25400"/>
-          </a:xfrm>
-          <a:prstGeom prst="rect">
-            <a:avLst/>
-          </a:prstGeom>
-          <a:solidFill>
-            <a:srgbClr val="2A3242"/>
-          </a:solidFill>
-          <a:ln>
-            <a:noFill/>
-          </a:ln>
-          <a:effectLst/>
-        </p:spPr>
-        <p:style>
-          <a:lnRef idx="1">
-            <a:schemeClr val="accent1"/>
-          </a:lnRef>
-          <a:fillRef idx="3">
-            <a:schemeClr val="accent1"/>
-          </a:fillRef>
-          <a:effectRef idx="2">
-            <a:schemeClr val="accent1"/>
-          </a:effectRef>
-          <a:fontRef idx="minor">
-            <a:schemeClr val="lt1"/>
-          </a:fontRef>
-        </p:style>
-        <p:txBody>
-          <a:bodyPr rtlCol="0" anchor="ctr"/>
-          <a:lstStyle/>
-          <a:p>
-            <a:pPr algn="ctr"/>
-          </a:p>
-        </p:txBody>
-      </p:sp>
-      <p:pic>
-        <p:nvPicPr>
-          <p:cNvPr id="6" name="Picture 5" descr="fig_ply_compare.png"/>
-          <p:cNvPicPr>
-            <a:picLocks noChangeAspect="1"/>
-          </p:cNvPicPr>
-          <p:nvPr/>
-        </p:nvPicPr>
-        <p:blipFill>
-          <a:blip r:embed="rId2"/>
-          <a:stretch>
-            <a:fillRect/>
-          </a:stretch>
-        </p:blipFill>
-        <p:spPr>
-          <a:xfrm>
-            <a:off x="2034995" y="1234440"/>
-            <a:ext cx="8121704" cy="3200400"/>
-          </a:xfrm>
-          <a:prstGeom prst="rect">
-            <a:avLst/>
-          </a:prstGeom>
-        </p:spPr>
-      </p:pic>
-      <p:sp>
-        <p:nvSpPr>
-          <p:cNvPr id="7" name="Rounded Rectangle 6"/>
-          <p:cNvSpPr/>
-          <p:nvPr/>
-        </p:nvSpPr>
-        <p:spPr>
-          <a:xfrm>
-            <a:off x="548640" y="4572000"/>
-            <a:ext cx="3566160" cy="914400"/>
-          </a:xfrm>
-          <a:prstGeom prst="roundRect">
-            <a:avLst>
-              <a:gd name="adj" fmla="val 8000"/>
-            </a:avLst>
-          </a:prstGeom>
-          <a:solidFill>
-            <a:srgbClr val="1A1F2B"/>
-          </a:solidFill>
-          <a:ln w="15875">
-            <a:solidFill>
-              <a:srgbClr val="EF6A5C"/>
-            </a:solidFill>
-          </a:ln>
-          <a:effectLst/>
-        </p:spPr>
-        <p:style>
-          <a:lnRef idx="1">
-            <a:schemeClr val="accent1"/>
-          </a:lnRef>
-          <a:fillRef idx="3">
-            <a:schemeClr val="accent1"/>
-          </a:fillRef>
-          <a:effectRef idx="2">
-            <a:schemeClr val="accent1"/>
-          </a:effectRef>
-          <a:fontRef idx="minor">
-            <a:schemeClr val="lt1"/>
-          </a:fontRef>
-        </p:style>
-        <p:txBody>
-          <a:bodyPr rtlCol="0" anchor="ctr" wrap="square" lIns="146304" rIns="146304"/>
-          <a:lstStyle/>
-          <a:p>
-            <a:pPr algn="ctr"/>
-            <a:r>
-              <a:rPr sz="2200" b="1">
-                <a:solidFill>
-                  <a:srgbClr val="EF6A5C"/>
-                </a:solidFill>
-                <a:latin typeface="Noto Sans CJK KR"/>
-              </a:rPr>
-              <a:t>~196s</a:t>
-            </a:r>
-          </a:p>
-          <a:p>
-            <a:pPr algn="ctr"/>
-            <a:r>
-              <a:rPr sz="1050">
-                <a:solidFill>
-                  <a:srgbClr val="8B95AB"/>
-                </a:solidFill>
-                <a:latin typeface="Noto Sans CJK KR"/>
-              </a:rPr>
-              <a:t>후처리 고정비용
-(26,000 iter, 프레임수 무관)</a:t>
-            </a:r>
-          </a:p>
-        </p:txBody>
-      </p:sp>
-      <p:sp>
-        <p:nvSpPr>
-          <p:cNvPr id="8" name="Rounded Rectangle 7"/>
-          <p:cNvSpPr/>
-          <p:nvPr/>
-        </p:nvSpPr>
-        <p:spPr>
-          <a:xfrm>
-            <a:off x="4297679" y="4572000"/>
-            <a:ext cx="3566160" cy="914400"/>
-          </a:xfrm>
-          <a:prstGeom prst="roundRect">
-            <a:avLst>
-              <a:gd name="adj" fmla="val 8000"/>
-            </a:avLst>
-          </a:prstGeom>
-          <a:solidFill>
-            <a:srgbClr val="1A1F2B"/>
-          </a:solidFill>
-          <a:ln w="15875">
-            <a:solidFill>
-              <a:srgbClr val="4CC98A"/>
-            </a:solidFill>
-          </a:ln>
-          <a:effectLst/>
-        </p:spPr>
-        <p:style>
-          <a:lnRef idx="1">
-            <a:schemeClr val="accent1"/>
-          </a:lnRef>
-          <a:fillRef idx="3">
-            <a:schemeClr val="accent1"/>
-          </a:fillRef>
-          <a:effectRef idx="2">
-            <a:schemeClr val="accent1"/>
-          </a:effectRef>
-          <a:fontRef idx="minor">
-            <a:schemeClr val="lt1"/>
-          </a:fontRef>
-        </p:style>
-        <p:txBody>
-          <a:bodyPr rtlCol="0" anchor="ctr" wrap="square" lIns="146304" rIns="146304"/>
-          <a:lstStyle/>
-          <a:p>
-            <a:pPr algn="ctr"/>
-            <a:r>
-              <a:rPr sz="2200" b="1">
-                <a:solidFill>
-                  <a:srgbClr val="4CC98A"/>
-                </a:solidFill>
-                <a:latin typeface="Noto Sans CJK KR"/>
-              </a:rPr>
-              <a:t>+3.04 / +6.45dB</a:t>
-            </a:r>
-          </a:p>
-          <a:p>
-            <a:pPr algn="ctr"/>
-            <a:r>
-              <a:rPr sz="1050">
-                <a:solidFill>
-                  <a:srgbClr val="8B95AB"/>
-                </a:solidFill>
-                <a:latin typeface="Noto Sans CJK KR"/>
-              </a:rPr>
-              <a:t>PSNR 이득(mean/kf)</a:t>
-            </a:r>
-          </a:p>
-        </p:txBody>
-      </p:sp>
-      <p:sp>
-        <p:nvSpPr>
-          <p:cNvPr id="9" name="Rounded Rectangle 8"/>
-          <p:cNvSpPr/>
-          <p:nvPr/>
-        </p:nvSpPr>
-        <p:spPr>
-          <a:xfrm>
-            <a:off x="8046719" y="4572000"/>
-            <a:ext cx="3657600" cy="914400"/>
-          </a:xfrm>
-          <a:prstGeom prst="roundRect">
-            <a:avLst>
-              <a:gd name="adj" fmla="val 8000"/>
-            </a:avLst>
-          </a:prstGeom>
-          <a:solidFill>
-            <a:srgbClr val="1A1F2B"/>
-          </a:solidFill>
-          <a:ln w="15875">
-            <a:solidFill>
-              <a:srgbClr val="E8ECF4"/>
-            </a:solidFill>
-          </a:ln>
-          <a:effectLst/>
-        </p:spPr>
-        <p:style>
-          <a:lnRef idx="1">
-            <a:schemeClr val="accent1"/>
-          </a:lnRef>
-          <a:fillRef idx="3">
-            <a:schemeClr val="accent1"/>
-          </a:fillRef>
-          <a:effectRef idx="2">
-            <a:schemeClr val="accent1"/>
-          </a:effectRef>
-          <a:fontRef idx="minor">
-            <a:schemeClr val="lt1"/>
-          </a:fontRef>
-        </p:style>
-        <p:txBody>
-          <a:bodyPr rtlCol="0" anchor="ctr" wrap="square" lIns="146304" rIns="146304"/>
-          <a:lstStyle/>
-          <a:p>
-            <a:pPr algn="ctr"/>
-            <a:r>
-              <a:rPr sz="2200" b="1">
-                <a:solidFill>
-                  <a:srgbClr val="E8ECF4"/>
-                </a:solidFill>
-                <a:latin typeface="Noto Sans CJK KR"/>
-              </a:rPr>
-              <a:t>26.53 / 30.33dB</a:t>
-            </a:r>
-          </a:p>
-          <a:p>
-            <a:pPr algn="ctr"/>
-            <a:r>
-              <a:rPr sz="1050">
-                <a:solidFill>
-                  <a:srgbClr val="8B95AB"/>
-                </a:solidFill>
-                <a:latin typeface="Noto Sans CJK KR"/>
-              </a:rPr>
-              <a:t>exp56 최종 레시피 위 실측</a:t>
-            </a:r>
-          </a:p>
-        </p:txBody>
-      </p:sp>
-      <p:sp>
-        <p:nvSpPr>
-          <p:cNvPr id="10" name="TextBox 9"/>
-          <p:cNvSpPr txBox="1"/>
-          <p:nvPr/>
-        </p:nvSpPr>
-        <p:spPr>
-          <a:xfrm>
-            <a:off x="548640" y="5623560"/>
-            <a:ext cx="11094415" cy="1005840"/>
-          </a:xfrm>
-          <a:prstGeom prst="rect">
-            <a:avLst/>
-          </a:prstGeom>
-          <a:noFill/>
-        </p:spPr>
-        <p:txBody>
-          <a:bodyPr wrap="square" anchor="t">
-            <a:spAutoFit/>
-          </a:bodyPr>
-          <a:lstStyle/>
-          <a:p>
-            <a:pPr algn="l">
-              <a:lnSpc>
-                <a:spcPct val="120000"/>
-              </a:lnSpc>
-            </a:pPr>
-            <a:r>
-              <a:rPr sz="1100" b="0">
-                <a:solidFill>
-                  <a:srgbClr val="8B95AB"/>
-                </a:solidFill>
-                <a:latin typeface="Noto Sans CJK KR"/>
-              </a:rPr>
-              <a:t>07/18 구버전 설정에서 처음 발견된 패턴(+4.12/+7.95dB)이 exp56 최종 레시피에서도 재현됨(2026-07-27 재검증). 26k iteration은 시퀀스 길이와 무관한 고정 배치 작업이라 현재 구조로는 "실시간"이 아니라 "끝나고 한 번에 몰아서" — 다음 슬라이드는 이걸 실시간 호환으로 만들 방법에 대한 제안.</a:t>
-            </a:r>
-          </a:p>
-        </p:txBody>
-      </p:sp>
-    </p:spTree>
-  </p:cSld>
-  <p:clrMapOvr>
-    <a:masterClrMapping/>
-  </p:clrMapOvr>
-</p:sld>
-</file>
-
-<file path=ppt/slides/slide2.xml><?xml version="1.0" encoding="utf-8"?>
-<p:sld xmlns:a="http://schemas.openxmlformats.org/drawingml/2006/main" xmlns:p="http://schemas.openxmlformats.org/presentationml/2006/main" xmlns:r="http://schemas.openxmlformats.org/officeDocument/2006/relationships">
-  <p:cSld>
-    <p:spTree>
-      <p:nvGrpSpPr>
-        <p:cNvPr id="1" name=""/>
-        <p:cNvGrpSpPr/>
-        <p:nvPr/>
-      </p:nvGrpSpPr>
-      <p:grpSpPr/>
-      <p:sp>
-        <p:nvSpPr>
-          <p:cNvPr id="2" name="Rectangle 1"/>
-          <p:cNvSpPr/>
-          <p:nvPr/>
-        </p:nvSpPr>
-        <p:spPr>
-          <a:xfrm>
-            <a:off x="0" y="0"/>
-            <a:ext cx="12191695" cy="6858000"/>
-          </a:xfrm>
-          <a:prstGeom prst="rect">
-            <a:avLst/>
-          </a:prstGeom>
-          <a:solidFill>
-            <a:srgbClr val="12151C"/>
-          </a:solidFill>
-          <a:ln>
-            <a:noFill/>
-          </a:ln>
-          <a:effectLst/>
-        </p:spPr>
-        <p:style>
-          <a:lnRef idx="1">
-            <a:schemeClr val="accent1"/>
-          </a:lnRef>
-          <a:fillRef idx="3">
-            <a:schemeClr val="accent1"/>
-          </a:fillRef>
-          <a:effectRef idx="2">
-            <a:schemeClr val="accent1"/>
-          </a:effectRef>
-          <a:fontRef idx="minor">
-            <a:schemeClr val="lt1"/>
-          </a:fontRef>
-        </p:style>
-        <p:txBody>
-          <a:bodyPr rtlCol="0" anchor="ctr"/>
-          <a:lstStyle/>
-          <a:p>
-            <a:pPr algn="ctr"/>
-          </a:p>
-        </p:txBody>
-      </p:sp>
-      <p:sp>
-        <p:nvSpPr>
-          <p:cNvPr id="3" name="TextBox 2"/>
-          <p:cNvSpPr txBox="1"/>
-          <p:nvPr/>
-        </p:nvSpPr>
-        <p:spPr>
-          <a:xfrm>
-            <a:off x="548640" y="320040"/>
-            <a:ext cx="11094415" cy="292608"/>
-          </a:xfrm>
-          <a:prstGeom prst="rect">
-            <a:avLst/>
-          </a:prstGeom>
-          <a:noFill/>
-        </p:spPr>
-        <p:txBody>
-          <a:bodyPr wrap="square" anchor="t">
-            <a:spAutoFit/>
-          </a:bodyPr>
-          <a:lstStyle/>
-          <a:p>
-            <a:pPr algn="l">
-              <a:lnSpc>
-                <a:spcPct val="100000"/>
-              </a:lnSpc>
-            </a:pPr>
-            <a:r>
-              <a:rPr sz="1200" b="1">
-                <a:solidFill>
-                  <a:srgbClr val="FFB454"/>
-                </a:solidFill>
-                <a:latin typeface="Noto Sans CJK KR"/>
-              </a:rPr>
-              <a:t>RECAP · 07/20</a:t>
-            </a:r>
-          </a:p>
-        </p:txBody>
-      </p:sp>
-      <p:sp>
-        <p:nvSpPr>
-          <p:cNvPr id="4" name="TextBox 3"/>
-          <p:cNvSpPr txBox="1"/>
-          <p:nvPr/>
-        </p:nvSpPr>
-        <p:spPr>
-          <a:xfrm>
-            <a:off x="548640" y="566928"/>
-            <a:ext cx="11094415" cy="548640"/>
-          </a:xfrm>
-          <a:prstGeom prst="rect">
-            <a:avLst/>
-          </a:prstGeom>
-          <a:noFill/>
-        </p:spPr>
-        <p:txBody>
-          <a:bodyPr wrap="square" anchor="t">
-            <a:spAutoFit/>
-          </a:bodyPr>
-          <a:lstStyle/>
-          <a:p>
-            <a:pPr algn="l">
-              <a:lnSpc>
-                <a:spcPct val="100000"/>
-              </a:lnSpc>
-            </a:pPr>
-            <a:r>
-              <a:rPr sz="2200" b="1">
-                <a:solidFill>
-                  <a:srgbClr val="E8ECF4"/>
-                </a:solidFill>
-                <a:latin typeface="Noto Sans CJK KR"/>
-              </a:rPr>
-              <a:t>지난 발표 리캡: 어디까지 끝냈나</a:t>
-            </a:r>
-          </a:p>
-        </p:txBody>
-      </p:sp>
-      <p:sp>
-        <p:nvSpPr>
-          <p:cNvPr id="5" name="Rectangle 4"/>
-          <p:cNvSpPr/>
-          <p:nvPr/>
-        </p:nvSpPr>
-        <p:spPr>
-          <a:xfrm>
-            <a:off x="548640" y="1078992"/>
-            <a:ext cx="11094415" cy="25400"/>
-          </a:xfrm>
-          <a:prstGeom prst="rect">
-            <a:avLst/>
-          </a:prstGeom>
-          <a:solidFill>
-            <a:srgbClr val="2A3242"/>
-          </a:solidFill>
-          <a:ln>
-            <a:noFill/>
-          </a:ln>
-          <a:effectLst/>
-        </p:spPr>
-        <p:style>
-          <a:lnRef idx="1">
-            <a:schemeClr val="accent1"/>
-          </a:lnRef>
-          <a:fillRef idx="3">
-            <a:schemeClr val="accent1"/>
-          </a:fillRef>
-          <a:effectRef idx="2">
-            <a:schemeClr val="accent1"/>
-          </a:effectRef>
-          <a:fontRef idx="minor">
-            <a:schemeClr val="lt1"/>
-          </a:fontRef>
-        </p:style>
-        <p:txBody>
-          <a:bodyPr rtlCol="0" anchor="ctr"/>
-          <a:lstStyle/>
-          <a:p>
-            <a:pPr algn="ctr"/>
-          </a:p>
-        </p:txBody>
-      </p:sp>
-      <p:sp>
-        <p:nvSpPr>
-          <p:cNvPr id="6" name="TextBox 5"/>
-          <p:cNvSpPr txBox="1"/>
-          <p:nvPr/>
-        </p:nvSpPr>
-        <p:spPr>
-          <a:xfrm>
-            <a:off x="548640" y="1325880"/>
-            <a:ext cx="11094415" cy="3108960"/>
-          </a:xfrm>
-          <a:prstGeom prst="rect">
-            <a:avLst/>
-          </a:prstGeom>
-          <a:noFill/>
-        </p:spPr>
-        <p:txBody>
-          <a:bodyPr wrap="square">
-            <a:spAutoFit/>
-          </a:bodyPr>
-          <a:lstStyle/>
-          <a:p>
-            <a:pPr>
-              <a:lnSpc>
-                <a:spcPct val="122000"/>
-              </a:lnSpc>
-              <a:spcAft>
-                <a:spcPts val="800"/>
-              </a:spcAft>
-            </a:pPr>
-            <a:r>
-              <a:rPr sz="1350">
-                <a:solidFill>
-                  <a:srgbClr val="E8ECF4"/>
-                </a:solidFill>
-                <a:latin typeface="Noto Sans CJK KR"/>
-              </a:rPr>
-              <a:t>•  VIGS-SLAM(ECCV2026) 채택 — 단안 RGB+IMU, DROID-SLAM식 dense correlation 트래킹. 우리 목표(흑백 SLAM 트래킹 + RGB incremental 매핑)에 가장 가까운 참조 아키텍처</a:t>
-            </a:r>
-          </a:p>
-          <a:p>
-            <a:pPr>
-              <a:lnSpc>
-                <a:spcPct val="122000"/>
-              </a:lnSpc>
-              <a:spcAft>
-                <a:spcPts val="800"/>
-              </a:spcAft>
-            </a:pPr>
-            <a:r>
-              <a:rPr sz="1350">
-                <a:solidFill>
-                  <a:srgbClr val="E8ECF4"/>
-                </a:solidFill>
-                <a:latin typeface="Noto Sans CJK KR"/>
-              </a:rPr>
-              <a:t>•  20초 타이밍 버그 발견·수정 — reader 프로세스 sleep(20) 순서 문제로 모든 "온라인 루프 총합"에 인위적 20초가 섞여있었음. 수정 후 실시간 배수 2.77배 → 1.52배로 정정</a:t>
-            </a:r>
-          </a:p>
-          <a:p>
-            <a:pPr>
-              <a:lnSpc>
-                <a:spcPct val="122000"/>
-              </a:lnSpc>
-              <a:spcAft>
-                <a:spcPts val="800"/>
-              </a:spcAft>
-            </a:pPr>
-            <a:r>
-              <a:rPr sz="1350">
-                <a:solidFill>
-                  <a:srgbClr val="E8ECF4"/>
-                </a:solidFill>
-                <a:latin typeface="Noto Sans CJK KR"/>
-              </a:rPr>
-              <a:t>•  구조적 개선 — IMU 프리적분 C++ 빌드 + TensorRT 3종(−14%), tracking/mapping 비동기 오버랩 gs_parallel 도입(업스트림 레이스 컨디션 버그 발견·수정, −26.1% 추가)</a:t>
-            </a:r>
-          </a:p>
-          <a:p>
-            <a:pPr>
-              <a:lnSpc>
-                <a:spcPct val="122000"/>
-              </a:lnSpc>
-              <a:spcAft>
-                <a:spcPts val="800"/>
-              </a:spcAft>
-            </a:pPr>
-            <a:r>
-              <a:rPr sz="1350">
-                <a:solidFill>
-                  <a:srgbClr val="E8ECF4"/>
-                </a:solidFill>
-                <a:latin typeface="Noto Sans CJK KR"/>
-              </a:rPr>
-              <a:t>•  핵심 진단 — mapping(rasterize+backward+loss_compute)이 온라인 루프의 81.4%로 압도적 병목. 이번 사이클(exp53~56) 전체가 이 진단 위에서 진행됨</a:t>
-            </a:r>
-          </a:p>
-        </p:txBody>
-      </p:sp>
-      <p:sp>
-        <p:nvSpPr>
-          <p:cNvPr id="7" name="TextBox 6"/>
-          <p:cNvSpPr txBox="1"/>
-          <p:nvPr/>
-        </p:nvSpPr>
-        <p:spPr>
-          <a:xfrm>
-            <a:off x="548640" y="6126480"/>
-            <a:ext cx="11094415" cy="457200"/>
-          </a:xfrm>
-          <a:prstGeom prst="rect">
-            <a:avLst/>
-          </a:prstGeom>
-          <a:noFill/>
-        </p:spPr>
-        <p:txBody>
-          <a:bodyPr wrap="square" anchor="t">
-            <a:spAutoFit/>
-          </a:bodyPr>
-          <a:lstStyle/>
-          <a:p>
-            <a:pPr algn="l">
-              <a:lnSpc>
-                <a:spcPct val="120000"/>
-              </a:lnSpc>
-            </a:pPr>
-            <a:r>
-              <a:rPr sz="1100" b="0">
-                <a:solidFill>
-                  <a:srgbClr val="8B95AB"/>
-                </a:solidFill>
-                <a:latin typeface="Noto Sans CJK KR"/>
-              </a:rPr>
-              <a:t>오늘은 이 지점(1.52배, 아직 실시간 아님) 이후 일주일간 일어난 일만 다룹니다.</a:t>
-            </a:r>
-          </a:p>
-        </p:txBody>
-      </p:sp>
-    </p:spTree>
-  </p:cSld>
-  <p:clrMapOvr>
-    <a:masterClrMapping/>
-  </p:clrMapOvr>
-</p:sld>
-</file>
-
-<file path=ppt/slides/slide20.xml><?xml version="1.0" encoding="utf-8"?>
-<p:sld xmlns:a="http://schemas.openxmlformats.org/drawingml/2006/main" xmlns:p="http://schemas.openxmlformats.org/presentationml/2006/main" xmlns:r="http://schemas.openxmlformats.org/officeDocument/2006/relationships">
-  <p:cSld>
-    <p:spTree>
-      <p:nvGrpSpPr>
-        <p:cNvPr id="1" name=""/>
-        <p:cNvGrpSpPr/>
-        <p:nvPr/>
-      </p:nvGrpSpPr>
-      <p:grpSpPr/>
-      <p:sp>
-        <p:nvSpPr>
-          <p:cNvPr id="2" name="Rectangle 1"/>
-          <p:cNvSpPr/>
-          <p:nvPr/>
-        </p:nvSpPr>
-        <p:spPr>
-          <a:xfrm>
-            <a:off x="0" y="0"/>
-            <a:ext cx="12191695" cy="6858000"/>
-          </a:xfrm>
-          <a:prstGeom prst="rect">
-            <a:avLst/>
-          </a:prstGeom>
-          <a:solidFill>
-            <a:srgbClr val="12151C"/>
-          </a:solidFill>
-          <a:ln>
-            <a:noFill/>
-          </a:ln>
-          <a:effectLst/>
-        </p:spPr>
-        <p:style>
-          <a:lnRef idx="1">
-            <a:schemeClr val="accent1"/>
-          </a:lnRef>
-          <a:fillRef idx="3">
-            <a:schemeClr val="accent1"/>
-          </a:fillRef>
-          <a:effectRef idx="2">
-            <a:schemeClr val="accent1"/>
-          </a:effectRef>
-          <a:fontRef idx="minor">
-            <a:schemeClr val="lt1"/>
-          </a:fontRef>
-        </p:style>
-        <p:txBody>
-          <a:bodyPr rtlCol="0" anchor="ctr"/>
-          <a:lstStyle/>
-          <a:p>
-            <a:pPr algn="ctr"/>
-          </a:p>
-        </p:txBody>
-      </p:sp>
-      <p:sp>
-        <p:nvSpPr>
-          <p:cNvPr id="3" name="TextBox 2"/>
-          <p:cNvSpPr txBox="1"/>
-          <p:nvPr/>
-        </p:nvSpPr>
-        <p:spPr>
-          <a:xfrm>
-            <a:off x="548640" y="320040"/>
-            <a:ext cx="11094415" cy="292608"/>
-          </a:xfrm>
-          <a:prstGeom prst="rect">
-            <a:avLst/>
-          </a:prstGeom>
-          <a:noFill/>
-        </p:spPr>
-        <p:txBody>
-          <a:bodyPr wrap="square" anchor="t">
-            <a:spAutoFit/>
-          </a:bodyPr>
-          <a:lstStyle/>
-          <a:p>
-            <a:pPr algn="l">
-              <a:lnSpc>
-                <a:spcPct val="100000"/>
-              </a:lnSpc>
-            </a:pPr>
-            <a:r>
-              <a:rPr sz="1200" b="1">
-                <a:solidFill>
-                  <a:srgbClr val="FFB454"/>
-                </a:solidFill>
-                <a:latin typeface="Noto Sans CJK KR"/>
-              </a:rPr>
-              <a:t>§4 · PROPOSAL</a:t>
-            </a:r>
-          </a:p>
-        </p:txBody>
-      </p:sp>
-      <p:sp>
-        <p:nvSpPr>
-          <p:cNvPr id="4" name="TextBox 3"/>
-          <p:cNvSpPr txBox="1"/>
-          <p:nvPr/>
-        </p:nvSpPr>
-        <p:spPr>
-          <a:xfrm>
-            <a:off x="548640" y="566928"/>
-            <a:ext cx="11094415" cy="548640"/>
-          </a:xfrm>
-          <a:prstGeom prst="rect">
-            <a:avLst/>
-          </a:prstGeom>
-          <a:noFill/>
-        </p:spPr>
-        <p:txBody>
-          <a:bodyPr wrap="square" anchor="t">
-            <a:spAutoFit/>
-          </a:bodyPr>
-          <a:lstStyle/>
-          <a:p>
-            <a:pPr algn="l">
-              <a:lnSpc>
-                <a:spcPct val="100000"/>
-              </a:lnSpc>
-            </a:pPr>
-            <a:r>
-              <a:rPr sz="2200" b="1">
-                <a:solidFill>
-                  <a:srgbClr val="E8ECF4"/>
-                </a:solidFill>
-                <a:latin typeface="Noto Sans CJK KR"/>
-              </a:rPr>
-              <a:t>후처리를 실시간 호환으로 만들려면</a:t>
-            </a:r>
-          </a:p>
-        </p:txBody>
-      </p:sp>
-      <p:sp>
-        <p:nvSpPr>
-          <p:cNvPr id="5" name="Rectangle 4"/>
-          <p:cNvSpPr/>
-          <p:nvPr/>
-        </p:nvSpPr>
-        <p:spPr>
-          <a:xfrm>
-            <a:off x="548640" y="1078992"/>
-            <a:ext cx="11094415" cy="25400"/>
-          </a:xfrm>
-          <a:prstGeom prst="rect">
-            <a:avLst/>
-          </a:prstGeom>
-          <a:solidFill>
-            <a:srgbClr val="2A3242"/>
-          </a:solidFill>
-          <a:ln>
-            <a:noFill/>
-          </a:ln>
-          <a:effectLst/>
-        </p:spPr>
-        <p:style>
-          <a:lnRef idx="1">
-            <a:schemeClr val="accent1"/>
-          </a:lnRef>
-          <a:fillRef idx="3">
-            <a:schemeClr val="accent1"/>
-          </a:fillRef>
-          <a:effectRef idx="2">
-            <a:schemeClr val="accent1"/>
-          </a:effectRef>
-          <a:fontRef idx="minor">
-            <a:schemeClr val="lt1"/>
-          </a:fontRef>
-        </p:style>
-        <p:txBody>
-          <a:bodyPr rtlCol="0" anchor="ctr"/>
-          <a:lstStyle/>
-          <a:p>
-            <a:pPr algn="ctr"/>
-          </a:p>
-        </p:txBody>
-      </p:sp>
-      <p:sp>
-        <p:nvSpPr>
-          <p:cNvPr id="6" name="TextBox 5"/>
-          <p:cNvSpPr txBox="1"/>
-          <p:nvPr/>
-        </p:nvSpPr>
-        <p:spPr>
-          <a:xfrm>
-            <a:off x="548640" y="1371600"/>
-            <a:ext cx="11094415" cy="914400"/>
-          </a:xfrm>
-          <a:prstGeom prst="rect">
-            <a:avLst/>
-          </a:prstGeom>
-          <a:noFill/>
-        </p:spPr>
-        <p:txBody>
-          <a:bodyPr wrap="square">
-            <a:spAutoFit/>
-          </a:bodyPr>
-          <a:lstStyle/>
-          <a:p>
-            <a:pPr>
-              <a:lnSpc>
-                <a:spcPct val="122000"/>
-              </a:lnSpc>
-              <a:spcAft>
-                <a:spcPts val="800"/>
-              </a:spcAft>
-            </a:pPr>
-            <a:r>
-              <a:rPr sz="1350">
-                <a:solidFill>
-                  <a:srgbClr val="E8ECF4"/>
-                </a:solidFill>
-                <a:latin typeface="Noto Sans CJK KR"/>
-              </a:rPr>
-              <a:t>•  핵심 문제: 26,000 iteration이 시퀀스 종료 후 한 번에 블로킹으로 몰림 — 온라인 시스템엔 "종료 시점"이 없음</a:t>
-            </a:r>
-          </a:p>
-        </p:txBody>
-      </p:sp>
-      <p:sp>
-        <p:nvSpPr>
-          <p:cNvPr id="7" name="Rounded Rectangle 6"/>
-          <p:cNvSpPr/>
-          <p:nvPr/>
-        </p:nvSpPr>
-        <p:spPr>
-          <a:xfrm>
-            <a:off x="548640" y="2468880"/>
-            <a:ext cx="1554480" cy="292608"/>
-          </a:xfrm>
-          <a:prstGeom prst="roundRect">
-            <a:avLst>
-              <a:gd name="adj" fmla="val 50000"/>
-            </a:avLst>
-          </a:prstGeom>
-          <a:solidFill>
-            <a:srgbClr val="1A1F2B"/>
-          </a:solidFill>
-          <a:ln w="12700">
-            <a:solidFill>
-              <a:srgbClr val="4C86EA"/>
-            </a:solidFill>
-          </a:ln>
-          <a:effectLst/>
-        </p:spPr>
-        <p:style>
-          <a:lnRef idx="1">
-            <a:schemeClr val="accent1"/>
-          </a:lnRef>
-          <a:fillRef idx="3">
-            <a:schemeClr val="accent1"/>
-          </a:fillRef>
-          <a:effectRef idx="2">
-            <a:schemeClr val="accent1"/>
-          </a:effectRef>
-          <a:fontRef idx="minor">
-            <a:schemeClr val="lt1"/>
-          </a:fontRef>
-        </p:style>
-        <p:txBody>
-          <a:bodyPr rtlCol="0" anchor="ctr" lIns="45720" rIns="45720"/>
-          <a:lstStyle/>
-          <a:p>
-            <a:pPr algn="ctr"/>
-            <a:r>
-              <a:rPr sz="900" b="1">
-                <a:solidFill>
-                  <a:srgbClr val="4C86EA"/>
-                </a:solidFill>
-                <a:latin typeface="Noto Sans CJK KR"/>
-              </a:rPr>
-              <a:t>A · 상시 백그라운드화</a:t>
-            </a:r>
-          </a:p>
-        </p:txBody>
-      </p:sp>
-      <p:sp>
-        <p:nvSpPr>
-          <p:cNvPr id="8" name="TextBox 7"/>
-          <p:cNvSpPr txBox="1"/>
-          <p:nvPr/>
-        </p:nvSpPr>
-        <p:spPr>
-          <a:xfrm>
-            <a:off x="2240280" y="2414016"/>
-            <a:ext cx="9402775" cy="502920"/>
-          </a:xfrm>
-          <a:prstGeom prst="rect">
-            <a:avLst/>
-          </a:prstGeom>
-          <a:noFill/>
-        </p:spPr>
-        <p:txBody>
-          <a:bodyPr wrap="square" anchor="ctr">
-            <a:spAutoFit/>
-          </a:bodyPr>
-          <a:lstStyle/>
-          <a:p>
-            <a:pPr algn="l">
-              <a:lnSpc>
-                <a:spcPct val="100000"/>
-              </a:lnSpc>
-            </a:pPr>
-            <a:r>
-              <a:rPr sz="1200" b="0">
-                <a:solidFill>
-                  <a:srgbClr val="E8ECF4"/>
-                </a:solidFill>
-                <a:latin typeface="Noto Sans CJK KR"/>
-              </a:rPr>
-              <a:t>26k를 세션 끝에 몰아서 돌리지 않고, 이미 지나간(프론티어 밖) keyframe에 대해 GPU 유휴 사이클마다 소량씩 지속 refinement — n_global_views(Phase7)가 이미 하던 걸 전용 백그라운드 루프로 확장</a:t>
-            </a:r>
-          </a:p>
-        </p:txBody>
-      </p:sp>
-      <p:sp>
-        <p:nvSpPr>
-          <p:cNvPr id="9" name="Rounded Rectangle 8"/>
-          <p:cNvSpPr/>
-          <p:nvPr/>
-        </p:nvSpPr>
-        <p:spPr>
-          <a:xfrm>
-            <a:off x="548640" y="3429000"/>
-            <a:ext cx="1554480" cy="292608"/>
-          </a:xfrm>
-          <a:prstGeom prst="roundRect">
-            <a:avLst>
-              <a:gd name="adj" fmla="val 50000"/>
-            </a:avLst>
-          </a:prstGeom>
-          <a:solidFill>
-            <a:srgbClr val="1A1F2B"/>
-          </a:solidFill>
-          <a:ln w="12700">
-            <a:solidFill>
-              <a:srgbClr val="FFB454"/>
-            </a:solidFill>
-          </a:ln>
-          <a:effectLst/>
-        </p:spPr>
-        <p:style>
-          <a:lnRef idx="1">
-            <a:schemeClr val="accent1"/>
-          </a:lnRef>
-          <a:fillRef idx="3">
-            <a:schemeClr val="accent1"/>
-          </a:fillRef>
-          <a:effectRef idx="2">
-            <a:schemeClr val="accent1"/>
-          </a:effectRef>
-          <a:fontRef idx="minor">
-            <a:schemeClr val="lt1"/>
-          </a:fontRef>
-        </p:style>
-        <p:txBody>
-          <a:bodyPr rtlCol="0" anchor="ctr" lIns="45720" rIns="45720"/>
-          <a:lstStyle/>
-          <a:p>
-            <a:pPr algn="ctr"/>
-            <a:r>
-              <a:rPr sz="900" b="1">
-                <a:solidFill>
-                  <a:srgbClr val="FFB454"/>
-                </a:solidFill>
-                <a:latin typeface="Noto Sans CJK KR"/>
-              </a:rPr>
-              <a:t>B · 우선순위 스케줄링</a:t>
-            </a:r>
-          </a:p>
-        </p:txBody>
-      </p:sp>
-      <p:sp>
-        <p:nvSpPr>
-          <p:cNvPr id="10" name="TextBox 9"/>
-          <p:cNvSpPr txBox="1"/>
-          <p:nvPr/>
-        </p:nvSpPr>
-        <p:spPr>
-          <a:xfrm>
-            <a:off x="2240280" y="3374136"/>
-            <a:ext cx="9402775" cy="502920"/>
-          </a:xfrm>
-          <a:prstGeom prst="rect">
-            <a:avLst/>
-          </a:prstGeom>
-          <a:noFill/>
-        </p:spPr>
-        <p:txBody>
-          <a:bodyPr wrap="square" anchor="ctr">
-            <a:spAutoFit/>
-          </a:bodyPr>
-          <a:lstStyle/>
-          <a:p>
-            <a:pPr algn="l">
-              <a:lnSpc>
-                <a:spcPct val="100000"/>
-              </a:lnSpc>
-            </a:pPr>
-            <a:r>
-              <a:rPr sz="1200" b="0">
-                <a:solidFill>
-                  <a:srgbClr val="E8ECF4"/>
-                </a:solidFill>
-                <a:latin typeface="Noto Sans CJK KR"/>
-              </a:rPr>
-              <a:t>_gs_queue가 비어 mapper가 노는 시점(exp55 부록에서 이미 발견한 유휴 구간)을 감지해 그 틈에만 refinement 스텝을 끼워 넣음 — 신규 keyframe 처리를 항상 최우선으로 선점</a:t>
-            </a:r>
-          </a:p>
-        </p:txBody>
-      </p:sp>
-      <p:sp>
-        <p:nvSpPr>
-          <p:cNvPr id="11" name="Rounded Rectangle 10"/>
-          <p:cNvSpPr/>
-          <p:nvPr/>
-        </p:nvSpPr>
-        <p:spPr>
-          <a:xfrm>
-            <a:off x="548640" y="4389120"/>
-            <a:ext cx="1554480" cy="292608"/>
-          </a:xfrm>
-          <a:prstGeom prst="roundRect">
-            <a:avLst>
-              <a:gd name="adj" fmla="val 50000"/>
-            </a:avLst>
-          </a:prstGeom>
-          <a:solidFill>
-            <a:srgbClr val="1A1F2B"/>
-          </a:solidFill>
-          <a:ln w="12700">
-            <a:solidFill>
-              <a:srgbClr val="4CC98A"/>
-            </a:solidFill>
-          </a:ln>
-          <a:effectLst/>
-        </p:spPr>
-        <p:style>
-          <a:lnRef idx="1">
-            <a:schemeClr val="accent1"/>
-          </a:lnRef>
-          <a:fillRef idx="3">
-            <a:schemeClr val="accent1"/>
-          </a:fillRef>
-          <a:effectRef idx="2">
-            <a:schemeClr val="accent1"/>
-          </a:effectRef>
-          <a:fontRef idx="minor">
-            <a:schemeClr val="lt1"/>
-          </a:fontRef>
-        </p:style>
-        <p:txBody>
-          <a:bodyPr rtlCol="0" anchor="ctr" lIns="45720" rIns="45720"/>
-          <a:lstStyle/>
-          <a:p>
-            <a:pPr algn="ctr"/>
-            <a:r>
-              <a:rPr sz="900" b="1">
-                <a:solidFill>
-                  <a:srgbClr val="4CC98A"/>
-                </a:solidFill>
-                <a:latin typeface="Noto Sans CJK KR"/>
-              </a:rPr>
-              <a:t>C · 반복수 자체 축소</a:t>
-            </a:r>
-          </a:p>
-        </p:txBody>
-      </p:sp>
-      <p:sp>
-        <p:nvSpPr>
-          <p:cNvPr id="12" name="TextBox 11"/>
-          <p:cNvSpPr txBox="1"/>
-          <p:nvPr/>
-        </p:nvSpPr>
-        <p:spPr>
-          <a:xfrm>
-            <a:off x="2240280" y="4334256"/>
-            <a:ext cx="9402775" cy="502920"/>
-          </a:xfrm>
-          <a:prstGeom prst="rect">
-            <a:avLst/>
-          </a:prstGeom>
-          <a:noFill/>
-        </p:spPr>
-        <p:txBody>
-          <a:bodyPr wrap="square" anchor="ctr">
-            <a:spAutoFit/>
-          </a:bodyPr>
-          <a:lstStyle/>
-          <a:p>
-            <a:pPr algn="l">
-              <a:lnSpc>
-                <a:spcPct val="100000"/>
-              </a:lnSpc>
-            </a:pPr>
-            <a:r>
-              <a:rPr sz="1200" b="0">
-                <a:solidFill>
-                  <a:srgbClr val="E8ECF4"/>
-                </a:solidFill>
-                <a:latin typeface="Noto Sans CJK KR"/>
-              </a:rPr>
-              <a:t>iters=10→7이 온라인에서 그랬듯, 26,000도 고정 상수일 뿐 — 스윕(예: 5000/10000)해서 수확체감 지점을 찾으면 고정비용 자체를 줄일 수 있음(저위험, 미검증)</a:t>
-            </a:r>
-          </a:p>
-        </p:txBody>
-      </p:sp>
-      <p:sp>
-        <p:nvSpPr>
-          <p:cNvPr id="13" name="TextBox 12"/>
-          <p:cNvSpPr txBox="1"/>
-          <p:nvPr/>
-        </p:nvSpPr>
-        <p:spPr>
-          <a:xfrm>
-            <a:off x="548640" y="5760720"/>
-            <a:ext cx="11094415" cy="822960"/>
-          </a:xfrm>
-          <a:prstGeom prst="rect">
-            <a:avLst/>
-          </a:prstGeom>
-          <a:noFill/>
-        </p:spPr>
-        <p:txBody>
-          <a:bodyPr wrap="square" anchor="t">
-            <a:spAutoFit/>
-          </a:bodyPr>
-          <a:lstStyle/>
-          <a:p>
-            <a:pPr algn="l">
-              <a:lnSpc>
-                <a:spcPct val="120000"/>
-              </a:lnSpc>
-            </a:pPr>
-            <a:r>
-              <a:rPr sz="1100" b="0">
-                <a:solidFill>
-                  <a:srgbClr val="8B95AB"/>
-                </a:solidFill>
-                <a:latin typeface="Noto Sans CJK KR"/>
-              </a:rPr>
-              <a:t>권장: C(반복수 스윕)로 저위험 저비용 검증 먼저 → A/B(상시 백그라운드화)로 구조를 바꾸는 건 exp56 Phase7의 아이디어를 그대로 확장하는 것이라 다음 사이클 후보로 유력.</a:t>
-            </a:r>
-          </a:p>
-        </p:txBody>
-      </p:sp>
-    </p:spTree>
-  </p:cSld>
-  <p:clrMapOvr>
-    <a:masterClrMapping/>
-  </p:clrMapOvr>
-</p:sld>
-</file>
-
-<file path=ppt/slides/slide21.xml><?xml version="1.0" encoding="utf-8"?>
-<p:sld xmlns:a="http://schemas.openxmlformats.org/drawingml/2006/main" xmlns:p="http://schemas.openxmlformats.org/presentationml/2006/main" xmlns:r="http://schemas.openxmlformats.org/officeDocument/2006/relationships">
-  <p:cSld>
-    <p:spTree>
-      <p:nvGrpSpPr>
-        <p:cNvPr id="1" name=""/>
-        <p:cNvGrpSpPr/>
-        <p:nvPr/>
-      </p:nvGrpSpPr>
-      <p:grpSpPr/>
-      <p:sp>
-        <p:nvSpPr>
-          <p:cNvPr id="2" name="Rectangle 1"/>
-          <p:cNvSpPr/>
-          <p:nvPr/>
-        </p:nvSpPr>
-        <p:spPr>
-          <a:xfrm>
-            <a:off x="0" y="0"/>
-            <a:ext cx="12191695" cy="6858000"/>
-          </a:xfrm>
-          <a:prstGeom prst="rect">
-            <a:avLst/>
-          </a:prstGeom>
-          <a:solidFill>
-            <a:srgbClr val="12151C"/>
-          </a:solidFill>
-          <a:ln>
-            <a:noFill/>
-          </a:ln>
-          <a:effectLst/>
-        </p:spPr>
-        <p:style>
-          <a:lnRef idx="1">
-            <a:schemeClr val="accent1"/>
-          </a:lnRef>
-          <a:fillRef idx="3">
-            <a:schemeClr val="accent1"/>
-          </a:fillRef>
-          <a:effectRef idx="2">
-            <a:schemeClr val="accent1"/>
-          </a:effectRef>
-          <a:fontRef idx="minor">
-            <a:schemeClr val="lt1"/>
-          </a:fontRef>
-        </p:style>
-        <p:txBody>
-          <a:bodyPr rtlCol="0" anchor="ctr"/>
-          <a:lstStyle/>
-          <a:p>
-            <a:pPr algn="ctr"/>
-          </a:p>
-        </p:txBody>
-      </p:sp>
-      <p:sp>
-        <p:nvSpPr>
-          <p:cNvPr id="3" name="TextBox 2"/>
-          <p:cNvSpPr txBox="1"/>
-          <p:nvPr/>
-        </p:nvSpPr>
-        <p:spPr>
-          <a:xfrm>
-            <a:off x="548640" y="320040"/>
-            <a:ext cx="11094415" cy="292608"/>
-          </a:xfrm>
-          <a:prstGeom prst="rect">
-            <a:avLst/>
-          </a:prstGeom>
-          <a:noFill/>
-        </p:spPr>
-        <p:txBody>
-          <a:bodyPr wrap="square" anchor="t">
-            <a:spAutoFit/>
-          </a:bodyPr>
-          <a:lstStyle/>
-          <a:p>
-            <a:pPr algn="l">
-              <a:lnSpc>
-                <a:spcPct val="100000"/>
-              </a:lnSpc>
-            </a:pPr>
-            <a:r>
-              <a:rPr sz="1200" b="1">
-                <a:solidFill>
-                  <a:srgbClr val="FFB454"/>
-                </a:solidFill>
-                <a:latin typeface="Noto Sans CJK KR"/>
-              </a:rPr>
-              <a:t>§4 · REALITY CHECK</a:t>
-            </a:r>
-          </a:p>
-        </p:txBody>
-      </p:sp>
-      <p:sp>
-        <p:nvSpPr>
-          <p:cNvPr id="4" name="TextBox 3"/>
-          <p:cNvSpPr txBox="1"/>
-          <p:nvPr/>
-        </p:nvSpPr>
-        <p:spPr>
-          <a:xfrm>
-            <a:off x="548640" y="566928"/>
-            <a:ext cx="11094415" cy="548640"/>
-          </a:xfrm>
-          <a:prstGeom prst="rect">
-            <a:avLst/>
-          </a:prstGeom>
-          <a:noFill/>
-        </p:spPr>
-        <p:txBody>
-          <a:bodyPr wrap="square" anchor="t">
-            <a:spAutoFit/>
-          </a:bodyPr>
-          <a:lstStyle/>
-          <a:p>
-            <a:pPr algn="l">
-              <a:lnSpc>
-                <a:spcPct val="100000"/>
-              </a:lnSpc>
-            </a:pPr>
-            <a:r>
-              <a:rPr sz="2200" b="1">
-                <a:solidFill>
-                  <a:srgbClr val="E8ECF4"/>
-                </a:solidFill>
-                <a:latin typeface="Noto Sans CJK KR"/>
-              </a:rPr>
-              <a:t>post-processed급 online — 쉽지 않은 이유</a:t>
-            </a:r>
-          </a:p>
-        </p:txBody>
-      </p:sp>
-      <p:sp>
-        <p:nvSpPr>
-          <p:cNvPr id="5" name="Rectangle 4"/>
-          <p:cNvSpPr/>
-          <p:nvPr/>
-        </p:nvSpPr>
-        <p:spPr>
-          <a:xfrm>
-            <a:off x="548640" y="1078992"/>
-            <a:ext cx="11094415" cy="25400"/>
-          </a:xfrm>
-          <a:prstGeom prst="rect">
-            <a:avLst/>
-          </a:prstGeom>
-          <a:solidFill>
-            <a:srgbClr val="2A3242"/>
-          </a:solidFill>
-          <a:ln>
-            <a:noFill/>
-          </a:ln>
-          <a:effectLst/>
-        </p:spPr>
-        <p:style>
-          <a:lnRef idx="1">
-            <a:schemeClr val="accent1"/>
-          </a:lnRef>
-          <a:fillRef idx="3">
-            <a:schemeClr val="accent1"/>
-          </a:fillRef>
-          <a:effectRef idx="2">
-            <a:schemeClr val="accent1"/>
-          </a:effectRef>
-          <a:fontRef idx="minor">
-            <a:schemeClr val="lt1"/>
-          </a:fontRef>
-        </p:style>
-        <p:txBody>
-          <a:bodyPr rtlCol="0" anchor="ctr"/>
-          <a:lstStyle/>
-          <a:p>
-            <a:pPr algn="ctr"/>
-          </a:p>
-        </p:txBody>
-      </p:sp>
-      <p:pic>
-        <p:nvPicPr>
-          <p:cNvPr id="6" name="Picture 5" descr="fig_realtime_gap.png"/>
-          <p:cNvPicPr>
-            <a:picLocks noChangeAspect="1"/>
-          </p:cNvPicPr>
-          <p:nvPr/>
-        </p:nvPicPr>
-        <p:blipFill>
-          <a:blip r:embed="rId2"/>
-          <a:stretch>
-            <a:fillRect/>
-          </a:stretch>
-        </p:blipFill>
-        <p:spPr>
-          <a:xfrm>
-            <a:off x="582606" y="1234440"/>
-            <a:ext cx="5692786" cy="3840480"/>
-          </a:xfrm>
-          <a:prstGeom prst="rect">
-            <a:avLst/>
-          </a:prstGeom>
-        </p:spPr>
-      </p:pic>
-      <p:sp>
-        <p:nvSpPr>
-          <p:cNvPr id="7" name="TextBox 6"/>
-          <p:cNvSpPr txBox="1"/>
-          <p:nvPr/>
-        </p:nvSpPr>
-        <p:spPr>
-          <a:xfrm>
-            <a:off x="6583680" y="1371600"/>
-            <a:ext cx="5059375" cy="3840480"/>
-          </a:xfrm>
-          <a:prstGeom prst="rect">
-            <a:avLst/>
-          </a:prstGeom>
-          <a:noFill/>
-        </p:spPr>
-        <p:txBody>
-          <a:bodyPr wrap="square">
-            <a:spAutoFit/>
-          </a:bodyPr>
-          <a:lstStyle/>
-          <a:p>
-            <a:pPr>
-              <a:lnSpc>
-                <a:spcPct val="122000"/>
-              </a:lnSpc>
-              <a:spcAft>
-                <a:spcPts val="800"/>
-              </a:spcAft>
-            </a:pPr>
-            <a:r>
-              <a:rPr sz="1250">
-                <a:solidFill>
-                  <a:srgbClr val="E8ECF4"/>
-                </a:solidFill>
-                <a:latin typeface="Noto Sans CJK KR"/>
-              </a:rPr>
-              <a:t>•  계산량 격차: 26,000 iter × ~6.4ms/view-op(Phase8 실측치 그대로 적용) ≈ 166~196초 필요 — 지금 파이프라인 여유는 65.1s 예산 대비 19.3초뿐, 약 8~10배 부족</a:t>
-            </a:r>
-          </a:p>
-          <a:p>
-            <a:pPr>
-              <a:lnSpc>
-                <a:spcPct val="122000"/>
-              </a:lnSpc>
-              <a:spcAft>
-                <a:spcPts val="800"/>
-              </a:spcAft>
-            </a:pPr>
-            <a:r>
-              <a:rPr sz="1250">
-                <a:solidFill>
-                  <a:srgbClr val="E8ECF4"/>
-                </a:solidFill>
-                <a:latin typeface="Noto Sans CJK KR"/>
-              </a:rPr>
-              <a:t>•  더 근본적 문제: color_refinement는 "전체 궤적을 이미 다 본 상태"에서 모든 keyframe을 반복 방문하는 global 작업 — 라이브 스트림엔 애초에 "다 봤다"는 시점이 없음</a:t>
-            </a:r>
-          </a:p>
-          <a:p>
-            <a:pPr>
-              <a:lnSpc>
-                <a:spcPct val="122000"/>
-              </a:lnSpc>
-              <a:spcAft>
-                <a:spcPts val="800"/>
-              </a:spcAft>
-            </a:pPr>
-            <a:r>
-              <a:rPr sz="1250">
-                <a:solidFill>
-                  <a:srgbClr val="E8ECF4"/>
-                </a:solidFill>
-                <a:latin typeface="Noto Sans CJK KR"/>
-              </a:rPr>
-              <a:t>•  즉 "매 순간 완전히 캐치업된 post-processed급"은 계산량 문제 이전에 정의상 불가능</a:t>
-            </a:r>
-          </a:p>
-        </p:txBody>
-      </p:sp>
-      <p:sp>
-        <p:nvSpPr>
-          <p:cNvPr id="8" name="TextBox 7"/>
-          <p:cNvSpPr txBox="1"/>
-          <p:nvPr/>
-        </p:nvSpPr>
-        <p:spPr>
-          <a:xfrm>
-            <a:off x="6583680" y="5577840"/>
-            <a:ext cx="5059375" cy="914400"/>
-          </a:xfrm>
-          <a:prstGeom prst="rect">
-            <a:avLst/>
-          </a:prstGeom>
-          <a:noFill/>
-        </p:spPr>
-        <p:txBody>
-          <a:bodyPr wrap="square" anchor="t">
-            <a:spAutoFit/>
-          </a:bodyPr>
-          <a:lstStyle/>
-          <a:p>
-            <a:pPr algn="l">
-              <a:lnSpc>
-                <a:spcPct val="120000"/>
-              </a:lnSpc>
-            </a:pPr>
-            <a:r>
-              <a:rPr sz="1100" b="0">
-                <a:solidFill>
-                  <a:srgbClr val="8B95AB"/>
-                </a:solidFill>
-                <a:latin typeface="Noto Sans CJK KR"/>
-              </a:rPr>
-              <a:t>그래서 목표를 "항상 최종 품질"이 아니라 "프론티어 + 뒤에서 점점 따라잡는 품질"로 재정의하는 게 현실적 — 다음 슬라이드가 그 그림.</a:t>
-            </a:r>
-          </a:p>
-        </p:txBody>
-      </p:sp>
-    </p:spTree>
-  </p:cSld>
-  <p:clrMapOvr>
-    <a:masterClrMapping/>
-  </p:clrMapOvr>
-</p:sld>
-</file>
-
 <file path=ppt/slides/slide22.xml><?xml version="1.0" encoding="utf-8"?>
 <p:sld xmlns:a="http://schemas.openxmlformats.org/drawingml/2006/main" xmlns:p="http://schemas.openxmlformats.org/presentationml/2006/main" xmlns:r="http://schemas.openxmlformats.org/officeDocument/2006/relationships">
   <p:cSld>
@@ -8732,7 +8298,7 @@
                 </a:solidFill>
                 <a:latin typeface="Noto Sans CJK KR"/>
               </a:rPr>
-              <a:t>§4 · REALITY CHECK</a:t>
+              <a:t>§4 · SCORECARD</a:t>
             </a:r>
           </a:p>
         </p:txBody>
@@ -8771,7 +8337,7 @@
                 </a:solidFill>
                 <a:latin typeface="Noto Sans CJK KR"/>
               </a:rPr>
-              <a:t>현실적 목표: bounded-lag 온라인 정제</a:t>
+              <a:t>현재 상태 스코어카드 + 다음 후보</a:t>
             </a:r>
           </a:p>
         </p:txBody>
@@ -8820,40 +8386,224 @@
           </a:p>
         </p:txBody>
       </p:sp>
-      <p:pic>
-        <p:nvPicPr>
-          <p:cNvPr id="6" name="Picture 5" descr="fig_bounded_lag.png"/>
-          <p:cNvPicPr>
-            <a:picLocks noChangeAspect="1"/>
-          </p:cNvPicPr>
-          <p:nvPr/>
-        </p:nvPicPr>
-        <p:blipFill>
-          <a:blip r:embed="rId2"/>
-          <a:stretch>
-            <a:fillRect/>
-          </a:stretch>
-        </p:blipFill>
-        <p:spPr>
-          <a:xfrm>
-            <a:off x="2178354" y="1280160"/>
-            <a:ext cx="7834985" cy="3566159"/>
-          </a:xfrm>
-          <a:prstGeom prst="rect">
-            <a:avLst/>
-          </a:prstGeom>
-        </p:spPr>
-      </p:pic>
-      <p:sp>
-        <p:nvSpPr>
-          <p:cNvPr id="7" name="TextBox 6"/>
+      <p:sp>
+        <p:nvSpPr>
+          <p:cNvPr id="6" name="Rounded Rectangle 5"/>
+          <p:cNvSpPr/>
+          <p:nvPr/>
+        </p:nvSpPr>
+        <p:spPr>
+          <a:xfrm>
+            <a:off x="548640" y="1417320"/>
+            <a:ext cx="3566160" cy="1051560"/>
+          </a:xfrm>
+          <a:prstGeom prst="roundRect">
+            <a:avLst>
+              <a:gd name="adj" fmla="val 8000"/>
+            </a:avLst>
+          </a:prstGeom>
+          <a:solidFill>
+            <a:srgbClr val="1A1F2B"/>
+          </a:solidFill>
+          <a:ln w="15875">
+            <a:solidFill>
+              <a:srgbClr val="E8ECF4"/>
+            </a:solidFill>
+          </a:ln>
+          <a:effectLst/>
+        </p:spPr>
+        <p:style>
+          <a:lnRef idx="1">
+            <a:schemeClr val="accent1"/>
+          </a:lnRef>
+          <a:fillRef idx="3">
+            <a:schemeClr val="accent1"/>
+          </a:fillRef>
+          <a:effectRef idx="2">
+            <a:schemeClr val="accent1"/>
+          </a:effectRef>
+          <a:fontRef idx="minor">
+            <a:schemeClr val="lt1"/>
+          </a:fontRef>
+        </p:style>
+        <p:txBody>
+          <a:bodyPr rtlCol="0" anchor="ctr" wrap="square" lIns="146304" rIns="146304"/>
+          <a:lstStyle/>
+          <a:p>
+            <a:pPr algn="ctr"/>
+            <a:r>
+              <a:rPr sz="2200" b="1">
+                <a:solidFill>
+                  <a:srgbClr val="E8ECF4"/>
+                </a:solidFill>
+                <a:latin typeface="Noto Sans CJK KR"/>
+              </a:rPr>
+              <a:t>45.79s</a:t>
+            </a:r>
+          </a:p>
+          <a:p>
+            <a:pPr algn="ctr"/>
+            <a:r>
+              <a:rPr sz="1050">
+                <a:solidFill>
+                  <a:srgbClr val="8B95AB"/>
+                </a:solidFill>
+                <a:latin typeface="Noto Sans CJK KR"/>
+              </a:rPr>
+              <a:t>온라인 루프 총합
+(예산 65.1s 대비 여유 19s)</a:t>
+            </a:r>
+          </a:p>
+        </p:txBody>
+      </p:sp>
+      <p:sp>
+        <p:nvSpPr>
+          <p:cNvPr id="7" name="Rounded Rectangle 6"/>
+          <p:cNvSpPr/>
+          <p:nvPr/>
+        </p:nvSpPr>
+        <p:spPr>
+          <a:xfrm>
+            <a:off x="4297679" y="1417320"/>
+            <a:ext cx="3566160" cy="1051560"/>
+          </a:xfrm>
+          <a:prstGeom prst="roundRect">
+            <a:avLst>
+              <a:gd name="adj" fmla="val 8000"/>
+            </a:avLst>
+          </a:prstGeom>
+          <a:solidFill>
+            <a:srgbClr val="1A1F2B"/>
+          </a:solidFill>
+          <a:ln w="15875">
+            <a:solidFill>
+              <a:srgbClr val="4CC98A"/>
+            </a:solidFill>
+          </a:ln>
+          <a:effectLst/>
+        </p:spPr>
+        <p:style>
+          <a:lnRef idx="1">
+            <a:schemeClr val="accent1"/>
+          </a:lnRef>
+          <a:fillRef idx="3">
+            <a:schemeClr val="accent1"/>
+          </a:fillRef>
+          <a:effectRef idx="2">
+            <a:schemeClr val="accent1"/>
+          </a:effectRef>
+          <a:fontRef idx="minor">
+            <a:schemeClr val="lt1"/>
+          </a:fontRef>
+        </p:style>
+        <p:txBody>
+          <a:bodyPr rtlCol="0" anchor="ctr" wrap="square" lIns="146304" rIns="146304"/>
+          <a:lstStyle/>
+          <a:p>
+            <a:pPr algn="ctr"/>
+            <a:r>
+              <a:rPr sz="2200" b="1">
+                <a:solidFill>
+                  <a:srgbClr val="4CC98A"/>
+                </a:solidFill>
+                <a:latin typeface="Noto Sans CJK KR"/>
+              </a:rPr>
+              <a:t>23.49/23.88</a:t>
+            </a:r>
+          </a:p>
+          <a:p>
+            <a:pPr algn="ctr"/>
+            <a:r>
+              <a:rPr sz="1050">
+                <a:solidFill>
+                  <a:srgbClr val="8B95AB"/>
+                </a:solidFill>
+                <a:latin typeface="Noto Sans CJK KR"/>
+              </a:rPr>
+              <a:t>PSNR (mean/kf)</a:t>
+            </a:r>
+          </a:p>
+        </p:txBody>
+      </p:sp>
+      <p:sp>
+        <p:nvSpPr>
+          <p:cNvPr id="8" name="Rounded Rectangle 7"/>
+          <p:cNvSpPr/>
+          <p:nvPr/>
+        </p:nvSpPr>
+        <p:spPr>
+          <a:xfrm>
+            <a:off x="8046719" y="1417320"/>
+            <a:ext cx="3657600" cy="1051560"/>
+          </a:xfrm>
+          <a:prstGeom prst="roundRect">
+            <a:avLst>
+              <a:gd name="adj" fmla="val 8000"/>
+            </a:avLst>
+          </a:prstGeom>
+          <a:solidFill>
+            <a:srgbClr val="1A1F2B"/>
+          </a:solidFill>
+          <a:ln w="15875">
+            <a:solidFill>
+              <a:srgbClr val="FFB454"/>
+            </a:solidFill>
+          </a:ln>
+          <a:effectLst/>
+        </p:spPr>
+        <p:style>
+          <a:lnRef idx="1">
+            <a:schemeClr val="accent1"/>
+          </a:lnRef>
+          <a:fillRef idx="3">
+            <a:schemeClr val="accent1"/>
+          </a:fillRef>
+          <a:effectRef idx="2">
+            <a:schemeClr val="accent1"/>
+          </a:effectRef>
+          <a:fontRef idx="minor">
+            <a:schemeClr val="lt1"/>
+          </a:fontRef>
+        </p:style>
+        <p:txBody>
+          <a:bodyPr rtlCol="0" anchor="ctr" wrap="square" lIns="146304" rIns="146304"/>
+          <a:lstStyle/>
+          <a:p>
+            <a:pPr algn="ctr"/>
+            <a:r>
+              <a:rPr sz="2200" b="1">
+                <a:solidFill>
+                  <a:srgbClr val="FFB454"/>
+                </a:solidFill>
+                <a:latin typeface="Noto Sans CJK KR"/>
+              </a:rPr>
+              <a:t>0.70×</a:t>
+            </a:r>
+          </a:p>
+          <a:p>
+            <a:pPr algn="ctr"/>
+            <a:r>
+              <a:rPr sz="1050">
+                <a:solidFill>
+                  <a:srgbClr val="8B95AB"/>
+                </a:solidFill>
+                <a:latin typeface="Noto Sans CJK KR"/>
+              </a:rPr>
+              <a:t>실시간 배수</a:t>
+            </a:r>
+          </a:p>
+        </p:txBody>
+      </p:sp>
+      <p:sp>
+        <p:nvSpPr>
+          <p:cNvPr id="9" name="TextBox 8"/>
           <p:cNvSpPr txBox="1"/>
           <p:nvPr/>
         </p:nvSpPr>
         <p:spPr>
           <a:xfrm>
-            <a:off x="548640" y="5120640"/>
-            <a:ext cx="11094415" cy="1371600"/>
+            <a:off x="548640" y="2743200"/>
+            <a:ext cx="11094415" cy="365760"/>
           </a:xfrm>
           <a:prstGeom prst="rect">
             <a:avLst/>
@@ -8868,6 +8618,429 @@
           <a:p>
             <a:pPr algn="l">
               <a:lnSpc>
+                <a:spcPct val="100000"/>
+              </a:lnSpc>
+            </a:pPr>
+            <a:r>
+              <a:rPr sz="1400" b="1">
+                <a:solidFill>
+                  <a:srgbClr val="FFB454"/>
+                </a:solidFill>
+                <a:latin typeface="Noto Sans CJK KR"/>
+              </a:rPr>
+              <a:t>다음 후보 (우선순위 논의 필요)</a:t>
+            </a:r>
+          </a:p>
+        </p:txBody>
+      </p:sp>
+      <p:sp>
+        <p:nvSpPr>
+          <p:cNvPr id="10" name="Rounded Rectangle 9"/>
+          <p:cNvSpPr/>
+          <p:nvPr/>
+        </p:nvSpPr>
+        <p:spPr>
+          <a:xfrm>
+            <a:off x="548640" y="3200400"/>
+            <a:ext cx="1554480" cy="292608"/>
+          </a:xfrm>
+          <a:prstGeom prst="roundRect">
+            <a:avLst>
+              <a:gd name="adj" fmla="val 50000"/>
+            </a:avLst>
+          </a:prstGeom>
+          <a:solidFill>
+            <a:srgbClr val="1A1F2B"/>
+          </a:solidFill>
+          <a:ln w="12700">
+            <a:solidFill>
+              <a:srgbClr val="EF6A5C"/>
+            </a:solidFill>
+          </a:ln>
+          <a:effectLst/>
+        </p:spPr>
+        <p:style>
+          <a:lnRef idx="1">
+            <a:schemeClr val="accent1"/>
+          </a:lnRef>
+          <a:fillRef idx="3">
+            <a:schemeClr val="accent1"/>
+          </a:fillRef>
+          <a:effectRef idx="2">
+            <a:schemeClr val="accent1"/>
+          </a:effectRef>
+          <a:fontRef idx="minor">
+            <a:schemeClr val="lt1"/>
+          </a:fontRef>
+        </p:style>
+        <p:txBody>
+          <a:bodyPr rtlCol="0" anchor="ctr" lIns="45720" rIns="45720"/>
+          <a:lstStyle/>
+          <a:p>
+            <a:pPr algn="ctr"/>
+            <a:r>
+              <a:rPr sz="900" b="1">
+                <a:solidFill>
+                  <a:srgbClr val="EF6A5C"/>
+                </a:solidFill>
+                <a:latin typeface="Noto Sans CJK KR"/>
+              </a:rPr>
+              <a:t>① 고위험</a:t>
+            </a:r>
+          </a:p>
+        </p:txBody>
+      </p:sp>
+      <p:sp>
+        <p:nvSpPr>
+          <p:cNvPr id="11" name="TextBox 10"/>
+          <p:cNvSpPr txBox="1"/>
+          <p:nvPr/>
+        </p:nvSpPr>
+        <p:spPr>
+          <a:xfrm>
+            <a:off x="2240280" y="3145536"/>
+            <a:ext cx="9402775" cy="502920"/>
+          </a:xfrm>
+          <a:prstGeom prst="rect">
+            <a:avLst/>
+          </a:prstGeom>
+          <a:noFill/>
+        </p:spPr>
+        <p:txBody>
+          <a:bodyPr wrap="square" anchor="ctr">
+            <a:spAutoFit/>
+          </a:bodyPr>
+          <a:lstStyle/>
+          <a:p>
+            <a:pPr algn="l">
+              <a:lnSpc>
+                <a:spcPct val="100000"/>
+              </a:lnSpc>
+            </a:pPr>
+            <a:r>
+              <a:rPr sz="1200" b="0">
+                <a:solidFill>
+                  <a:srgbClr val="E8ECF4"/>
+                </a:solidFill>
+                <a:latin typeface="Noto Sans CJK KR"/>
+              </a:rPr>
+              <a:t>CUDA 커널 레벨 batch화(Phase 8b가 실패한 진짜 원인 해결) — 이득 불확실</a:t>
+            </a:r>
+          </a:p>
+        </p:txBody>
+      </p:sp>
+      <p:sp>
+        <p:nvSpPr>
+          <p:cNvPr id="12" name="Rounded Rectangle 11"/>
+          <p:cNvSpPr/>
+          <p:nvPr/>
+        </p:nvSpPr>
+        <p:spPr>
+          <a:xfrm>
+            <a:off x="548640" y="3886200"/>
+            <a:ext cx="1554480" cy="292608"/>
+          </a:xfrm>
+          <a:prstGeom prst="roundRect">
+            <a:avLst>
+              <a:gd name="adj" fmla="val 50000"/>
+            </a:avLst>
+          </a:prstGeom>
+          <a:solidFill>
+            <a:srgbClr val="1A1F2B"/>
+          </a:solidFill>
+          <a:ln w="12700">
+            <a:solidFill>
+              <a:srgbClr val="4C86EA"/>
+            </a:solidFill>
+          </a:ln>
+          <a:effectLst/>
+        </p:spPr>
+        <p:style>
+          <a:lnRef idx="1">
+            <a:schemeClr val="accent1"/>
+          </a:lnRef>
+          <a:fillRef idx="3">
+            <a:schemeClr val="accent1"/>
+          </a:fillRef>
+          <a:effectRef idx="2">
+            <a:schemeClr val="accent1"/>
+          </a:effectRef>
+          <a:fontRef idx="minor">
+            <a:schemeClr val="lt1"/>
+          </a:fontRef>
+        </p:style>
+        <p:txBody>
+          <a:bodyPr rtlCol="0" anchor="ctr" lIns="45720" rIns="45720"/>
+          <a:lstStyle/>
+          <a:p>
+            <a:pPr algn="ctr"/>
+            <a:r>
+              <a:rPr sz="900" b="1">
+                <a:solidFill>
+                  <a:srgbClr val="4C86EA"/>
+                </a:solidFill>
+                <a:latin typeface="Noto Sans CJK KR"/>
+              </a:rPr>
+              <a:t>② 저위험</a:t>
+            </a:r>
+          </a:p>
+        </p:txBody>
+      </p:sp>
+      <p:sp>
+        <p:nvSpPr>
+          <p:cNvPr id="13" name="TextBox 12"/>
+          <p:cNvSpPr txBox="1"/>
+          <p:nvPr/>
+        </p:nvSpPr>
+        <p:spPr>
+          <a:xfrm>
+            <a:off x="2240280" y="3831336"/>
+            <a:ext cx="9402775" cy="502920"/>
+          </a:xfrm>
+          <a:prstGeom prst="rect">
+            <a:avLst/>
+          </a:prstGeom>
+          <a:noFill/>
+        </p:spPr>
+        <p:txBody>
+          <a:bodyPr wrap="square" anchor="ctr">
+            <a:spAutoFit/>
+          </a:bodyPr>
+          <a:lstStyle/>
+          <a:p>
+            <a:pPr algn="l">
+              <a:lnSpc>
+                <a:spcPct val="100000"/>
+              </a:lnSpc>
+            </a:pPr>
+            <a:r>
+              <a:rPr sz="1200" b="0">
+                <a:solidFill>
+                  <a:srgbClr val="E8ECF4"/>
+                </a:solidFill>
+                <a:latin typeface="Noto Sans CJK KR"/>
+              </a:rPr>
+              <a:t>init_itr_num/iters 더 세밀한 스캔 — 이득 작음</a:t>
+            </a:r>
+          </a:p>
+        </p:txBody>
+      </p:sp>
+      <p:sp>
+        <p:nvSpPr>
+          <p:cNvPr id="14" name="Rounded Rectangle 13"/>
+          <p:cNvSpPr/>
+          <p:nvPr/>
+        </p:nvSpPr>
+        <p:spPr>
+          <a:xfrm>
+            <a:off x="548640" y="4572000"/>
+            <a:ext cx="1554480" cy="292608"/>
+          </a:xfrm>
+          <a:prstGeom prst="roundRect">
+            <a:avLst>
+              <a:gd name="adj" fmla="val 50000"/>
+            </a:avLst>
+          </a:prstGeom>
+          <a:solidFill>
+            <a:srgbClr val="1A1F2B"/>
+          </a:solidFill>
+          <a:ln w="12700">
+            <a:solidFill>
+              <a:srgbClr val="A479E0"/>
+            </a:solidFill>
+          </a:ln>
+          <a:effectLst/>
+        </p:spPr>
+        <p:style>
+          <a:lnRef idx="1">
+            <a:schemeClr val="accent1"/>
+          </a:lnRef>
+          <a:fillRef idx="3">
+            <a:schemeClr val="accent1"/>
+          </a:fillRef>
+          <a:effectRef idx="2">
+            <a:schemeClr val="accent1"/>
+          </a:effectRef>
+          <a:fontRef idx="minor">
+            <a:schemeClr val="lt1"/>
+          </a:fontRef>
+        </p:style>
+        <p:txBody>
+          <a:bodyPr rtlCol="0" anchor="ctr" lIns="45720" rIns="45720"/>
+          <a:lstStyle/>
+          <a:p>
+            <a:pPr algn="ctr"/>
+            <a:r>
+              <a:rPr sz="900" b="1">
+                <a:solidFill>
+                  <a:srgbClr val="A479E0"/>
+                </a:solidFill>
+                <a:latin typeface="Noto Sans CJK KR"/>
+              </a:rPr>
+              <a:t>③ 신규 후보</a:t>
+            </a:r>
+          </a:p>
+        </p:txBody>
+      </p:sp>
+      <p:sp>
+        <p:nvSpPr>
+          <p:cNvPr id="15" name="TextBox 14"/>
+          <p:cNvSpPr txBox="1"/>
+          <p:nvPr/>
+        </p:nvSpPr>
+        <p:spPr>
+          <a:xfrm>
+            <a:off x="2240280" y="4517136"/>
+            <a:ext cx="9402775" cy="502920"/>
+          </a:xfrm>
+          <a:prstGeom prst="rect">
+            <a:avLst/>
+          </a:prstGeom>
+          <a:noFill/>
+        </p:spPr>
+        <p:txBody>
+          <a:bodyPr wrap="square" anchor="ctr">
+            <a:spAutoFit/>
+          </a:bodyPr>
+          <a:lstStyle/>
+          <a:p>
+            <a:pPr algn="l">
+              <a:lnSpc>
+                <a:spcPct val="100000"/>
+              </a:lnSpc>
+            </a:pPr>
+            <a:r>
+              <a:rPr sz="1200" b="0">
+                <a:solidFill>
+                  <a:srgbClr val="E8ECF4"/>
+                </a:solidFill>
+                <a:latin typeface="Noto Sans CJK KR"/>
+              </a:rPr>
+              <a:t>오프라인 색정제를 실시간 호환으로 재설계 — 다음 슬라이드, +3~6dB 확인됨</a:t>
+            </a:r>
+          </a:p>
+        </p:txBody>
+      </p:sp>
+      <p:sp>
+        <p:nvSpPr>
+          <p:cNvPr id="16" name="Rounded Rectangle 15"/>
+          <p:cNvSpPr/>
+          <p:nvPr/>
+        </p:nvSpPr>
+        <p:spPr>
+          <a:xfrm>
+            <a:off x="548640" y="5257800"/>
+            <a:ext cx="1554480" cy="292608"/>
+          </a:xfrm>
+          <a:prstGeom prst="roundRect">
+            <a:avLst>
+              <a:gd name="adj" fmla="val 50000"/>
+            </a:avLst>
+          </a:prstGeom>
+          <a:solidFill>
+            <a:srgbClr val="1A1F2B"/>
+          </a:solidFill>
+          <a:ln w="12700">
+            <a:solidFill>
+              <a:srgbClr val="4CC98A"/>
+            </a:solidFill>
+          </a:ln>
+          <a:effectLst/>
+        </p:spPr>
+        <p:style>
+          <a:lnRef idx="1">
+            <a:schemeClr val="accent1"/>
+          </a:lnRef>
+          <a:fillRef idx="3">
+            <a:schemeClr val="accent1"/>
+          </a:fillRef>
+          <a:effectRef idx="2">
+            <a:schemeClr val="accent1"/>
+          </a:effectRef>
+          <a:fontRef idx="minor">
+            <a:schemeClr val="lt1"/>
+          </a:fontRef>
+        </p:style>
+        <p:txBody>
+          <a:bodyPr rtlCol="0" anchor="ctr" lIns="45720" rIns="45720"/>
+          <a:lstStyle/>
+          <a:p>
+            <a:pPr algn="ctr"/>
+            <a:r>
+              <a:rPr sz="900" b="1">
+                <a:solidFill>
+                  <a:srgbClr val="4CC98A"/>
+                </a:solidFill>
+                <a:latin typeface="Noto Sans CJK KR"/>
+              </a:rPr>
+              <a:t>④ 다음 단계</a:t>
+            </a:r>
+          </a:p>
+        </p:txBody>
+      </p:sp>
+      <p:sp>
+        <p:nvSpPr>
+          <p:cNvPr id="17" name="TextBox 16"/>
+          <p:cNvSpPr txBox="1"/>
+          <p:nvPr/>
+        </p:nvSpPr>
+        <p:spPr>
+          <a:xfrm>
+            <a:off x="2240280" y="5202936"/>
+            <a:ext cx="9402775" cy="502920"/>
+          </a:xfrm>
+          <a:prstGeom prst="rect">
+            <a:avLst/>
+          </a:prstGeom>
+          <a:noFill/>
+        </p:spPr>
+        <p:txBody>
+          <a:bodyPr wrap="square" anchor="ctr">
+            <a:spAutoFit/>
+          </a:bodyPr>
+          <a:lstStyle/>
+          <a:p>
+            <a:pPr algn="l">
+              <a:lnSpc>
+                <a:spcPct val="100000"/>
+              </a:lnSpc>
+            </a:pPr>
+            <a:r>
+              <a:rPr sz="1200" b="0">
+                <a:solidFill>
+                  <a:srgbClr val="E8ECF4"/>
+                </a:solidFill>
+                <a:latin typeface="Noto Sans CJK KR"/>
+              </a:rPr>
+              <a:t>Localization(흑백 SLAM 트래킹) 실제 통합 — exp50과 합류</a:t>
+            </a:r>
+          </a:p>
+        </p:txBody>
+      </p:sp>
+      <p:sp>
+        <p:nvSpPr>
+          <p:cNvPr id="18" name="TextBox 17"/>
+          <p:cNvSpPr txBox="1"/>
+          <p:nvPr/>
+        </p:nvSpPr>
+        <p:spPr>
+          <a:xfrm>
+            <a:off x="548640" y="5943600"/>
+            <a:ext cx="11094415" cy="822960"/>
+          </a:xfrm>
+          <a:prstGeom prst="rect">
+            <a:avLst/>
+          </a:prstGeom>
+          <a:noFill/>
+        </p:spPr>
+        <p:txBody>
+          <a:bodyPr wrap="square" anchor="t">
+            <a:spAutoFit/>
+          </a:bodyPr>
+          <a:lstStyle/>
+          <a:p>
+            <a:pPr algn="l">
+              <a:lnSpc>
                 <a:spcPct val="120000"/>
               </a:lnSpc>
             </a:pPr>
@@ -8878,7 +9051,7 @@
                 </a:solidFill>
                 <a:latin typeface="Noto Sans CJK KR"/>
               </a:rPr>
-              <a:t>루프클로저 global BA를 백그라운드로 돌리는 성숙한 SLAM 시스템들과 같은 패턴 — 프론티어(방금 본 곳)는 항상 실시간으로 그려지고, 그 뒤를 정제(refinement)가 시간차를 두고 계속 따라오며 품질을 끌어올린다. "실시간 = 항상 완성본"이 아니라 "실시간 = 프론티어가 안 밀린다 + 지나간 곳은 계속 좋아진다"로 성공 기준 자체를 바꾸는 게 이번 발견의 결론.</a:t>
+              <a:t>carve loss로 floater 억제는 유지 중. ①번은 리스크 대비 이득이 불확실해서 팀 논의가 필요한 지점.</a:t>
             </a:r>
           </a:p>
         </p:txBody>
@@ -8979,6 +9152,1588 @@
                 </a:solidFill>
                 <a:latin typeface="Noto Sans CJK KR"/>
               </a:rPr>
+              <a:t>§4 · NEW FINDING</a:t>
+            </a:r>
+          </a:p>
+        </p:txBody>
+      </p:sp>
+      <p:sp>
+        <p:nvSpPr>
+          <p:cNvPr id="4" name="TextBox 3"/>
+          <p:cNvSpPr txBox="1"/>
+          <p:nvPr/>
+        </p:nvSpPr>
+        <p:spPr>
+          <a:xfrm>
+            <a:off x="548640" y="566928"/>
+            <a:ext cx="11094415" cy="548640"/>
+          </a:xfrm>
+          <a:prstGeom prst="rect">
+            <a:avLst/>
+          </a:prstGeom>
+          <a:noFill/>
+        </p:spPr>
+        <p:txBody>
+          <a:bodyPr wrap="square" anchor="t">
+            <a:spAutoFit/>
+          </a:bodyPr>
+          <a:lstStyle/>
+          <a:p>
+            <a:pPr algn="l">
+              <a:lnSpc>
+                <a:spcPct val="100000"/>
+              </a:lnSpc>
+            </a:pPr>
+            <a:r>
+              <a:rPr sz="2200" b="1">
+                <a:solidFill>
+                  <a:srgbClr val="E8ECF4"/>
+                </a:solidFill>
+                <a:latin typeface="Noto Sans CJK KR"/>
+              </a:rPr>
+              <a:t>부록: 오프라인 후처리가 사주는 PSNR</a:t>
+            </a:r>
+          </a:p>
+        </p:txBody>
+      </p:sp>
+      <p:sp>
+        <p:nvSpPr>
+          <p:cNvPr id="5" name="Rectangle 4"/>
+          <p:cNvSpPr/>
+          <p:nvPr/>
+        </p:nvSpPr>
+        <p:spPr>
+          <a:xfrm>
+            <a:off x="548640" y="1078992"/>
+            <a:ext cx="11094415" cy="25400"/>
+          </a:xfrm>
+          <a:prstGeom prst="rect">
+            <a:avLst/>
+          </a:prstGeom>
+          <a:solidFill>
+            <a:srgbClr val="2A3242"/>
+          </a:solidFill>
+          <a:ln>
+            <a:noFill/>
+          </a:ln>
+          <a:effectLst/>
+        </p:spPr>
+        <p:style>
+          <a:lnRef idx="1">
+            <a:schemeClr val="accent1"/>
+          </a:lnRef>
+          <a:fillRef idx="3">
+            <a:schemeClr val="accent1"/>
+          </a:fillRef>
+          <a:effectRef idx="2">
+            <a:schemeClr val="accent1"/>
+          </a:effectRef>
+          <a:fontRef idx="minor">
+            <a:schemeClr val="lt1"/>
+          </a:fontRef>
+        </p:style>
+        <p:txBody>
+          <a:bodyPr rtlCol="0" anchor="ctr"/>
+          <a:lstStyle/>
+          <a:p>
+            <a:pPr algn="ctr"/>
+          </a:p>
+        </p:txBody>
+      </p:sp>
+      <p:pic>
+        <p:nvPicPr>
+          <p:cNvPr id="6" name="Picture 5" descr="fig_ply_compare.png"/>
+          <p:cNvPicPr>
+            <a:picLocks noChangeAspect="1"/>
+          </p:cNvPicPr>
+          <p:nvPr/>
+        </p:nvPicPr>
+        <p:blipFill>
+          <a:blip r:embed="rId2"/>
+          <a:stretch>
+            <a:fillRect/>
+          </a:stretch>
+        </p:blipFill>
+        <p:spPr>
+          <a:xfrm>
+            <a:off x="2034995" y="1234440"/>
+            <a:ext cx="8121704" cy="3200400"/>
+          </a:xfrm>
+          <a:prstGeom prst="rect">
+            <a:avLst/>
+          </a:prstGeom>
+        </p:spPr>
+      </p:pic>
+      <p:sp>
+        <p:nvSpPr>
+          <p:cNvPr id="7" name="Rounded Rectangle 6"/>
+          <p:cNvSpPr/>
+          <p:nvPr/>
+        </p:nvSpPr>
+        <p:spPr>
+          <a:xfrm>
+            <a:off x="548640" y="4572000"/>
+            <a:ext cx="3566160" cy="914400"/>
+          </a:xfrm>
+          <a:prstGeom prst="roundRect">
+            <a:avLst>
+              <a:gd name="adj" fmla="val 8000"/>
+            </a:avLst>
+          </a:prstGeom>
+          <a:solidFill>
+            <a:srgbClr val="1A1F2B"/>
+          </a:solidFill>
+          <a:ln w="15875">
+            <a:solidFill>
+              <a:srgbClr val="EF6A5C"/>
+            </a:solidFill>
+          </a:ln>
+          <a:effectLst/>
+        </p:spPr>
+        <p:style>
+          <a:lnRef idx="1">
+            <a:schemeClr val="accent1"/>
+          </a:lnRef>
+          <a:fillRef idx="3">
+            <a:schemeClr val="accent1"/>
+          </a:fillRef>
+          <a:effectRef idx="2">
+            <a:schemeClr val="accent1"/>
+          </a:effectRef>
+          <a:fontRef idx="minor">
+            <a:schemeClr val="lt1"/>
+          </a:fontRef>
+        </p:style>
+        <p:txBody>
+          <a:bodyPr rtlCol="0" anchor="ctr" wrap="square" lIns="146304" rIns="146304"/>
+          <a:lstStyle/>
+          <a:p>
+            <a:pPr algn="ctr"/>
+            <a:r>
+              <a:rPr sz="2200" b="1">
+                <a:solidFill>
+                  <a:srgbClr val="EF6A5C"/>
+                </a:solidFill>
+                <a:latin typeface="Noto Sans CJK KR"/>
+              </a:rPr>
+              <a:t>~196s</a:t>
+            </a:r>
+          </a:p>
+          <a:p>
+            <a:pPr algn="ctr"/>
+            <a:r>
+              <a:rPr sz="1050">
+                <a:solidFill>
+                  <a:srgbClr val="8B95AB"/>
+                </a:solidFill>
+                <a:latin typeface="Noto Sans CJK KR"/>
+              </a:rPr>
+              <a:t>후처리 고정비용
+(26,000 iter, 프레임수 무관)</a:t>
+            </a:r>
+          </a:p>
+        </p:txBody>
+      </p:sp>
+      <p:sp>
+        <p:nvSpPr>
+          <p:cNvPr id="8" name="Rounded Rectangle 7"/>
+          <p:cNvSpPr/>
+          <p:nvPr/>
+        </p:nvSpPr>
+        <p:spPr>
+          <a:xfrm>
+            <a:off x="4297679" y="4572000"/>
+            <a:ext cx="3566160" cy="914400"/>
+          </a:xfrm>
+          <a:prstGeom prst="roundRect">
+            <a:avLst>
+              <a:gd name="adj" fmla="val 8000"/>
+            </a:avLst>
+          </a:prstGeom>
+          <a:solidFill>
+            <a:srgbClr val="1A1F2B"/>
+          </a:solidFill>
+          <a:ln w="15875">
+            <a:solidFill>
+              <a:srgbClr val="4CC98A"/>
+            </a:solidFill>
+          </a:ln>
+          <a:effectLst/>
+        </p:spPr>
+        <p:style>
+          <a:lnRef idx="1">
+            <a:schemeClr val="accent1"/>
+          </a:lnRef>
+          <a:fillRef idx="3">
+            <a:schemeClr val="accent1"/>
+          </a:fillRef>
+          <a:effectRef idx="2">
+            <a:schemeClr val="accent1"/>
+          </a:effectRef>
+          <a:fontRef idx="minor">
+            <a:schemeClr val="lt1"/>
+          </a:fontRef>
+        </p:style>
+        <p:txBody>
+          <a:bodyPr rtlCol="0" anchor="ctr" wrap="square" lIns="146304" rIns="146304"/>
+          <a:lstStyle/>
+          <a:p>
+            <a:pPr algn="ctr"/>
+            <a:r>
+              <a:rPr sz="2200" b="1">
+                <a:solidFill>
+                  <a:srgbClr val="4CC98A"/>
+                </a:solidFill>
+                <a:latin typeface="Noto Sans CJK KR"/>
+              </a:rPr>
+              <a:t>+3.04 / +6.45dB</a:t>
+            </a:r>
+          </a:p>
+          <a:p>
+            <a:pPr algn="ctr"/>
+            <a:r>
+              <a:rPr sz="1050">
+                <a:solidFill>
+                  <a:srgbClr val="8B95AB"/>
+                </a:solidFill>
+                <a:latin typeface="Noto Sans CJK KR"/>
+              </a:rPr>
+              <a:t>PSNR 이득(mean/kf)</a:t>
+            </a:r>
+          </a:p>
+        </p:txBody>
+      </p:sp>
+      <p:sp>
+        <p:nvSpPr>
+          <p:cNvPr id="9" name="Rounded Rectangle 8"/>
+          <p:cNvSpPr/>
+          <p:nvPr/>
+        </p:nvSpPr>
+        <p:spPr>
+          <a:xfrm>
+            <a:off x="8046719" y="4572000"/>
+            <a:ext cx="3657600" cy="914400"/>
+          </a:xfrm>
+          <a:prstGeom prst="roundRect">
+            <a:avLst>
+              <a:gd name="adj" fmla="val 8000"/>
+            </a:avLst>
+          </a:prstGeom>
+          <a:solidFill>
+            <a:srgbClr val="1A1F2B"/>
+          </a:solidFill>
+          <a:ln w="15875">
+            <a:solidFill>
+              <a:srgbClr val="E8ECF4"/>
+            </a:solidFill>
+          </a:ln>
+          <a:effectLst/>
+        </p:spPr>
+        <p:style>
+          <a:lnRef idx="1">
+            <a:schemeClr val="accent1"/>
+          </a:lnRef>
+          <a:fillRef idx="3">
+            <a:schemeClr val="accent1"/>
+          </a:fillRef>
+          <a:effectRef idx="2">
+            <a:schemeClr val="accent1"/>
+          </a:effectRef>
+          <a:fontRef idx="minor">
+            <a:schemeClr val="lt1"/>
+          </a:fontRef>
+        </p:style>
+        <p:txBody>
+          <a:bodyPr rtlCol="0" anchor="ctr" wrap="square" lIns="146304" rIns="146304"/>
+          <a:lstStyle/>
+          <a:p>
+            <a:pPr algn="ctr"/>
+            <a:r>
+              <a:rPr sz="2200" b="1">
+                <a:solidFill>
+                  <a:srgbClr val="E8ECF4"/>
+                </a:solidFill>
+                <a:latin typeface="Noto Sans CJK KR"/>
+              </a:rPr>
+              <a:t>26.53 / 30.33dB</a:t>
+            </a:r>
+          </a:p>
+          <a:p>
+            <a:pPr algn="ctr"/>
+            <a:r>
+              <a:rPr sz="1050">
+                <a:solidFill>
+                  <a:srgbClr val="8B95AB"/>
+                </a:solidFill>
+                <a:latin typeface="Noto Sans CJK KR"/>
+              </a:rPr>
+              <a:t>exp56 최종 레시피 위 실측</a:t>
+            </a:r>
+          </a:p>
+        </p:txBody>
+      </p:sp>
+      <p:sp>
+        <p:nvSpPr>
+          <p:cNvPr id="10" name="TextBox 9"/>
+          <p:cNvSpPr txBox="1"/>
+          <p:nvPr/>
+        </p:nvSpPr>
+        <p:spPr>
+          <a:xfrm>
+            <a:off x="548640" y="5623560"/>
+            <a:ext cx="11094415" cy="1005840"/>
+          </a:xfrm>
+          <a:prstGeom prst="rect">
+            <a:avLst/>
+          </a:prstGeom>
+          <a:noFill/>
+        </p:spPr>
+        <p:txBody>
+          <a:bodyPr wrap="square" anchor="t">
+            <a:spAutoFit/>
+          </a:bodyPr>
+          <a:lstStyle/>
+          <a:p>
+            <a:pPr algn="l">
+              <a:lnSpc>
+                <a:spcPct val="120000"/>
+              </a:lnSpc>
+            </a:pPr>
+            <a:r>
+              <a:rPr sz="1100" b="0">
+                <a:solidFill>
+                  <a:srgbClr val="8B95AB"/>
+                </a:solidFill>
+                <a:latin typeface="Noto Sans CJK KR"/>
+              </a:rPr>
+              <a:t>07/18 구버전 설정에서 처음 발견된 패턴(+4.12/+7.95dB)이 exp56 최종 레시피에서도 재현됨(2026-07-27 재검증). 26k iteration은 시퀀스 길이와 무관한 고정 배치 작업이라 현재 구조로는 "실시간"이 아니라 "끝나고 한 번에 몰아서" — 다음 슬라이드는 이걸 실시간 호환으로 만들 방법에 대한 제안.</a:t>
+            </a:r>
+          </a:p>
+        </p:txBody>
+      </p:sp>
+    </p:spTree>
+  </p:cSld>
+  <p:clrMapOvr>
+    <a:masterClrMapping/>
+  </p:clrMapOvr>
+</p:sld>
+</file>
+
+<file path=ppt/slides/slide24.xml><?xml version="1.0" encoding="utf-8"?>
+<p:sld xmlns:a="http://schemas.openxmlformats.org/drawingml/2006/main" xmlns:p="http://schemas.openxmlformats.org/presentationml/2006/main" xmlns:r="http://schemas.openxmlformats.org/officeDocument/2006/relationships">
+  <p:cSld>
+    <p:spTree>
+      <p:nvGrpSpPr>
+        <p:cNvPr id="1" name=""/>
+        <p:cNvGrpSpPr/>
+        <p:nvPr/>
+      </p:nvGrpSpPr>
+      <p:grpSpPr/>
+      <p:sp>
+        <p:nvSpPr>
+          <p:cNvPr id="2" name="Rectangle 1"/>
+          <p:cNvSpPr/>
+          <p:nvPr/>
+        </p:nvSpPr>
+        <p:spPr>
+          <a:xfrm>
+            <a:off x="0" y="0"/>
+            <a:ext cx="12191695" cy="6858000"/>
+          </a:xfrm>
+          <a:prstGeom prst="rect">
+            <a:avLst/>
+          </a:prstGeom>
+          <a:solidFill>
+            <a:srgbClr val="12151C"/>
+          </a:solidFill>
+          <a:ln>
+            <a:noFill/>
+          </a:ln>
+          <a:effectLst/>
+        </p:spPr>
+        <p:style>
+          <a:lnRef idx="1">
+            <a:schemeClr val="accent1"/>
+          </a:lnRef>
+          <a:fillRef idx="3">
+            <a:schemeClr val="accent1"/>
+          </a:fillRef>
+          <a:effectRef idx="2">
+            <a:schemeClr val="accent1"/>
+          </a:effectRef>
+          <a:fontRef idx="minor">
+            <a:schemeClr val="lt1"/>
+          </a:fontRef>
+        </p:style>
+        <p:txBody>
+          <a:bodyPr rtlCol="0" anchor="ctr"/>
+          <a:lstStyle/>
+          <a:p>
+            <a:pPr algn="ctr"/>
+          </a:p>
+        </p:txBody>
+      </p:sp>
+      <p:sp>
+        <p:nvSpPr>
+          <p:cNvPr id="3" name="TextBox 2"/>
+          <p:cNvSpPr txBox="1"/>
+          <p:nvPr/>
+        </p:nvSpPr>
+        <p:spPr>
+          <a:xfrm>
+            <a:off x="548640" y="320040"/>
+            <a:ext cx="11094415" cy="292608"/>
+          </a:xfrm>
+          <a:prstGeom prst="rect">
+            <a:avLst/>
+          </a:prstGeom>
+          <a:noFill/>
+        </p:spPr>
+        <p:txBody>
+          <a:bodyPr wrap="square" anchor="t">
+            <a:spAutoFit/>
+          </a:bodyPr>
+          <a:lstStyle/>
+          <a:p>
+            <a:pPr algn="l">
+              <a:lnSpc>
+                <a:spcPct val="100000"/>
+              </a:lnSpc>
+            </a:pPr>
+            <a:r>
+              <a:rPr sz="1200" b="1">
+                <a:solidFill>
+                  <a:srgbClr val="FFB454"/>
+                </a:solidFill>
+                <a:latin typeface="Noto Sans CJK KR"/>
+              </a:rPr>
+              <a:t>§4 · PROPOSAL</a:t>
+            </a:r>
+          </a:p>
+        </p:txBody>
+      </p:sp>
+      <p:sp>
+        <p:nvSpPr>
+          <p:cNvPr id="4" name="TextBox 3"/>
+          <p:cNvSpPr txBox="1"/>
+          <p:nvPr/>
+        </p:nvSpPr>
+        <p:spPr>
+          <a:xfrm>
+            <a:off x="548640" y="566928"/>
+            <a:ext cx="11094415" cy="548640"/>
+          </a:xfrm>
+          <a:prstGeom prst="rect">
+            <a:avLst/>
+          </a:prstGeom>
+          <a:noFill/>
+        </p:spPr>
+        <p:txBody>
+          <a:bodyPr wrap="square" anchor="t">
+            <a:spAutoFit/>
+          </a:bodyPr>
+          <a:lstStyle/>
+          <a:p>
+            <a:pPr algn="l">
+              <a:lnSpc>
+                <a:spcPct val="100000"/>
+              </a:lnSpc>
+            </a:pPr>
+            <a:r>
+              <a:rPr sz="2200" b="1">
+                <a:solidFill>
+                  <a:srgbClr val="E8ECF4"/>
+                </a:solidFill>
+                <a:latin typeface="Noto Sans CJK KR"/>
+              </a:rPr>
+              <a:t>후처리를 실시간 호환으로 만들려면</a:t>
+            </a:r>
+          </a:p>
+        </p:txBody>
+      </p:sp>
+      <p:sp>
+        <p:nvSpPr>
+          <p:cNvPr id="5" name="Rectangle 4"/>
+          <p:cNvSpPr/>
+          <p:nvPr/>
+        </p:nvSpPr>
+        <p:spPr>
+          <a:xfrm>
+            <a:off x="548640" y="1078992"/>
+            <a:ext cx="11094415" cy="25400"/>
+          </a:xfrm>
+          <a:prstGeom prst="rect">
+            <a:avLst/>
+          </a:prstGeom>
+          <a:solidFill>
+            <a:srgbClr val="2A3242"/>
+          </a:solidFill>
+          <a:ln>
+            <a:noFill/>
+          </a:ln>
+          <a:effectLst/>
+        </p:spPr>
+        <p:style>
+          <a:lnRef idx="1">
+            <a:schemeClr val="accent1"/>
+          </a:lnRef>
+          <a:fillRef idx="3">
+            <a:schemeClr val="accent1"/>
+          </a:fillRef>
+          <a:effectRef idx="2">
+            <a:schemeClr val="accent1"/>
+          </a:effectRef>
+          <a:fontRef idx="minor">
+            <a:schemeClr val="lt1"/>
+          </a:fontRef>
+        </p:style>
+        <p:txBody>
+          <a:bodyPr rtlCol="0" anchor="ctr"/>
+          <a:lstStyle/>
+          <a:p>
+            <a:pPr algn="ctr"/>
+          </a:p>
+        </p:txBody>
+      </p:sp>
+      <p:sp>
+        <p:nvSpPr>
+          <p:cNvPr id="6" name="TextBox 5"/>
+          <p:cNvSpPr txBox="1"/>
+          <p:nvPr/>
+        </p:nvSpPr>
+        <p:spPr>
+          <a:xfrm>
+            <a:off x="548640" y="1371600"/>
+            <a:ext cx="11094415" cy="914400"/>
+          </a:xfrm>
+          <a:prstGeom prst="rect">
+            <a:avLst/>
+          </a:prstGeom>
+          <a:noFill/>
+        </p:spPr>
+        <p:txBody>
+          <a:bodyPr wrap="square">
+            <a:spAutoFit/>
+          </a:bodyPr>
+          <a:lstStyle/>
+          <a:p>
+            <a:pPr>
+              <a:lnSpc>
+                <a:spcPct val="122000"/>
+              </a:lnSpc>
+              <a:spcAft>
+                <a:spcPts val="800"/>
+              </a:spcAft>
+            </a:pPr>
+            <a:r>
+              <a:rPr sz="1350">
+                <a:solidFill>
+                  <a:srgbClr val="E8ECF4"/>
+                </a:solidFill>
+                <a:latin typeface="Noto Sans CJK KR"/>
+              </a:rPr>
+              <a:t>•  핵심 문제: 26,000 iteration이 시퀀스 종료 후 한 번에 블로킹으로 몰림 — 온라인 시스템엔 "종료 시점"이 없음</a:t>
+            </a:r>
+          </a:p>
+        </p:txBody>
+      </p:sp>
+      <p:sp>
+        <p:nvSpPr>
+          <p:cNvPr id="7" name="Rounded Rectangle 6"/>
+          <p:cNvSpPr/>
+          <p:nvPr/>
+        </p:nvSpPr>
+        <p:spPr>
+          <a:xfrm>
+            <a:off x="548640" y="2468880"/>
+            <a:ext cx="1554480" cy="292608"/>
+          </a:xfrm>
+          <a:prstGeom prst="roundRect">
+            <a:avLst>
+              <a:gd name="adj" fmla="val 50000"/>
+            </a:avLst>
+          </a:prstGeom>
+          <a:solidFill>
+            <a:srgbClr val="1A1F2B"/>
+          </a:solidFill>
+          <a:ln w="12700">
+            <a:solidFill>
+              <a:srgbClr val="4C86EA"/>
+            </a:solidFill>
+          </a:ln>
+          <a:effectLst/>
+        </p:spPr>
+        <p:style>
+          <a:lnRef idx="1">
+            <a:schemeClr val="accent1"/>
+          </a:lnRef>
+          <a:fillRef idx="3">
+            <a:schemeClr val="accent1"/>
+          </a:fillRef>
+          <a:effectRef idx="2">
+            <a:schemeClr val="accent1"/>
+          </a:effectRef>
+          <a:fontRef idx="minor">
+            <a:schemeClr val="lt1"/>
+          </a:fontRef>
+        </p:style>
+        <p:txBody>
+          <a:bodyPr rtlCol="0" anchor="ctr" lIns="45720" rIns="45720"/>
+          <a:lstStyle/>
+          <a:p>
+            <a:pPr algn="ctr"/>
+            <a:r>
+              <a:rPr sz="900" b="1">
+                <a:solidFill>
+                  <a:srgbClr val="4C86EA"/>
+                </a:solidFill>
+                <a:latin typeface="Noto Sans CJK KR"/>
+              </a:rPr>
+              <a:t>A · 상시 백그라운드화</a:t>
+            </a:r>
+          </a:p>
+        </p:txBody>
+      </p:sp>
+      <p:sp>
+        <p:nvSpPr>
+          <p:cNvPr id="8" name="TextBox 7"/>
+          <p:cNvSpPr txBox="1"/>
+          <p:nvPr/>
+        </p:nvSpPr>
+        <p:spPr>
+          <a:xfrm>
+            <a:off x="2240280" y="2414016"/>
+            <a:ext cx="9402775" cy="502920"/>
+          </a:xfrm>
+          <a:prstGeom prst="rect">
+            <a:avLst/>
+          </a:prstGeom>
+          <a:noFill/>
+        </p:spPr>
+        <p:txBody>
+          <a:bodyPr wrap="square" anchor="ctr">
+            <a:spAutoFit/>
+          </a:bodyPr>
+          <a:lstStyle/>
+          <a:p>
+            <a:pPr algn="l">
+              <a:lnSpc>
+                <a:spcPct val="100000"/>
+              </a:lnSpc>
+            </a:pPr>
+            <a:r>
+              <a:rPr sz="1200" b="0">
+                <a:solidFill>
+                  <a:srgbClr val="E8ECF4"/>
+                </a:solidFill>
+                <a:latin typeface="Noto Sans CJK KR"/>
+              </a:rPr>
+              <a:t>26k를 세션 끝에 몰아서 돌리지 않고, 이미 지나간(프론티어 밖) keyframe에 대해 GPU 유휴 사이클마다 소량씩 지속 refinement — n_global_views(Phase7)가 이미 하던 걸 전용 백그라운드 루프로 확장</a:t>
+            </a:r>
+          </a:p>
+        </p:txBody>
+      </p:sp>
+      <p:sp>
+        <p:nvSpPr>
+          <p:cNvPr id="9" name="Rounded Rectangle 8"/>
+          <p:cNvSpPr/>
+          <p:nvPr/>
+        </p:nvSpPr>
+        <p:spPr>
+          <a:xfrm>
+            <a:off x="548640" y="3429000"/>
+            <a:ext cx="1554480" cy="292608"/>
+          </a:xfrm>
+          <a:prstGeom prst="roundRect">
+            <a:avLst>
+              <a:gd name="adj" fmla="val 50000"/>
+            </a:avLst>
+          </a:prstGeom>
+          <a:solidFill>
+            <a:srgbClr val="1A1F2B"/>
+          </a:solidFill>
+          <a:ln w="12700">
+            <a:solidFill>
+              <a:srgbClr val="FFB454"/>
+            </a:solidFill>
+          </a:ln>
+          <a:effectLst/>
+        </p:spPr>
+        <p:style>
+          <a:lnRef idx="1">
+            <a:schemeClr val="accent1"/>
+          </a:lnRef>
+          <a:fillRef idx="3">
+            <a:schemeClr val="accent1"/>
+          </a:fillRef>
+          <a:effectRef idx="2">
+            <a:schemeClr val="accent1"/>
+          </a:effectRef>
+          <a:fontRef idx="minor">
+            <a:schemeClr val="lt1"/>
+          </a:fontRef>
+        </p:style>
+        <p:txBody>
+          <a:bodyPr rtlCol="0" anchor="ctr" lIns="45720" rIns="45720"/>
+          <a:lstStyle/>
+          <a:p>
+            <a:pPr algn="ctr"/>
+            <a:r>
+              <a:rPr sz="900" b="1">
+                <a:solidFill>
+                  <a:srgbClr val="FFB454"/>
+                </a:solidFill>
+                <a:latin typeface="Noto Sans CJK KR"/>
+              </a:rPr>
+              <a:t>B · 우선순위 스케줄링</a:t>
+            </a:r>
+          </a:p>
+        </p:txBody>
+      </p:sp>
+      <p:sp>
+        <p:nvSpPr>
+          <p:cNvPr id="10" name="TextBox 9"/>
+          <p:cNvSpPr txBox="1"/>
+          <p:nvPr/>
+        </p:nvSpPr>
+        <p:spPr>
+          <a:xfrm>
+            <a:off x="2240280" y="3374136"/>
+            <a:ext cx="9402775" cy="502920"/>
+          </a:xfrm>
+          <a:prstGeom prst="rect">
+            <a:avLst/>
+          </a:prstGeom>
+          <a:noFill/>
+        </p:spPr>
+        <p:txBody>
+          <a:bodyPr wrap="square" anchor="ctr">
+            <a:spAutoFit/>
+          </a:bodyPr>
+          <a:lstStyle/>
+          <a:p>
+            <a:pPr algn="l">
+              <a:lnSpc>
+                <a:spcPct val="100000"/>
+              </a:lnSpc>
+            </a:pPr>
+            <a:r>
+              <a:rPr sz="1200" b="0">
+                <a:solidFill>
+                  <a:srgbClr val="E8ECF4"/>
+                </a:solidFill>
+                <a:latin typeface="Noto Sans CJK KR"/>
+              </a:rPr>
+              <a:t>_gs_queue가 비어 mapper가 노는 시점(exp55 부록에서 이미 발견한 유휴 구간)을 감지해 그 틈에만 refinement 스텝을 끼워 넣음 — 신규 keyframe 처리를 항상 최우선으로 선점</a:t>
+            </a:r>
+          </a:p>
+        </p:txBody>
+      </p:sp>
+      <p:sp>
+        <p:nvSpPr>
+          <p:cNvPr id="11" name="Rounded Rectangle 10"/>
+          <p:cNvSpPr/>
+          <p:nvPr/>
+        </p:nvSpPr>
+        <p:spPr>
+          <a:xfrm>
+            <a:off x="548640" y="4389120"/>
+            <a:ext cx="1554480" cy="292608"/>
+          </a:xfrm>
+          <a:prstGeom prst="roundRect">
+            <a:avLst>
+              <a:gd name="adj" fmla="val 50000"/>
+            </a:avLst>
+          </a:prstGeom>
+          <a:solidFill>
+            <a:srgbClr val="1A1F2B"/>
+          </a:solidFill>
+          <a:ln w="12700">
+            <a:solidFill>
+              <a:srgbClr val="4CC98A"/>
+            </a:solidFill>
+          </a:ln>
+          <a:effectLst/>
+        </p:spPr>
+        <p:style>
+          <a:lnRef idx="1">
+            <a:schemeClr val="accent1"/>
+          </a:lnRef>
+          <a:fillRef idx="3">
+            <a:schemeClr val="accent1"/>
+          </a:fillRef>
+          <a:effectRef idx="2">
+            <a:schemeClr val="accent1"/>
+          </a:effectRef>
+          <a:fontRef idx="minor">
+            <a:schemeClr val="lt1"/>
+          </a:fontRef>
+        </p:style>
+        <p:txBody>
+          <a:bodyPr rtlCol="0" anchor="ctr" lIns="45720" rIns="45720"/>
+          <a:lstStyle/>
+          <a:p>
+            <a:pPr algn="ctr"/>
+            <a:r>
+              <a:rPr sz="900" b="1">
+                <a:solidFill>
+                  <a:srgbClr val="4CC98A"/>
+                </a:solidFill>
+                <a:latin typeface="Noto Sans CJK KR"/>
+              </a:rPr>
+              <a:t>C · 반복수 자체 축소</a:t>
+            </a:r>
+          </a:p>
+        </p:txBody>
+      </p:sp>
+      <p:sp>
+        <p:nvSpPr>
+          <p:cNvPr id="12" name="TextBox 11"/>
+          <p:cNvSpPr txBox="1"/>
+          <p:nvPr/>
+        </p:nvSpPr>
+        <p:spPr>
+          <a:xfrm>
+            <a:off x="2240280" y="4334256"/>
+            <a:ext cx="9402775" cy="502920"/>
+          </a:xfrm>
+          <a:prstGeom prst="rect">
+            <a:avLst/>
+          </a:prstGeom>
+          <a:noFill/>
+        </p:spPr>
+        <p:txBody>
+          <a:bodyPr wrap="square" anchor="ctr">
+            <a:spAutoFit/>
+          </a:bodyPr>
+          <a:lstStyle/>
+          <a:p>
+            <a:pPr algn="l">
+              <a:lnSpc>
+                <a:spcPct val="100000"/>
+              </a:lnSpc>
+            </a:pPr>
+            <a:r>
+              <a:rPr sz="1200" b="0">
+                <a:solidFill>
+                  <a:srgbClr val="E8ECF4"/>
+                </a:solidFill>
+                <a:latin typeface="Noto Sans CJK KR"/>
+              </a:rPr>
+              <a:t>iters=10→7이 온라인에서 그랬듯, 26,000도 고정 상수일 뿐 — 스윕(예: 5000/10000)해서 수확체감 지점을 찾으면 고정비용 자체를 줄일 수 있음(저위험, 미검증)</a:t>
+            </a:r>
+          </a:p>
+        </p:txBody>
+      </p:sp>
+      <p:sp>
+        <p:nvSpPr>
+          <p:cNvPr id="13" name="TextBox 12"/>
+          <p:cNvSpPr txBox="1"/>
+          <p:nvPr/>
+        </p:nvSpPr>
+        <p:spPr>
+          <a:xfrm>
+            <a:off x="548640" y="5760720"/>
+            <a:ext cx="11094415" cy="822960"/>
+          </a:xfrm>
+          <a:prstGeom prst="rect">
+            <a:avLst/>
+          </a:prstGeom>
+          <a:noFill/>
+        </p:spPr>
+        <p:txBody>
+          <a:bodyPr wrap="square" anchor="t">
+            <a:spAutoFit/>
+          </a:bodyPr>
+          <a:lstStyle/>
+          <a:p>
+            <a:pPr algn="l">
+              <a:lnSpc>
+                <a:spcPct val="120000"/>
+              </a:lnSpc>
+            </a:pPr>
+            <a:r>
+              <a:rPr sz="1100" b="0">
+                <a:solidFill>
+                  <a:srgbClr val="8B95AB"/>
+                </a:solidFill>
+                <a:latin typeface="Noto Sans CJK KR"/>
+              </a:rPr>
+              <a:t>권장: C(반복수 스윕)로 저위험 저비용 검증 먼저 → A/B(상시 백그라운드화)로 구조를 바꾸는 건 exp56 Phase7의 아이디어를 그대로 확장하는 것이라 다음 사이클 후보로 유력.</a:t>
+            </a:r>
+          </a:p>
+        </p:txBody>
+      </p:sp>
+    </p:spTree>
+  </p:cSld>
+  <p:clrMapOvr>
+    <a:masterClrMapping/>
+  </p:clrMapOvr>
+</p:sld>
+</file>
+
+<file path=ppt/slides/slide25.xml><?xml version="1.0" encoding="utf-8"?>
+<p:sld xmlns:a="http://schemas.openxmlformats.org/drawingml/2006/main" xmlns:p="http://schemas.openxmlformats.org/presentationml/2006/main" xmlns:r="http://schemas.openxmlformats.org/officeDocument/2006/relationships">
+  <p:cSld>
+    <p:spTree>
+      <p:nvGrpSpPr>
+        <p:cNvPr id="1" name=""/>
+        <p:cNvGrpSpPr/>
+        <p:nvPr/>
+      </p:nvGrpSpPr>
+      <p:grpSpPr/>
+      <p:sp>
+        <p:nvSpPr>
+          <p:cNvPr id="2" name="Rectangle 1"/>
+          <p:cNvSpPr/>
+          <p:nvPr/>
+        </p:nvSpPr>
+        <p:spPr>
+          <a:xfrm>
+            <a:off x="0" y="0"/>
+            <a:ext cx="12191695" cy="6858000"/>
+          </a:xfrm>
+          <a:prstGeom prst="rect">
+            <a:avLst/>
+          </a:prstGeom>
+          <a:solidFill>
+            <a:srgbClr val="12151C"/>
+          </a:solidFill>
+          <a:ln>
+            <a:noFill/>
+          </a:ln>
+          <a:effectLst/>
+        </p:spPr>
+        <p:style>
+          <a:lnRef idx="1">
+            <a:schemeClr val="accent1"/>
+          </a:lnRef>
+          <a:fillRef idx="3">
+            <a:schemeClr val="accent1"/>
+          </a:fillRef>
+          <a:effectRef idx="2">
+            <a:schemeClr val="accent1"/>
+          </a:effectRef>
+          <a:fontRef idx="minor">
+            <a:schemeClr val="lt1"/>
+          </a:fontRef>
+        </p:style>
+        <p:txBody>
+          <a:bodyPr rtlCol="0" anchor="ctr"/>
+          <a:lstStyle/>
+          <a:p>
+            <a:pPr algn="ctr"/>
+          </a:p>
+        </p:txBody>
+      </p:sp>
+      <p:sp>
+        <p:nvSpPr>
+          <p:cNvPr id="3" name="TextBox 2"/>
+          <p:cNvSpPr txBox="1"/>
+          <p:nvPr/>
+        </p:nvSpPr>
+        <p:spPr>
+          <a:xfrm>
+            <a:off x="548640" y="320040"/>
+            <a:ext cx="11094415" cy="292608"/>
+          </a:xfrm>
+          <a:prstGeom prst="rect">
+            <a:avLst/>
+          </a:prstGeom>
+          <a:noFill/>
+        </p:spPr>
+        <p:txBody>
+          <a:bodyPr wrap="square" anchor="t">
+            <a:spAutoFit/>
+          </a:bodyPr>
+          <a:lstStyle/>
+          <a:p>
+            <a:pPr algn="l">
+              <a:lnSpc>
+                <a:spcPct val="100000"/>
+              </a:lnSpc>
+            </a:pPr>
+            <a:r>
+              <a:rPr sz="1200" b="1">
+                <a:solidFill>
+                  <a:srgbClr val="FFB454"/>
+                </a:solidFill>
+                <a:latin typeface="Noto Sans CJK KR"/>
+              </a:rPr>
+              <a:t>§4 · REALITY CHECK</a:t>
+            </a:r>
+          </a:p>
+        </p:txBody>
+      </p:sp>
+      <p:sp>
+        <p:nvSpPr>
+          <p:cNvPr id="4" name="TextBox 3"/>
+          <p:cNvSpPr txBox="1"/>
+          <p:nvPr/>
+        </p:nvSpPr>
+        <p:spPr>
+          <a:xfrm>
+            <a:off x="548640" y="566928"/>
+            <a:ext cx="11094415" cy="548640"/>
+          </a:xfrm>
+          <a:prstGeom prst="rect">
+            <a:avLst/>
+          </a:prstGeom>
+          <a:noFill/>
+        </p:spPr>
+        <p:txBody>
+          <a:bodyPr wrap="square" anchor="t">
+            <a:spAutoFit/>
+          </a:bodyPr>
+          <a:lstStyle/>
+          <a:p>
+            <a:pPr algn="l">
+              <a:lnSpc>
+                <a:spcPct val="100000"/>
+              </a:lnSpc>
+            </a:pPr>
+            <a:r>
+              <a:rPr sz="2200" b="1">
+                <a:solidFill>
+                  <a:srgbClr val="E8ECF4"/>
+                </a:solidFill>
+                <a:latin typeface="Noto Sans CJK KR"/>
+              </a:rPr>
+              <a:t>post-processed급 online — 쉽지 않은 이유</a:t>
+            </a:r>
+          </a:p>
+        </p:txBody>
+      </p:sp>
+      <p:sp>
+        <p:nvSpPr>
+          <p:cNvPr id="5" name="Rectangle 4"/>
+          <p:cNvSpPr/>
+          <p:nvPr/>
+        </p:nvSpPr>
+        <p:spPr>
+          <a:xfrm>
+            <a:off x="548640" y="1078992"/>
+            <a:ext cx="11094415" cy="25400"/>
+          </a:xfrm>
+          <a:prstGeom prst="rect">
+            <a:avLst/>
+          </a:prstGeom>
+          <a:solidFill>
+            <a:srgbClr val="2A3242"/>
+          </a:solidFill>
+          <a:ln>
+            <a:noFill/>
+          </a:ln>
+          <a:effectLst/>
+        </p:spPr>
+        <p:style>
+          <a:lnRef idx="1">
+            <a:schemeClr val="accent1"/>
+          </a:lnRef>
+          <a:fillRef idx="3">
+            <a:schemeClr val="accent1"/>
+          </a:fillRef>
+          <a:effectRef idx="2">
+            <a:schemeClr val="accent1"/>
+          </a:effectRef>
+          <a:fontRef idx="minor">
+            <a:schemeClr val="lt1"/>
+          </a:fontRef>
+        </p:style>
+        <p:txBody>
+          <a:bodyPr rtlCol="0" anchor="ctr"/>
+          <a:lstStyle/>
+          <a:p>
+            <a:pPr algn="ctr"/>
+          </a:p>
+        </p:txBody>
+      </p:sp>
+      <p:pic>
+        <p:nvPicPr>
+          <p:cNvPr id="6" name="Picture 5" descr="fig_realtime_gap.png"/>
+          <p:cNvPicPr>
+            <a:picLocks noChangeAspect="1"/>
+          </p:cNvPicPr>
+          <p:nvPr/>
+        </p:nvPicPr>
+        <p:blipFill>
+          <a:blip r:embed="rId2"/>
+          <a:stretch>
+            <a:fillRect/>
+          </a:stretch>
+        </p:blipFill>
+        <p:spPr>
+          <a:xfrm>
+            <a:off x="582606" y="1234440"/>
+            <a:ext cx="5692786" cy="3840480"/>
+          </a:xfrm>
+          <a:prstGeom prst="rect">
+            <a:avLst/>
+          </a:prstGeom>
+        </p:spPr>
+      </p:pic>
+      <p:sp>
+        <p:nvSpPr>
+          <p:cNvPr id="7" name="TextBox 6"/>
+          <p:cNvSpPr txBox="1"/>
+          <p:nvPr/>
+        </p:nvSpPr>
+        <p:spPr>
+          <a:xfrm>
+            <a:off x="6583680" y="1371600"/>
+            <a:ext cx="5059375" cy="3840480"/>
+          </a:xfrm>
+          <a:prstGeom prst="rect">
+            <a:avLst/>
+          </a:prstGeom>
+          <a:noFill/>
+        </p:spPr>
+        <p:txBody>
+          <a:bodyPr wrap="square">
+            <a:spAutoFit/>
+          </a:bodyPr>
+          <a:lstStyle/>
+          <a:p>
+            <a:pPr>
+              <a:lnSpc>
+                <a:spcPct val="122000"/>
+              </a:lnSpc>
+              <a:spcAft>
+                <a:spcPts val="800"/>
+              </a:spcAft>
+            </a:pPr>
+            <a:r>
+              <a:rPr sz="1250">
+                <a:solidFill>
+                  <a:srgbClr val="E8ECF4"/>
+                </a:solidFill>
+                <a:latin typeface="Noto Sans CJK KR"/>
+              </a:rPr>
+              <a:t>•  계산량 격차: 26,000 iter × ~6.4ms/view-op(Phase8 실측치 그대로 적용) ≈ 166~196초 필요 — 지금 파이프라인 여유는 65.1s 예산 대비 19.3초뿐, 약 8~10배 부족</a:t>
+            </a:r>
+          </a:p>
+          <a:p>
+            <a:pPr>
+              <a:lnSpc>
+                <a:spcPct val="122000"/>
+              </a:lnSpc>
+              <a:spcAft>
+                <a:spcPts val="800"/>
+              </a:spcAft>
+            </a:pPr>
+            <a:r>
+              <a:rPr sz="1250">
+                <a:solidFill>
+                  <a:srgbClr val="E8ECF4"/>
+                </a:solidFill>
+                <a:latin typeface="Noto Sans CJK KR"/>
+              </a:rPr>
+              <a:t>•  더 근본적 문제: color_refinement는 "전체 궤적을 이미 다 본 상태"에서 모든 keyframe을 반복 방문하는 global 작업 — 라이브 스트림엔 애초에 "다 봤다"는 시점이 없음</a:t>
+            </a:r>
+          </a:p>
+          <a:p>
+            <a:pPr>
+              <a:lnSpc>
+                <a:spcPct val="122000"/>
+              </a:lnSpc>
+              <a:spcAft>
+                <a:spcPts val="800"/>
+              </a:spcAft>
+            </a:pPr>
+            <a:r>
+              <a:rPr sz="1250">
+                <a:solidFill>
+                  <a:srgbClr val="E8ECF4"/>
+                </a:solidFill>
+                <a:latin typeface="Noto Sans CJK KR"/>
+              </a:rPr>
+              <a:t>•  즉 "매 순간 완전히 캐치업된 post-processed급"은 계산량 문제 이전에 정의상 불가능</a:t>
+            </a:r>
+          </a:p>
+        </p:txBody>
+      </p:sp>
+      <p:sp>
+        <p:nvSpPr>
+          <p:cNvPr id="8" name="TextBox 7"/>
+          <p:cNvSpPr txBox="1"/>
+          <p:nvPr/>
+        </p:nvSpPr>
+        <p:spPr>
+          <a:xfrm>
+            <a:off x="6583680" y="5577840"/>
+            <a:ext cx="5059375" cy="914400"/>
+          </a:xfrm>
+          <a:prstGeom prst="rect">
+            <a:avLst/>
+          </a:prstGeom>
+          <a:noFill/>
+        </p:spPr>
+        <p:txBody>
+          <a:bodyPr wrap="square" anchor="t">
+            <a:spAutoFit/>
+          </a:bodyPr>
+          <a:lstStyle/>
+          <a:p>
+            <a:pPr algn="l">
+              <a:lnSpc>
+                <a:spcPct val="120000"/>
+              </a:lnSpc>
+            </a:pPr>
+            <a:r>
+              <a:rPr sz="1100" b="0">
+                <a:solidFill>
+                  <a:srgbClr val="8B95AB"/>
+                </a:solidFill>
+                <a:latin typeface="Noto Sans CJK KR"/>
+              </a:rPr>
+              <a:t>그래서 목표를 "항상 최종 품질"이 아니라 "프론티어 + 뒤에서 점점 따라잡는 품질"로 재정의하는 게 현실적 — 다음 슬라이드가 그 그림.</a:t>
+            </a:r>
+          </a:p>
+        </p:txBody>
+      </p:sp>
+    </p:spTree>
+  </p:cSld>
+  <p:clrMapOvr>
+    <a:masterClrMapping/>
+  </p:clrMapOvr>
+</p:sld>
+</file>
+
+<file path=ppt/slides/slide26.xml><?xml version="1.0" encoding="utf-8"?>
+<p:sld xmlns:a="http://schemas.openxmlformats.org/drawingml/2006/main" xmlns:p="http://schemas.openxmlformats.org/presentationml/2006/main" xmlns:r="http://schemas.openxmlformats.org/officeDocument/2006/relationships">
+  <p:cSld>
+    <p:spTree>
+      <p:nvGrpSpPr>
+        <p:cNvPr id="1" name=""/>
+        <p:cNvGrpSpPr/>
+        <p:nvPr/>
+      </p:nvGrpSpPr>
+      <p:grpSpPr/>
+      <p:sp>
+        <p:nvSpPr>
+          <p:cNvPr id="2" name="Rectangle 1"/>
+          <p:cNvSpPr/>
+          <p:nvPr/>
+        </p:nvSpPr>
+        <p:spPr>
+          <a:xfrm>
+            <a:off x="0" y="0"/>
+            <a:ext cx="12191695" cy="6858000"/>
+          </a:xfrm>
+          <a:prstGeom prst="rect">
+            <a:avLst/>
+          </a:prstGeom>
+          <a:solidFill>
+            <a:srgbClr val="12151C"/>
+          </a:solidFill>
+          <a:ln>
+            <a:noFill/>
+          </a:ln>
+          <a:effectLst/>
+        </p:spPr>
+        <p:style>
+          <a:lnRef idx="1">
+            <a:schemeClr val="accent1"/>
+          </a:lnRef>
+          <a:fillRef idx="3">
+            <a:schemeClr val="accent1"/>
+          </a:fillRef>
+          <a:effectRef idx="2">
+            <a:schemeClr val="accent1"/>
+          </a:effectRef>
+          <a:fontRef idx="minor">
+            <a:schemeClr val="lt1"/>
+          </a:fontRef>
+        </p:style>
+        <p:txBody>
+          <a:bodyPr rtlCol="0" anchor="ctr"/>
+          <a:lstStyle/>
+          <a:p>
+            <a:pPr algn="ctr"/>
+          </a:p>
+        </p:txBody>
+      </p:sp>
+      <p:sp>
+        <p:nvSpPr>
+          <p:cNvPr id="3" name="TextBox 2"/>
+          <p:cNvSpPr txBox="1"/>
+          <p:nvPr/>
+        </p:nvSpPr>
+        <p:spPr>
+          <a:xfrm>
+            <a:off x="548640" y="320040"/>
+            <a:ext cx="11094415" cy="292608"/>
+          </a:xfrm>
+          <a:prstGeom prst="rect">
+            <a:avLst/>
+          </a:prstGeom>
+          <a:noFill/>
+        </p:spPr>
+        <p:txBody>
+          <a:bodyPr wrap="square" anchor="t">
+            <a:spAutoFit/>
+          </a:bodyPr>
+          <a:lstStyle/>
+          <a:p>
+            <a:pPr algn="l">
+              <a:lnSpc>
+                <a:spcPct val="100000"/>
+              </a:lnSpc>
+            </a:pPr>
+            <a:r>
+              <a:rPr sz="1200" b="1">
+                <a:solidFill>
+                  <a:srgbClr val="FFB454"/>
+                </a:solidFill>
+                <a:latin typeface="Noto Sans CJK KR"/>
+              </a:rPr>
+              <a:t>§4 · REALITY CHECK</a:t>
+            </a:r>
+          </a:p>
+        </p:txBody>
+      </p:sp>
+      <p:sp>
+        <p:nvSpPr>
+          <p:cNvPr id="4" name="TextBox 3"/>
+          <p:cNvSpPr txBox="1"/>
+          <p:nvPr/>
+        </p:nvSpPr>
+        <p:spPr>
+          <a:xfrm>
+            <a:off x="548640" y="566928"/>
+            <a:ext cx="11094415" cy="548640"/>
+          </a:xfrm>
+          <a:prstGeom prst="rect">
+            <a:avLst/>
+          </a:prstGeom>
+          <a:noFill/>
+        </p:spPr>
+        <p:txBody>
+          <a:bodyPr wrap="square" anchor="t">
+            <a:spAutoFit/>
+          </a:bodyPr>
+          <a:lstStyle/>
+          <a:p>
+            <a:pPr algn="l">
+              <a:lnSpc>
+                <a:spcPct val="100000"/>
+              </a:lnSpc>
+            </a:pPr>
+            <a:r>
+              <a:rPr sz="2200" b="1">
+                <a:solidFill>
+                  <a:srgbClr val="E8ECF4"/>
+                </a:solidFill>
+                <a:latin typeface="Noto Sans CJK KR"/>
+              </a:rPr>
+              <a:t>현실적 목표: bounded-lag 온라인 정제</a:t>
+            </a:r>
+          </a:p>
+        </p:txBody>
+      </p:sp>
+      <p:sp>
+        <p:nvSpPr>
+          <p:cNvPr id="5" name="Rectangle 4"/>
+          <p:cNvSpPr/>
+          <p:nvPr/>
+        </p:nvSpPr>
+        <p:spPr>
+          <a:xfrm>
+            <a:off x="548640" y="1078992"/>
+            <a:ext cx="11094415" cy="25400"/>
+          </a:xfrm>
+          <a:prstGeom prst="rect">
+            <a:avLst/>
+          </a:prstGeom>
+          <a:solidFill>
+            <a:srgbClr val="2A3242"/>
+          </a:solidFill>
+          <a:ln>
+            <a:noFill/>
+          </a:ln>
+          <a:effectLst/>
+        </p:spPr>
+        <p:style>
+          <a:lnRef idx="1">
+            <a:schemeClr val="accent1"/>
+          </a:lnRef>
+          <a:fillRef idx="3">
+            <a:schemeClr val="accent1"/>
+          </a:fillRef>
+          <a:effectRef idx="2">
+            <a:schemeClr val="accent1"/>
+          </a:effectRef>
+          <a:fontRef idx="minor">
+            <a:schemeClr val="lt1"/>
+          </a:fontRef>
+        </p:style>
+        <p:txBody>
+          <a:bodyPr rtlCol="0" anchor="ctr"/>
+          <a:lstStyle/>
+          <a:p>
+            <a:pPr algn="ctr"/>
+          </a:p>
+        </p:txBody>
+      </p:sp>
+      <p:pic>
+        <p:nvPicPr>
+          <p:cNvPr id="6" name="Picture 5" descr="fig_bounded_lag.png"/>
+          <p:cNvPicPr>
+            <a:picLocks noChangeAspect="1"/>
+          </p:cNvPicPr>
+          <p:nvPr/>
+        </p:nvPicPr>
+        <p:blipFill>
+          <a:blip r:embed="rId2"/>
+          <a:stretch>
+            <a:fillRect/>
+          </a:stretch>
+        </p:blipFill>
+        <p:spPr>
+          <a:xfrm>
+            <a:off x="2178354" y="1280160"/>
+            <a:ext cx="7834985" cy="3566159"/>
+          </a:xfrm>
+          <a:prstGeom prst="rect">
+            <a:avLst/>
+          </a:prstGeom>
+        </p:spPr>
+      </p:pic>
+      <p:sp>
+        <p:nvSpPr>
+          <p:cNvPr id="7" name="TextBox 6"/>
+          <p:cNvSpPr txBox="1"/>
+          <p:nvPr/>
+        </p:nvSpPr>
+        <p:spPr>
+          <a:xfrm>
+            <a:off x="548640" y="5120640"/>
+            <a:ext cx="11094415" cy="1371600"/>
+          </a:xfrm>
+          <a:prstGeom prst="rect">
+            <a:avLst/>
+          </a:prstGeom>
+          <a:noFill/>
+        </p:spPr>
+        <p:txBody>
+          <a:bodyPr wrap="square" anchor="t">
+            <a:spAutoFit/>
+          </a:bodyPr>
+          <a:lstStyle/>
+          <a:p>
+            <a:pPr algn="l">
+              <a:lnSpc>
+                <a:spcPct val="120000"/>
+              </a:lnSpc>
+            </a:pPr>
+            <a:r>
+              <a:rPr sz="1100" b="0">
+                <a:solidFill>
+                  <a:srgbClr val="8B95AB"/>
+                </a:solidFill>
+                <a:latin typeface="Noto Sans CJK KR"/>
+              </a:rPr>
+              <a:t>루프클로저 global BA를 백그라운드로 돌리는 성숙한 SLAM 시스템들과 같은 패턴 — 프론티어(방금 본 곳)는 항상 실시간으로 그려지고, 그 뒤를 정제(refinement)가 시간차를 두고 계속 따라오며 품질을 끌어올린다. "실시간 = 항상 완성본"이 아니라 "실시간 = 프론티어가 안 밀린다 + 지나간 곳은 계속 좋아진다"로 성공 기준 자체를 바꾸는 게 이번 발견의 결론.</a:t>
+            </a:r>
+          </a:p>
+        </p:txBody>
+      </p:sp>
+    </p:spTree>
+  </p:cSld>
+  <p:clrMapOvr>
+    <a:masterClrMapping/>
+  </p:clrMapOvr>
+</p:sld>
+</file>
+
+<file path=ppt/slides/slide27.xml><?xml version="1.0" encoding="utf-8"?>
+<p:sld xmlns:a="http://schemas.openxmlformats.org/drawingml/2006/main" xmlns:p="http://schemas.openxmlformats.org/presentationml/2006/main" xmlns:r="http://schemas.openxmlformats.org/officeDocument/2006/relationships">
+  <p:cSld>
+    <p:spTree>
+      <p:nvGrpSpPr>
+        <p:cNvPr id="1" name=""/>
+        <p:cNvGrpSpPr/>
+        <p:nvPr/>
+      </p:nvGrpSpPr>
+      <p:grpSpPr/>
+      <p:sp>
+        <p:nvSpPr>
+          <p:cNvPr id="2" name="Rectangle 1"/>
+          <p:cNvSpPr/>
+          <p:nvPr/>
+        </p:nvSpPr>
+        <p:spPr>
+          <a:xfrm>
+            <a:off x="0" y="0"/>
+            <a:ext cx="12191695" cy="6858000"/>
+          </a:xfrm>
+          <a:prstGeom prst="rect">
+            <a:avLst/>
+          </a:prstGeom>
+          <a:solidFill>
+            <a:srgbClr val="12151C"/>
+          </a:solidFill>
+          <a:ln>
+            <a:noFill/>
+          </a:ln>
+          <a:effectLst/>
+        </p:spPr>
+        <p:style>
+          <a:lnRef idx="1">
+            <a:schemeClr val="accent1"/>
+          </a:lnRef>
+          <a:fillRef idx="3">
+            <a:schemeClr val="accent1"/>
+          </a:fillRef>
+          <a:effectRef idx="2">
+            <a:schemeClr val="accent1"/>
+          </a:effectRef>
+          <a:fontRef idx="minor">
+            <a:schemeClr val="lt1"/>
+          </a:fontRef>
+        </p:style>
+        <p:txBody>
+          <a:bodyPr rtlCol="0" anchor="ctr"/>
+          <a:lstStyle/>
+          <a:p>
+            <a:pPr algn="ctr"/>
+          </a:p>
+        </p:txBody>
+      </p:sp>
+      <p:sp>
+        <p:nvSpPr>
+          <p:cNvPr id="3" name="TextBox 2"/>
+          <p:cNvSpPr txBox="1"/>
+          <p:nvPr/>
+        </p:nvSpPr>
+        <p:spPr>
+          <a:xfrm>
+            <a:off x="548640" y="320040"/>
+            <a:ext cx="11094415" cy="292608"/>
+          </a:xfrm>
+          <a:prstGeom prst="rect">
+            <a:avLst/>
+          </a:prstGeom>
+          <a:noFill/>
+        </p:spPr>
+        <p:txBody>
+          <a:bodyPr wrap="square" anchor="t">
+            <a:spAutoFit/>
+          </a:bodyPr>
+          <a:lstStyle/>
+          <a:p>
+            <a:pPr algn="l">
+              <a:lnSpc>
+                <a:spcPct val="100000"/>
+              </a:lnSpc>
+            </a:pPr>
+            <a:r>
+              <a:rPr sz="1200" b="1">
+                <a:solidFill>
+                  <a:srgbClr val="FFB454"/>
+                </a:solidFill>
+                <a:latin typeface="Noto Sans CJK KR"/>
+              </a:rPr>
               <a:t>§4 · CONCLUSION</a:t>
             </a:r>
           </a:p>
@@ -9996,8 +11751,8 @@
         </p:blipFill>
         <p:spPr>
           <a:xfrm>
-            <a:off x="3085259" y="1280160"/>
-            <a:ext cx="6021175" cy="3291840"/>
+            <a:off x="3262553" y="1280160"/>
+            <a:ext cx="5666587" cy="3291840"/>
           </a:xfrm>
           <a:prstGeom prst="rect">
             <a:avLst/>
@@ -10200,7 +11955,7 @@
                 </a:solidFill>
                 <a:latin typeface="Noto Sans CJK KR"/>
               </a:rPr>
-              <a:t>§1 · EXP54</a:t>
+              <a:t>§1 · EXP53 · 용어</a:t>
             </a:r>
           </a:p>
         </p:txBody>
@@ -10239,7 +11994,7 @@
                 </a:solidFill>
                 <a:latin typeface="Noto Sans CJK KR"/>
               </a:rPr>
-              <a:t>매핑 경량화 — 7축 스캔</a:t>
+              <a:t>트래킹 축A~D, 실제로 뭘 바꾸는 건가</a:t>
             </a:r>
           </a:p>
         </p:txBody>
@@ -10290,13 +12045,244 @@
       </p:sp>
       <p:sp>
         <p:nvSpPr>
-          <p:cNvPr id="6" name="Rounded Rectangle 5"/>
+          <p:cNvPr id="6" name="TextBox 5"/>
+          <p:cNvSpPr txBox="1"/>
+          <p:nvPr/>
+        </p:nvSpPr>
+        <p:spPr>
+          <a:xfrm>
+            <a:off x="548640" y="1234440"/>
+            <a:ext cx="11094415" cy="457200"/>
+          </a:xfrm>
+          <a:prstGeom prst="rect">
+            <a:avLst/>
+          </a:prstGeom>
+          <a:noFill/>
+        </p:spPr>
+        <p:txBody>
+          <a:bodyPr wrap="square" anchor="t">
+            <a:spAutoFit/>
+          </a:bodyPr>
+          <a:lstStyle/>
+          <a:p>
+            <a:pPr algn="l">
+              <a:lnSpc>
+                <a:spcPct val="100000"/>
+              </a:lnSpc>
+            </a:pPr>
+            <a:r>
+              <a:rPr sz="1250" b="0">
+                <a:solidFill>
+                  <a:srgbClr val="8B95AB"/>
+                </a:solidFill>
+                <a:latin typeface="Noto Sans CJK KR"/>
+              </a:rPr>
+              <a:t>파이프라인: 카메라 프레임 → motion_filter(이게 keyframe인가?) → frontend(correlation → GRU 반복정제 → local BA)</a:t>
+            </a:r>
+          </a:p>
+        </p:txBody>
+      </p:sp>
+      <p:sp>
+        <p:nvSpPr>
+          <p:cNvPr id="7" name="Rounded Rectangle 6"/>
           <p:cNvSpPr/>
           <p:nvPr/>
         </p:nvSpPr>
         <p:spPr>
           <a:xfrm>
-            <a:off x="548640" y="1371600"/>
+            <a:off x="548640" y="1920240"/>
+            <a:ext cx="1554480" cy="292608"/>
+          </a:xfrm>
+          <a:prstGeom prst="roundRect">
+            <a:avLst>
+              <a:gd name="adj" fmla="val 50000"/>
+            </a:avLst>
+          </a:prstGeom>
+          <a:solidFill>
+            <a:srgbClr val="1A1F2B"/>
+          </a:solidFill>
+          <a:ln w="12700">
+            <a:solidFill>
+              <a:srgbClr val="4C86EA"/>
+            </a:solidFill>
+          </a:ln>
+          <a:effectLst/>
+        </p:spPr>
+        <p:style>
+          <a:lnRef idx="1">
+            <a:schemeClr val="accent1"/>
+          </a:lnRef>
+          <a:fillRef idx="3">
+            <a:schemeClr val="accent1"/>
+          </a:fillRef>
+          <a:effectRef idx="2">
+            <a:schemeClr val="accent1"/>
+          </a:effectRef>
+          <a:fontRef idx="minor">
+            <a:schemeClr val="lt1"/>
+          </a:fontRef>
+        </p:style>
+        <p:txBody>
+          <a:bodyPr rtlCol="0" anchor="ctr" lIns="45720" rIns="45720"/>
+          <a:lstStyle/>
+          <a:p>
+            <a:pPr algn="ctr"/>
+            <a:r>
+              <a:rPr sz="900" b="1">
+                <a:solidFill>
+                  <a:srgbClr val="4C86EA"/>
+                </a:solidFill>
+                <a:latin typeface="Noto Sans CJK KR"/>
+              </a:rPr>
+              <a:t>축A</a:t>
+            </a:r>
+          </a:p>
+        </p:txBody>
+      </p:sp>
+      <p:sp>
+        <p:nvSpPr>
+          <p:cNvPr id="8" name="TextBox 7"/>
+          <p:cNvSpPr txBox="1"/>
+          <p:nvPr/>
+        </p:nvSpPr>
+        <p:spPr>
+          <a:xfrm>
+            <a:off x="2240280" y="1865376"/>
+            <a:ext cx="9402775" cy="502920"/>
+          </a:xfrm>
+          <a:prstGeom prst="rect">
+            <a:avLst/>
+          </a:prstGeom>
+          <a:noFill/>
+        </p:spPr>
+        <p:txBody>
+          <a:bodyPr wrap="square" anchor="ctr">
+            <a:spAutoFit/>
+          </a:bodyPr>
+          <a:lstStyle/>
+          <a:p>
+            <a:pPr algn="l">
+              <a:lnSpc>
+                <a:spcPct val="100000"/>
+              </a:lnSpc>
+            </a:pPr>
+            <a:r>
+              <a:rPr sz="1200" b="0">
+                <a:solidFill>
+                  <a:srgbClr val="E8ECF4"/>
+                </a:solidFill>
+                <a:latin typeface="Noto Sans CJK KR"/>
+              </a:rPr>
+              <a:t>correlation iters — 두 프레임의 optical flow(correlation)를 GRU로 여러 번 반복해서 다듬는 횟수(iters1/iters2). 시간 −20.7%, ΔPSNR +0.21/+0.21dB(오히려 개선) — 4/2회를 1/0회로 줄여도 정확도 손실 없었음</a:t>
+            </a:r>
+          </a:p>
+        </p:txBody>
+      </p:sp>
+      <p:sp>
+        <p:nvSpPr>
+          <p:cNvPr id="9" name="Rounded Rectangle 8"/>
+          <p:cNvSpPr/>
+          <p:nvPr/>
+        </p:nvSpPr>
+        <p:spPr>
+          <a:xfrm>
+            <a:off x="548640" y="2926080"/>
+            <a:ext cx="1554480" cy="292608"/>
+          </a:xfrm>
+          <a:prstGeom prst="roundRect">
+            <a:avLst>
+              <a:gd name="adj" fmla="val 50000"/>
+            </a:avLst>
+          </a:prstGeom>
+          <a:solidFill>
+            <a:srgbClr val="1A1F2B"/>
+          </a:solidFill>
+          <a:ln w="12700">
+            <a:solidFill>
+              <a:srgbClr val="FFB454"/>
+            </a:solidFill>
+          </a:ln>
+          <a:effectLst/>
+        </p:spPr>
+        <p:style>
+          <a:lnRef idx="1">
+            <a:schemeClr val="accent1"/>
+          </a:lnRef>
+          <a:fillRef idx="3">
+            <a:schemeClr val="accent1"/>
+          </a:fillRef>
+          <a:effectRef idx="2">
+            <a:schemeClr val="accent1"/>
+          </a:effectRef>
+          <a:fontRef idx="minor">
+            <a:schemeClr val="lt1"/>
+          </a:fontRef>
+        </p:style>
+        <p:txBody>
+          <a:bodyPr rtlCol="0" anchor="ctr" lIns="45720" rIns="45720"/>
+          <a:lstStyle/>
+          <a:p>
+            <a:pPr algn="ctr"/>
+            <a:r>
+              <a:rPr sz="900" b="1">
+                <a:solidFill>
+                  <a:srgbClr val="FFB454"/>
+                </a:solidFill>
+                <a:latin typeface="Noto Sans CJK KR"/>
+              </a:rPr>
+              <a:t>축B</a:t>
+            </a:r>
+          </a:p>
+        </p:txBody>
+      </p:sp>
+      <p:sp>
+        <p:nvSpPr>
+          <p:cNvPr id="10" name="TextBox 9"/>
+          <p:cNvSpPr txBox="1"/>
+          <p:nvPr/>
+        </p:nvSpPr>
+        <p:spPr>
+          <a:xfrm>
+            <a:off x="2240280" y="2871216"/>
+            <a:ext cx="9402775" cy="502920"/>
+          </a:xfrm>
+          <a:prstGeom prst="rect">
+            <a:avLst/>
+          </a:prstGeom>
+          <a:noFill/>
+        </p:spPr>
+        <p:txBody>
+          <a:bodyPr wrap="square" anchor="ctr">
+            <a:spAutoFit/>
+          </a:bodyPr>
+          <a:lstStyle/>
+          <a:p>
+            <a:pPr algn="l">
+              <a:lnSpc>
+                <a:spcPct val="100000"/>
+              </a:lnSpc>
+            </a:pPr>
+            <a:r>
+              <a:rPr sz="1200" b="0">
+                <a:solidFill>
+                  <a:srgbClr val="E8ECF4"/>
+                </a:solidFill>
+                <a:latin typeface="Noto Sans CJK KR"/>
+              </a:rPr>
+              <a:t>motion_filter.thresh — 새 프레임이 이전 keyframe 대비 "이만큼은 움직여야 keyframe으로 인정"하는 임계값. 시간 −15.4%, ΔPSNR +0.41/+0.55dB — keyframe 자체가 덜 생겨 트래킹·매핑 작업량이 동시에 줄어듦, 이 세션 최대 레버</a:t>
+            </a:r>
+          </a:p>
+        </p:txBody>
+      </p:sp>
+      <p:sp>
+        <p:nvSpPr>
+          <p:cNvPr id="11" name="Rounded Rectangle 10"/>
+          <p:cNvSpPr/>
+          <p:nvPr/>
+        </p:nvSpPr>
+        <p:spPr>
+          <a:xfrm>
+            <a:off x="548640" y="3931920"/>
             <a:ext cx="1554480" cy="292608"/>
           </a:xfrm>
           <a:prstGeom prst="roundRect">
@@ -10340,20 +12326,20 @@
                 </a:solidFill>
                 <a:latin typeface="Noto Sans CJK KR"/>
               </a:rPr>
-              <a:t>축1 · 채택</a:t>
-            </a:r>
-          </a:p>
-        </p:txBody>
-      </p:sp>
-      <p:sp>
-        <p:nvSpPr>
-          <p:cNvPr id="7" name="TextBox 6"/>
+              <a:t>축C</a:t>
+            </a:r>
+          </a:p>
+        </p:txBody>
+      </p:sp>
+      <p:sp>
+        <p:nvSpPr>
+          <p:cNvPr id="12" name="TextBox 11"/>
           <p:cNvSpPr txBox="1"/>
           <p:nvPr/>
         </p:nvSpPr>
         <p:spPr>
           <a:xfrm>
-            <a:off x="2240280" y="1316736"/>
+            <a:off x="2240280" y="3877056"/>
             <a:ext cx="9402775" cy="502920"/>
           </a:xfrm>
           <a:prstGeom prst="rect">
@@ -10379,20 +12365,20 @@
                 </a:solidFill>
                 <a:latin typeface="Noto Sans CJK KR"/>
               </a:rPr>
-              <a:t>keyframe당 초기 gaussian 점 개수를 절반으로 (pcd_downsample 64→128) → 시간 −3.3%, 품질 손실 없음</a:t>
-            </a:r>
-          </a:p>
-        </p:txBody>
-      </p:sp>
-      <p:sp>
-        <p:nvSpPr>
-          <p:cNvPr id="8" name="Rounded Rectangle 7"/>
+              <a:t>frontend_window/radius — local BA가 한 번에 붙잡고 최적화하는 "최근 keyframe 그래프"의 크기(window)와 이웃 범위(radius). 시간 −1.7%, ΔPSNR +0.02/+0.12dB — 줄이면 BA solve 행렬이 작아져 계산이 가벼워짐</a:t>
+            </a:r>
+          </a:p>
+        </p:txBody>
+      </p:sp>
+      <p:sp>
+        <p:nvSpPr>
+          <p:cNvPr id="13" name="Rounded Rectangle 12"/>
           <p:cNvSpPr/>
           <p:nvPr/>
         </p:nvSpPr>
         <p:spPr>
           <a:xfrm>
-            <a:off x="548640" y="1933956"/>
+            <a:off x="548640" y="4937760"/>
             <a:ext cx="1554480" cy="292608"/>
           </a:xfrm>
           <a:prstGeom prst="roundRect">
@@ -10405,7 +12391,7 @@
           </a:solidFill>
           <a:ln w="12700">
             <a:solidFill>
-              <a:srgbClr val="EF6A5C"/>
+              <a:srgbClr val="8B95AB"/>
             </a:solidFill>
           </a:ln>
           <a:effectLst/>
@@ -10432,24 +12418,24 @@
             <a:r>
               <a:rPr sz="900" b="1">
                 <a:solidFill>
-                  <a:srgbClr val="EF6A5C"/>
-                </a:solidFill>
-                <a:latin typeface="Noto Sans CJK KR"/>
-              </a:rPr>
-              <a:t>축2 · 기각</a:t>
-            </a:r>
-          </a:p>
-        </p:txBody>
-      </p:sp>
-      <p:sp>
-        <p:nvSpPr>
-          <p:cNvPr id="9" name="TextBox 8"/>
+                  <a:srgbClr val="8B95AB"/>
+                </a:solidFill>
+                <a:latin typeface="Noto Sans CJK KR"/>
+              </a:rPr>
+              <a:t>축D</a:t>
+            </a:r>
+          </a:p>
+        </p:txBody>
+      </p:sp>
+      <p:sp>
+        <p:nvSpPr>
+          <p:cNvPr id="14" name="TextBox 13"/>
           <p:cNvSpPr txBox="1"/>
           <p:nvPr/>
         </p:nvSpPr>
         <p:spPr>
           <a:xfrm>
-            <a:off x="2240280" y="1879092"/>
+            <a:off x="2240280" y="4882896"/>
             <a:ext cx="9402775" cy="502920"/>
           </a:xfrm>
           <a:prstGeom prst="rect">
@@ -10475,526 +12461,7 @@
                 </a:solidFill>
                 <a:latin typeface="Noto Sans CJK KR"/>
               </a:rPr>
-              <a:t>첫 keyframe만 더 성기게 초기화 → 오히려 densify가 보충해버려 +1.2%(역효과) — 축6과 짝으로 봐야 하는 축</a:t>
-            </a:r>
-          </a:p>
-        </p:txBody>
-      </p:sp>
-      <p:sp>
-        <p:nvSpPr>
-          <p:cNvPr id="10" name="Rounded Rectangle 9"/>
-          <p:cNvSpPr/>
-          <p:nvPr/>
-        </p:nvSpPr>
-        <p:spPr>
-          <a:xfrm>
-            <a:off x="548640" y="2496312"/>
-            <a:ext cx="1554480" cy="292608"/>
-          </a:xfrm>
-          <a:prstGeom prst="roundRect">
-            <a:avLst>
-              <a:gd name="adj" fmla="val 50000"/>
-            </a:avLst>
-          </a:prstGeom>
-          <a:solidFill>
-            <a:srgbClr val="1A1F2B"/>
-          </a:solidFill>
-          <a:ln w="12700">
-            <a:solidFill>
-              <a:srgbClr val="EF6A5C"/>
-            </a:solidFill>
-          </a:ln>
-          <a:effectLst/>
-        </p:spPr>
-        <p:style>
-          <a:lnRef idx="1">
-            <a:schemeClr val="accent1"/>
-          </a:lnRef>
-          <a:fillRef idx="3">
-            <a:schemeClr val="accent1"/>
-          </a:fillRef>
-          <a:effectRef idx="2">
-            <a:schemeClr val="accent1"/>
-          </a:effectRef>
-          <a:fontRef idx="minor">
-            <a:schemeClr val="lt1"/>
-          </a:fontRef>
-        </p:style>
-        <p:txBody>
-          <a:bodyPr rtlCol="0" anchor="ctr" lIns="45720" rIns="45720"/>
-          <a:lstStyle/>
-          <a:p>
-            <a:pPr algn="ctr"/>
-            <a:r>
-              <a:rPr sz="900" b="1">
-                <a:solidFill>
-                  <a:srgbClr val="EF6A5C"/>
-                </a:solidFill>
-                <a:latin typeface="Noto Sans CJK KR"/>
-              </a:rPr>
-              <a:t>축3 · 기각</a:t>
-            </a:r>
-          </a:p>
-        </p:txBody>
-      </p:sp>
-      <p:sp>
-        <p:nvSpPr>
-          <p:cNvPr id="11" name="TextBox 10"/>
-          <p:cNvSpPr txBox="1"/>
-          <p:nvPr/>
-        </p:nvSpPr>
-        <p:spPr>
-          <a:xfrm>
-            <a:off x="2240280" y="2441448"/>
-            <a:ext cx="9402775" cy="502920"/>
-          </a:xfrm>
-          <a:prstGeom prst="rect">
-            <a:avLst/>
-          </a:prstGeom>
-          <a:noFill/>
-        </p:spPr>
-        <p:txBody>
-          <a:bodyPr wrap="square" anchor="ctr">
-            <a:spAutoFit/>
-          </a:bodyPr>
-          <a:lstStyle/>
-          <a:p>
-            <a:pPr algn="l">
-              <a:lnSpc>
-                <a:spcPct val="100000"/>
-              </a:lnSpc>
-            </a:pPr>
-            <a:r>
-              <a:rPr sz="1200" b="0">
-                <a:solidFill>
-                  <a:srgbClr val="E8ECF4"/>
-                </a:solidFill>
-                <a:latin typeface="Noto Sans CJK KR"/>
-              </a:rPr>
-              <a:t>keyframe당 최적화 반복 10→5로 절반 → 이 시점엔 트래킹이 병목(91%)이라 mapping 줄여도 ±0%, ROI 없음</a:t>
-            </a:r>
-          </a:p>
-        </p:txBody>
-      </p:sp>
-      <p:sp>
-        <p:nvSpPr>
-          <p:cNvPr id="12" name="Rounded Rectangle 11"/>
-          <p:cNvSpPr/>
-          <p:nvPr/>
-        </p:nvSpPr>
-        <p:spPr>
-          <a:xfrm>
-            <a:off x="548640" y="3058668"/>
-            <a:ext cx="1554480" cy="292608"/>
-          </a:xfrm>
-          <a:prstGeom prst="roundRect">
-            <a:avLst>
-              <a:gd name="adj" fmla="val 50000"/>
-            </a:avLst>
-          </a:prstGeom>
-          <a:solidFill>
-            <a:srgbClr val="1A1F2B"/>
-          </a:solidFill>
-          <a:ln w="12700">
-            <a:solidFill>
-              <a:srgbClr val="A479E0"/>
-            </a:solidFill>
-          </a:ln>
-          <a:effectLst/>
-        </p:spPr>
-        <p:style>
-          <a:lnRef idx="1">
-            <a:schemeClr val="accent1"/>
-          </a:lnRef>
-          <a:fillRef idx="3">
-            <a:schemeClr val="accent1"/>
-          </a:fillRef>
-          <a:effectRef idx="2">
-            <a:schemeClr val="accent1"/>
-          </a:effectRef>
-          <a:fontRef idx="minor">
-            <a:schemeClr val="lt1"/>
-          </a:fontRef>
-        </p:style>
-        <p:txBody>
-          <a:bodyPr rtlCol="0" anchor="ctr" lIns="45720" rIns="45720"/>
-          <a:lstStyle/>
-          <a:p>
-            <a:pPr algn="ctr"/>
-            <a:r>
-              <a:rPr sz="900" b="1">
-                <a:solidFill>
-                  <a:srgbClr val="A479E0"/>
-                </a:solidFill>
-                <a:latin typeface="Noto Sans CJK KR"/>
-              </a:rPr>
-              <a:t>축4 · 보류</a:t>
-            </a:r>
-          </a:p>
-        </p:txBody>
-      </p:sp>
-      <p:sp>
-        <p:nvSpPr>
-          <p:cNvPr id="13" name="TextBox 12"/>
-          <p:cNvSpPr txBox="1"/>
-          <p:nvPr/>
-        </p:nvSpPr>
-        <p:spPr>
-          <a:xfrm>
-            <a:off x="2240280" y="3003804"/>
-            <a:ext cx="9402775" cy="502920"/>
-          </a:xfrm>
-          <a:prstGeom prst="rect">
-            <a:avLst/>
-          </a:prstGeom>
-          <a:noFill/>
-        </p:spPr>
-        <p:txBody>
-          <a:bodyPr wrap="square" anchor="ctr">
-            <a:spAutoFit/>
-          </a:bodyPr>
-          <a:lstStyle/>
-          <a:p>
-            <a:pPr algn="l">
-              <a:lnSpc>
-                <a:spcPct val="100000"/>
-              </a:lnSpc>
-            </a:pPr>
-            <a:r>
-              <a:rPr sz="1200" b="0">
-                <a:solidFill>
-                  <a:srgbClr val="E8ECF4"/>
-                </a:solidFill>
-                <a:latin typeface="Noto Sans CJK KR"/>
-              </a:rPr>
-              <a:t>매핑 렌더링 해상도를 절반으로(render_downsample=2) → −4.2%, PSNR −0.8dB — 유효하지만 이미 실시간이라 미채택, 코드만 보존</a:t>
-            </a:r>
-          </a:p>
-        </p:txBody>
-      </p:sp>
-      <p:sp>
-        <p:nvSpPr>
-          <p:cNvPr id="14" name="Rounded Rectangle 13"/>
-          <p:cNvSpPr/>
-          <p:nvPr/>
-        </p:nvSpPr>
-        <p:spPr>
-          <a:xfrm>
-            <a:off x="548640" y="3621024"/>
-            <a:ext cx="1554480" cy="292608"/>
-          </a:xfrm>
-          <a:prstGeom prst="roundRect">
-            <a:avLst>
-              <a:gd name="adj" fmla="val 50000"/>
-            </a:avLst>
-          </a:prstGeom>
-          <a:solidFill>
-            <a:srgbClr val="1A1F2B"/>
-          </a:solidFill>
-          <a:ln w="12700">
-            <a:solidFill>
-              <a:srgbClr val="EF6A5C"/>
-            </a:solidFill>
-          </a:ln>
-          <a:effectLst/>
-        </p:spPr>
-        <p:style>
-          <a:lnRef idx="1">
-            <a:schemeClr val="accent1"/>
-          </a:lnRef>
-          <a:fillRef idx="3">
-            <a:schemeClr val="accent1"/>
-          </a:fillRef>
-          <a:effectRef idx="2">
-            <a:schemeClr val="accent1"/>
-          </a:effectRef>
-          <a:fontRef idx="minor">
-            <a:schemeClr val="lt1"/>
-          </a:fontRef>
-        </p:style>
-        <p:txBody>
-          <a:bodyPr rtlCol="0" anchor="ctr" lIns="45720" rIns="45720"/>
-          <a:lstStyle/>
-          <a:p>
-            <a:pPr algn="ctr"/>
-            <a:r>
-              <a:rPr sz="900" b="1">
-                <a:solidFill>
-                  <a:srgbClr val="EF6A5C"/>
-                </a:solidFill>
-                <a:latin typeface="Noto Sans CJK KR"/>
-              </a:rPr>
-              <a:t>축5 · 기각</a:t>
-            </a:r>
-          </a:p>
-        </p:txBody>
-      </p:sp>
-      <p:sp>
-        <p:nvSpPr>
-          <p:cNvPr id="15" name="TextBox 14"/>
-          <p:cNvSpPr txBox="1"/>
-          <p:nvPr/>
-        </p:nvSpPr>
-        <p:spPr>
-          <a:xfrm>
-            <a:off x="2240280" y="3566160"/>
-            <a:ext cx="9402775" cy="502920"/>
-          </a:xfrm>
-          <a:prstGeom prst="rect">
-            <a:avLst/>
-          </a:prstGeom>
-          <a:noFill/>
-        </p:spPr>
-        <p:txBody>
-          <a:bodyPr wrap="square" anchor="ctr">
-            <a:spAutoFit/>
-          </a:bodyPr>
-          <a:lstStyle/>
-          <a:p>
-            <a:pPr algn="l">
-              <a:lnSpc>
-                <a:spcPct val="100000"/>
-              </a:lnSpc>
-            </a:pPr>
-            <a:r>
-              <a:rPr sz="1200" b="0">
-                <a:solidFill>
-                  <a:srgbClr val="E8ECF4"/>
-                </a:solidFill>
-                <a:latin typeface="Noto Sans CJK KR"/>
-              </a:rPr>
-              <a:t>한 번의 map() 호출에서 보는 카메라 뷰 개수 상한을 축소(max_viewpoints↓) → ±0%, 효과 없음</a:t>
-            </a:r>
-          </a:p>
-        </p:txBody>
-      </p:sp>
-      <p:sp>
-        <p:nvSpPr>
-          <p:cNvPr id="16" name="Rounded Rectangle 15"/>
-          <p:cNvSpPr/>
-          <p:nvPr/>
-        </p:nvSpPr>
-        <p:spPr>
-          <a:xfrm>
-            <a:off x="548640" y="4183380"/>
-            <a:ext cx="1554480" cy="292608"/>
-          </a:xfrm>
-          <a:prstGeom prst="roundRect">
-            <a:avLst>
-              <a:gd name="adj" fmla="val 50000"/>
-            </a:avLst>
-          </a:prstGeom>
-          <a:solidFill>
-            <a:srgbClr val="1A1F2B"/>
-          </a:solidFill>
-          <a:ln w="12700">
-            <a:solidFill>
-              <a:srgbClr val="EF6A5C"/>
-            </a:solidFill>
-          </a:ln>
-          <a:effectLst/>
-        </p:spPr>
-        <p:style>
-          <a:lnRef idx="1">
-            <a:schemeClr val="accent1"/>
-          </a:lnRef>
-          <a:fillRef idx="3">
-            <a:schemeClr val="accent1"/>
-          </a:fillRef>
-          <a:effectRef idx="2">
-            <a:schemeClr val="accent1"/>
-          </a:effectRef>
-          <a:fontRef idx="minor">
-            <a:schemeClr val="lt1"/>
-          </a:fontRef>
-        </p:style>
-        <p:txBody>
-          <a:bodyPr rtlCol="0" anchor="ctr" lIns="45720" rIns="45720"/>
-          <a:lstStyle/>
-          <a:p>
-            <a:pPr algn="ctr"/>
-            <a:r>
-              <a:rPr sz="900" b="1">
-                <a:solidFill>
-                  <a:srgbClr val="EF6A5C"/>
-                </a:solidFill>
-                <a:latin typeface="Noto Sans CJK KR"/>
-              </a:rPr>
-              <a:t>축6+2 · 기각</a:t>
-            </a:r>
-          </a:p>
-        </p:txBody>
-      </p:sp>
-      <p:sp>
-        <p:nvSpPr>
-          <p:cNvPr id="17" name="TextBox 16"/>
-          <p:cNvSpPr txBox="1"/>
-          <p:nvPr/>
-        </p:nvSpPr>
-        <p:spPr>
-          <a:xfrm>
-            <a:off x="2240280" y="4128516"/>
-            <a:ext cx="9402775" cy="502920"/>
-          </a:xfrm>
-          <a:prstGeom prst="rect">
-            <a:avLst/>
-          </a:prstGeom>
-          <a:noFill/>
-        </p:spPr>
-        <p:txBody>
-          <a:bodyPr wrap="square" anchor="ctr">
-            <a:spAutoFit/>
-          </a:bodyPr>
-          <a:lstStyle/>
-          <a:p>
-            <a:pPr algn="l">
-              <a:lnSpc>
-                <a:spcPct val="100000"/>
-              </a:lnSpc>
-            </a:pPr>
-            <a:r>
-              <a:rPr sz="1200" b="0">
-                <a:solidFill>
-                  <a:srgbClr val="E8ECF4"/>
-                </a:solidFill>
-                <a:latin typeface="Noto Sans CJK KR"/>
-              </a:rPr>
-              <a:t>gaussian 증식 속도 억제 + 성긴 초기화 결합 → 최종 gaussian 수는 줄었는데 시간은 그대로(+0.2%) — 개수 자체가 더는 병목이 아님을 처음 시사</a:t>
-            </a:r>
-          </a:p>
-        </p:txBody>
-      </p:sp>
-      <p:sp>
-        <p:nvSpPr>
-          <p:cNvPr id="18" name="Rounded Rectangle 17"/>
-          <p:cNvSpPr/>
-          <p:nvPr/>
-        </p:nvSpPr>
-        <p:spPr>
-          <a:xfrm>
-            <a:off x="548640" y="4745736"/>
-            <a:ext cx="1554480" cy="292608"/>
-          </a:xfrm>
-          <a:prstGeom prst="roundRect">
-            <a:avLst>
-              <a:gd name="adj" fmla="val 50000"/>
-            </a:avLst>
-          </a:prstGeom>
-          <a:solidFill>
-            <a:srgbClr val="1A1F2B"/>
-          </a:solidFill>
-          <a:ln w="12700">
-            <a:solidFill>
-              <a:srgbClr val="4CC98A"/>
-            </a:solidFill>
-          </a:ln>
-          <a:effectLst/>
-        </p:spPr>
-        <p:style>
-          <a:lnRef idx="1">
-            <a:schemeClr val="accent1"/>
-          </a:lnRef>
-          <a:fillRef idx="3">
-            <a:schemeClr val="accent1"/>
-          </a:fillRef>
-          <a:effectRef idx="2">
-            <a:schemeClr val="accent1"/>
-          </a:effectRef>
-          <a:fontRef idx="minor">
-            <a:schemeClr val="lt1"/>
-          </a:fontRef>
-        </p:style>
-        <p:txBody>
-          <a:bodyPr rtlCol="0" anchor="ctr" lIns="45720" rIns="45720"/>
-          <a:lstStyle/>
-          <a:p>
-            <a:pPr algn="ctr"/>
-            <a:r>
-              <a:rPr sz="900" b="1">
-                <a:solidFill>
-                  <a:srgbClr val="4CC98A"/>
-                </a:solidFill>
-                <a:latin typeface="Noto Sans CJK KR"/>
-              </a:rPr>
-              <a:t>축7 · 채택</a:t>
-            </a:r>
-          </a:p>
-        </p:txBody>
-      </p:sp>
-      <p:sp>
-        <p:nvSpPr>
-          <p:cNvPr id="19" name="TextBox 18"/>
-          <p:cNvSpPr txBox="1"/>
-          <p:nvPr/>
-        </p:nvSpPr>
-        <p:spPr>
-          <a:xfrm>
-            <a:off x="2240280" y="4690872"/>
-            <a:ext cx="9402775" cy="502920"/>
-          </a:xfrm>
-          <a:prstGeom prst="rect">
-            <a:avLst/>
-          </a:prstGeom>
-          <a:noFill/>
-        </p:spPr>
-        <p:txBody>
-          <a:bodyPr wrap="square" anchor="ctr">
-            <a:spAutoFit/>
-          </a:bodyPr>
-          <a:lstStyle/>
-          <a:p>
-            <a:pPr algn="l">
-              <a:lnSpc>
-                <a:spcPct val="100000"/>
-              </a:lnSpc>
-            </a:pPr>
-            <a:r>
-              <a:rPr sz="1200" b="0">
-                <a:solidFill>
-                  <a:srgbClr val="E8ECF4"/>
-                </a:solidFill>
-                <a:latin typeface="Noto Sans CJK KR"/>
-              </a:rPr>
-              <a:t>균일 샘플링 대신 이미지 디테일에 따라 점을 배분(PPM 적응 샘플링) → 시간 그대로, PSNR +0.16dB 공짜</a:t>
-            </a:r>
-          </a:p>
-        </p:txBody>
-      </p:sp>
-      <p:sp>
-        <p:nvSpPr>
-          <p:cNvPr id="20" name="TextBox 19"/>
-          <p:cNvSpPr txBox="1"/>
-          <p:nvPr/>
-        </p:nvSpPr>
-        <p:spPr>
-          <a:xfrm>
-            <a:off x="548640" y="5445252"/>
-            <a:ext cx="11094415" cy="822960"/>
-          </a:xfrm>
-          <a:prstGeom prst="rect">
-            <a:avLst/>
-          </a:prstGeom>
-          <a:noFill/>
-        </p:spPr>
-        <p:txBody>
-          <a:bodyPr wrap="square" anchor="t">
-            <a:spAutoFit/>
-          </a:bodyPr>
-          <a:lstStyle/>
-          <a:p>
-            <a:pPr algn="l">
-              <a:lnSpc>
-                <a:spcPct val="120000"/>
-              </a:lnSpc>
-            </a:pPr>
-            <a:r>
-              <a:rPr sz="1100" b="0">
-                <a:solidFill>
-                  <a:srgbClr val="8B95AB"/>
-                </a:solidFill>
-                <a:latin typeface="Noto Sans CJK KR"/>
-              </a:rPr>
-              <a:t>속도 축만 스캔한 게 아니라 축3에서 우연히 "이 시점엔 트래킹이 91%"라는 걸 발견 — 이게 exp53 우선순위의 직접 근거가 됨(서로 다른 실험이 서로의 근거를 만든 사례).</a:t>
+              <a:t>correlation 해상도 — correlation volume(두 프레임 유사도 맵)을 뽑는 특징맵의 해상도. 사전학습된 신경망 가중치의 입력 shape에 못박혀 있어 재학습 없인 못 건드림 — 미실행</a:t>
             </a:r>
           </a:p>
         </p:txBody>
@@ -11095,7 +12562,7 @@
                 </a:solidFill>
                 <a:latin typeface="Noto Sans CJK KR"/>
               </a:rPr>
-              <a:t>§1 · RESULT</a:t>
+              <a:t>§1 · EXP54</a:t>
             </a:r>
           </a:p>
         </p:txBody>
@@ -11134,7 +12601,7 @@
                 </a:solidFill>
                 <a:latin typeface="Noto Sans CJK KR"/>
               </a:rPr>
-              <a:t>결과: 실시간 최초 돌파</a:t>
+              <a:t>매핑 경량화 — 7축 스캔</a:t>
             </a:r>
           </a:p>
         </p:txBody>
@@ -11185,7 +12652,7 @@
       </p:sp>
       <p:pic>
         <p:nvPicPr>
-          <p:cNvPr id="6" name="Picture 5" descr="fig_breakthrough.png"/>
+          <p:cNvPr id="6" name="Picture 5" descr="fig_exp54_axes.png"/>
           <p:cNvPicPr>
             <a:picLocks noChangeAspect="1"/>
           </p:cNvPicPr>
@@ -11199,8 +12666,8 @@
         </p:blipFill>
         <p:spPr>
           <a:xfrm>
-            <a:off x="1850179" y="1371600"/>
-            <a:ext cx="8491335" cy="3931920"/>
+            <a:off x="1716469" y="1280160"/>
+            <a:ext cx="8758756" cy="4206240"/>
           </a:xfrm>
           <a:prstGeom prst="rect">
             <a:avLst/>
@@ -11215,7 +12682,7 @@
         </p:nvSpPr>
         <p:spPr>
           <a:xfrm>
-            <a:off x="548640" y="5577840"/>
+            <a:off x="548640" y="5806440"/>
             <a:ext cx="11094415" cy="822960"/>
           </a:xfrm>
           <a:prstGeom prst="rect">
@@ -11241,7 +12708,7 @@
                 </a:solidFill>
                 <a:latin typeface="Noto Sans CJK KR"/>
               </a:rPr>
-              <a:t>exp53+exp54 통합 레시피: 61.34초, 실시간 배수 0.94배 — 이 프로젝트 최초로 1.0배 미만 달성. 여기서 멈춰도 목표(실시간)는 달성인데, 다음 두 사이클(exp55/56)에서 여유를 더 벌고 품질까지 올림.</a:t>
+              <a:t>속도 축만 스캔한 게 아니라 축3에서 우연히 "이 시점엔 트래킹이 91%"라는 걸 발견 — 이게 exp53 우선순위의 직접 근거가 됨(서로 다른 실험이 서로의 근거를 만든 사례). 각 축이 정확히 뭘 바꾸는 실험인지는 다음 슬라이드에서 설명.</a:t>
             </a:r>
           </a:p>
         </p:txBody>
@@ -11342,7 +12809,7 @@
                 </a:solidFill>
                 <a:latin typeface="Noto Sans CJK KR"/>
               </a:rPr>
-              <a:t>§2 · EXP55</a:t>
+              <a:t>§1 · EXP54 · 용어</a:t>
             </a:r>
           </a:p>
         </p:txBody>
@@ -11381,7 +12848,7 @@
                 </a:solidFill>
                 <a:latin typeface="Noto Sans CJK KR"/>
               </a:rPr>
-              <a:t>내용-적응 gaussian 예산</a:t>
+              <a:t>매핑 축1~7, 실제로 뭘 바꾸는 건가</a:t>
             </a:r>
           </a:p>
         </p:txBody>
@@ -11430,40 +12897,16 @@
           </a:p>
         </p:txBody>
       </p:sp>
-      <p:pic>
-        <p:nvPicPr>
-          <p:cNvPr id="6" name="Picture 5" descr="fig_exp55_adaptive.png"/>
-          <p:cNvPicPr>
-            <a:picLocks noChangeAspect="1"/>
-          </p:cNvPicPr>
-          <p:nvPr/>
-        </p:nvPicPr>
-        <p:blipFill>
-          <a:blip r:embed="rId2"/>
-          <a:stretch>
-            <a:fillRect/>
-          </a:stretch>
-        </p:blipFill>
-        <p:spPr>
-          <a:xfrm>
-            <a:off x="886917" y="1280160"/>
-            <a:ext cx="10417859" cy="3749039"/>
-          </a:xfrm>
-          <a:prstGeom prst="rect">
-            <a:avLst/>
-          </a:prstGeom>
-        </p:spPr>
-      </p:pic>
-      <p:sp>
-        <p:nvSpPr>
-          <p:cNvPr id="7" name="TextBox 6"/>
+      <p:sp>
+        <p:nvSpPr>
+          <p:cNvPr id="6" name="TextBox 5"/>
           <p:cNvSpPr txBox="1"/>
           <p:nvPr/>
         </p:nvSpPr>
         <p:spPr>
           <a:xfrm>
-            <a:off x="548640" y="5212080"/>
-            <a:ext cx="11094415" cy="1280160"/>
+            <a:off x="548640" y="1207008"/>
+            <a:ext cx="11094415" cy="457200"/>
           </a:xfrm>
           <a:prstGeom prst="rect">
             <a:avLst/>
@@ -11478,17 +12921,689 @@
           <a:p>
             <a:pPr algn="l">
               <a:lnSpc>
-                <a:spcPct val="120000"/>
-              </a:lnSpc>
-            </a:pPr>
-            <a:r>
-              <a:rPr sz="1100" b="0">
+                <a:spcPct val="100000"/>
+              </a:lnSpc>
+            </a:pPr>
+            <a:r>
+              <a:rPr sz="1200" b="0">
                 <a:solidFill>
                   <a:srgbClr val="8B95AB"/>
                 </a:solidFill>
                 <a:latin typeface="Noto Sans CJK KR"/>
               </a:rPr>
-              <a:t>가설: 디테일 많은(Sobel gradient 큰) keyframe엔 gaussian이 더 필요하고, 단조로운 keyframe엔 덜 필요할 것. Phase1(캘리브레이션)에서 상관관계로 먼저 검증한 뒤 Phase2에서 배율곡선+keyframe별 cap을 구현 → 평균 gaussian 수 −35.9%, 최종 −35.3%, PSNR·궤적 손실 없음(오히려 소폭 개선). 사용자 아이디어를 감으로 가지 않고 상관관계로 먼저 검증한 뒤 구현했다는 게 핵심.</a:t>
+              <a:t>파이프라인: keyframe 도착 → 초기 gaussian 샘플링(축1/2/7) → map() 반복 최적화(축3) → rasterize·densify(축4/5/6)</a:t>
+            </a:r>
+          </a:p>
+        </p:txBody>
+      </p:sp>
+      <p:sp>
+        <p:nvSpPr>
+          <p:cNvPr id="7" name="Rounded Rectangle 6"/>
+          <p:cNvSpPr/>
+          <p:nvPr/>
+        </p:nvSpPr>
+        <p:spPr>
+          <a:xfrm>
+            <a:off x="548640" y="1783080"/>
+            <a:ext cx="1554480" cy="292608"/>
+          </a:xfrm>
+          <a:prstGeom prst="roundRect">
+            <a:avLst>
+              <a:gd name="adj" fmla="val 50000"/>
+            </a:avLst>
+          </a:prstGeom>
+          <a:solidFill>
+            <a:srgbClr val="1A1F2B"/>
+          </a:solidFill>
+          <a:ln w="12700">
+            <a:solidFill>
+              <a:srgbClr val="4CC98A"/>
+            </a:solidFill>
+          </a:ln>
+          <a:effectLst/>
+        </p:spPr>
+        <p:style>
+          <a:lnRef idx="1">
+            <a:schemeClr val="accent1"/>
+          </a:lnRef>
+          <a:fillRef idx="3">
+            <a:schemeClr val="accent1"/>
+          </a:fillRef>
+          <a:effectRef idx="2">
+            <a:schemeClr val="accent1"/>
+          </a:effectRef>
+          <a:fontRef idx="minor">
+            <a:schemeClr val="lt1"/>
+          </a:fontRef>
+        </p:style>
+        <p:txBody>
+          <a:bodyPr rtlCol="0" anchor="ctr" lIns="45720" rIns="45720"/>
+          <a:lstStyle/>
+          <a:p>
+            <a:pPr algn="ctr"/>
+            <a:r>
+              <a:rPr sz="900" b="1">
+                <a:solidFill>
+                  <a:srgbClr val="4CC98A"/>
+                </a:solidFill>
+                <a:latin typeface="Noto Sans CJK KR"/>
+              </a:rPr>
+              <a:t>축1</a:t>
+            </a:r>
+          </a:p>
+        </p:txBody>
+      </p:sp>
+      <p:sp>
+        <p:nvSpPr>
+          <p:cNvPr id="8" name="TextBox 7"/>
+          <p:cNvSpPr txBox="1"/>
+          <p:nvPr/>
+        </p:nvSpPr>
+        <p:spPr>
+          <a:xfrm>
+            <a:off x="2240280" y="1728216"/>
+            <a:ext cx="9402775" cy="502920"/>
+          </a:xfrm>
+          <a:prstGeom prst="rect">
+            <a:avLst/>
+          </a:prstGeom>
+          <a:noFill/>
+        </p:spPr>
+        <p:txBody>
+          <a:bodyPr wrap="square" anchor="ctr">
+            <a:spAutoFit/>
+          </a:bodyPr>
+          <a:lstStyle/>
+          <a:p>
+            <a:pPr algn="l">
+              <a:lnSpc>
+                <a:spcPct val="100000"/>
+              </a:lnSpc>
+            </a:pPr>
+            <a:r>
+              <a:rPr sz="1200" b="0">
+                <a:solidFill>
+                  <a:srgbClr val="E8ECF4"/>
+                </a:solidFill>
+                <a:latin typeface="Noto Sans CJK KR"/>
+              </a:rPr>
+              <a:t>pcd_downsample — 매 keyframe마다 RGB-D에서 새 gaussian을 뽑을 때의 샘플링 간격. 64→128은 점 개수 절반. 시간 −3.3%, ΔPSNR −0.05/−0.14dB(거의 동일) — 채택</a:t>
+            </a:r>
+          </a:p>
+        </p:txBody>
+      </p:sp>
+      <p:sp>
+        <p:nvSpPr>
+          <p:cNvPr id="9" name="Rounded Rectangle 8"/>
+          <p:cNvSpPr/>
+          <p:nvPr/>
+        </p:nvSpPr>
+        <p:spPr>
+          <a:xfrm>
+            <a:off x="548640" y="2386584"/>
+            <a:ext cx="1554480" cy="292608"/>
+          </a:xfrm>
+          <a:prstGeom prst="roundRect">
+            <a:avLst>
+              <a:gd name="adj" fmla="val 50000"/>
+            </a:avLst>
+          </a:prstGeom>
+          <a:solidFill>
+            <a:srgbClr val="1A1F2B"/>
+          </a:solidFill>
+          <a:ln w="12700">
+            <a:solidFill>
+              <a:srgbClr val="EF6A5C"/>
+            </a:solidFill>
+          </a:ln>
+          <a:effectLst/>
+        </p:spPr>
+        <p:style>
+          <a:lnRef idx="1">
+            <a:schemeClr val="accent1"/>
+          </a:lnRef>
+          <a:fillRef idx="3">
+            <a:schemeClr val="accent1"/>
+          </a:fillRef>
+          <a:effectRef idx="2">
+            <a:schemeClr val="accent1"/>
+          </a:effectRef>
+          <a:fontRef idx="minor">
+            <a:schemeClr val="lt1"/>
+          </a:fontRef>
+        </p:style>
+        <p:txBody>
+          <a:bodyPr rtlCol="0" anchor="ctr" lIns="45720" rIns="45720"/>
+          <a:lstStyle/>
+          <a:p>
+            <a:pPr algn="ctr"/>
+            <a:r>
+              <a:rPr sz="900" b="1">
+                <a:solidFill>
+                  <a:srgbClr val="EF6A5C"/>
+                </a:solidFill>
+                <a:latin typeface="Noto Sans CJK KR"/>
+              </a:rPr>
+              <a:t>축2</a:t>
+            </a:r>
+          </a:p>
+        </p:txBody>
+      </p:sp>
+      <p:sp>
+        <p:nvSpPr>
+          <p:cNvPr id="10" name="TextBox 9"/>
+          <p:cNvSpPr txBox="1"/>
+          <p:nvPr/>
+        </p:nvSpPr>
+        <p:spPr>
+          <a:xfrm>
+            <a:off x="2240280" y="2331720"/>
+            <a:ext cx="9402775" cy="502920"/>
+          </a:xfrm>
+          <a:prstGeom prst="rect">
+            <a:avLst/>
+          </a:prstGeom>
+          <a:noFill/>
+        </p:spPr>
+        <p:txBody>
+          <a:bodyPr wrap="square" anchor="ctr">
+            <a:spAutoFit/>
+          </a:bodyPr>
+          <a:lstStyle/>
+          <a:p>
+            <a:pPr algn="l">
+              <a:lnSpc>
+                <a:spcPct val="100000"/>
+              </a:lnSpc>
+            </a:pPr>
+            <a:r>
+              <a:rPr sz="1200" b="0">
+                <a:solidFill>
+                  <a:srgbClr val="E8ECF4"/>
+                </a:solidFill>
+                <a:latin typeface="Noto Sans CJK KR"/>
+              </a:rPr>
+              <a:t>pcd_downsample_init — 축1과 같은 개념인데 "시퀀스 맨 첫 keyframe"에만 적용. 시간 +1.2%(역효과), ΔPSNR +0.24/+0.19dB — densify가 나중에 보충해버려 시간 이득이 상쇄됨, 기각</a:t>
+            </a:r>
+          </a:p>
+        </p:txBody>
+      </p:sp>
+      <p:sp>
+        <p:nvSpPr>
+          <p:cNvPr id="11" name="Rounded Rectangle 10"/>
+          <p:cNvSpPr/>
+          <p:nvPr/>
+        </p:nvSpPr>
+        <p:spPr>
+          <a:xfrm>
+            <a:off x="548640" y="2990088"/>
+            <a:ext cx="1554480" cy="292608"/>
+          </a:xfrm>
+          <a:prstGeom prst="roundRect">
+            <a:avLst>
+              <a:gd name="adj" fmla="val 50000"/>
+            </a:avLst>
+          </a:prstGeom>
+          <a:solidFill>
+            <a:srgbClr val="1A1F2B"/>
+          </a:solidFill>
+          <a:ln w="12700">
+            <a:solidFill>
+              <a:srgbClr val="EF6A5C"/>
+            </a:solidFill>
+          </a:ln>
+          <a:effectLst/>
+        </p:spPr>
+        <p:style>
+          <a:lnRef idx="1">
+            <a:schemeClr val="accent1"/>
+          </a:lnRef>
+          <a:fillRef idx="3">
+            <a:schemeClr val="accent1"/>
+          </a:fillRef>
+          <a:effectRef idx="2">
+            <a:schemeClr val="accent1"/>
+          </a:effectRef>
+          <a:fontRef idx="minor">
+            <a:schemeClr val="lt1"/>
+          </a:fontRef>
+        </p:style>
+        <p:txBody>
+          <a:bodyPr rtlCol="0" anchor="ctr" lIns="45720" rIns="45720"/>
+          <a:lstStyle/>
+          <a:p>
+            <a:pPr algn="ctr"/>
+            <a:r>
+              <a:rPr sz="900" b="1">
+                <a:solidFill>
+                  <a:srgbClr val="EF6A5C"/>
+                </a:solidFill>
+                <a:latin typeface="Noto Sans CJK KR"/>
+              </a:rPr>
+              <a:t>축3</a:t>
+            </a:r>
+          </a:p>
+        </p:txBody>
+      </p:sp>
+      <p:sp>
+        <p:nvSpPr>
+          <p:cNvPr id="12" name="TextBox 11"/>
+          <p:cNvSpPr txBox="1"/>
+          <p:nvPr/>
+        </p:nvSpPr>
+        <p:spPr>
+          <a:xfrm>
+            <a:off x="2240280" y="2935224"/>
+            <a:ext cx="9402775" cy="502920"/>
+          </a:xfrm>
+          <a:prstGeom prst="rect">
+            <a:avLst/>
+          </a:prstGeom>
+          <a:noFill/>
+        </p:spPr>
+        <p:txBody>
+          <a:bodyPr wrap="square" anchor="ctr">
+            <a:spAutoFit/>
+          </a:bodyPr>
+          <a:lstStyle/>
+          <a:p>
+            <a:pPr algn="l">
+              <a:lnSpc>
+                <a:spcPct val="100000"/>
+              </a:lnSpc>
+            </a:pPr>
+            <a:r>
+              <a:rPr sz="1200" b="0">
+                <a:solidFill>
+                  <a:srgbClr val="E8ECF4"/>
+                </a:solidFill>
+                <a:latin typeface="Noto Sans CJK KR"/>
+              </a:rPr>
+              <a:t>map() iters — keyframe 하나를 처리할 때 gaussian을 SGD로 최적화하는 반복 횟수. 시간 −1.5%, ΔPSNR −0.46/−0.48dB — 이 시점엔 트래킹이 병목(91%)이라 ROI 나쁨, 기각</a:t>
+            </a:r>
+          </a:p>
+        </p:txBody>
+      </p:sp>
+      <p:sp>
+        <p:nvSpPr>
+          <p:cNvPr id="13" name="Rounded Rectangle 12"/>
+          <p:cNvSpPr/>
+          <p:nvPr/>
+        </p:nvSpPr>
+        <p:spPr>
+          <a:xfrm>
+            <a:off x="548640" y="3593592"/>
+            <a:ext cx="1554480" cy="292608"/>
+          </a:xfrm>
+          <a:prstGeom prst="roundRect">
+            <a:avLst>
+              <a:gd name="adj" fmla="val 50000"/>
+            </a:avLst>
+          </a:prstGeom>
+          <a:solidFill>
+            <a:srgbClr val="1A1F2B"/>
+          </a:solidFill>
+          <a:ln w="12700">
+            <a:solidFill>
+              <a:srgbClr val="A479E0"/>
+            </a:solidFill>
+          </a:ln>
+          <a:effectLst/>
+        </p:spPr>
+        <p:style>
+          <a:lnRef idx="1">
+            <a:schemeClr val="accent1"/>
+          </a:lnRef>
+          <a:fillRef idx="3">
+            <a:schemeClr val="accent1"/>
+          </a:fillRef>
+          <a:effectRef idx="2">
+            <a:schemeClr val="accent1"/>
+          </a:effectRef>
+          <a:fontRef idx="minor">
+            <a:schemeClr val="lt1"/>
+          </a:fontRef>
+        </p:style>
+        <p:txBody>
+          <a:bodyPr rtlCol="0" anchor="ctr" lIns="45720" rIns="45720"/>
+          <a:lstStyle/>
+          <a:p>
+            <a:pPr algn="ctr"/>
+            <a:r>
+              <a:rPr sz="900" b="1">
+                <a:solidFill>
+                  <a:srgbClr val="A479E0"/>
+                </a:solidFill>
+                <a:latin typeface="Noto Sans CJK KR"/>
+              </a:rPr>
+              <a:t>축4</a:t>
+            </a:r>
+          </a:p>
+        </p:txBody>
+      </p:sp>
+      <p:sp>
+        <p:nvSpPr>
+          <p:cNvPr id="14" name="TextBox 13"/>
+          <p:cNvSpPr txBox="1"/>
+          <p:nvPr/>
+        </p:nvSpPr>
+        <p:spPr>
+          <a:xfrm>
+            <a:off x="2240280" y="3538728"/>
+            <a:ext cx="9402775" cy="502920"/>
+          </a:xfrm>
+          <a:prstGeom prst="rect">
+            <a:avLst/>
+          </a:prstGeom>
+          <a:noFill/>
+        </p:spPr>
+        <p:txBody>
+          <a:bodyPr wrap="square" anchor="ctr">
+            <a:spAutoFit/>
+          </a:bodyPr>
+          <a:lstStyle/>
+          <a:p>
+            <a:pPr algn="l">
+              <a:lnSpc>
+                <a:spcPct val="100000"/>
+              </a:lnSpc>
+            </a:pPr>
+            <a:r>
+              <a:rPr sz="1200" b="0">
+                <a:solidFill>
+                  <a:srgbClr val="E8ECF4"/>
+                </a:solidFill>
+                <a:latin typeface="Noto Sans CJK KR"/>
+              </a:rPr>
+              <a:t>render_downsample — 매핑용 렌더링 자체를 낮은 해상도로 그림(원래는 트래킹 해상도의 8배까지 업샘플). 시간 −4.2%, ΔPSNR −0.83/−0.68dB — 유효하나 이미 실시간이라 손실 감수 안 함, 보류</a:t>
+            </a:r>
+          </a:p>
+        </p:txBody>
+      </p:sp>
+      <p:sp>
+        <p:nvSpPr>
+          <p:cNvPr id="15" name="Rounded Rectangle 14"/>
+          <p:cNvSpPr/>
+          <p:nvPr/>
+        </p:nvSpPr>
+        <p:spPr>
+          <a:xfrm>
+            <a:off x="548640" y="4197096"/>
+            <a:ext cx="1554480" cy="292608"/>
+          </a:xfrm>
+          <a:prstGeom prst="roundRect">
+            <a:avLst>
+              <a:gd name="adj" fmla="val 50000"/>
+            </a:avLst>
+          </a:prstGeom>
+          <a:solidFill>
+            <a:srgbClr val="1A1F2B"/>
+          </a:solidFill>
+          <a:ln w="12700">
+            <a:solidFill>
+              <a:srgbClr val="EF6A5C"/>
+            </a:solidFill>
+          </a:ln>
+          <a:effectLst/>
+        </p:spPr>
+        <p:style>
+          <a:lnRef idx="1">
+            <a:schemeClr val="accent1"/>
+          </a:lnRef>
+          <a:fillRef idx="3">
+            <a:schemeClr val="accent1"/>
+          </a:fillRef>
+          <a:effectRef idx="2">
+            <a:schemeClr val="accent1"/>
+          </a:effectRef>
+          <a:fontRef idx="minor">
+            <a:schemeClr val="lt1"/>
+          </a:fontRef>
+        </p:style>
+        <p:txBody>
+          <a:bodyPr rtlCol="0" anchor="ctr" lIns="45720" rIns="45720"/>
+          <a:lstStyle/>
+          <a:p>
+            <a:pPr algn="ctr"/>
+            <a:r>
+              <a:rPr sz="900" b="1">
+                <a:solidFill>
+                  <a:srgbClr val="EF6A5C"/>
+                </a:solidFill>
+                <a:latin typeface="Noto Sans CJK KR"/>
+              </a:rPr>
+              <a:t>축5</a:t>
+            </a:r>
+          </a:p>
+        </p:txBody>
+      </p:sp>
+      <p:sp>
+        <p:nvSpPr>
+          <p:cNvPr id="16" name="TextBox 15"/>
+          <p:cNvSpPr txBox="1"/>
+          <p:nvPr/>
+        </p:nvSpPr>
+        <p:spPr>
+          <a:xfrm>
+            <a:off x="2240280" y="4142232"/>
+            <a:ext cx="9402775" cy="502920"/>
+          </a:xfrm>
+          <a:prstGeom prst="rect">
+            <a:avLst/>
+          </a:prstGeom>
+          <a:noFill/>
+        </p:spPr>
+        <p:txBody>
+          <a:bodyPr wrap="square" anchor="ctr">
+            <a:spAutoFit/>
+          </a:bodyPr>
+          <a:lstStyle/>
+          <a:p>
+            <a:pPr algn="l">
+              <a:lnSpc>
+                <a:spcPct val="100000"/>
+              </a:lnSpc>
+            </a:pPr>
+            <a:r>
+              <a:rPr sz="1200" b="0">
+                <a:solidFill>
+                  <a:srgbClr val="E8ECF4"/>
+                </a:solidFill>
+                <a:latin typeface="Noto Sans CJK KR"/>
+              </a:rPr>
+              <a:t>max_viewpoints — map() 한 번의 호출에서 동시에 보는 카메라 뷰 개수의 상한. 시간 −0.7%(거의 무변화), ΔPSNR −1.73/−1.98dB — 최악의 ROI, 기각</a:t>
+            </a:r>
+          </a:p>
+        </p:txBody>
+      </p:sp>
+      <p:sp>
+        <p:nvSpPr>
+          <p:cNvPr id="17" name="Rounded Rectangle 16"/>
+          <p:cNvSpPr/>
+          <p:nvPr/>
+        </p:nvSpPr>
+        <p:spPr>
+          <a:xfrm>
+            <a:off x="548640" y="4800600"/>
+            <a:ext cx="1554480" cy="292608"/>
+          </a:xfrm>
+          <a:prstGeom prst="roundRect">
+            <a:avLst>
+              <a:gd name="adj" fmla="val 50000"/>
+            </a:avLst>
+          </a:prstGeom>
+          <a:solidFill>
+            <a:srgbClr val="1A1F2B"/>
+          </a:solidFill>
+          <a:ln w="12700">
+            <a:solidFill>
+              <a:srgbClr val="EF6A5C"/>
+            </a:solidFill>
+          </a:ln>
+          <a:effectLst/>
+        </p:spPr>
+        <p:style>
+          <a:lnRef idx="1">
+            <a:schemeClr val="accent1"/>
+          </a:lnRef>
+          <a:fillRef idx="3">
+            <a:schemeClr val="accent1"/>
+          </a:fillRef>
+          <a:effectRef idx="2">
+            <a:schemeClr val="accent1"/>
+          </a:effectRef>
+          <a:fontRef idx="minor">
+            <a:schemeClr val="lt1"/>
+          </a:fontRef>
+        </p:style>
+        <p:txBody>
+          <a:bodyPr rtlCol="0" anchor="ctr" lIns="45720" rIns="45720"/>
+          <a:lstStyle/>
+          <a:p>
+            <a:pPr algn="ctr"/>
+            <a:r>
+              <a:rPr sz="900" b="1">
+                <a:solidFill>
+                  <a:srgbClr val="EF6A5C"/>
+                </a:solidFill>
+                <a:latin typeface="Noto Sans CJK KR"/>
+              </a:rPr>
+              <a:t>축6</a:t>
+            </a:r>
+          </a:p>
+        </p:txBody>
+      </p:sp>
+      <p:sp>
+        <p:nvSpPr>
+          <p:cNvPr id="18" name="TextBox 17"/>
+          <p:cNvSpPr txBox="1"/>
+          <p:nvPr/>
+        </p:nvSpPr>
+        <p:spPr>
+          <a:xfrm>
+            <a:off x="2240280" y="4745736"/>
+            <a:ext cx="9402775" cy="502920"/>
+          </a:xfrm>
+          <a:prstGeom prst="rect">
+            <a:avLst/>
+          </a:prstGeom>
+          <a:noFill/>
+        </p:spPr>
+        <p:txBody>
+          <a:bodyPr wrap="square" anchor="ctr">
+            <a:spAutoFit/>
+          </a:bodyPr>
+          <a:lstStyle/>
+          <a:p>
+            <a:pPr algn="l">
+              <a:lnSpc>
+                <a:spcPct val="100000"/>
+              </a:lnSpc>
+            </a:pPr>
+            <a:r>
+              <a:rPr sz="1200" b="0">
+                <a:solidFill>
+                  <a:srgbClr val="E8ECF4"/>
+                </a:solidFill>
+                <a:latin typeface="Noto Sans CJK KR"/>
+              </a:rPr>
+              <a:t>densify_grad_threshold — gaussian이 "부족하다"고 판단해 새로 쪼개거나 복제하는(densify) 공격성을 정하는 임계값. 시간 +0.2%, ΔPSNR −0.07/−0.29dB — 개수는 줄여도 시간은 그대로, 기각</a:t>
+            </a:r>
+          </a:p>
+        </p:txBody>
+      </p:sp>
+      <p:sp>
+        <p:nvSpPr>
+          <p:cNvPr id="19" name="Rounded Rectangle 18"/>
+          <p:cNvSpPr/>
+          <p:nvPr/>
+        </p:nvSpPr>
+        <p:spPr>
+          <a:xfrm>
+            <a:off x="548640" y="5404104"/>
+            <a:ext cx="1554480" cy="292608"/>
+          </a:xfrm>
+          <a:prstGeom prst="roundRect">
+            <a:avLst>
+              <a:gd name="adj" fmla="val 50000"/>
+            </a:avLst>
+          </a:prstGeom>
+          <a:solidFill>
+            <a:srgbClr val="1A1F2B"/>
+          </a:solidFill>
+          <a:ln w="12700">
+            <a:solidFill>
+              <a:srgbClr val="4CC98A"/>
+            </a:solidFill>
+          </a:ln>
+          <a:effectLst/>
+        </p:spPr>
+        <p:style>
+          <a:lnRef idx="1">
+            <a:schemeClr val="accent1"/>
+          </a:lnRef>
+          <a:fillRef idx="3">
+            <a:schemeClr val="accent1"/>
+          </a:fillRef>
+          <a:effectRef idx="2">
+            <a:schemeClr val="accent1"/>
+          </a:effectRef>
+          <a:fontRef idx="minor">
+            <a:schemeClr val="lt1"/>
+          </a:fontRef>
+        </p:style>
+        <p:txBody>
+          <a:bodyPr rtlCol="0" anchor="ctr" lIns="45720" rIns="45720"/>
+          <a:lstStyle/>
+          <a:p>
+            <a:pPr algn="ctr"/>
+            <a:r>
+              <a:rPr sz="900" b="1">
+                <a:solidFill>
+                  <a:srgbClr val="4CC98A"/>
+                </a:solidFill>
+                <a:latin typeface="Noto Sans CJK KR"/>
+              </a:rPr>
+              <a:t>축7</a:t>
+            </a:r>
+          </a:p>
+        </p:txBody>
+      </p:sp>
+      <p:sp>
+        <p:nvSpPr>
+          <p:cNvPr id="20" name="TextBox 19"/>
+          <p:cNvSpPr txBox="1"/>
+          <p:nvPr/>
+        </p:nvSpPr>
+        <p:spPr>
+          <a:xfrm>
+            <a:off x="2240280" y="5349240"/>
+            <a:ext cx="9402775" cy="502920"/>
+          </a:xfrm>
+          <a:prstGeom prst="rect">
+            <a:avLst/>
+          </a:prstGeom>
+          <a:noFill/>
+        </p:spPr>
+        <p:txBody>
+          <a:bodyPr wrap="square" anchor="ctr">
+            <a:spAutoFit/>
+          </a:bodyPr>
+          <a:lstStyle/>
+          <a:p>
+            <a:pPr algn="l">
+              <a:lnSpc>
+                <a:spcPct val="100000"/>
+              </a:lnSpc>
+            </a:pPr>
+            <a:r>
+              <a:rPr sz="1200" b="0">
+                <a:solidFill>
+                  <a:srgbClr val="E8ECF4"/>
+                </a:solidFill>
+                <a:latin typeface="Noto Sans CJK KR"/>
+              </a:rPr>
+              <a:t>PPM 적응 샘플링 — 균일 샘플링 대신 이미지 디테일(Sobel gradient)에 따라 점을 더/덜 배분. 시간 +0.9%(오차범위), ΔPSNR +0.16/+0.11dB — 같은 예산에서 품질만 공짜로 오름, 채택</a:t>
             </a:r>
           </a:p>
         </p:txBody>
@@ -11589,7 +13704,7 @@
                 </a:solidFill>
                 <a:latin typeface="Noto Sans CJK KR"/>
               </a:rPr>
-              <a:t>§2 · EXP55</a:t>
+              <a:t>§1 · RESULT</a:t>
             </a:r>
           </a:p>
         </p:txBody>
@@ -11628,7 +13743,7 @@
                 </a:solidFill>
                 <a:latin typeface="Noto Sans CJK KR"/>
               </a:rPr>
-              <a:t>carve loss 온라인 이식</a:t>
+              <a:t>결과: 실시간 최초 돌파</a:t>
             </a:r>
           </a:p>
         </p:txBody>
@@ -11679,7 +13794,7 @@
       </p:sp>
       <p:pic>
         <p:nvPicPr>
-          <p:cNvPr id="6" name="Picture 5" descr="fig_exp55_carve.png"/>
+          <p:cNvPr id="6" name="Picture 5" descr="fig_breakthrough.png"/>
           <p:cNvPicPr>
             <a:picLocks noChangeAspect="1"/>
           </p:cNvPicPr>
@@ -11693,8 +13808,8 @@
         </p:blipFill>
         <p:spPr>
           <a:xfrm>
-            <a:off x="2200213" y="1280160"/>
-            <a:ext cx="7791268" cy="2926080"/>
+            <a:off x="1850179" y="1371600"/>
+            <a:ext cx="8491335" cy="3931920"/>
           </a:xfrm>
           <a:prstGeom prst="rect">
             <a:avLst/>
@@ -11709,69 +13824,8 @@
         </p:nvSpPr>
         <p:spPr>
           <a:xfrm>
-            <a:off x="548640" y="4434840"/>
-            <a:ext cx="11094415" cy="1737360"/>
-          </a:xfrm>
-          <a:prstGeom prst="rect">
-            <a:avLst/>
-          </a:prstGeom>
-          <a:noFill/>
-        </p:spPr>
-        <p:txBody>
-          <a:bodyPr wrap="square">
-            <a:spAutoFit/>
-          </a:bodyPr>
-          <a:lstStyle/>
-          <a:p>
-            <a:pPr>
-              <a:lnSpc>
-                <a:spcPct val="122000"/>
-              </a:lnSpc>
-              <a:spcAft>
-                <a:spcPts val="800"/>
-              </a:spcAft>
-            </a:pPr>
-            <a:r>
-              <a:rPr sz="1200">
-                <a:solidFill>
-                  <a:srgbClr val="E8ECF4"/>
-                </a:solidFill>
-                <a:latin typeface="Noto Sans CJK KR"/>
-              </a:rPr>
-              <a:t>•  배치 트랙에서 이미 검증된(AUC 0.98) carve loss를, VIGS의 BA-정제 추적 depth(disps_up)를 신뢰 표면 삼아 depth-violation 전용 온라인 근사로 재설계</a:t>
-            </a:r>
-          </a:p>
-          <a:p>
-            <a:pPr>
-              <a:lnSpc>
-                <a:spcPct val="122000"/>
-              </a:lnSpc>
-              <a:spcAft>
-                <a:spcPts val="800"/>
-              </a:spcAft>
-            </a:pPr>
-            <a:r>
-              <a:rPr sz="1200">
-                <a:solidFill>
-                  <a:srgbClr val="E8ECF4"/>
-                </a:solidFill>
-                <a:latin typeface="Noto Sans CJK KR"/>
-              </a:rPr>
-              <a:t>•  region GT가 VIGS 좌표계에 안 맞아 — carve_loss.py 자신의 신호 설계를 그대로 재구현한 오프라인 진단 지표를 새로 제작해 검증</a:t>
-            </a:r>
-          </a:p>
-        </p:txBody>
-      </p:sp>
-      <p:sp>
-        <p:nvSpPr>
-          <p:cNvPr id="8" name="TextBox 7"/>
-          <p:cNvSpPr txBox="1"/>
-          <p:nvPr/>
-        </p:nvSpPr>
-        <p:spPr>
-          <a:xfrm>
-            <a:off x="548640" y="6172200"/>
-            <a:ext cx="11094415" cy="457200"/>
+            <a:off x="548640" y="5577840"/>
+            <a:ext cx="11094415" cy="822960"/>
           </a:xfrm>
           <a:prstGeom prst="rect">
             <a:avLst/>
@@ -11796,7 +13850,7 @@
                 </a:solidFill>
                 <a:latin typeface="Noto Sans CJK KR"/>
               </a:rPr>
-              <a:t>표준 지표가 안 맞으면 새로 만들어서라도 채택/기각을 숫자로 판단한다는 원칙.</a:t>
+              <a:t>exp53+exp54 통합 레시피: 61.34초, 실시간 배수 0.94배 — 이 프로젝트 최초로 1.0배 미만 달성. 여기서 멈춰도 목표(실시간)는 달성인데, 다음 두 사이클(exp55/56)에서 여유를 더 벌고 품질까지 올림.</a:t>
             </a:r>
           </a:p>
         </p:txBody>
@@ -11897,7 +13951,7 @@
                 </a:solidFill>
                 <a:latin typeface="Noto Sans CJK KR"/>
               </a:rPr>
-              <a:t>§2 · APPENDIX</a:t>
+              <a:t>§2 · EXP55</a:t>
             </a:r>
           </a:p>
         </p:txBody>
@@ -11936,7 +13990,7 @@
                 </a:solidFill>
                 <a:latin typeface="Noto Sans CJK KR"/>
               </a:rPr>
-              <a:t>부록: 직렬 실행으로 밝혀진 진짜 구조</a:t>
+              <a:t>내용-적응 gaussian 예산</a:t>
             </a:r>
           </a:p>
         </p:txBody>
@@ -11987,7 +14041,7 @@
       </p:sp>
       <p:pic>
         <p:nvPicPr>
-          <p:cNvPr id="6" name="Picture 5" descr="fig_exp55_appendix.png"/>
+          <p:cNvPr id="6" name="Picture 5" descr="fig_exp55_adaptive.png"/>
           <p:cNvPicPr>
             <a:picLocks noChangeAspect="1"/>
           </p:cNvPicPr>
@@ -12001,8 +14055,8 @@
         </p:blipFill>
         <p:spPr>
           <a:xfrm>
-            <a:off x="1582655" y="1280160"/>
-            <a:ext cx="9026384" cy="3383280"/>
+            <a:off x="886917" y="1280160"/>
+            <a:ext cx="10417859" cy="3749039"/>
           </a:xfrm>
           <a:prstGeom prst="rect">
             <a:avLst/>
@@ -12017,69 +14071,8 @@
         </p:nvSpPr>
         <p:spPr>
           <a:xfrm>
-            <a:off x="548640" y="4846320"/>
+            <a:off x="548640" y="5212080"/>
             <a:ext cx="11094415" cy="1280160"/>
-          </a:xfrm>
-          <a:prstGeom prst="rect">
-            <a:avLst/>
-          </a:prstGeom>
-          <a:noFill/>
-        </p:spPr>
-        <p:txBody>
-          <a:bodyPr wrap="square">
-            <a:spAutoFit/>
-          </a:bodyPr>
-          <a:lstStyle/>
-          <a:p>
-            <a:pPr>
-              <a:lnSpc>
-                <a:spcPct val="122000"/>
-              </a:lnSpc>
-              <a:spcAft>
-                <a:spcPts val="800"/>
-              </a:spcAft>
-            </a:pPr>
-            <a:r>
-              <a:rPr sz="1200">
-                <a:solidFill>
-                  <a:srgbClr val="E8ECF4"/>
-                </a:solidFill>
-                <a:latin typeface="Noto Sans CJK KR"/>
-              </a:rPr>
-              <a:t>•  "지금 상태로 직렬 돌리면 순수 시간이 어떻게 되나" 실측 → 순수 tracking 27.9초 vs 순수 mapping 80.1초. 이게 exp54의 "tracking-bound" 결론과 정면 모순</a:t>
-            </a:r>
-          </a:p>
-          <a:p>
-            <a:pPr>
-              <a:lnSpc>
-                <a:spcPct val="122000"/>
-              </a:lnSpc>
-              <a:spcAft>
-                <a:spcPts val="800"/>
-              </a:spcAft>
-            </a:pPr>
-            <a:r>
-              <a:rPr sz="1200">
-                <a:solidFill>
-                  <a:srgbClr val="E8ECF4"/>
-                </a:solidFill>
-                <a:latin typeface="Noto Sans CJK KR"/>
-              </a:rPr>
-              <a:t>•  파고든 결과 두 가지 발견: ① GPU 경합이 병렬 tracking을 거의 2배로 부풀림 ② _gs_queue가 가득 차면 오래된 keyframe을 버리는 정책 때문에 병렬 모드가 mapping 업데이트의 약 80%를 그냥 스킵(직렬 110회 vs 병렬 22회)</a:t>
-            </a:r>
-          </a:p>
-        </p:txBody>
-      </p:sp>
-      <p:sp>
-        <p:nvSpPr>
-          <p:cNvPr id="8" name="TextBox 7"/>
-          <p:cNvSpPr txBox="1"/>
-          <p:nvPr/>
-        </p:nvSpPr>
-        <p:spPr>
-          <a:xfrm>
-            <a:off x="548640" y="6309360"/>
-            <a:ext cx="11094415" cy="457200"/>
           </a:xfrm>
           <a:prstGeom prst="rect">
             <a:avLst/>
@@ -12104,7 +14097,7 @@
                 </a:solidFill>
                 <a:latin typeface="Noto Sans CJK KR"/>
               </a:rPr>
-              <a:t>이 발견이 exp56 전체의 출발점 — "병렬 배수만 보면 안 되고 안에서 뭐가 스킵되는지 봐야 한다".</a:t>
+              <a:t>가설: 디테일 많은(Sobel gradient 큰) keyframe엔 gaussian이 더 필요하고, 단조로운 keyframe엔 덜 필요할 것. Phase1(캘리브레이션)에서 상관관계로 먼저 검증한 뒤 Phase2에서 배율곡선+keyframe별 cap을 구현 → 평균 gaussian 수 −35.9%, 최종 −35.3%, PSNR·궤적 손실 없음(오히려 소폭 개선). 사용자 아이디어를 감으로 가지 않고 상관관계로 먼저 검증한 뒤 구현했다는 게 핵심.</a:t>
             </a:r>
           </a:p>
         </p:txBody>
